--- a/docs/presentation.pptx
+++ b/docs/presentation.pptx
@@ -3023,7 +3023,7 @@
                           <a:ea typeface="Calibri" pitchFamily="34" charset="-122"/>
                           <a:cs typeface="Calibri" pitchFamily="34" charset="-120"/>
                         </a:rPr>
-                        <a:t>Stages 1–2 implemented, stage 3 not offered</a:t>
+                        <a:t>Stages 1 and 2 implemented, stage 3 not offered</a:t>
                       </a:r>
                       <a:endParaRPr lang="en-US" sz="1000" dirty="0">
                         <a:latin typeface="Calibri" charset="0"/>
@@ -5144,7 +5144,7 @@
                 <a:ea typeface="Calibri" pitchFamily="34" charset="-122"/>
                 <a:cs typeface="Calibri" pitchFamily="34" charset="-120"/>
               </a:rPr>
-              <a:t>one client's month, −63% in the second</a:t>
+              <a:t>one client's month, 63% less in the second</a:t>
             </a:r>
             <a:endParaRPr lang="en-US" sz="1100" dirty="0"/>
           </a:p>
@@ -5247,7 +5247,7 @@
                 <a:ea typeface="Calibri" pitchFamily="34" charset="-122"/>
                 <a:cs typeface="Calibri" pitchFamily="34" charset="-120"/>
               </a:rPr>
-              <a:t>of work on levels 0–1 (rules, templates, small model)</a:t>
+              <a:t>of work on levels 0 and 1 (rules, templates, small model)</a:t>
             </a:r>
             <a:endParaRPr lang="en-US" sz="1100" dirty="0"/>
           </a:p>
@@ -7266,7 +7266,7 @@
                 <a:ea typeface="Calibri" pitchFamily="34" charset="-122"/>
                 <a:cs typeface="Calibri" pitchFamily="34" charset="-120"/>
               </a:rPr>
-              <a:t>Demo: one month for one client, scenarios C1–C10</a:t>
+              <a:t>Demo: one month for one client, scenarios C1 to C10</a:t>
             </a:r>
             <a:endParaRPr lang="en-US" sz="2800" dirty="0"/>
           </a:p>
@@ -10260,7 +10260,7 @@
                 <a:ea typeface="Calibri" pitchFamily="34" charset="-122"/>
                 <a:cs typeface="Calibri" pitchFamily="34" charset="-120"/>
               </a:rPr>
-              <a:t>Trust levels 0–2  </a:t>
+              <a:t>Trust levels 0, 1, 2  </a:t>
             </a:r>
             <a:pPr indent="0" marL="0">
               <a:buNone/>
@@ -10274,7 +10274,7 @@
                 <a:ea typeface="Calibri" pitchFamily="34" charset="-122"/>
                 <a:cs typeface="Calibri" pitchFamily="34" charset="-120"/>
               </a:rPr>
-              <a:t>Level 1 limit 1 000 ₽; promotion after 5 verified results in a row. Autonomy stages 1–2, stage 3 not offered.</a:t>
+              <a:t>Level 1 limit 1 000 ₽; promotion after 5 verified results in a row. Autonomy stages 1 and 2, stage 3 not offered.</a:t>
             </a:r>
             <a:endParaRPr lang="en-US" sz="1200" dirty="0"/>
           </a:p>
@@ -11900,7 +11900,7 @@
                 <a:ea typeface="Calibri" pitchFamily="34" charset="-122"/>
                 <a:cs typeface="Calibri" pitchFamily="34" charset="-120"/>
               </a:rPr>
-              <a:t>Known risks are listed openly in the security report (K1–K14): a compromised client device, a colluding analyst, synthetic training data, no SD-JWT yet.</a:t>
+              <a:t>Known risks are listed openly in the security report (K1 to K14): a compromised client device, a colluding analyst, synthetic training data, no SD-JWT yet.</a:t>
             </a:r>
             <a:endParaRPr lang="en-US" sz="1200" dirty="0"/>
           </a:p>

--- a/docs/presentation.pptx
+++ b/docs/presentation.pptx
@@ -1208,7 +1208,7 @@
           <a:p>
             <a:r>
               <a:rPr lang="en-US" dirty="0"/>
-              <a:t>Hello. We are the Guardian team. Our topic is A: an AI agent that pays, cancels and budgets for a bank client. In ten minutes: the problem, the idea, a month of the demo, how the kernel works, the security results, compliance, cost and what is next.</a:t>
+              <a:t>Hello. We are Kseniia Kuzmina and Nikita Stepanov, the Guardian team. Our topic is A: an AI agent that pays, cancels and budgets for a bank client. In ten minutes: the problem, the idea, a month of the demo, how the kernel works, the security results, compliance, cost and what is next.</a:t>
             </a:r>
             <a:endParaRPr lang="en-US" dirty="0"/>
           </a:p>
@@ -2674,6 +2674,45 @@
         </p:nvSpPr>
         <p:spPr>
           <a:xfrm>
+            <a:off x="548640" y="3840480"/>
+            <a:ext cx="8046720" cy="365760"/>
+          </a:xfrm>
+          <a:prstGeom prst="rect">
+            <a:avLst/>
+          </a:prstGeom>
+          <a:noFill/>
+          <a:ln/>
+        </p:spPr>
+        <p:txBody>
+          <a:bodyPr wrap="square" lIns="0" tIns="0" rIns="0" bIns="0" rtlCol="0" anchor="ctr"/>
+          <a:lstStyle/>
+          <a:p>
+            <a:pPr indent="0" marL="0">
+              <a:buNone/>
+            </a:pPr>
+            <a:r>
+              <a:rPr lang="en-US" sz="1500" b="1" dirty="0">
+                <a:solidFill>
+                  <a:srgbClr val="FFFFFF"/>
+                </a:solidFill>
+                <a:latin typeface="Calibri" pitchFamily="34" charset="0"/>
+                <a:ea typeface="Calibri" pitchFamily="34" charset="-122"/>
+                <a:cs typeface="Calibri" pitchFamily="34" charset="-120"/>
+              </a:rPr>
+              <a:t>Kseniia Kuzmina · Nikita Stepanov</a:t>
+            </a:r>
+            <a:endParaRPr lang="en-US" sz="1500" dirty="0"/>
+          </a:p>
+        </p:txBody>
+      </p:sp>
+      <p:sp>
+        <p:nvSpPr>
+          <p:cNvPr id="7" name="Text 4"/>
+          <p:cNvSpPr/>
+          <p:nvPr/>
+        </p:nvSpPr>
+        <p:spPr>
+          <a:xfrm>
             <a:off x="548640" y="4206240"/>
             <a:ext cx="8046720" cy="365760"/>
           </a:xfrm>

--- a/docs/presentation.pptx
+++ b/docs/presentation.pptx
@@ -17,9 +17,10 @@
     <p:sldId id="265" r:id="rId11"/>
     <p:sldId id="266" r:id="rId12"/>
     <p:sldId id="267" r:id="rId13"/>
+    <p:sldId id="268" r:id="rId14"/>
   </p:sldIdLst>
   <p:notesMasterIdLst>
-    <p:notesMasterId r:id="rId14"/>
+    <p:notesMasterId r:id="rId15"/>
   </p:notesMasterIdLst>
   <p:sldSz cx="9144000" cy="5143500"/>
   <p:notesSz cx="5143500" cy="9144000"/>
@@ -1296,7 +1297,7 @@
           <a:p>
             <a:r>
               <a:rPr lang="en-US" dirty="0"/>
-              <a:t>Compliance. The self-regulatory code for agent payment apps has three stages; we implement stage one and two, and we do not offer stage three. Whoever provides the payment service is responsible: Guardian is a bank module, only the bank's executor moves money. Know your agent: every agent has a passport checked at every step. Withdrawal of authorisation is one press. Records are immutable and anchored. There is a human fallback and stricter rules for the elderly. And the assistant sells nothing. On the right, our mandates map onto Mastercard Verifiable Intent and Google AP2 concepts. The full tables with where to check each line are in the security report.</a:t>
+              <a:t>We attacked the kernel four ways. 39 static attacks: fake bills, injected instructions, swapped payees, look-alike merchants, replayed signatures, over-limit requests. All 39 stopped. 5 attacks that try to plant something in the assistant's memory for later: all stopped. An adaptive attacker that learns from the kernel's answers, 10 rounds, 360 attempts: zero payments outside the mandate. And the earlier prototype's suite: 20 of 21 prevented, one bounded by the limit. Without the kernel the same static set lost 532 038.76 ₽.</a:t>
             </a:r>
             <a:endParaRPr lang="en-US" dirty="0"/>
           </a:p>
@@ -1384,7 +1385,7 @@
           <a:p>
             <a:r>
               <a:rPr lang="en-US" dirty="0"/>
-              <a:t>Cost. Models sit on a three-level ladder: rules and templates cost nothing, then a small model, then larger ones only when risk is high. For one client's typical month the first month costs 0.73 rubles in tokens; the next month 0.27, 63.1 percent less, because the repeat payment and the repeated check run from templates with no model call. In the full demo 96.7 percent of the work stays on levels zero and one. At the next-month rate a million clients cost about 270 000 rubles a month. These are token counts on the real prompts with stub answers; a live run will replace the estimate.</a:t>
+              <a:t>Compliance. The self-regulatory code for agent payment apps has three stages; we implement stage one and two, and we do not offer stage three. Whoever provides the payment service is responsible: Guardian is a bank module, only the bank's executor moves money. Know your agent: every agent has a passport checked at every step. Withdrawal of authorisation is one press. Records are immutable and anchored. There is a human fallback and stricter rules for the elderly. And the assistant sells nothing. On the right, our mandates map onto Mastercard Verifiable Intent and Google AP2 concepts. The full tables with where to check each line are in the security report.</a:t>
             </a:r>
             <a:endParaRPr lang="en-US" dirty="0"/>
           </a:p>
@@ -1472,7 +1473,7 @@
           <a:p>
             <a:r>
               <a:rPr lang="en-US" dirty="0"/>
-              <a:t>To sum up. 48 of 48 functional tasks pass in English, Russian and Chinese, 50 of 50 attacks in the evaluation set are stopped, and the whole repository has an automated test suite that runs in the Docker build. Everything is reproducible from the repository in replay mode without any keys. Next: live runs with real models, anchoring on a public test network, the payee model on real bank graphs, and SD-JWT selective disclosure for mandates. Agents propose; the kernel decides, checks and records. Thank you.</a:t>
+              <a:t>Cost. Models sit on a three-level ladder: rules and templates cost nothing, then a small model, then larger ones only when risk is high. For one client's typical month the first month costs 0.73 rubles in tokens; the next month 0.27, 63.1 percent less, because the repeat payment and the repeated check run from templates with no model call. In the full demo 97.1 percent of the work stays on levels zero and one. At the next-month rate a million clients cost about 270 000 rubles a month. These are token counts on the real prompts with stub answers; a live run will replace the estimate.</a:t>
             </a:r>
             <a:endParaRPr lang="en-US" dirty="0"/>
           </a:p>
@@ -1496,6 +1497,94 @@
             <a:fld id="{F7021451-1387-4CA6-816F-3879F97B5CBC}" type="slidenum">
               <a:rPr lang="en-US"/>
               <a:t>12</a:t>
+            </a:fld>
+            <a:endParaRPr lang="en-US"/>
+          </a:p>
+        </p:txBody>
+      </p:sp>
+    </p:spTree>
+    <p:extLst>
+      <p:ext uri="{BB962C8B-B14F-4D97-AF65-F5344CB8AC3E}">
+        <p14:creationId xmlns:p14="http://schemas.microsoft.com/office/powerpoint/2010/main" val="1024086991"/>
+      </p:ext>
+    </p:extLst>
+  </p:cSld>
+  <p:clrMapOvr>
+    <a:masterClrMapping/>
+  </p:clrMapOvr>
+</p:notes>
+</file>
+
+<file path=ppt/notesSlides/notesSlide13.xml><?xml version="1.0" encoding="utf-8"?>
+<p:notes xmlns:a="http://schemas.openxmlformats.org/drawingml/2006/main" xmlns:r="http://schemas.openxmlformats.org/officeDocument/2006/relationships" xmlns:p="http://schemas.openxmlformats.org/presentationml/2006/main">
+  <p:cSld>
+    <p:spTree>
+      <p:nvGrpSpPr>
+        <p:cNvPr id="1" name=""/>
+        <p:cNvGrpSpPr/>
+        <p:nvPr/>
+      </p:nvGrpSpPr>
+      <p:grpSpPr>
+        <a:xfrm>
+          <a:off x="0" y="0"/>
+          <a:ext cx="0" cy="0"/>
+          <a:chOff x="0" y="0"/>
+          <a:chExt cx="0" cy="0"/>
+        </a:xfrm>
+      </p:grpSpPr>
+      <p:sp>
+        <p:nvSpPr>
+          <p:cNvPr id="2" name="Slide Image Placeholder 1"/>
+          <p:cNvSpPr>
+            <a:spLocks noGrp="1" noRot="1" noChangeAspect="1"/>
+          </p:cNvSpPr>
+          <p:nvPr>
+            <p:ph type="sldImg"/>
+          </p:nvPr>
+        </p:nvSpPr>
+        <p:spPr/>
+      </p:sp>
+      <p:sp>
+        <p:nvSpPr>
+          <p:cNvPr id="3" name="Notes Placeholder 2"/>
+          <p:cNvSpPr>
+            <a:spLocks noGrp="1"/>
+          </p:cNvSpPr>
+          <p:nvPr>
+            <p:ph type="body" idx="1"/>
+          </p:nvPr>
+        </p:nvSpPr>
+        <p:spPr/>
+        <p:txBody>
+          <a:bodyPr/>
+          <a:lstStyle/>
+          <a:p>
+            <a:r>
+              <a:rPr lang="en-US" dirty="0"/>
+              <a:t>To sum up. 48 of 48 functional tasks pass in English, Russian and Chinese, 50 of 50 attacks in the evaluation set are stopped, and the whole repository has an automated test suite that runs in the Docker build. Everything is reproducible from the repository in replay mode without any keys. Next: live runs with real models, anchoring on a public test network, the payee model on real bank graphs, and SD-JWT selective disclosure for mandates. Agents propose; the kernel decides, checks and records. Thank you.</a:t>
+            </a:r>
+            <a:endParaRPr lang="en-US" dirty="0"/>
+          </a:p>
+        </p:txBody>
+      </p:sp>
+      <p:sp>
+        <p:nvSpPr>
+          <p:cNvPr id="4" name="Slide Number Placeholder 3"/>
+          <p:cNvSpPr>
+            <a:spLocks noGrp="1"/>
+          </p:cNvSpPr>
+          <p:nvPr>
+            <p:ph type="sldNum" sz="quarter" idx="10"/>
+          </p:nvPr>
+        </p:nvSpPr>
+        <p:spPr/>
+        <p:txBody>
+          <a:bodyPr/>
+          <a:lstStyle/>
+          <a:p>
+            <a:fld id="{F7021451-1387-4CA6-816F-3879F97B5CBC}" type="slidenum">
+              <a:rPr lang="en-US"/>
+              <a:t>13</a:t>
             </a:fld>
             <a:endParaRPr lang="en-US"/>
           </a:p>
@@ -1736,7 +1825,7 @@
           <a:p>
             <a:r>
               <a:rPr lang="en-US" dirty="0"/>
-              <a:t>The demo is one month in a sandbox bank with synthetic data. Ten scenarios. Pay a subscription and allow it monthly; cancel one through the merchant's API; find leaks; a double charge; bills where one is fake; a free trial turning paid; a budget with a goal; a 'safe account' scam call; and a risky payee on the transfer graph. Over the month Guardian saved 548 ₽ a month, did 10 things, asked 11 times and stopped 2. The whole run is in the evidence folder: 292 signed journal entries, chain verified.</a:t>
+              <a:t>The demo is one month in a sandbox bank with synthetic data. Ten scenarios. Pay a subscription and allow it monthly; cancel one through the merchant's API; find leaks; a double charge; bills where one is fake; a free trial turning paid; a budget with a goal; a 'safe account' scam call; and a risky payee on the transfer graph. Over the month Guardian saved 797 ₽ a month, did 11 things, asked 12 times and stopped 4. The whole run is in the evidence folder: 347 signed journal entries, chain verified.</a:t>
             </a:r>
             <a:endParaRPr lang="en-US" dirty="0"/>
           </a:p>
@@ -2088,7 +2177,7 @@
           <a:p>
             <a:r>
               <a:rPr lang="en-US" dirty="0"/>
-              <a:t>Two analytical parts, each measured on held-out data. The budget agent found all five planted leaks and the double charge. The spending forecast has a weighted error of about 27 percent on held-out months, and the cash-gap back-test found the real gap with no false alarms. The payee risk model is gradient boosting over 14 features of the bank's transfer graph. On held-out synthetic graphs it scores ROC-AUC 1.0, precision 0.993 and recall 0.944. These are synthetic graphs from our own generator; real bank data will score lower. The point is that the pipeline is in place and the model only adds a reason to ask: it never moves money by itself.</a:t>
+              <a:t>Autonomy is earned, and it is lost faster than it is earned. Every kind of task starts at level 1: inside a standing permission an agent may act alone up to 1 000 rubles. Five results in a row that the kernel verified in the bank raise it to level 2. One mistake lowers it a level, and acting outside the signed permission drops it straight to zero. The second axis is the agent itself: its role, model and the hash of its instructions. A mistake is a strike, a scope violation two. Three strikes mean 24 hours of quarantine: the kernel revokes its passports and everything it proposes needs a card. Then probation until five clean results. The client can also press Undo on any payment made alone, and that counts too. In the demo the fifth verified result promotes subscriptions; then a faulty planner tries twice, is stopped twice, and is quarantined. 0 of 2 faulty actions executed. Every change is in the signed journal.</a:t>
             </a:r>
             <a:endParaRPr lang="en-US" dirty="0"/>
           </a:p>
@@ -2176,7 +2265,7 @@
           <a:p>
             <a:r>
               <a:rPr lang="en-US" dirty="0"/>
-              <a:t>We attacked the kernel four ways. 39 static attacks: fake bills, injected instructions, swapped payees, look-alike merchants, replayed signatures, over-limit requests. All 39 stopped. 5 attacks that try to plant something in the assistant's memory for later: all stopped. An adaptive attacker that learns from the kernel's answers, 10 rounds, 360 attempts: zero payments outside the mandate. And the earlier prototype's suite: 20 of 21 prevented, one bounded by the limit. Without the kernel the same static set lost 532 038.76 ₽.</a:t>
+              <a:t>Two analytical parts, each measured on held-out data. The budget agent found all five planted leaks and the double charge. The spending forecast has a weighted error of about 27 percent on held-out months, and the cash-gap back-test found the real gap with no false alarms. The payee risk model is gradient boosting over 14 features of the bank's transfer graph. On held-out synthetic graphs it scores ROC-AUC 1.0, precision 0.993 and recall 0.944. These are synthetic graphs from our own generator; real bank data will score lower. The point is that the pipeline is in place and the model only adds a reason to ask: it never moves money by itself.</a:t>
             </a:r>
             <a:endParaRPr lang="en-US" dirty="0"/>
           </a:p>
@@ -2875,7 +2964,7 @@
                 <a:ea typeface="Inter" pitchFamily="34" charset="-122"/>
                 <a:cs typeface="Inter" pitchFamily="34" charset="-120"/>
               </a:rPr>
-              <a:t>Compliance: 智能体支付应用自律公约 · VI / AP2</a:t>
+              <a:t>Red-team: what an attacker gets</a:t>
             </a:r>
             <a:endParaRPr lang="en-US" sz="2500" dirty="0"/>
           </a:p>
@@ -3019,15 +3108,797 @@
                 <a:ea typeface="Inter" pitchFamily="34" charset="-122"/>
                 <a:cs typeface="Inter" pitchFamily="34" charset="-120"/>
               </a:rPr>
-              <a:t>10 / 12</a:t>
+              <a:t>10 / 13</a:t>
             </a:r>
             <a:endParaRPr lang="en-US" sz="900" dirty="0"/>
+          </a:p>
+        </p:txBody>
+      </p:sp>
+      <p:sp>
+        <p:nvSpPr>
+          <p:cNvPr id="8" name="Shape 5"/>
+          <p:cNvSpPr/>
+          <p:nvPr/>
+        </p:nvSpPr>
+        <p:spPr>
+          <a:xfrm>
+            <a:off x="457200" y="1188720"/>
+            <a:ext cx="1920240" cy="1188720"/>
+          </a:xfrm>
+          <a:prstGeom prst="roundRect">
+            <a:avLst>
+              <a:gd name="adj" fmla="val 7692"/>
+            </a:avLst>
+          </a:prstGeom>
+          <a:solidFill>
+            <a:srgbClr val="F4F5F7"/>
+          </a:solidFill>
+          <a:ln w="12700">
+            <a:solidFill>
+              <a:srgbClr val="F4F5F7"/>
+            </a:solidFill>
+            <a:prstDash val="solid"/>
+          </a:ln>
+        </p:spPr>
+      </p:sp>
+      <p:sp>
+        <p:nvSpPr>
+          <p:cNvPr id="9" name="Text 6"/>
+          <p:cNvSpPr/>
+          <p:nvPr/>
+        </p:nvSpPr>
+        <p:spPr>
+          <a:xfrm>
+            <a:off x="594360" y="1280160"/>
+            <a:ext cx="1645920" cy="548640"/>
+          </a:xfrm>
+          <a:prstGeom prst="rect">
+            <a:avLst/>
+          </a:prstGeom>
+          <a:noFill/>
+          <a:ln/>
+        </p:spPr>
+        <p:txBody>
+          <a:bodyPr wrap="square" lIns="0" tIns="0" rIns="0" bIns="0" rtlCol="0" anchor="ctr"/>
+          <a:lstStyle/>
+          <a:p>
+            <a:pPr indent="0" marL="0">
+              <a:buNone/>
+            </a:pPr>
+            <a:r>
+              <a:rPr lang="en-US" sz="2600" b="1" dirty="0">
+                <a:solidFill>
+                  <a:srgbClr val="101828"/>
+                </a:solidFill>
+                <a:latin typeface="Inter" pitchFamily="34" charset="0"/>
+                <a:ea typeface="Inter" pitchFamily="34" charset="-122"/>
+                <a:cs typeface="Inter" pitchFamily="34" charset="-120"/>
+              </a:rPr>
+              <a:t>39/39</a:t>
+            </a:r>
+            <a:endParaRPr lang="en-US" sz="2600" dirty="0"/>
+          </a:p>
+        </p:txBody>
+      </p:sp>
+      <p:sp>
+        <p:nvSpPr>
+          <p:cNvPr id="10" name="Text 7"/>
+          <p:cNvSpPr/>
+          <p:nvPr/>
+        </p:nvSpPr>
+        <p:spPr>
+          <a:xfrm>
+            <a:off x="594360" y="1847088"/>
+            <a:ext cx="1645920" cy="457200"/>
+          </a:xfrm>
+          <a:prstGeom prst="rect">
+            <a:avLst/>
+          </a:prstGeom>
+          <a:noFill/>
+          <a:ln/>
+        </p:spPr>
+        <p:txBody>
+          <a:bodyPr wrap="square" lIns="0" tIns="0" rIns="0" bIns="0" rtlCol="0" anchor="t"/>
+          <a:lstStyle/>
+          <a:p>
+            <a:pPr indent="0" marL="0">
+              <a:buNone/>
+            </a:pPr>
+            <a:r>
+              <a:rPr lang="en-US" sz="1050" dirty="0">
+                <a:solidFill>
+                  <a:srgbClr val="667085"/>
+                </a:solidFill>
+                <a:latin typeface="Inter" pitchFamily="34" charset="0"/>
+                <a:ea typeface="Inter" pitchFamily="34" charset="-122"/>
+                <a:cs typeface="Inter" pitchFamily="34" charset="-120"/>
+              </a:rPr>
+              <a:t>static attacks stopped</a:t>
+            </a:r>
+            <a:endParaRPr lang="en-US" sz="1050" dirty="0"/>
+          </a:p>
+        </p:txBody>
+      </p:sp>
+      <p:sp>
+        <p:nvSpPr>
+          <p:cNvPr id="11" name="Shape 8"/>
+          <p:cNvSpPr/>
+          <p:nvPr/>
+        </p:nvSpPr>
+        <p:spPr>
+          <a:xfrm>
+            <a:off x="2560320" y="1188720"/>
+            <a:ext cx="1920240" cy="1188720"/>
+          </a:xfrm>
+          <a:prstGeom prst="roundRect">
+            <a:avLst>
+              <a:gd name="adj" fmla="val 7692"/>
+            </a:avLst>
+          </a:prstGeom>
+          <a:solidFill>
+            <a:srgbClr val="F4F5F7"/>
+          </a:solidFill>
+          <a:ln w="12700">
+            <a:solidFill>
+              <a:srgbClr val="F4F5F7"/>
+            </a:solidFill>
+            <a:prstDash val="solid"/>
+          </a:ln>
+        </p:spPr>
+      </p:sp>
+      <p:sp>
+        <p:nvSpPr>
+          <p:cNvPr id="12" name="Text 9"/>
+          <p:cNvSpPr/>
+          <p:nvPr/>
+        </p:nvSpPr>
+        <p:spPr>
+          <a:xfrm>
+            <a:off x="2697480" y="1280160"/>
+            <a:ext cx="1645920" cy="548640"/>
+          </a:xfrm>
+          <a:prstGeom prst="rect">
+            <a:avLst/>
+          </a:prstGeom>
+          <a:noFill/>
+          <a:ln/>
+        </p:spPr>
+        <p:txBody>
+          <a:bodyPr wrap="square" lIns="0" tIns="0" rIns="0" bIns="0" rtlCol="0" anchor="ctr"/>
+          <a:lstStyle/>
+          <a:p>
+            <a:pPr indent="0" marL="0">
+              <a:buNone/>
+            </a:pPr>
+            <a:r>
+              <a:rPr lang="en-US" sz="2600" b="1" dirty="0">
+                <a:solidFill>
+                  <a:srgbClr val="101828"/>
+                </a:solidFill>
+                <a:latin typeface="Inter" pitchFamily="34" charset="0"/>
+                <a:ea typeface="Inter" pitchFamily="34" charset="-122"/>
+                <a:cs typeface="Inter" pitchFamily="34" charset="-120"/>
+              </a:rPr>
+              <a:t>5/5</a:t>
+            </a:r>
+            <a:endParaRPr lang="en-US" sz="2600" dirty="0"/>
+          </a:p>
+        </p:txBody>
+      </p:sp>
+      <p:sp>
+        <p:nvSpPr>
+          <p:cNvPr id="13" name="Text 10"/>
+          <p:cNvSpPr/>
+          <p:nvPr/>
+        </p:nvSpPr>
+        <p:spPr>
+          <a:xfrm>
+            <a:off x="2697480" y="1847088"/>
+            <a:ext cx="1645920" cy="457200"/>
+          </a:xfrm>
+          <a:prstGeom prst="rect">
+            <a:avLst/>
+          </a:prstGeom>
+          <a:noFill/>
+          <a:ln/>
+        </p:spPr>
+        <p:txBody>
+          <a:bodyPr wrap="square" lIns="0" tIns="0" rIns="0" bIns="0" rtlCol="0" anchor="t"/>
+          <a:lstStyle/>
+          <a:p>
+            <a:pPr indent="0" marL="0">
+              <a:buNone/>
+            </a:pPr>
+            <a:r>
+              <a:rPr lang="en-US" sz="1050" dirty="0">
+                <a:solidFill>
+                  <a:srgbClr val="667085"/>
+                </a:solidFill>
+                <a:latin typeface="Inter" pitchFamily="34" charset="0"/>
+                <a:ea typeface="Inter" pitchFamily="34" charset="-122"/>
+                <a:cs typeface="Inter" pitchFamily="34" charset="-120"/>
+              </a:rPr>
+              <a:t>memory-planting attacks stopped</a:t>
+            </a:r>
+            <a:endParaRPr lang="en-US" sz="1050" dirty="0"/>
+          </a:p>
+        </p:txBody>
+      </p:sp>
+      <p:sp>
+        <p:nvSpPr>
+          <p:cNvPr id="14" name="Shape 11"/>
+          <p:cNvSpPr/>
+          <p:nvPr/>
+        </p:nvSpPr>
+        <p:spPr>
+          <a:xfrm>
+            <a:off x="4663440" y="1188720"/>
+            <a:ext cx="1920240" cy="1188720"/>
+          </a:xfrm>
+          <a:prstGeom prst="roundRect">
+            <a:avLst>
+              <a:gd name="adj" fmla="val 7692"/>
+            </a:avLst>
+          </a:prstGeom>
+          <a:solidFill>
+            <a:srgbClr val="F4F5F7"/>
+          </a:solidFill>
+          <a:ln w="12700">
+            <a:solidFill>
+              <a:srgbClr val="F4F5F7"/>
+            </a:solidFill>
+            <a:prstDash val="solid"/>
+          </a:ln>
+        </p:spPr>
+      </p:sp>
+      <p:sp>
+        <p:nvSpPr>
+          <p:cNvPr id="15" name="Text 12"/>
+          <p:cNvSpPr/>
+          <p:nvPr/>
+        </p:nvSpPr>
+        <p:spPr>
+          <a:xfrm>
+            <a:off x="4800600" y="1280160"/>
+            <a:ext cx="1645920" cy="548640"/>
+          </a:xfrm>
+          <a:prstGeom prst="rect">
+            <a:avLst/>
+          </a:prstGeom>
+          <a:noFill/>
+          <a:ln/>
+        </p:spPr>
+        <p:txBody>
+          <a:bodyPr wrap="square" lIns="0" tIns="0" rIns="0" bIns="0" rtlCol="0" anchor="ctr"/>
+          <a:lstStyle/>
+          <a:p>
+            <a:pPr indent="0" marL="0">
+              <a:buNone/>
+            </a:pPr>
+            <a:r>
+              <a:rPr lang="en-US" sz="2600" b="1" dirty="0">
+                <a:solidFill>
+                  <a:srgbClr val="101828"/>
+                </a:solidFill>
+                <a:latin typeface="Inter" pitchFamily="34" charset="0"/>
+                <a:ea typeface="Inter" pitchFamily="34" charset="-122"/>
+                <a:cs typeface="Inter" pitchFamily="34" charset="-120"/>
+              </a:rPr>
+              <a:t>0/360</a:t>
+            </a:r>
+            <a:endParaRPr lang="en-US" sz="2600" dirty="0"/>
+          </a:p>
+        </p:txBody>
+      </p:sp>
+      <p:sp>
+        <p:nvSpPr>
+          <p:cNvPr id="16" name="Text 13"/>
+          <p:cNvSpPr/>
+          <p:nvPr/>
+        </p:nvSpPr>
+        <p:spPr>
+          <a:xfrm>
+            <a:off x="4800600" y="1847088"/>
+            <a:ext cx="1645920" cy="457200"/>
+          </a:xfrm>
+          <a:prstGeom prst="rect">
+            <a:avLst/>
+          </a:prstGeom>
+          <a:noFill/>
+          <a:ln/>
+        </p:spPr>
+        <p:txBody>
+          <a:bodyPr wrap="square" lIns="0" tIns="0" rIns="0" bIns="0" rtlCol="0" anchor="t"/>
+          <a:lstStyle/>
+          <a:p>
+            <a:pPr indent="0" marL="0">
+              <a:buNone/>
+            </a:pPr>
+            <a:r>
+              <a:rPr lang="en-US" sz="1050" dirty="0">
+                <a:solidFill>
+                  <a:srgbClr val="667085"/>
+                </a:solidFill>
+                <a:latin typeface="Inter" pitchFamily="34" charset="0"/>
+                <a:ea typeface="Inter" pitchFamily="34" charset="-122"/>
+                <a:cs typeface="Inter" pitchFamily="34" charset="-120"/>
+              </a:rPr>
+              <a:t>adaptive attacker's tries outside the mandate</a:t>
+            </a:r>
+            <a:endParaRPr lang="en-US" sz="1050" dirty="0"/>
+          </a:p>
+        </p:txBody>
+      </p:sp>
+      <p:sp>
+        <p:nvSpPr>
+          <p:cNvPr id="17" name="Shape 14"/>
+          <p:cNvSpPr/>
+          <p:nvPr/>
+        </p:nvSpPr>
+        <p:spPr>
+          <a:xfrm>
+            <a:off x="6766560" y="1188720"/>
+            <a:ext cx="1920240" cy="1188720"/>
+          </a:xfrm>
+          <a:prstGeom prst="roundRect">
+            <a:avLst>
+              <a:gd name="adj" fmla="val 7692"/>
+            </a:avLst>
+          </a:prstGeom>
+          <a:solidFill>
+            <a:srgbClr val="F4F5F7"/>
+          </a:solidFill>
+          <a:ln w="12700">
+            <a:solidFill>
+              <a:srgbClr val="F4F5F7"/>
+            </a:solidFill>
+            <a:prstDash val="solid"/>
+          </a:ln>
+        </p:spPr>
+      </p:sp>
+      <p:sp>
+        <p:nvSpPr>
+          <p:cNvPr id="18" name="Text 15"/>
+          <p:cNvSpPr/>
+          <p:nvPr/>
+        </p:nvSpPr>
+        <p:spPr>
+          <a:xfrm>
+            <a:off x="6903720" y="1280160"/>
+            <a:ext cx="1645920" cy="548640"/>
+          </a:xfrm>
+          <a:prstGeom prst="rect">
+            <a:avLst/>
+          </a:prstGeom>
+          <a:noFill/>
+          <a:ln/>
+        </p:spPr>
+        <p:txBody>
+          <a:bodyPr wrap="square" lIns="0" tIns="0" rIns="0" bIns="0" rtlCol="0" anchor="ctr"/>
+          <a:lstStyle/>
+          <a:p>
+            <a:pPr indent="0" marL="0">
+              <a:buNone/>
+            </a:pPr>
+            <a:r>
+              <a:rPr lang="en-US" sz="2600" b="1" dirty="0">
+                <a:solidFill>
+                  <a:srgbClr val="101828"/>
+                </a:solidFill>
+                <a:latin typeface="Inter" pitchFamily="34" charset="0"/>
+                <a:ea typeface="Inter" pitchFamily="34" charset="-122"/>
+                <a:cs typeface="Inter" pitchFamily="34" charset="-120"/>
+              </a:rPr>
+              <a:t>20/21</a:t>
+            </a:r>
+            <a:endParaRPr lang="en-US" sz="2600" dirty="0"/>
+          </a:p>
+        </p:txBody>
+      </p:sp>
+      <p:sp>
+        <p:nvSpPr>
+          <p:cNvPr id="19" name="Text 16"/>
+          <p:cNvSpPr/>
+          <p:nvPr/>
+        </p:nvSpPr>
+        <p:spPr>
+          <a:xfrm>
+            <a:off x="6903720" y="1847088"/>
+            <a:ext cx="1645920" cy="457200"/>
+          </a:xfrm>
+          <a:prstGeom prst="rect">
+            <a:avLst/>
+          </a:prstGeom>
+          <a:noFill/>
+          <a:ln/>
+        </p:spPr>
+        <p:txBody>
+          <a:bodyPr wrap="square" lIns="0" tIns="0" rIns="0" bIns="0" rtlCol="0" anchor="t"/>
+          <a:lstStyle/>
+          <a:p>
+            <a:pPr indent="0" marL="0">
+              <a:buNone/>
+            </a:pPr>
+            <a:r>
+              <a:rPr lang="en-US" sz="1050" dirty="0">
+                <a:solidFill>
+                  <a:srgbClr val="667085"/>
+                </a:solidFill>
+                <a:latin typeface="Inter" pitchFamily="34" charset="0"/>
+                <a:ea typeface="Inter" pitchFamily="34" charset="-122"/>
+                <a:cs typeface="Inter" pitchFamily="34" charset="-120"/>
+              </a:rPr>
+              <a:t>earlier prototype's suite, 1 bounded by the limit</a:t>
+            </a:r>
+            <a:endParaRPr lang="en-US" sz="1050" dirty="0"/>
+          </a:p>
+        </p:txBody>
+      </p:sp>
+      <p:sp>
+        <p:nvSpPr>
+          <p:cNvPr id="20" name="Text 17"/>
+          <p:cNvSpPr/>
+          <p:nvPr/>
+        </p:nvSpPr>
+        <p:spPr>
+          <a:xfrm>
+            <a:off x="457200" y="2697480"/>
+            <a:ext cx="3657600" cy="365760"/>
+          </a:xfrm>
+          <a:prstGeom prst="rect">
+            <a:avLst/>
+          </a:prstGeom>
+          <a:noFill/>
+          <a:ln/>
+        </p:spPr>
+        <p:txBody>
+          <a:bodyPr wrap="square" lIns="0" tIns="0" rIns="0" bIns="0" rtlCol="0" anchor="ctr"/>
+          <a:lstStyle/>
+          <a:p>
+            <a:pPr indent="0" marL="0">
+              <a:buNone/>
+            </a:pPr>
+            <a:r>
+              <a:rPr lang="en-US" sz="1600" b="1" dirty="0">
+                <a:solidFill>
+                  <a:srgbClr val="101828"/>
+                </a:solidFill>
+                <a:latin typeface="Inter" pitchFamily="34" charset="0"/>
+                <a:ea typeface="Inter" pitchFamily="34" charset="-122"/>
+                <a:cs typeface="Inter" pitchFamily="34" charset="-120"/>
+              </a:rPr>
+              <a:t>Without the kernel</a:t>
+            </a:r>
+            <a:endParaRPr lang="en-US" sz="1600" dirty="0"/>
+          </a:p>
+        </p:txBody>
+      </p:sp>
+      <p:sp>
+        <p:nvSpPr>
+          <p:cNvPr id="21" name="Text 18"/>
+          <p:cNvSpPr/>
+          <p:nvPr/>
+        </p:nvSpPr>
+        <p:spPr>
+          <a:xfrm>
+            <a:off x="457200" y="3063240"/>
+            <a:ext cx="4023360" cy="411480"/>
+          </a:xfrm>
+          <a:prstGeom prst="rect">
+            <a:avLst/>
+          </a:prstGeom>
+          <a:noFill/>
+          <a:ln/>
+        </p:spPr>
+        <p:txBody>
+          <a:bodyPr wrap="square" lIns="0" tIns="0" rIns="0" bIns="0" rtlCol="0" anchor="ctr"/>
+          <a:lstStyle/>
+          <a:p>
+            <a:pPr indent="0" marL="0">
+              <a:buNone/>
+            </a:pPr>
+            <a:r>
+              <a:rPr lang="en-US" sz="1800" b="1" dirty="0">
+                <a:solidFill>
+                  <a:srgbClr val="B42318"/>
+                </a:solidFill>
+                <a:latin typeface="Inter" pitchFamily="34" charset="0"/>
+                <a:ea typeface="Inter" pitchFamily="34" charset="-122"/>
+                <a:cs typeface="Inter" pitchFamily="34" charset="-120"/>
+              </a:rPr>
+              <a:t>39/39 succeeded · </a:t>
+            </a:r>
+            <a:pPr indent="0" marL="0">
+              <a:buNone/>
+            </a:pPr>
+            <a:r>
+              <a:rPr lang="en-US" sz="1800" b="1" dirty="0">
+                <a:solidFill>
+                  <a:srgbClr val="B42318"/>
+                </a:solidFill>
+                <a:latin typeface="Inter" pitchFamily="34" charset="0"/>
+                <a:ea typeface="Inter" pitchFamily="34" charset="-122"/>
+                <a:cs typeface="Inter" pitchFamily="34" charset="-120"/>
+              </a:rPr>
+              <a:t>532 038.76 ₽ lost</a:t>
+            </a:r>
+            <a:endParaRPr lang="en-US" sz="1800" dirty="0"/>
+          </a:p>
+        </p:txBody>
+      </p:sp>
+      <p:sp>
+        <p:nvSpPr>
+          <p:cNvPr id="22" name="Text 19"/>
+          <p:cNvSpPr/>
+          <p:nvPr/>
+        </p:nvSpPr>
+        <p:spPr>
+          <a:xfrm>
+            <a:off x="457200" y="3611880"/>
+            <a:ext cx="4023360" cy="822960"/>
+          </a:xfrm>
+          <a:prstGeom prst="rect">
+            <a:avLst/>
+          </a:prstGeom>
+          <a:noFill/>
+          <a:ln/>
+        </p:spPr>
+        <p:txBody>
+          <a:bodyPr wrap="square" lIns="0" tIns="0" rIns="0" bIns="0" rtlCol="0" anchor="ctr"/>
+          <a:lstStyle/>
+          <a:p>
+            <a:pPr indent="0" marL="0">
+              <a:buNone/>
+            </a:pPr>
+            <a:r>
+              <a:rPr lang="en-US" sz="1200" dirty="0">
+                <a:solidFill>
+                  <a:srgbClr val="667085"/>
+                </a:solidFill>
+                <a:latin typeface="Inter" pitchFamily="34" charset="0"/>
+                <a:ea typeface="Inter" pitchFamily="34" charset="-122"/>
+                <a:cs typeface="Inter" pitchFamily="34" charset="-120"/>
+              </a:rPr>
+              <a:t>Known risks are listed openly in the security report (K1 to K14): a compromised client device, a colluding analyst, synthetic training data, no SD-JWT yet.</a:t>
+            </a:r>
+            <a:endParaRPr lang="en-US" sz="1200" dirty="0"/>
           </a:p>
         </p:txBody>
       </p:sp>
       <p:graphicFrame>
         <p:nvGraphicFramePr>
-          <p:cNvPr id="11" name="Table 0"/>
+          <p:cNvPr id="23" name="Chart 0" descr=""/>
+          <p:cNvGraphicFramePr/>
+          <p:nvPr/>
+        </p:nvGraphicFramePr>
+        <p:xfrm>
+          <a:off x="4663440" y="2606040"/>
+          <a:ext cx="4023360" cy="2011680"/>
+        </p:xfrm>
+        <a:graphic xmlns:a="http://schemas.openxmlformats.org/drawingml/2006/main">
+          <a:graphicData uri="http://schemas.openxmlformats.org/drawingml/2006/chart">
+            <c:chart xmlns:c="http://schemas.openxmlformats.org/drawingml/2006/chart" r:id="rId1"/>
+          </a:graphicData>
+        </a:graphic>
+      </p:graphicFrame>
+    </p:spTree>
+  </p:cSld>
+  <p:clrMapOvr>
+    <a:masterClrMapping/>
+  </p:clrMapOvr>
+</p:sld>
+</file>
+
+<file path=ppt/slides/slide11.xml><?xml version="1.0" encoding="utf-8"?>
+<p:sld xmlns:a="http://schemas.openxmlformats.org/drawingml/2006/main" xmlns:r="http://schemas.openxmlformats.org/officeDocument/2006/relationships" xmlns:p="http://schemas.openxmlformats.org/presentationml/2006/main">
+  <p:cSld name="Slide 11">
+    <p:bg>
+      <p:bgPr>
+        <a:solidFill>
+          <a:srgbClr val="FFFFFF"/>
+        </a:solidFill>
+      </p:bgPr>
+    </p:bg>
+    <p:spTree>
+      <p:nvGrpSpPr>
+        <p:cNvPr id="1" name=""/>
+        <p:cNvGrpSpPr/>
+        <p:nvPr/>
+      </p:nvGrpSpPr>
+      <p:grpSpPr>
+        <a:xfrm>
+          <a:off x="0" y="0"/>
+          <a:ext cx="0" cy="0"/>
+          <a:chOff x="0" y="0"/>
+          <a:chExt cx="0" cy="0"/>
+        </a:xfrm>
+      </p:grpSpPr>
+      <p:sp>
+        <p:nvSpPr>
+          <p:cNvPr id="2" name="Text 0"/>
+          <p:cNvSpPr/>
+          <p:nvPr/>
+        </p:nvSpPr>
+        <p:spPr>
+          <a:xfrm>
+            <a:off x="457200" y="384048"/>
+            <a:ext cx="8229600" cy="548640"/>
+          </a:xfrm>
+          <a:prstGeom prst="rect">
+            <a:avLst/>
+          </a:prstGeom>
+          <a:noFill/>
+          <a:ln/>
+        </p:spPr>
+        <p:txBody>
+          <a:bodyPr wrap="square" lIns="0" tIns="0" rIns="0" bIns="0" rtlCol="0" anchor="ctr"/>
+          <a:lstStyle/>
+          <a:p>
+            <a:pPr indent="0" marL="0">
+              <a:buNone/>
+            </a:pPr>
+            <a:r>
+              <a:rPr lang="en-US" sz="2500" b="1" dirty="0">
+                <a:solidFill>
+                  <a:srgbClr val="101828"/>
+                </a:solidFill>
+                <a:latin typeface="Inter" pitchFamily="34" charset="0"/>
+                <a:ea typeface="Inter" pitchFamily="34" charset="-122"/>
+                <a:cs typeface="Inter" pitchFamily="34" charset="-120"/>
+              </a:rPr>
+              <a:t>Compliance: 智能体支付应用自律公约 · VI / AP2</a:t>
+            </a:r>
+            <a:endParaRPr lang="en-US" sz="2500" dirty="0"/>
+          </a:p>
+        </p:txBody>
+      </p:sp>
+      <p:sp>
+        <p:nvSpPr>
+          <p:cNvPr id="3" name="Shape 1"/>
+          <p:cNvSpPr/>
+          <p:nvPr/>
+        </p:nvSpPr>
+        <p:spPr>
+          <a:xfrm>
+            <a:off x="457200" y="4754880"/>
+            <a:ext cx="210312" cy="210312"/>
+          </a:xfrm>
+          <a:prstGeom prst="roundRect">
+            <a:avLst>
+              <a:gd name="adj" fmla="val 22000"/>
+            </a:avLst>
+          </a:prstGeom>
+          <a:solidFill>
+            <a:srgbClr val="C2361F"/>
+          </a:solidFill>
+          <a:ln w="12700">
+            <a:solidFill>
+              <a:srgbClr val="C2361F"/>
+            </a:solidFill>
+            <a:prstDash val="solid"/>
+          </a:ln>
+        </p:spPr>
+      </p:sp>
+      <p:sp>
+        <p:nvSpPr>
+          <p:cNvPr id="4" name="Text 2"/>
+          <p:cNvSpPr/>
+          <p:nvPr/>
+        </p:nvSpPr>
+        <p:spPr>
+          <a:xfrm>
+            <a:off x="457200" y="4754880"/>
+            <a:ext cx="210312" cy="210312"/>
+          </a:xfrm>
+          <a:prstGeom prst="rect">
+            <a:avLst/>
+          </a:prstGeom>
+          <a:noFill/>
+          <a:ln/>
+        </p:spPr>
+        <p:txBody>
+          <a:bodyPr wrap="square" lIns="0" tIns="0" rIns="0" bIns="0" rtlCol="0" anchor="ctr"/>
+          <a:lstStyle/>
+          <a:p>
+            <a:pPr algn="ctr" indent="0" marL="0">
+              <a:buNone/>
+            </a:pPr>
+            <a:r>
+              <a:rPr lang="en-US" sz="920" dirty="0">
+                <a:solidFill>
+                  <a:srgbClr val="FFFFFF"/>
+                </a:solidFill>
+                <a:latin typeface="Noto Sans CJK SC" pitchFamily="34" charset="0"/>
+                <a:ea typeface="Noto Sans CJK SC" pitchFamily="34" charset="-122"/>
+                <a:cs typeface="Noto Sans CJK SC" pitchFamily="34" charset="-120"/>
+              </a:rPr>
+              <a:t>守</a:t>
+            </a:r>
+            <a:endParaRPr lang="en-US" sz="920" dirty="0"/>
+          </a:p>
+        </p:txBody>
+      </p:sp>
+      <p:sp>
+        <p:nvSpPr>
+          <p:cNvPr id="5" name="Text 3"/>
+          <p:cNvSpPr/>
+          <p:nvPr/>
+        </p:nvSpPr>
+        <p:spPr>
+          <a:xfrm>
+            <a:off x="731520" y="4754880"/>
+            <a:ext cx="1828800" cy="210312"/>
+          </a:xfrm>
+          <a:prstGeom prst="rect">
+            <a:avLst/>
+          </a:prstGeom>
+          <a:noFill/>
+          <a:ln/>
+        </p:spPr>
+        <p:txBody>
+          <a:bodyPr wrap="square" lIns="0" tIns="0" rIns="0" bIns="0" rtlCol="0" anchor="ctr"/>
+          <a:lstStyle/>
+          <a:p>
+            <a:pPr indent="0" marL="0">
+              <a:buNone/>
+            </a:pPr>
+            <a:r>
+              <a:rPr lang="en-US" sz="900" b="1" dirty="0">
+                <a:solidFill>
+                  <a:srgbClr val="101828"/>
+                </a:solidFill>
+                <a:latin typeface="Inter" pitchFamily="34" charset="0"/>
+                <a:ea typeface="Inter" pitchFamily="34" charset="-122"/>
+                <a:cs typeface="Inter" pitchFamily="34" charset="-120"/>
+              </a:rPr>
+              <a:t>Guardian</a:t>
+            </a:r>
+            <a:endParaRPr lang="en-US" sz="900" dirty="0"/>
+          </a:p>
+        </p:txBody>
+      </p:sp>
+      <p:sp>
+        <p:nvSpPr>
+          <p:cNvPr id="6" name="Text 4"/>
+          <p:cNvSpPr/>
+          <p:nvPr/>
+        </p:nvSpPr>
+        <p:spPr>
+          <a:xfrm>
+            <a:off x="6858000" y="4754880"/>
+            <a:ext cx="1828800" cy="210312"/>
+          </a:xfrm>
+          <a:prstGeom prst="rect">
+            <a:avLst/>
+          </a:prstGeom>
+          <a:noFill/>
+          <a:ln/>
+        </p:spPr>
+        <p:txBody>
+          <a:bodyPr wrap="square" lIns="0" tIns="0" rIns="0" bIns="0" rtlCol="0" anchor="ctr"/>
+          <a:lstStyle/>
+          <a:p>
+            <a:pPr algn="r" indent="0" marL="0">
+              <a:buNone/>
+            </a:pPr>
+            <a:r>
+              <a:rPr lang="en-US" sz="900" dirty="0">
+                <a:solidFill>
+                  <a:srgbClr val="667085"/>
+                </a:solidFill>
+                <a:latin typeface="Inter" pitchFamily="34" charset="0"/>
+                <a:ea typeface="Inter" pitchFamily="34" charset="-122"/>
+                <a:cs typeface="Inter" pitchFamily="34" charset="-120"/>
+              </a:rPr>
+              <a:t>11 / 13</a:t>
+            </a:r>
+            <a:endParaRPr lang="en-US" sz="900" dirty="0"/>
+          </a:p>
+        </p:txBody>
+      </p:sp>
+      <p:graphicFrame>
+        <p:nvGraphicFramePr>
+          <p:cNvPr id="12" name="Table 0"/>
           <p:cNvGraphicFramePr>
             <a:graphicFrameLocks noGrp="1"/>
           </p:cNvGraphicFramePr>
@@ -4437,7 +5308,7 @@
       </p:graphicFrame>
       <p:graphicFrame>
         <p:nvGraphicFramePr>
-          <p:cNvPr id="21" name="Table 1"/>
+          <p:cNvPr id="23" name="Table 1"/>
           <p:cNvGraphicFramePr>
             <a:graphicFrameLocks noGrp="1"/>
           </p:cNvGraphicFramePr>
@@ -5301,552 +6172,6 @@
 </p:sld>
 </file>
 
-<file path=ppt/slides/slide11.xml><?xml version="1.0" encoding="utf-8"?>
-<p:sld xmlns:a="http://schemas.openxmlformats.org/drawingml/2006/main" xmlns:r="http://schemas.openxmlformats.org/officeDocument/2006/relationships" xmlns:p="http://schemas.openxmlformats.org/presentationml/2006/main">
-  <p:cSld name="Slide 11">
-    <p:bg>
-      <p:bgPr>
-        <a:solidFill>
-          <a:srgbClr val="FFFFFF"/>
-        </a:solidFill>
-      </p:bgPr>
-    </p:bg>
-    <p:spTree>
-      <p:nvGrpSpPr>
-        <p:cNvPr id="1" name=""/>
-        <p:cNvGrpSpPr/>
-        <p:nvPr/>
-      </p:nvGrpSpPr>
-      <p:grpSpPr>
-        <a:xfrm>
-          <a:off x="0" y="0"/>
-          <a:ext cx="0" cy="0"/>
-          <a:chOff x="0" y="0"/>
-          <a:chExt cx="0" cy="0"/>
-        </a:xfrm>
-      </p:grpSpPr>
-      <p:sp>
-        <p:nvSpPr>
-          <p:cNvPr id="2" name="Text 0"/>
-          <p:cNvSpPr/>
-          <p:nvPr/>
-        </p:nvSpPr>
-        <p:spPr>
-          <a:xfrm>
-            <a:off x="457200" y="384048"/>
-            <a:ext cx="8229600" cy="548640"/>
-          </a:xfrm>
-          <a:prstGeom prst="rect">
-            <a:avLst/>
-          </a:prstGeom>
-          <a:noFill/>
-          <a:ln/>
-        </p:spPr>
-        <p:txBody>
-          <a:bodyPr wrap="square" lIns="0" tIns="0" rIns="0" bIns="0" rtlCol="0" anchor="ctr"/>
-          <a:lstStyle/>
-          <a:p>
-            <a:pPr indent="0" marL="0">
-              <a:buNone/>
-            </a:pPr>
-            <a:r>
-              <a:rPr lang="en-US" sz="2500" b="1" dirty="0">
-                <a:solidFill>
-                  <a:srgbClr val="101828"/>
-                </a:solidFill>
-                <a:latin typeface="Inter" pitchFamily="34" charset="0"/>
-                <a:ea typeface="Inter" pitchFamily="34" charset="-122"/>
-                <a:cs typeface="Inter" pitchFamily="34" charset="-120"/>
-              </a:rPr>
-              <a:t>Cost: most of the work needs no large model</a:t>
-            </a:r>
-            <a:endParaRPr lang="en-US" sz="2500" dirty="0"/>
-          </a:p>
-        </p:txBody>
-      </p:sp>
-      <p:sp>
-        <p:nvSpPr>
-          <p:cNvPr id="3" name="Shape 1"/>
-          <p:cNvSpPr/>
-          <p:nvPr/>
-        </p:nvSpPr>
-        <p:spPr>
-          <a:xfrm>
-            <a:off x="457200" y="4754880"/>
-            <a:ext cx="210312" cy="210312"/>
-          </a:xfrm>
-          <a:prstGeom prst="roundRect">
-            <a:avLst>
-              <a:gd name="adj" fmla="val 22000"/>
-            </a:avLst>
-          </a:prstGeom>
-          <a:solidFill>
-            <a:srgbClr val="C2361F"/>
-          </a:solidFill>
-          <a:ln w="12700">
-            <a:solidFill>
-              <a:srgbClr val="C2361F"/>
-            </a:solidFill>
-            <a:prstDash val="solid"/>
-          </a:ln>
-        </p:spPr>
-      </p:sp>
-      <p:sp>
-        <p:nvSpPr>
-          <p:cNvPr id="4" name="Text 2"/>
-          <p:cNvSpPr/>
-          <p:nvPr/>
-        </p:nvSpPr>
-        <p:spPr>
-          <a:xfrm>
-            <a:off x="457200" y="4754880"/>
-            <a:ext cx="210312" cy="210312"/>
-          </a:xfrm>
-          <a:prstGeom prst="rect">
-            <a:avLst/>
-          </a:prstGeom>
-          <a:noFill/>
-          <a:ln/>
-        </p:spPr>
-        <p:txBody>
-          <a:bodyPr wrap="square" lIns="0" tIns="0" rIns="0" bIns="0" rtlCol="0" anchor="ctr"/>
-          <a:lstStyle/>
-          <a:p>
-            <a:pPr algn="ctr" indent="0" marL="0">
-              <a:buNone/>
-            </a:pPr>
-            <a:r>
-              <a:rPr lang="en-US" sz="920" dirty="0">
-                <a:solidFill>
-                  <a:srgbClr val="FFFFFF"/>
-                </a:solidFill>
-                <a:latin typeface="Noto Sans CJK SC" pitchFamily="34" charset="0"/>
-                <a:ea typeface="Noto Sans CJK SC" pitchFamily="34" charset="-122"/>
-                <a:cs typeface="Noto Sans CJK SC" pitchFamily="34" charset="-120"/>
-              </a:rPr>
-              <a:t>守</a:t>
-            </a:r>
-            <a:endParaRPr lang="en-US" sz="920" dirty="0"/>
-          </a:p>
-        </p:txBody>
-      </p:sp>
-      <p:sp>
-        <p:nvSpPr>
-          <p:cNvPr id="5" name="Text 3"/>
-          <p:cNvSpPr/>
-          <p:nvPr/>
-        </p:nvSpPr>
-        <p:spPr>
-          <a:xfrm>
-            <a:off x="731520" y="4754880"/>
-            <a:ext cx="1828800" cy="210312"/>
-          </a:xfrm>
-          <a:prstGeom prst="rect">
-            <a:avLst/>
-          </a:prstGeom>
-          <a:noFill/>
-          <a:ln/>
-        </p:spPr>
-        <p:txBody>
-          <a:bodyPr wrap="square" lIns="0" tIns="0" rIns="0" bIns="0" rtlCol="0" anchor="ctr"/>
-          <a:lstStyle/>
-          <a:p>
-            <a:pPr indent="0" marL="0">
-              <a:buNone/>
-            </a:pPr>
-            <a:r>
-              <a:rPr lang="en-US" sz="900" b="1" dirty="0">
-                <a:solidFill>
-                  <a:srgbClr val="101828"/>
-                </a:solidFill>
-                <a:latin typeface="Inter" pitchFamily="34" charset="0"/>
-                <a:ea typeface="Inter" pitchFamily="34" charset="-122"/>
-                <a:cs typeface="Inter" pitchFamily="34" charset="-120"/>
-              </a:rPr>
-              <a:t>Guardian</a:t>
-            </a:r>
-            <a:endParaRPr lang="en-US" sz="900" dirty="0"/>
-          </a:p>
-        </p:txBody>
-      </p:sp>
-      <p:sp>
-        <p:nvSpPr>
-          <p:cNvPr id="6" name="Text 4"/>
-          <p:cNvSpPr/>
-          <p:nvPr/>
-        </p:nvSpPr>
-        <p:spPr>
-          <a:xfrm>
-            <a:off x="6858000" y="4754880"/>
-            <a:ext cx="1828800" cy="210312"/>
-          </a:xfrm>
-          <a:prstGeom prst="rect">
-            <a:avLst/>
-          </a:prstGeom>
-          <a:noFill/>
-          <a:ln/>
-        </p:spPr>
-        <p:txBody>
-          <a:bodyPr wrap="square" lIns="0" tIns="0" rIns="0" bIns="0" rtlCol="0" anchor="ctr"/>
-          <a:lstStyle/>
-          <a:p>
-            <a:pPr algn="r" indent="0" marL="0">
-              <a:buNone/>
-            </a:pPr>
-            <a:r>
-              <a:rPr lang="en-US" sz="900" dirty="0">
-                <a:solidFill>
-                  <a:srgbClr val="667085"/>
-                </a:solidFill>
-                <a:latin typeface="Inter" pitchFamily="34" charset="0"/>
-                <a:ea typeface="Inter" pitchFamily="34" charset="-122"/>
-                <a:cs typeface="Inter" pitchFamily="34" charset="-120"/>
-              </a:rPr>
-              <a:t>11 / 12</a:t>
-            </a:r>
-            <a:endParaRPr lang="en-US" sz="900" dirty="0"/>
-          </a:p>
-        </p:txBody>
-      </p:sp>
-      <p:graphicFrame>
-        <p:nvGraphicFramePr>
-          <p:cNvPr id="8" name="Chart 0" descr=""/>
-          <p:cNvGraphicFramePr/>
-          <p:nvPr/>
-        </p:nvGraphicFramePr>
-        <p:xfrm>
-          <a:off x="365760" y="1051560"/>
-          <a:ext cx="5120640" cy="3566160"/>
-        </p:xfrm>
-        <a:graphic xmlns:a="http://schemas.openxmlformats.org/drawingml/2006/main">
-          <a:graphicData uri="http://schemas.openxmlformats.org/drawingml/2006/chart">
-            <c:chart xmlns:c="http://schemas.openxmlformats.org/drawingml/2006/chart" r:id="rId1"/>
-          </a:graphicData>
-        </a:graphic>
-      </p:graphicFrame>
-      <p:sp>
-        <p:nvSpPr>
-          <p:cNvPr id="9" name="Shape 5"/>
-          <p:cNvSpPr/>
-          <p:nvPr/>
-        </p:nvSpPr>
-        <p:spPr>
-          <a:xfrm>
-            <a:off x="5760720" y="1097280"/>
-            <a:ext cx="2926080" cy="1188720"/>
-          </a:xfrm>
-          <a:prstGeom prst="roundRect">
-            <a:avLst>
-              <a:gd name="adj" fmla="val 7692"/>
-            </a:avLst>
-          </a:prstGeom>
-          <a:solidFill>
-            <a:srgbClr val="F4F5F7"/>
-          </a:solidFill>
-          <a:ln w="12700">
-            <a:solidFill>
-              <a:srgbClr val="F4F5F7"/>
-            </a:solidFill>
-            <a:prstDash val="solid"/>
-          </a:ln>
-        </p:spPr>
-      </p:sp>
-      <p:sp>
-        <p:nvSpPr>
-          <p:cNvPr id="10" name="Text 6"/>
-          <p:cNvSpPr/>
-          <p:nvPr/>
-        </p:nvSpPr>
-        <p:spPr>
-          <a:xfrm>
-            <a:off x="5897880" y="1188720"/>
-            <a:ext cx="2651760" cy="548640"/>
-          </a:xfrm>
-          <a:prstGeom prst="rect">
-            <a:avLst/>
-          </a:prstGeom>
-          <a:noFill/>
-          <a:ln/>
-        </p:spPr>
-        <p:txBody>
-          <a:bodyPr wrap="square" lIns="0" tIns="0" rIns="0" bIns="0" rtlCol="0" anchor="ctr"/>
-          <a:lstStyle/>
-          <a:p>
-            <a:pPr indent="0" marL="0">
-              <a:buNone/>
-            </a:pPr>
-            <a:r>
-              <a:rPr lang="en-US" sz="2000" b="1" dirty="0">
-                <a:solidFill>
-                  <a:srgbClr val="101828"/>
-                </a:solidFill>
-                <a:latin typeface="Inter" pitchFamily="34" charset="0"/>
-                <a:ea typeface="Inter" pitchFamily="34" charset="-122"/>
-                <a:cs typeface="Inter" pitchFamily="34" charset="-120"/>
-              </a:rPr>
-              <a:t>0.73 → 0.27 ₽</a:t>
-            </a:r>
-            <a:endParaRPr lang="en-US" sz="2000" dirty="0"/>
-          </a:p>
-        </p:txBody>
-      </p:sp>
-      <p:sp>
-        <p:nvSpPr>
-          <p:cNvPr id="11" name="Text 7"/>
-          <p:cNvSpPr/>
-          <p:nvPr/>
-        </p:nvSpPr>
-        <p:spPr>
-          <a:xfrm>
-            <a:off x="5897880" y="1755648"/>
-            <a:ext cx="2651760" cy="457200"/>
-          </a:xfrm>
-          <a:prstGeom prst="rect">
-            <a:avLst/>
-          </a:prstGeom>
-          <a:noFill/>
-          <a:ln/>
-        </p:spPr>
-        <p:txBody>
-          <a:bodyPr wrap="square" lIns="0" tIns="0" rIns="0" bIns="0" rtlCol="0" anchor="t"/>
-          <a:lstStyle/>
-          <a:p>
-            <a:pPr indent="0" marL="0">
-              <a:buNone/>
-            </a:pPr>
-            <a:r>
-              <a:rPr lang="en-US" sz="1050" dirty="0">
-                <a:solidFill>
-                  <a:srgbClr val="667085"/>
-                </a:solidFill>
-                <a:latin typeface="Inter" pitchFamily="34" charset="0"/>
-                <a:ea typeface="Inter" pitchFamily="34" charset="-122"/>
-                <a:cs typeface="Inter" pitchFamily="34" charset="-120"/>
-              </a:rPr>
-              <a:t>one client's month, 63% less in the second</a:t>
-            </a:r>
-            <a:endParaRPr lang="en-US" sz="1050" dirty="0"/>
-          </a:p>
-        </p:txBody>
-      </p:sp>
-      <p:sp>
-        <p:nvSpPr>
-          <p:cNvPr id="12" name="Shape 8"/>
-          <p:cNvSpPr/>
-          <p:nvPr/>
-        </p:nvSpPr>
-        <p:spPr>
-          <a:xfrm>
-            <a:off x="5760720" y="2423160"/>
-            <a:ext cx="2926080" cy="1188720"/>
-          </a:xfrm>
-          <a:prstGeom prst="roundRect">
-            <a:avLst>
-              <a:gd name="adj" fmla="val 7692"/>
-            </a:avLst>
-          </a:prstGeom>
-          <a:solidFill>
-            <a:srgbClr val="F4F5F7"/>
-          </a:solidFill>
-          <a:ln w="12700">
-            <a:solidFill>
-              <a:srgbClr val="F4F5F7"/>
-            </a:solidFill>
-            <a:prstDash val="solid"/>
-          </a:ln>
-        </p:spPr>
-      </p:sp>
-      <p:sp>
-        <p:nvSpPr>
-          <p:cNvPr id="13" name="Text 9"/>
-          <p:cNvSpPr/>
-          <p:nvPr/>
-        </p:nvSpPr>
-        <p:spPr>
-          <a:xfrm>
-            <a:off x="5897880" y="2514600"/>
-            <a:ext cx="2651760" cy="548640"/>
-          </a:xfrm>
-          <a:prstGeom prst="rect">
-            <a:avLst/>
-          </a:prstGeom>
-          <a:noFill/>
-          <a:ln/>
-        </p:spPr>
-        <p:txBody>
-          <a:bodyPr wrap="square" lIns="0" tIns="0" rIns="0" bIns="0" rtlCol="0" anchor="ctr"/>
-          <a:lstStyle/>
-          <a:p>
-            <a:pPr indent="0" marL="0">
-              <a:buNone/>
-            </a:pPr>
-            <a:r>
-              <a:rPr lang="en-US" sz="2600" b="1" dirty="0">
-                <a:solidFill>
-                  <a:srgbClr val="101828"/>
-                </a:solidFill>
-                <a:latin typeface="Inter" pitchFamily="34" charset="0"/>
-                <a:ea typeface="Inter" pitchFamily="34" charset="-122"/>
-                <a:cs typeface="Inter" pitchFamily="34" charset="-120"/>
-              </a:rPr>
-              <a:t>96.7%</a:t>
-            </a:r>
-            <a:endParaRPr lang="en-US" sz="2600" dirty="0"/>
-          </a:p>
-        </p:txBody>
-      </p:sp>
-      <p:sp>
-        <p:nvSpPr>
-          <p:cNvPr id="14" name="Text 10"/>
-          <p:cNvSpPr/>
-          <p:nvPr/>
-        </p:nvSpPr>
-        <p:spPr>
-          <a:xfrm>
-            <a:off x="5897880" y="3081528"/>
-            <a:ext cx="2651760" cy="457200"/>
-          </a:xfrm>
-          <a:prstGeom prst="rect">
-            <a:avLst/>
-          </a:prstGeom>
-          <a:noFill/>
-          <a:ln/>
-        </p:spPr>
-        <p:txBody>
-          <a:bodyPr wrap="square" lIns="0" tIns="0" rIns="0" bIns="0" rtlCol="0" anchor="t"/>
-          <a:lstStyle/>
-          <a:p>
-            <a:pPr indent="0" marL="0">
-              <a:buNone/>
-            </a:pPr>
-            <a:r>
-              <a:rPr lang="en-US" sz="1050" dirty="0">
-                <a:solidFill>
-                  <a:srgbClr val="667085"/>
-                </a:solidFill>
-                <a:latin typeface="Inter" pitchFamily="34" charset="0"/>
-                <a:ea typeface="Inter" pitchFamily="34" charset="-122"/>
-                <a:cs typeface="Inter" pitchFamily="34" charset="-120"/>
-              </a:rPr>
-              <a:t>of work on levels 0 and 1 (rules, templates, small model)</a:t>
-            </a:r>
-            <a:endParaRPr lang="en-US" sz="1050" dirty="0"/>
-          </a:p>
-        </p:txBody>
-      </p:sp>
-      <p:sp>
-        <p:nvSpPr>
-          <p:cNvPr id="15" name="Shape 11"/>
-          <p:cNvSpPr/>
-          <p:nvPr/>
-        </p:nvSpPr>
-        <p:spPr>
-          <a:xfrm>
-            <a:off x="5760720" y="3749040"/>
-            <a:ext cx="2926080" cy="1188720"/>
-          </a:xfrm>
-          <a:prstGeom prst="roundRect">
-            <a:avLst>
-              <a:gd name="adj" fmla="val 7692"/>
-            </a:avLst>
-          </a:prstGeom>
-          <a:solidFill>
-            <a:srgbClr val="F4F5F7"/>
-          </a:solidFill>
-          <a:ln w="12700">
-            <a:solidFill>
-              <a:srgbClr val="F4F5F7"/>
-            </a:solidFill>
-            <a:prstDash val="solid"/>
-          </a:ln>
-        </p:spPr>
-      </p:sp>
-      <p:sp>
-        <p:nvSpPr>
-          <p:cNvPr id="16" name="Text 12"/>
-          <p:cNvSpPr/>
-          <p:nvPr/>
-        </p:nvSpPr>
-        <p:spPr>
-          <a:xfrm>
-            <a:off x="5897880" y="3840480"/>
-            <a:ext cx="2651760" cy="548640"/>
-          </a:xfrm>
-          <a:prstGeom prst="rect">
-            <a:avLst/>
-          </a:prstGeom>
-          <a:noFill/>
-          <a:ln/>
-        </p:spPr>
-        <p:txBody>
-          <a:bodyPr wrap="square" lIns="0" tIns="0" rIns="0" bIns="0" rtlCol="0" anchor="ctr"/>
-          <a:lstStyle/>
-          <a:p>
-            <a:pPr indent="0" marL="0">
-              <a:buNone/>
-            </a:pPr>
-            <a:r>
-              <a:rPr lang="en-US" sz="2600" b="1" dirty="0">
-                <a:solidFill>
-                  <a:srgbClr val="101828"/>
-                </a:solidFill>
-                <a:latin typeface="Inter" pitchFamily="34" charset="0"/>
-                <a:ea typeface="Inter" pitchFamily="34" charset="-122"/>
-                <a:cs typeface="Inter" pitchFamily="34" charset="-120"/>
-              </a:rPr>
-              <a:t>≈ 270 000 ₽</a:t>
-            </a:r>
-            <a:endParaRPr lang="en-US" sz="2600" dirty="0"/>
-          </a:p>
-        </p:txBody>
-      </p:sp>
-      <p:sp>
-        <p:nvSpPr>
-          <p:cNvPr id="17" name="Text 13"/>
-          <p:cNvSpPr/>
-          <p:nvPr/>
-        </p:nvSpPr>
-        <p:spPr>
-          <a:xfrm>
-            <a:off x="5897880" y="4407408"/>
-            <a:ext cx="2651760" cy="457200"/>
-          </a:xfrm>
-          <a:prstGeom prst="rect">
-            <a:avLst/>
-          </a:prstGeom>
-          <a:noFill/>
-          <a:ln/>
-        </p:spPr>
-        <p:txBody>
-          <a:bodyPr wrap="square" lIns="0" tIns="0" rIns="0" bIns="0" rtlCol="0" anchor="t"/>
-          <a:lstStyle/>
-          <a:p>
-            <a:pPr indent="0" marL="0">
-              <a:buNone/>
-            </a:pPr>
-            <a:r>
-              <a:rPr lang="en-US" sz="1050" dirty="0">
-                <a:solidFill>
-                  <a:srgbClr val="667085"/>
-                </a:solidFill>
-                <a:latin typeface="Inter" pitchFamily="34" charset="0"/>
-                <a:ea typeface="Inter" pitchFamily="34" charset="-122"/>
-                <a:cs typeface="Inter" pitchFamily="34" charset="-120"/>
-              </a:rPr>
-              <a:t>a month for 1 million clients</a:t>
-            </a:r>
-            <a:endParaRPr lang="en-US" sz="1050" dirty="0"/>
-          </a:p>
-        </p:txBody>
-      </p:sp>
-    </p:spTree>
-  </p:cSld>
-  <p:clrMapOvr>
-    <a:masterClrMapping/>
-  </p:clrMapOvr>
-</p:sld>
-</file>
-
 <file path=ppt/slides/slide12.xml><?xml version="1.0" encoding="utf-8"?>
 <p:sld xmlns:a="http://schemas.openxmlformats.org/drawingml/2006/main" xmlns:r="http://schemas.openxmlformats.org/officeDocument/2006/relationships" xmlns:p="http://schemas.openxmlformats.org/presentationml/2006/main">
   <p:cSld name="Slide 12">
@@ -5904,7 +6229,7 @@
                 <a:ea typeface="Inter" pitchFamily="34" charset="-122"/>
                 <a:cs typeface="Inter" pitchFamily="34" charset="-120"/>
               </a:rPr>
-              <a:t>Results and what comes next</a:t>
+              <a:t>Cost: most of the work needs no large model</a:t>
             </a:r>
             <a:endParaRPr lang="en-US" sz="2500" dirty="0"/>
           </a:p>
@@ -6048,22 +6373,38 @@
                 <a:ea typeface="Inter" pitchFamily="34" charset="-122"/>
                 <a:cs typeface="Inter" pitchFamily="34" charset="-120"/>
               </a:rPr>
-              <a:t>12 / 12</a:t>
+              <a:t>12 / 13</a:t>
             </a:r>
             <a:endParaRPr lang="en-US" sz="900" dirty="0"/>
           </a:p>
         </p:txBody>
       </p:sp>
-      <p:sp>
-        <p:nvSpPr>
-          <p:cNvPr id="8" name="Shape 5"/>
-          <p:cNvSpPr/>
-          <p:nvPr/>
-        </p:nvSpPr>
-        <p:spPr>
-          <a:xfrm>
-            <a:off x="457200" y="1188720"/>
-            <a:ext cx="1920240" cy="1188720"/>
+      <p:graphicFrame>
+        <p:nvGraphicFramePr>
+          <p:cNvPr id="8" name="Chart 0" descr=""/>
+          <p:cNvGraphicFramePr/>
+          <p:nvPr/>
+        </p:nvGraphicFramePr>
+        <p:xfrm>
+          <a:off x="365760" y="1051560"/>
+          <a:ext cx="5120640" cy="3566160"/>
+        </p:xfrm>
+        <a:graphic xmlns:a="http://schemas.openxmlformats.org/drawingml/2006/main">
+          <a:graphicData uri="http://schemas.openxmlformats.org/drawingml/2006/chart">
+            <c:chart xmlns:c="http://schemas.openxmlformats.org/drawingml/2006/chart" r:id="rId1"/>
+          </a:graphicData>
+        </a:graphic>
+      </p:graphicFrame>
+      <p:sp>
+        <p:nvSpPr>
+          <p:cNvPr id="9" name="Shape 5"/>
+          <p:cNvSpPr/>
+          <p:nvPr/>
+        </p:nvSpPr>
+        <p:spPr>
+          <a:xfrm>
+            <a:off x="5760720" y="1097280"/>
+            <a:ext cx="2926080" cy="1188720"/>
           </a:xfrm>
           <a:prstGeom prst="roundRect">
             <a:avLst>
@@ -6083,30 +6424,30 @@
       </p:sp>
       <p:sp>
         <p:nvSpPr>
-          <p:cNvPr id="9" name="Text 6"/>
-          <p:cNvSpPr/>
-          <p:nvPr/>
-        </p:nvSpPr>
-        <p:spPr>
-          <a:xfrm>
-            <a:off x="594360" y="1280160"/>
-            <a:ext cx="1645920" cy="548640"/>
-          </a:xfrm>
-          <a:prstGeom prst="rect">
-            <a:avLst/>
-          </a:prstGeom>
-          <a:noFill/>
-          <a:ln/>
-        </p:spPr>
-        <p:txBody>
-          <a:bodyPr wrap="square" lIns="0" tIns="0" rIns="0" bIns="0" rtlCol="0" anchor="ctr"/>
-          <a:lstStyle/>
-          <a:p>
-            <a:pPr indent="0" marL="0">
-              <a:buNone/>
-            </a:pPr>
-            <a:r>
-              <a:rPr lang="en-US" sz="2600" b="1" dirty="0">
+          <p:cNvPr id="10" name="Text 6"/>
+          <p:cNvSpPr/>
+          <p:nvPr/>
+        </p:nvSpPr>
+        <p:spPr>
+          <a:xfrm>
+            <a:off x="5897880" y="1188720"/>
+            <a:ext cx="2651760" cy="548640"/>
+          </a:xfrm>
+          <a:prstGeom prst="rect">
+            <a:avLst/>
+          </a:prstGeom>
+          <a:noFill/>
+          <a:ln/>
+        </p:spPr>
+        <p:txBody>
+          <a:bodyPr wrap="square" lIns="0" tIns="0" rIns="0" bIns="0" rtlCol="0" anchor="ctr"/>
+          <a:lstStyle/>
+          <a:p>
+            <a:pPr indent="0" marL="0">
+              <a:buNone/>
+            </a:pPr>
+            <a:r>
+              <a:rPr lang="en-US" sz="2000" b="1" dirty="0">
                 <a:solidFill>
                   <a:srgbClr val="101828"/>
                 </a:solidFill>
@@ -6114,22 +6455,22 @@
                 <a:ea typeface="Inter" pitchFamily="34" charset="-122"/>
                 <a:cs typeface="Inter" pitchFamily="34" charset="-120"/>
               </a:rPr>
-              <a:t>48/48</a:t>
-            </a:r>
-            <a:endParaRPr lang="en-US" sz="2600" dirty="0"/>
-          </a:p>
-        </p:txBody>
-      </p:sp>
-      <p:sp>
-        <p:nvSpPr>
-          <p:cNvPr id="10" name="Text 7"/>
-          <p:cNvSpPr/>
-          <p:nvPr/>
-        </p:nvSpPr>
-        <p:spPr>
-          <a:xfrm>
-            <a:off x="594360" y="1847088"/>
-            <a:ext cx="1645920" cy="457200"/>
+              <a:t>0.73 → 0.27 ₽</a:t>
+            </a:r>
+            <a:endParaRPr lang="en-US" sz="2000" dirty="0"/>
+          </a:p>
+        </p:txBody>
+      </p:sp>
+      <p:sp>
+        <p:nvSpPr>
+          <p:cNvPr id="11" name="Text 7"/>
+          <p:cNvSpPr/>
+          <p:nvPr/>
+        </p:nvSpPr>
+        <p:spPr>
+          <a:xfrm>
+            <a:off x="5897880" y="1755648"/>
+            <a:ext cx="2651760" cy="457200"/>
           </a:xfrm>
           <a:prstGeom prst="rect">
             <a:avLst/>
@@ -6153,7 +6494,7 @@
                 <a:ea typeface="Inter" pitchFamily="34" charset="-122"/>
                 <a:cs typeface="Inter" pitchFamily="34" charset="-120"/>
               </a:rPr>
-              <a:t>functional tasks, EN / RU / ZH</a:t>
+              <a:t>one client's month, 63% less in the second</a:t>
             </a:r>
             <a:endParaRPr lang="en-US" sz="1050" dirty="0"/>
           </a:p>
@@ -6161,14 +6502,14 @@
       </p:sp>
       <p:sp>
         <p:nvSpPr>
-          <p:cNvPr id="11" name="Shape 8"/>
-          <p:cNvSpPr/>
-          <p:nvPr/>
-        </p:nvSpPr>
-        <p:spPr>
-          <a:xfrm>
-            <a:off x="2560320" y="1188720"/>
-            <a:ext cx="1920240" cy="1188720"/>
+          <p:cNvPr id="12" name="Shape 8"/>
+          <p:cNvSpPr/>
+          <p:nvPr/>
+        </p:nvSpPr>
+        <p:spPr>
+          <a:xfrm>
+            <a:off x="5760720" y="2423160"/>
+            <a:ext cx="2926080" cy="1188720"/>
           </a:xfrm>
           <a:prstGeom prst="roundRect">
             <a:avLst>
@@ -6188,14 +6529,14 @@
       </p:sp>
       <p:sp>
         <p:nvSpPr>
-          <p:cNvPr id="12" name="Text 9"/>
-          <p:cNvSpPr/>
-          <p:nvPr/>
-        </p:nvSpPr>
-        <p:spPr>
-          <a:xfrm>
-            <a:off x="2697480" y="1280160"/>
-            <a:ext cx="1645920" cy="548640"/>
+          <p:cNvPr id="13" name="Text 9"/>
+          <p:cNvSpPr/>
+          <p:nvPr/>
+        </p:nvSpPr>
+        <p:spPr>
+          <a:xfrm>
+            <a:off x="5897880" y="2514600"/>
+            <a:ext cx="2651760" cy="548640"/>
           </a:xfrm>
           <a:prstGeom prst="rect">
             <a:avLst/>
@@ -6219,7 +6560,7 @@
                 <a:ea typeface="Inter" pitchFamily="34" charset="-122"/>
                 <a:cs typeface="Inter" pitchFamily="34" charset="-120"/>
               </a:rPr>
-              <a:t>50/50</a:t>
+              <a:t>97.1%</a:t>
             </a:r>
             <a:endParaRPr lang="en-US" sz="2600" dirty="0"/>
           </a:p>
@@ -6227,14 +6568,14 @@
       </p:sp>
       <p:sp>
         <p:nvSpPr>
-          <p:cNvPr id="13" name="Text 10"/>
-          <p:cNvSpPr/>
-          <p:nvPr/>
-        </p:nvSpPr>
-        <p:spPr>
-          <a:xfrm>
-            <a:off x="2697480" y="1847088"/>
-            <a:ext cx="1645920" cy="457200"/>
+          <p:cNvPr id="14" name="Text 10"/>
+          <p:cNvSpPr/>
+          <p:nvPr/>
+        </p:nvSpPr>
+        <p:spPr>
+          <a:xfrm>
+            <a:off x="5897880" y="3081528"/>
+            <a:ext cx="2651760" cy="457200"/>
           </a:xfrm>
           <a:prstGeom prst="rect">
             <a:avLst/>
@@ -6258,7 +6599,7 @@
                 <a:ea typeface="Inter" pitchFamily="34" charset="-122"/>
                 <a:cs typeface="Inter" pitchFamily="34" charset="-120"/>
               </a:rPr>
-              <a:t>attacks in the evaluation set stopped</a:t>
+              <a:t>of work on levels 0 and 1 (rules, templates, small model)</a:t>
             </a:r>
             <a:endParaRPr lang="en-US" sz="1050" dirty="0"/>
           </a:p>
@@ -6266,14 +6607,14 @@
       </p:sp>
       <p:sp>
         <p:nvSpPr>
-          <p:cNvPr id="14" name="Shape 11"/>
-          <p:cNvSpPr/>
-          <p:nvPr/>
-        </p:nvSpPr>
-        <p:spPr>
-          <a:xfrm>
-            <a:off x="4663440" y="1188720"/>
-            <a:ext cx="1920240" cy="1188720"/>
+          <p:cNvPr id="15" name="Shape 11"/>
+          <p:cNvSpPr/>
+          <p:nvPr/>
+        </p:nvSpPr>
+        <p:spPr>
+          <a:xfrm>
+            <a:off x="5760720" y="3749040"/>
+            <a:ext cx="2926080" cy="1188720"/>
           </a:xfrm>
           <a:prstGeom prst="roundRect">
             <a:avLst>
@@ -6293,6 +6634,536 @@
       </p:sp>
       <p:sp>
         <p:nvSpPr>
+          <p:cNvPr id="16" name="Text 12"/>
+          <p:cNvSpPr/>
+          <p:nvPr/>
+        </p:nvSpPr>
+        <p:spPr>
+          <a:xfrm>
+            <a:off x="5897880" y="3840480"/>
+            <a:ext cx="2651760" cy="548640"/>
+          </a:xfrm>
+          <a:prstGeom prst="rect">
+            <a:avLst/>
+          </a:prstGeom>
+          <a:noFill/>
+          <a:ln/>
+        </p:spPr>
+        <p:txBody>
+          <a:bodyPr wrap="square" lIns="0" tIns="0" rIns="0" bIns="0" rtlCol="0" anchor="ctr"/>
+          <a:lstStyle/>
+          <a:p>
+            <a:pPr indent="0" marL="0">
+              <a:buNone/>
+            </a:pPr>
+            <a:r>
+              <a:rPr lang="en-US" sz="2600" b="1" dirty="0">
+                <a:solidFill>
+                  <a:srgbClr val="101828"/>
+                </a:solidFill>
+                <a:latin typeface="Inter" pitchFamily="34" charset="0"/>
+                <a:ea typeface="Inter" pitchFamily="34" charset="-122"/>
+                <a:cs typeface="Inter" pitchFamily="34" charset="-120"/>
+              </a:rPr>
+              <a:t>≈ 270 000 ₽</a:t>
+            </a:r>
+            <a:endParaRPr lang="en-US" sz="2600" dirty="0"/>
+          </a:p>
+        </p:txBody>
+      </p:sp>
+      <p:sp>
+        <p:nvSpPr>
+          <p:cNvPr id="17" name="Text 13"/>
+          <p:cNvSpPr/>
+          <p:nvPr/>
+        </p:nvSpPr>
+        <p:spPr>
+          <a:xfrm>
+            <a:off x="5897880" y="4407408"/>
+            <a:ext cx="2651760" cy="457200"/>
+          </a:xfrm>
+          <a:prstGeom prst="rect">
+            <a:avLst/>
+          </a:prstGeom>
+          <a:noFill/>
+          <a:ln/>
+        </p:spPr>
+        <p:txBody>
+          <a:bodyPr wrap="square" lIns="0" tIns="0" rIns="0" bIns="0" rtlCol="0" anchor="t"/>
+          <a:lstStyle/>
+          <a:p>
+            <a:pPr indent="0" marL="0">
+              <a:buNone/>
+            </a:pPr>
+            <a:r>
+              <a:rPr lang="en-US" sz="1050" dirty="0">
+                <a:solidFill>
+                  <a:srgbClr val="667085"/>
+                </a:solidFill>
+                <a:latin typeface="Inter" pitchFamily="34" charset="0"/>
+                <a:ea typeface="Inter" pitchFamily="34" charset="-122"/>
+                <a:cs typeface="Inter" pitchFamily="34" charset="-120"/>
+              </a:rPr>
+              <a:t>a month for 1 million clients</a:t>
+            </a:r>
+            <a:endParaRPr lang="en-US" sz="1050" dirty="0"/>
+          </a:p>
+        </p:txBody>
+      </p:sp>
+    </p:spTree>
+  </p:cSld>
+  <p:clrMapOvr>
+    <a:masterClrMapping/>
+  </p:clrMapOvr>
+</p:sld>
+</file>
+
+<file path=ppt/slides/slide13.xml><?xml version="1.0" encoding="utf-8"?>
+<p:sld xmlns:a="http://schemas.openxmlformats.org/drawingml/2006/main" xmlns:r="http://schemas.openxmlformats.org/officeDocument/2006/relationships" xmlns:p="http://schemas.openxmlformats.org/presentationml/2006/main">
+  <p:cSld name="Slide 13">
+    <p:bg>
+      <p:bgPr>
+        <a:solidFill>
+          <a:srgbClr val="FFFFFF"/>
+        </a:solidFill>
+      </p:bgPr>
+    </p:bg>
+    <p:spTree>
+      <p:nvGrpSpPr>
+        <p:cNvPr id="1" name=""/>
+        <p:cNvGrpSpPr/>
+        <p:nvPr/>
+      </p:nvGrpSpPr>
+      <p:grpSpPr>
+        <a:xfrm>
+          <a:off x="0" y="0"/>
+          <a:ext cx="0" cy="0"/>
+          <a:chOff x="0" y="0"/>
+          <a:chExt cx="0" cy="0"/>
+        </a:xfrm>
+      </p:grpSpPr>
+      <p:sp>
+        <p:nvSpPr>
+          <p:cNvPr id="2" name="Text 0"/>
+          <p:cNvSpPr/>
+          <p:nvPr/>
+        </p:nvSpPr>
+        <p:spPr>
+          <a:xfrm>
+            <a:off x="457200" y="384048"/>
+            <a:ext cx="8229600" cy="548640"/>
+          </a:xfrm>
+          <a:prstGeom prst="rect">
+            <a:avLst/>
+          </a:prstGeom>
+          <a:noFill/>
+          <a:ln/>
+        </p:spPr>
+        <p:txBody>
+          <a:bodyPr wrap="square" lIns="0" tIns="0" rIns="0" bIns="0" rtlCol="0" anchor="ctr"/>
+          <a:lstStyle/>
+          <a:p>
+            <a:pPr indent="0" marL="0">
+              <a:buNone/>
+            </a:pPr>
+            <a:r>
+              <a:rPr lang="en-US" sz="2500" b="1" dirty="0">
+                <a:solidFill>
+                  <a:srgbClr val="101828"/>
+                </a:solidFill>
+                <a:latin typeface="Inter" pitchFamily="34" charset="0"/>
+                <a:ea typeface="Inter" pitchFamily="34" charset="-122"/>
+                <a:cs typeface="Inter" pitchFamily="34" charset="-120"/>
+              </a:rPr>
+              <a:t>Results and what comes next</a:t>
+            </a:r>
+            <a:endParaRPr lang="en-US" sz="2500" dirty="0"/>
+          </a:p>
+        </p:txBody>
+      </p:sp>
+      <p:sp>
+        <p:nvSpPr>
+          <p:cNvPr id="3" name="Shape 1"/>
+          <p:cNvSpPr/>
+          <p:nvPr/>
+        </p:nvSpPr>
+        <p:spPr>
+          <a:xfrm>
+            <a:off x="457200" y="4754880"/>
+            <a:ext cx="210312" cy="210312"/>
+          </a:xfrm>
+          <a:prstGeom prst="roundRect">
+            <a:avLst>
+              <a:gd name="adj" fmla="val 22000"/>
+            </a:avLst>
+          </a:prstGeom>
+          <a:solidFill>
+            <a:srgbClr val="C2361F"/>
+          </a:solidFill>
+          <a:ln w="12700">
+            <a:solidFill>
+              <a:srgbClr val="C2361F"/>
+            </a:solidFill>
+            <a:prstDash val="solid"/>
+          </a:ln>
+        </p:spPr>
+      </p:sp>
+      <p:sp>
+        <p:nvSpPr>
+          <p:cNvPr id="4" name="Text 2"/>
+          <p:cNvSpPr/>
+          <p:nvPr/>
+        </p:nvSpPr>
+        <p:spPr>
+          <a:xfrm>
+            <a:off x="457200" y="4754880"/>
+            <a:ext cx="210312" cy="210312"/>
+          </a:xfrm>
+          <a:prstGeom prst="rect">
+            <a:avLst/>
+          </a:prstGeom>
+          <a:noFill/>
+          <a:ln/>
+        </p:spPr>
+        <p:txBody>
+          <a:bodyPr wrap="square" lIns="0" tIns="0" rIns="0" bIns="0" rtlCol="0" anchor="ctr"/>
+          <a:lstStyle/>
+          <a:p>
+            <a:pPr algn="ctr" indent="0" marL="0">
+              <a:buNone/>
+            </a:pPr>
+            <a:r>
+              <a:rPr lang="en-US" sz="920" dirty="0">
+                <a:solidFill>
+                  <a:srgbClr val="FFFFFF"/>
+                </a:solidFill>
+                <a:latin typeface="Noto Sans CJK SC" pitchFamily="34" charset="0"/>
+                <a:ea typeface="Noto Sans CJK SC" pitchFamily="34" charset="-122"/>
+                <a:cs typeface="Noto Sans CJK SC" pitchFamily="34" charset="-120"/>
+              </a:rPr>
+              <a:t>守</a:t>
+            </a:r>
+            <a:endParaRPr lang="en-US" sz="920" dirty="0"/>
+          </a:p>
+        </p:txBody>
+      </p:sp>
+      <p:sp>
+        <p:nvSpPr>
+          <p:cNvPr id="5" name="Text 3"/>
+          <p:cNvSpPr/>
+          <p:nvPr/>
+        </p:nvSpPr>
+        <p:spPr>
+          <a:xfrm>
+            <a:off x="731520" y="4754880"/>
+            <a:ext cx="1828800" cy="210312"/>
+          </a:xfrm>
+          <a:prstGeom prst="rect">
+            <a:avLst/>
+          </a:prstGeom>
+          <a:noFill/>
+          <a:ln/>
+        </p:spPr>
+        <p:txBody>
+          <a:bodyPr wrap="square" lIns="0" tIns="0" rIns="0" bIns="0" rtlCol="0" anchor="ctr"/>
+          <a:lstStyle/>
+          <a:p>
+            <a:pPr indent="0" marL="0">
+              <a:buNone/>
+            </a:pPr>
+            <a:r>
+              <a:rPr lang="en-US" sz="900" b="1" dirty="0">
+                <a:solidFill>
+                  <a:srgbClr val="101828"/>
+                </a:solidFill>
+                <a:latin typeface="Inter" pitchFamily="34" charset="0"/>
+                <a:ea typeface="Inter" pitchFamily="34" charset="-122"/>
+                <a:cs typeface="Inter" pitchFamily="34" charset="-120"/>
+              </a:rPr>
+              <a:t>Guardian</a:t>
+            </a:r>
+            <a:endParaRPr lang="en-US" sz="900" dirty="0"/>
+          </a:p>
+        </p:txBody>
+      </p:sp>
+      <p:sp>
+        <p:nvSpPr>
+          <p:cNvPr id="6" name="Text 4"/>
+          <p:cNvSpPr/>
+          <p:nvPr/>
+        </p:nvSpPr>
+        <p:spPr>
+          <a:xfrm>
+            <a:off x="6858000" y="4754880"/>
+            <a:ext cx="1828800" cy="210312"/>
+          </a:xfrm>
+          <a:prstGeom prst="rect">
+            <a:avLst/>
+          </a:prstGeom>
+          <a:noFill/>
+          <a:ln/>
+        </p:spPr>
+        <p:txBody>
+          <a:bodyPr wrap="square" lIns="0" tIns="0" rIns="0" bIns="0" rtlCol="0" anchor="ctr"/>
+          <a:lstStyle/>
+          <a:p>
+            <a:pPr algn="r" indent="0" marL="0">
+              <a:buNone/>
+            </a:pPr>
+            <a:r>
+              <a:rPr lang="en-US" sz="900" dirty="0">
+                <a:solidFill>
+                  <a:srgbClr val="667085"/>
+                </a:solidFill>
+                <a:latin typeface="Inter" pitchFamily="34" charset="0"/>
+                <a:ea typeface="Inter" pitchFamily="34" charset="-122"/>
+                <a:cs typeface="Inter" pitchFamily="34" charset="-120"/>
+              </a:rPr>
+              <a:t>13 / 13</a:t>
+            </a:r>
+            <a:endParaRPr lang="en-US" sz="900" dirty="0"/>
+          </a:p>
+        </p:txBody>
+      </p:sp>
+      <p:sp>
+        <p:nvSpPr>
+          <p:cNvPr id="8" name="Shape 5"/>
+          <p:cNvSpPr/>
+          <p:nvPr/>
+        </p:nvSpPr>
+        <p:spPr>
+          <a:xfrm>
+            <a:off x="457200" y="1188720"/>
+            <a:ext cx="1920240" cy="1188720"/>
+          </a:xfrm>
+          <a:prstGeom prst="roundRect">
+            <a:avLst>
+              <a:gd name="adj" fmla="val 7692"/>
+            </a:avLst>
+          </a:prstGeom>
+          <a:solidFill>
+            <a:srgbClr val="F4F5F7"/>
+          </a:solidFill>
+          <a:ln w="12700">
+            <a:solidFill>
+              <a:srgbClr val="F4F5F7"/>
+            </a:solidFill>
+            <a:prstDash val="solid"/>
+          </a:ln>
+        </p:spPr>
+      </p:sp>
+      <p:sp>
+        <p:nvSpPr>
+          <p:cNvPr id="9" name="Text 6"/>
+          <p:cNvSpPr/>
+          <p:nvPr/>
+        </p:nvSpPr>
+        <p:spPr>
+          <a:xfrm>
+            <a:off x="594360" y="1280160"/>
+            <a:ext cx="1645920" cy="548640"/>
+          </a:xfrm>
+          <a:prstGeom prst="rect">
+            <a:avLst/>
+          </a:prstGeom>
+          <a:noFill/>
+          <a:ln/>
+        </p:spPr>
+        <p:txBody>
+          <a:bodyPr wrap="square" lIns="0" tIns="0" rIns="0" bIns="0" rtlCol="0" anchor="ctr"/>
+          <a:lstStyle/>
+          <a:p>
+            <a:pPr indent="0" marL="0">
+              <a:buNone/>
+            </a:pPr>
+            <a:r>
+              <a:rPr lang="en-US" sz="2600" b="1" dirty="0">
+                <a:solidFill>
+                  <a:srgbClr val="101828"/>
+                </a:solidFill>
+                <a:latin typeface="Inter" pitchFamily="34" charset="0"/>
+                <a:ea typeface="Inter" pitchFamily="34" charset="-122"/>
+                <a:cs typeface="Inter" pitchFamily="34" charset="-120"/>
+              </a:rPr>
+              <a:t>48/48</a:t>
+            </a:r>
+            <a:endParaRPr lang="en-US" sz="2600" dirty="0"/>
+          </a:p>
+        </p:txBody>
+      </p:sp>
+      <p:sp>
+        <p:nvSpPr>
+          <p:cNvPr id="10" name="Text 7"/>
+          <p:cNvSpPr/>
+          <p:nvPr/>
+        </p:nvSpPr>
+        <p:spPr>
+          <a:xfrm>
+            <a:off x="594360" y="1847088"/>
+            <a:ext cx="1645920" cy="457200"/>
+          </a:xfrm>
+          <a:prstGeom prst="rect">
+            <a:avLst/>
+          </a:prstGeom>
+          <a:noFill/>
+          <a:ln/>
+        </p:spPr>
+        <p:txBody>
+          <a:bodyPr wrap="square" lIns="0" tIns="0" rIns="0" bIns="0" rtlCol="0" anchor="t"/>
+          <a:lstStyle/>
+          <a:p>
+            <a:pPr indent="0" marL="0">
+              <a:buNone/>
+            </a:pPr>
+            <a:r>
+              <a:rPr lang="en-US" sz="1050" dirty="0">
+                <a:solidFill>
+                  <a:srgbClr val="667085"/>
+                </a:solidFill>
+                <a:latin typeface="Inter" pitchFamily="34" charset="0"/>
+                <a:ea typeface="Inter" pitchFamily="34" charset="-122"/>
+                <a:cs typeface="Inter" pitchFamily="34" charset="-120"/>
+              </a:rPr>
+              <a:t>functional tasks, EN / RU / ZH</a:t>
+            </a:r>
+            <a:endParaRPr lang="en-US" sz="1050" dirty="0"/>
+          </a:p>
+        </p:txBody>
+      </p:sp>
+      <p:sp>
+        <p:nvSpPr>
+          <p:cNvPr id="11" name="Shape 8"/>
+          <p:cNvSpPr/>
+          <p:nvPr/>
+        </p:nvSpPr>
+        <p:spPr>
+          <a:xfrm>
+            <a:off x="2560320" y="1188720"/>
+            <a:ext cx="1920240" cy="1188720"/>
+          </a:xfrm>
+          <a:prstGeom prst="roundRect">
+            <a:avLst>
+              <a:gd name="adj" fmla="val 7692"/>
+            </a:avLst>
+          </a:prstGeom>
+          <a:solidFill>
+            <a:srgbClr val="F4F5F7"/>
+          </a:solidFill>
+          <a:ln w="12700">
+            <a:solidFill>
+              <a:srgbClr val="F4F5F7"/>
+            </a:solidFill>
+            <a:prstDash val="solid"/>
+          </a:ln>
+        </p:spPr>
+      </p:sp>
+      <p:sp>
+        <p:nvSpPr>
+          <p:cNvPr id="12" name="Text 9"/>
+          <p:cNvSpPr/>
+          <p:nvPr/>
+        </p:nvSpPr>
+        <p:spPr>
+          <a:xfrm>
+            <a:off x="2697480" y="1280160"/>
+            <a:ext cx="1645920" cy="548640"/>
+          </a:xfrm>
+          <a:prstGeom prst="rect">
+            <a:avLst/>
+          </a:prstGeom>
+          <a:noFill/>
+          <a:ln/>
+        </p:spPr>
+        <p:txBody>
+          <a:bodyPr wrap="square" lIns="0" tIns="0" rIns="0" bIns="0" rtlCol="0" anchor="ctr"/>
+          <a:lstStyle/>
+          <a:p>
+            <a:pPr indent="0" marL="0">
+              <a:buNone/>
+            </a:pPr>
+            <a:r>
+              <a:rPr lang="en-US" sz="2600" b="1" dirty="0">
+                <a:solidFill>
+                  <a:srgbClr val="101828"/>
+                </a:solidFill>
+                <a:latin typeface="Inter" pitchFamily="34" charset="0"/>
+                <a:ea typeface="Inter" pitchFamily="34" charset="-122"/>
+                <a:cs typeface="Inter" pitchFamily="34" charset="-120"/>
+              </a:rPr>
+              <a:t>50/50</a:t>
+            </a:r>
+            <a:endParaRPr lang="en-US" sz="2600" dirty="0"/>
+          </a:p>
+        </p:txBody>
+      </p:sp>
+      <p:sp>
+        <p:nvSpPr>
+          <p:cNvPr id="13" name="Text 10"/>
+          <p:cNvSpPr/>
+          <p:nvPr/>
+        </p:nvSpPr>
+        <p:spPr>
+          <a:xfrm>
+            <a:off x="2697480" y="1847088"/>
+            <a:ext cx="1645920" cy="457200"/>
+          </a:xfrm>
+          <a:prstGeom prst="rect">
+            <a:avLst/>
+          </a:prstGeom>
+          <a:noFill/>
+          <a:ln/>
+        </p:spPr>
+        <p:txBody>
+          <a:bodyPr wrap="square" lIns="0" tIns="0" rIns="0" bIns="0" rtlCol="0" anchor="t"/>
+          <a:lstStyle/>
+          <a:p>
+            <a:pPr indent="0" marL="0">
+              <a:buNone/>
+            </a:pPr>
+            <a:r>
+              <a:rPr lang="en-US" sz="1050" dirty="0">
+                <a:solidFill>
+                  <a:srgbClr val="667085"/>
+                </a:solidFill>
+                <a:latin typeface="Inter" pitchFamily="34" charset="0"/>
+                <a:ea typeface="Inter" pitchFamily="34" charset="-122"/>
+                <a:cs typeface="Inter" pitchFamily="34" charset="-120"/>
+              </a:rPr>
+              <a:t>attacks in the evaluation set stopped</a:t>
+            </a:r>
+            <a:endParaRPr lang="en-US" sz="1050" dirty="0"/>
+          </a:p>
+        </p:txBody>
+      </p:sp>
+      <p:sp>
+        <p:nvSpPr>
+          <p:cNvPr id="14" name="Shape 11"/>
+          <p:cNvSpPr/>
+          <p:nvPr/>
+        </p:nvSpPr>
+        <p:spPr>
+          <a:xfrm>
+            <a:off x="4663440" y="1188720"/>
+            <a:ext cx="1920240" cy="1188720"/>
+          </a:xfrm>
+          <a:prstGeom prst="roundRect">
+            <a:avLst>
+              <a:gd name="adj" fmla="val 7692"/>
+            </a:avLst>
+          </a:prstGeom>
+          <a:solidFill>
+            <a:srgbClr val="F4F5F7"/>
+          </a:solidFill>
+          <a:ln w="12700">
+            <a:solidFill>
+              <a:srgbClr val="F4F5F7"/>
+            </a:solidFill>
+            <a:prstDash val="solid"/>
+          </a:ln>
+        </p:spPr>
+      </p:sp>
+      <p:sp>
+        <p:nvSpPr>
           <p:cNvPr id="15" name="Text 12"/>
           <p:cNvSpPr/>
           <p:nvPr/>
@@ -6324,7 +7195,7 @@
                 <a:ea typeface="Inter" pitchFamily="34" charset="-122"/>
                 <a:cs typeface="Inter" pitchFamily="34" charset="-120"/>
               </a:rPr>
-              <a:t>292</a:t>
+              <a:t>347</a:t>
             </a:r>
             <a:endParaRPr lang="en-US" sz="2600" dirty="0"/>
           </a:p>
@@ -6911,7 +7782,7 @@
                 <a:ea typeface="Inter" pitchFamily="34" charset="-122"/>
                 <a:cs typeface="Inter" pitchFamily="34" charset="-120"/>
               </a:rPr>
-              <a:t>2 / 12</a:t>
+              <a:t>2 / 13</a:t>
             </a:r>
             <a:endParaRPr lang="en-US" sz="900" dirty="0"/>
           </a:p>
@@ -7699,7 +8570,7 @@
                 <a:ea typeface="Inter" pitchFamily="34" charset="-122"/>
                 <a:cs typeface="Inter" pitchFamily="34" charset="-120"/>
               </a:rPr>
-              <a:t>3 / 12</a:t>
+              <a:t>3 / 13</a:t>
             </a:r>
             <a:endParaRPr lang="en-US" sz="900" dirty="0"/>
           </a:p>
@@ -8385,7 +9256,7 @@
                 <a:ea typeface="Inter" pitchFamily="34" charset="-122"/>
                 <a:cs typeface="Inter" pitchFamily="34" charset="-120"/>
               </a:rPr>
-              <a:t>4 / 12</a:t>
+              <a:t>4 / 13</a:t>
             </a:r>
             <a:endParaRPr lang="en-US" sz="900" dirty="0"/>
           </a:p>
@@ -9864,7 +10735,7 @@
                 <a:ea typeface="Inter" pitchFamily="34" charset="-122"/>
                 <a:cs typeface="Inter" pitchFamily="34" charset="-120"/>
               </a:rPr>
-              <a:t>548 ₽ </a:t>
+              <a:t>797 ₽ </a:t>
             </a:r>
             <a:pPr indent="0" marL="0">
               <a:buNone/>
@@ -9917,7 +10788,7 @@
                 <a:ea typeface="Inter" pitchFamily="34" charset="-122"/>
                 <a:cs typeface="Inter" pitchFamily="34" charset="-120"/>
               </a:rPr>
-              <a:t>10 </a:t>
+              <a:t>11 </a:t>
             </a:r>
             <a:pPr indent="0" marL="0">
               <a:buNone/>
@@ -9970,7 +10841,7 @@
                 <a:ea typeface="Inter" pitchFamily="34" charset="-122"/>
                 <a:cs typeface="Inter" pitchFamily="34" charset="-120"/>
               </a:rPr>
-              <a:t>11 </a:t>
+              <a:t>12 </a:t>
             </a:r>
             <a:pPr indent="0" marL="0">
               <a:buNone/>
@@ -10023,7 +10894,7 @@
                 <a:ea typeface="Inter" pitchFamily="34" charset="-122"/>
                 <a:cs typeface="Inter" pitchFamily="34" charset="-120"/>
               </a:rPr>
-              <a:t>2 </a:t>
+              <a:t>4 </a:t>
             </a:r>
             <a:pPr indent="0" marL="0">
               <a:buNone/>
@@ -10076,7 +10947,7 @@
                 <a:ea typeface="Inter" pitchFamily="34" charset="-122"/>
                 <a:cs typeface="Inter" pitchFamily="34" charset="-120"/>
               </a:rPr>
-              <a:t>292 </a:t>
+              <a:t>347 </a:t>
             </a:r>
             <a:pPr indent="0" marL="0">
               <a:buNone/>
@@ -10305,7 +11176,7 @@
                 <a:ea typeface="Inter" pitchFamily="34" charset="-122"/>
                 <a:cs typeface="Inter" pitchFamily="34" charset="-120"/>
               </a:rPr>
-              <a:t>5 / 12</a:t>
+              <a:t>5 / 13</a:t>
             </a:r>
             <a:endParaRPr lang="en-US" sz="900" dirty="0"/>
           </a:p>
@@ -10694,7 +11565,7 @@
                 <a:ea typeface="Inter" pitchFamily="34" charset="-122"/>
                 <a:cs typeface="Inter" pitchFamily="34" charset="-120"/>
               </a:rPr>
-              <a:t>6 / 12</a:t>
+              <a:t>6 / 13</a:t>
             </a:r>
             <a:endParaRPr lang="en-US" sz="900" dirty="0"/>
           </a:p>
@@ -10933,7 +11804,7 @@
                 <a:ea typeface="Inter" pitchFamily="34" charset="-122"/>
                 <a:cs typeface="Inter" pitchFamily="34" charset="-120"/>
               </a:rPr>
-              <a:t>7 / 12</a:t>
+              <a:t>7 / 13</a:t>
             </a:r>
             <a:endParaRPr lang="en-US" sz="900" dirty="0"/>
           </a:p>
@@ -12722,7 +13593,7 @@
                 <a:ea typeface="Inter" pitchFamily="34" charset="-122"/>
                 <a:cs typeface="Inter" pitchFamily="34" charset="-120"/>
               </a:rPr>
-              <a:t>Budget and payee risk: measured, not claimed</a:t>
+              <a:t>Earned trust: rewards and penalties</a:t>
             </a:r>
             <a:endParaRPr lang="en-US" sz="2500" dirty="0"/>
           </a:p>
@@ -12866,7 +13737,7 @@
                 <a:ea typeface="Inter" pitchFamily="34" charset="-122"/>
                 <a:cs typeface="Inter" pitchFamily="34" charset="-120"/>
               </a:rPr>
-              <a:t>8 / 12</a:t>
+              <a:t>8 / 13</a:t>
             </a:r>
             <a:endParaRPr lang="en-US" sz="900" dirty="0"/>
           </a:p>
@@ -12880,7 +13751,7 @@
         </p:nvSpPr>
         <p:spPr>
           <a:xfrm>
-            <a:off x="457200" y="1097280"/>
+            <a:off x="457200" y="1051560"/>
             <a:ext cx="4023360" cy="365760"/>
           </a:xfrm>
           <a:prstGeom prst="rect">
@@ -12905,7 +13776,7 @@
                 <a:ea typeface="Inter" pitchFamily="34" charset="-122"/>
                 <a:cs typeface="Inter" pitchFamily="34" charset="-120"/>
               </a:rPr>
-              <a:t>C8 budget</a:t>
+              <a:t>Per kind of task</a:t>
             </a:r>
             <a:endParaRPr lang="en-US" sz="1700" dirty="0"/>
           </a:p>
@@ -12913,13 +13784,359 @@
       </p:sp>
       <p:sp>
         <p:nvSpPr>
-          <p:cNvPr id="9" name="Text 6"/>
-          <p:cNvSpPr/>
-          <p:nvPr/>
-        </p:nvSpPr>
-        <p:spPr>
-          <a:xfrm>
-            <a:off x="4663440" y="1097280"/>
+          <p:cNvPr id="9" name="Shape 6"/>
+          <p:cNvSpPr/>
+          <p:nvPr/>
+        </p:nvSpPr>
+        <p:spPr>
+          <a:xfrm>
+            <a:off x="457200" y="1508760"/>
+            <a:ext cx="2651760" cy="457200"/>
+          </a:xfrm>
+          <a:prstGeom prst="roundRect">
+            <a:avLst>
+              <a:gd name="adj" fmla="val 16000"/>
+            </a:avLst>
+          </a:prstGeom>
+          <a:solidFill>
+            <a:srgbClr val="E8F6F3"/>
+          </a:solidFill>
+          <a:ln w="12700">
+            <a:solidFill>
+              <a:srgbClr val="B7E4D9"/>
+            </a:solidFill>
+            <a:prstDash val="solid"/>
+          </a:ln>
+        </p:spPr>
+      </p:sp>
+      <p:sp>
+        <p:nvSpPr>
+          <p:cNvPr id="10" name="Text 7"/>
+          <p:cNvSpPr/>
+          <p:nvPr/>
+        </p:nvSpPr>
+        <p:spPr>
+          <a:xfrm>
+            <a:off x="566928" y="1508760"/>
+            <a:ext cx="2514600" cy="457200"/>
+          </a:xfrm>
+          <a:prstGeom prst="rect">
+            <a:avLst/>
+          </a:prstGeom>
+          <a:noFill/>
+          <a:ln/>
+        </p:spPr>
+        <p:txBody>
+          <a:bodyPr wrap="square" lIns="0" tIns="0" rIns="0" bIns="0" rtlCol="0" anchor="ctr"/>
+          <a:lstStyle/>
+          <a:p>
+            <a:pPr indent="0" marL="0">
+              <a:buNone/>
+            </a:pPr>
+            <a:r>
+              <a:rPr lang="en-US" sz="1100" b="1" dirty="0">
+                <a:solidFill>
+                  <a:srgbClr val="101828"/>
+                </a:solidFill>
+                <a:latin typeface="Inter" pitchFamily="34" charset="0"/>
+                <a:ea typeface="Inter" pitchFamily="34" charset="-122"/>
+                <a:cs typeface="Inter" pitchFamily="34" charset="-120"/>
+              </a:rPr>
+              <a:t>Level 2  </a:t>
+            </a:r>
+            <a:pPr indent="0" marL="0">
+              <a:buNone/>
+            </a:pPr>
+            <a:r>
+              <a:rPr lang="en-US" sz="1100" dirty="0">
+                <a:solidFill>
+                  <a:srgbClr val="101828"/>
+                </a:solidFill>
+                <a:latin typeface="Inter" pitchFamily="34" charset="0"/>
+                <a:ea typeface="Inter" pitchFamily="34" charset="-122"/>
+                <a:cs typeface="Inter" pitchFamily="34" charset="-120"/>
+              </a:rPr>
+              <a:t>alone up to the permission's cap</a:t>
+            </a:r>
+            <a:endParaRPr lang="en-US" sz="1100" dirty="0"/>
+          </a:p>
+        </p:txBody>
+      </p:sp>
+      <p:sp>
+        <p:nvSpPr>
+          <p:cNvPr id="11" name="Shape 8"/>
+          <p:cNvSpPr/>
+          <p:nvPr/>
+        </p:nvSpPr>
+        <p:spPr>
+          <a:xfrm>
+            <a:off x="457200" y="2057400"/>
+            <a:ext cx="2651760" cy="457200"/>
+          </a:xfrm>
+          <a:prstGeom prst="roundRect">
+            <a:avLst>
+              <a:gd name="adj" fmla="val 16000"/>
+            </a:avLst>
+          </a:prstGeom>
+          <a:solidFill>
+            <a:srgbClr val="EEF4FF"/>
+          </a:solidFill>
+          <a:ln w="12700">
+            <a:solidFill>
+              <a:srgbClr val="C7D7FE"/>
+            </a:solidFill>
+            <a:prstDash val="solid"/>
+          </a:ln>
+        </p:spPr>
+      </p:sp>
+      <p:sp>
+        <p:nvSpPr>
+          <p:cNvPr id="12" name="Text 9"/>
+          <p:cNvSpPr/>
+          <p:nvPr/>
+        </p:nvSpPr>
+        <p:spPr>
+          <a:xfrm>
+            <a:off x="566928" y="2057400"/>
+            <a:ext cx="2514600" cy="457200"/>
+          </a:xfrm>
+          <a:prstGeom prst="rect">
+            <a:avLst/>
+          </a:prstGeom>
+          <a:noFill/>
+          <a:ln/>
+        </p:spPr>
+        <p:txBody>
+          <a:bodyPr wrap="square" lIns="0" tIns="0" rIns="0" bIns="0" rtlCol="0" anchor="ctr"/>
+          <a:lstStyle/>
+          <a:p>
+            <a:pPr indent="0" marL="0">
+              <a:buNone/>
+            </a:pPr>
+            <a:r>
+              <a:rPr lang="en-US" sz="1100" b="1" dirty="0">
+                <a:solidFill>
+                  <a:srgbClr val="101828"/>
+                </a:solidFill>
+                <a:latin typeface="Inter" pitchFamily="34" charset="0"/>
+                <a:ea typeface="Inter" pitchFamily="34" charset="-122"/>
+                <a:cs typeface="Inter" pitchFamily="34" charset="-120"/>
+              </a:rPr>
+              <a:t>Level 1  </a:t>
+            </a:r>
+            <a:pPr indent="0" marL="0">
+              <a:buNone/>
+            </a:pPr>
+            <a:r>
+              <a:rPr lang="en-US" sz="1100" dirty="0">
+                <a:solidFill>
+                  <a:srgbClr val="101828"/>
+                </a:solidFill>
+                <a:latin typeface="Inter" pitchFamily="34" charset="0"/>
+                <a:ea typeface="Inter" pitchFamily="34" charset="-122"/>
+                <a:cs typeface="Inter" pitchFamily="34" charset="-120"/>
+              </a:rPr>
+              <a:t>alone up to 1 000 ₽ · the start</a:t>
+            </a:r>
+            <a:endParaRPr lang="en-US" sz="1100" dirty="0"/>
+          </a:p>
+        </p:txBody>
+      </p:sp>
+      <p:sp>
+        <p:nvSpPr>
+          <p:cNvPr id="13" name="Shape 10"/>
+          <p:cNvSpPr/>
+          <p:nvPr/>
+        </p:nvSpPr>
+        <p:spPr>
+          <a:xfrm>
+            <a:off x="457200" y="2606040"/>
+            <a:ext cx="2651760" cy="457200"/>
+          </a:xfrm>
+          <a:prstGeom prst="roundRect">
+            <a:avLst>
+              <a:gd name="adj" fmla="val 16000"/>
+            </a:avLst>
+          </a:prstGeom>
+          <a:solidFill>
+            <a:srgbClr val="FFF6E5"/>
+          </a:solidFill>
+          <a:ln w="12700">
+            <a:solidFill>
+              <a:srgbClr val="FEDF89"/>
+            </a:solidFill>
+            <a:prstDash val="solid"/>
+          </a:ln>
+        </p:spPr>
+      </p:sp>
+      <p:sp>
+        <p:nvSpPr>
+          <p:cNvPr id="14" name="Text 11"/>
+          <p:cNvSpPr/>
+          <p:nvPr/>
+        </p:nvSpPr>
+        <p:spPr>
+          <a:xfrm>
+            <a:off x="566928" y="2606040"/>
+            <a:ext cx="2514600" cy="457200"/>
+          </a:xfrm>
+          <a:prstGeom prst="rect">
+            <a:avLst/>
+          </a:prstGeom>
+          <a:noFill/>
+          <a:ln/>
+        </p:spPr>
+        <p:txBody>
+          <a:bodyPr wrap="square" lIns="0" tIns="0" rIns="0" bIns="0" rtlCol="0" anchor="ctr"/>
+          <a:lstStyle/>
+          <a:p>
+            <a:pPr indent="0" marL="0">
+              <a:buNone/>
+            </a:pPr>
+            <a:r>
+              <a:rPr lang="en-US" sz="1100" b="1" dirty="0">
+                <a:solidFill>
+                  <a:srgbClr val="101828"/>
+                </a:solidFill>
+                <a:latin typeface="Inter" pitchFamily="34" charset="0"/>
+                <a:ea typeface="Inter" pitchFamily="34" charset="-122"/>
+                <a:cs typeface="Inter" pitchFamily="34" charset="-120"/>
+              </a:rPr>
+              <a:t>Level 0  </a:t>
+            </a:r>
+            <a:pPr indent="0" marL="0">
+              <a:buNone/>
+            </a:pPr>
+            <a:r>
+              <a:rPr lang="en-US" sz="1100" dirty="0">
+                <a:solidFill>
+                  <a:srgbClr val="101828"/>
+                </a:solidFill>
+                <a:latin typeface="Inter" pitchFamily="34" charset="0"/>
+                <a:ea typeface="Inter" pitchFamily="34" charset="-122"/>
+                <a:cs typeface="Inter" pitchFamily="34" charset="-120"/>
+              </a:rPr>
+              <a:t>a card for everything</a:t>
+            </a:r>
+            <a:endParaRPr lang="en-US" sz="1100" dirty="0"/>
+          </a:p>
+        </p:txBody>
+      </p:sp>
+      <p:sp>
+        <p:nvSpPr>
+          <p:cNvPr id="15" name="Text 12"/>
+          <p:cNvSpPr/>
+          <p:nvPr/>
+        </p:nvSpPr>
+        <p:spPr>
+          <a:xfrm>
+            <a:off x="3246120" y="1508760"/>
+            <a:ext cx="1325880" cy="640080"/>
+          </a:xfrm>
+          <a:prstGeom prst="rect">
+            <a:avLst/>
+          </a:prstGeom>
+          <a:noFill/>
+          <a:ln/>
+        </p:spPr>
+        <p:txBody>
+          <a:bodyPr wrap="square" lIns="0" tIns="0" rIns="0" bIns="0" rtlCol="0" anchor="t"/>
+          <a:lstStyle/>
+          <a:p>
+            <a:pPr indent="0" marL="0">
+              <a:buNone/>
+            </a:pPr>
+            <a:r>
+              <a:rPr lang="en-US" sz="1050" b="1" dirty="0">
+                <a:solidFill>
+                  <a:srgbClr val="067647"/>
+                </a:solidFill>
+                <a:latin typeface="Inter" pitchFamily="34" charset="0"/>
+                <a:ea typeface="Inter" pitchFamily="34" charset="-122"/>
+                <a:cs typeface="Inter" pitchFamily="34" charset="-120"/>
+              </a:rPr>
+              <a:t>Up </a:t>
+            </a:r>
+            <a:pPr indent="0" marL="0">
+              <a:buNone/>
+            </a:pPr>
+            <a:r>
+              <a:rPr lang="en-US" sz="1050" dirty="0">
+                <a:solidFill>
+                  <a:srgbClr val="101828"/>
+                </a:solidFill>
+                <a:latin typeface="Inter" pitchFamily="34" charset="0"/>
+                <a:ea typeface="Inter" pitchFamily="34" charset="-122"/>
+                <a:cs typeface="Inter" pitchFamily="34" charset="-120"/>
+              </a:rPr>
+              <a:t>after 5 verified results in a row</a:t>
+            </a:r>
+            <a:endParaRPr lang="en-US" sz="1050" dirty="0"/>
+          </a:p>
+        </p:txBody>
+      </p:sp>
+      <p:sp>
+        <p:nvSpPr>
+          <p:cNvPr id="16" name="Text 13"/>
+          <p:cNvSpPr/>
+          <p:nvPr/>
+        </p:nvSpPr>
+        <p:spPr>
+          <a:xfrm>
+            <a:off x="3246120" y="2240280"/>
+            <a:ext cx="1325880" cy="731520"/>
+          </a:xfrm>
+          <a:prstGeom prst="rect">
+            <a:avLst/>
+          </a:prstGeom>
+          <a:noFill/>
+          <a:ln/>
+        </p:spPr>
+        <p:txBody>
+          <a:bodyPr wrap="square" lIns="0" tIns="0" rIns="0" bIns="0" rtlCol="0" anchor="t"/>
+          <a:lstStyle/>
+          <a:p>
+            <a:pPr indent="0" marL="0">
+              <a:buNone/>
+            </a:pPr>
+            <a:r>
+              <a:rPr lang="en-US" sz="1050" b="1" dirty="0">
+                <a:solidFill>
+                  <a:srgbClr val="B42318"/>
+                </a:solidFill>
+                <a:latin typeface="Inter" pitchFamily="34" charset="0"/>
+                <a:ea typeface="Inter" pitchFamily="34" charset="-122"/>
+                <a:cs typeface="Inter" pitchFamily="34" charset="-120"/>
+              </a:rPr>
+              <a:t>Down </a:t>
+            </a:r>
+            <a:pPr indent="0" marL="0">
+              <a:buNone/>
+            </a:pPr>
+            <a:r>
+              <a:rPr lang="en-US" sz="1050" dirty="0">
+                <a:solidFill>
+                  <a:srgbClr val="101828"/>
+                </a:solidFill>
+                <a:latin typeface="Inter" pitchFamily="34" charset="0"/>
+                <a:ea typeface="Inter" pitchFamily="34" charset="-122"/>
+                <a:cs typeface="Inter" pitchFamily="34" charset="-120"/>
+              </a:rPr>
+              <a:t>one level per mistake; to 0 on a scope violation</a:t>
+            </a:r>
+            <a:endParaRPr lang="en-US" sz="1050" dirty="0"/>
+          </a:p>
+        </p:txBody>
+      </p:sp>
+      <p:sp>
+        <p:nvSpPr>
+          <p:cNvPr id="17" name="Text 14"/>
+          <p:cNvSpPr/>
+          <p:nvPr/>
+        </p:nvSpPr>
+        <p:spPr>
+          <a:xfrm>
+            <a:off x="4663440" y="1051560"/>
             <a:ext cx="4023360" cy="365760"/>
           </a:xfrm>
           <a:prstGeom prst="rect">
@@ -12944,7 +14161,7 @@
                 <a:ea typeface="Inter" pitchFamily="34" charset="-122"/>
                 <a:cs typeface="Inter" pitchFamily="34" charset="-120"/>
               </a:rPr>
-              <a:t>C10 payee risk on the transfer graph</a:t>
+              <a:t>Per agent: role, model, prompt hash</a:t>
             </a:r>
             <a:endParaRPr lang="en-US" sz="1700" dirty="0"/>
           </a:p>
@@ -12952,13 +14169,445 @@
       </p:sp>
       <p:sp>
         <p:nvSpPr>
-          <p:cNvPr id="10" name="Shape 7"/>
-          <p:cNvSpPr/>
-          <p:nvPr/>
-        </p:nvSpPr>
-        <p:spPr>
-          <a:xfrm>
-            <a:off x="457200" y="1554480"/>
+          <p:cNvPr id="18" name="Shape 15"/>
+          <p:cNvSpPr/>
+          <p:nvPr/>
+        </p:nvSpPr>
+        <p:spPr>
+          <a:xfrm>
+            <a:off x="4663440" y="1508760"/>
+            <a:ext cx="1188720" cy="868680"/>
+          </a:xfrm>
+          <a:prstGeom prst="roundRect">
+            <a:avLst>
+              <a:gd name="adj" fmla="val 8421"/>
+            </a:avLst>
+          </a:prstGeom>
+          <a:solidFill>
+            <a:srgbClr val="FFFFFF"/>
+          </a:solidFill>
+          <a:ln w="12700">
+            <a:solidFill>
+              <a:srgbClr val="E4E7EC"/>
+            </a:solidFill>
+            <a:prstDash val="solid"/>
+          </a:ln>
+        </p:spPr>
+      </p:sp>
+      <p:sp>
+        <p:nvSpPr>
+          <p:cNvPr id="19" name="Text 16"/>
+          <p:cNvSpPr/>
+          <p:nvPr/>
+        </p:nvSpPr>
+        <p:spPr>
+          <a:xfrm>
+            <a:off x="4663440" y="1554480"/>
+            <a:ext cx="1188720" cy="320040"/>
+          </a:xfrm>
+          <a:prstGeom prst="rect">
+            <a:avLst/>
+          </a:prstGeom>
+          <a:noFill/>
+          <a:ln/>
+        </p:spPr>
+        <p:txBody>
+          <a:bodyPr wrap="square" lIns="0" tIns="0" rIns="0" bIns="0" rtlCol="0" anchor="ctr"/>
+          <a:lstStyle/>
+          <a:p>
+            <a:pPr algn="ctr" indent="0" marL="0">
+              <a:buNone/>
+            </a:pPr>
+            <a:r>
+              <a:rPr lang="en-US" sz="1200" b="1" dirty="0">
+                <a:solidFill>
+                  <a:srgbClr val="101828"/>
+                </a:solidFill>
+                <a:latin typeface="Inter" pitchFamily="34" charset="0"/>
+                <a:ea typeface="Inter" pitchFamily="34" charset="-122"/>
+                <a:cs typeface="Inter" pitchFamily="34" charset="-120"/>
+              </a:rPr>
+              <a:t>Active</a:t>
+            </a:r>
+            <a:endParaRPr lang="en-US" sz="1200" dirty="0"/>
+          </a:p>
+        </p:txBody>
+      </p:sp>
+      <p:sp>
+        <p:nvSpPr>
+          <p:cNvPr id="20" name="Text 17"/>
+          <p:cNvSpPr/>
+          <p:nvPr/>
+        </p:nvSpPr>
+        <p:spPr>
+          <a:xfrm>
+            <a:off x="4718304" y="1874520"/>
+            <a:ext cx="1078992" cy="457200"/>
+          </a:xfrm>
+          <a:prstGeom prst="rect">
+            <a:avLst/>
+          </a:prstGeom>
+          <a:noFill/>
+          <a:ln/>
+        </p:spPr>
+        <p:txBody>
+          <a:bodyPr wrap="square" lIns="0" tIns="0" rIns="0" bIns="0" rtlCol="0" anchor="t"/>
+          <a:lstStyle/>
+          <a:p>
+            <a:pPr algn="ctr" indent="0" marL="0">
+              <a:buNone/>
+            </a:pPr>
+            <a:r>
+              <a:rPr lang="en-US" sz="900" dirty="0">
+                <a:solidFill>
+                  <a:srgbClr val="667085"/>
+                </a:solidFill>
+                <a:latin typeface="Inter" pitchFamily="34" charset="0"/>
+                <a:ea typeface="Inter" pitchFamily="34" charset="-122"/>
+                <a:cs typeface="Inter" pitchFamily="34" charset="-120"/>
+              </a:rPr>
+              <a:t>up to level 2</a:t>
+            </a:r>
+            <a:endParaRPr lang="en-US" sz="900" dirty="0"/>
+          </a:p>
+        </p:txBody>
+      </p:sp>
+      <p:sp>
+        <p:nvSpPr>
+          <p:cNvPr id="21" name="Text 18"/>
+          <p:cNvSpPr/>
+          <p:nvPr/>
+        </p:nvSpPr>
+        <p:spPr>
+          <a:xfrm>
+            <a:off x="5852160" y="1508760"/>
+            <a:ext cx="182880" cy="868680"/>
+          </a:xfrm>
+          <a:prstGeom prst="rect">
+            <a:avLst/>
+          </a:prstGeom>
+          <a:noFill/>
+          <a:ln/>
+        </p:spPr>
+        <p:txBody>
+          <a:bodyPr wrap="square" lIns="0" tIns="0" rIns="0" bIns="0" rtlCol="0" anchor="ctr"/>
+          <a:lstStyle/>
+          <a:p>
+            <a:pPr algn="ctr" indent="0" marL="0">
+              <a:buNone/>
+            </a:pPr>
+            <a:r>
+              <a:rPr lang="en-US" sz="1800" dirty="0">
+                <a:solidFill>
+                  <a:srgbClr val="1D4ED8"/>
+                </a:solidFill>
+                <a:latin typeface="Inter" pitchFamily="34" charset="0"/>
+                <a:ea typeface="Inter" pitchFamily="34" charset="-122"/>
+                <a:cs typeface="Inter" pitchFamily="34" charset="-120"/>
+              </a:rPr>
+              <a:t>›</a:t>
+            </a:r>
+            <a:endParaRPr lang="en-US" sz="1800" dirty="0"/>
+          </a:p>
+        </p:txBody>
+      </p:sp>
+      <p:sp>
+        <p:nvSpPr>
+          <p:cNvPr id="22" name="Shape 19"/>
+          <p:cNvSpPr/>
+          <p:nvPr/>
+        </p:nvSpPr>
+        <p:spPr>
+          <a:xfrm>
+            <a:off x="6035040" y="1508760"/>
+            <a:ext cx="1188720" cy="868680"/>
+          </a:xfrm>
+          <a:prstGeom prst="roundRect">
+            <a:avLst>
+              <a:gd name="adj" fmla="val 8421"/>
+            </a:avLst>
+          </a:prstGeom>
+          <a:solidFill>
+            <a:srgbClr val="FEF3F2"/>
+          </a:solidFill>
+          <a:ln w="12700">
+            <a:solidFill>
+              <a:srgbClr val="FECDCA"/>
+            </a:solidFill>
+            <a:prstDash val="solid"/>
+          </a:ln>
+        </p:spPr>
+      </p:sp>
+      <p:sp>
+        <p:nvSpPr>
+          <p:cNvPr id="23" name="Text 20"/>
+          <p:cNvSpPr/>
+          <p:nvPr/>
+        </p:nvSpPr>
+        <p:spPr>
+          <a:xfrm>
+            <a:off x="6035040" y="1554480"/>
+            <a:ext cx="1188720" cy="320040"/>
+          </a:xfrm>
+          <a:prstGeom prst="rect">
+            <a:avLst/>
+          </a:prstGeom>
+          <a:noFill/>
+          <a:ln/>
+        </p:spPr>
+        <p:txBody>
+          <a:bodyPr wrap="square" lIns="0" tIns="0" rIns="0" bIns="0" rtlCol="0" anchor="ctr"/>
+          <a:lstStyle/>
+          <a:p>
+            <a:pPr algn="ctr" indent="0" marL="0">
+              <a:buNone/>
+            </a:pPr>
+            <a:r>
+              <a:rPr lang="en-US" sz="1200" b="1" dirty="0">
+                <a:solidFill>
+                  <a:srgbClr val="101828"/>
+                </a:solidFill>
+                <a:latin typeface="Inter" pitchFamily="34" charset="0"/>
+                <a:ea typeface="Inter" pitchFamily="34" charset="-122"/>
+                <a:cs typeface="Inter" pitchFamily="34" charset="-120"/>
+              </a:rPr>
+              <a:t>Quarantine</a:t>
+            </a:r>
+            <a:endParaRPr lang="en-US" sz="1200" dirty="0"/>
+          </a:p>
+        </p:txBody>
+      </p:sp>
+      <p:sp>
+        <p:nvSpPr>
+          <p:cNvPr id="24" name="Text 21"/>
+          <p:cNvSpPr/>
+          <p:nvPr/>
+        </p:nvSpPr>
+        <p:spPr>
+          <a:xfrm>
+            <a:off x="6089904" y="1874520"/>
+            <a:ext cx="1078992" cy="457200"/>
+          </a:xfrm>
+          <a:prstGeom prst="rect">
+            <a:avLst/>
+          </a:prstGeom>
+          <a:noFill/>
+          <a:ln/>
+        </p:spPr>
+        <p:txBody>
+          <a:bodyPr wrap="square" lIns="0" tIns="0" rIns="0" bIns="0" rtlCol="0" anchor="t"/>
+          <a:lstStyle/>
+          <a:p>
+            <a:pPr algn="ctr" indent="0" marL="0">
+              <a:buNone/>
+            </a:pPr>
+            <a:r>
+              <a:rPr lang="en-US" sz="900" dirty="0">
+                <a:solidFill>
+                  <a:srgbClr val="667085"/>
+                </a:solidFill>
+                <a:latin typeface="Inter" pitchFamily="34" charset="0"/>
+                <a:ea typeface="Inter" pitchFamily="34" charset="-122"/>
+                <a:cs typeface="Inter" pitchFamily="34" charset="-120"/>
+              </a:rPr>
+              <a:t>24 h · level 0 · passports revoked</a:t>
+            </a:r>
+            <a:endParaRPr lang="en-US" sz="900" dirty="0"/>
+          </a:p>
+        </p:txBody>
+      </p:sp>
+      <p:sp>
+        <p:nvSpPr>
+          <p:cNvPr id="25" name="Text 22"/>
+          <p:cNvSpPr/>
+          <p:nvPr/>
+        </p:nvSpPr>
+        <p:spPr>
+          <a:xfrm>
+            <a:off x="7223760" y="1508760"/>
+            <a:ext cx="182880" cy="868680"/>
+          </a:xfrm>
+          <a:prstGeom prst="rect">
+            <a:avLst/>
+          </a:prstGeom>
+          <a:noFill/>
+          <a:ln/>
+        </p:spPr>
+        <p:txBody>
+          <a:bodyPr wrap="square" lIns="0" tIns="0" rIns="0" bIns="0" rtlCol="0" anchor="ctr"/>
+          <a:lstStyle/>
+          <a:p>
+            <a:pPr algn="ctr" indent="0" marL="0">
+              <a:buNone/>
+            </a:pPr>
+            <a:r>
+              <a:rPr lang="en-US" sz="1800" dirty="0">
+                <a:solidFill>
+                  <a:srgbClr val="1D4ED8"/>
+                </a:solidFill>
+                <a:latin typeface="Inter" pitchFamily="34" charset="0"/>
+                <a:ea typeface="Inter" pitchFamily="34" charset="-122"/>
+                <a:cs typeface="Inter" pitchFamily="34" charset="-120"/>
+              </a:rPr>
+              <a:t>›</a:t>
+            </a:r>
+            <a:endParaRPr lang="en-US" sz="1800" dirty="0"/>
+          </a:p>
+        </p:txBody>
+      </p:sp>
+      <p:sp>
+        <p:nvSpPr>
+          <p:cNvPr id="26" name="Shape 23"/>
+          <p:cNvSpPr/>
+          <p:nvPr/>
+        </p:nvSpPr>
+        <p:spPr>
+          <a:xfrm>
+            <a:off x="7406640" y="1508760"/>
+            <a:ext cx="1188720" cy="868680"/>
+          </a:xfrm>
+          <a:prstGeom prst="roundRect">
+            <a:avLst>
+              <a:gd name="adj" fmla="val 8421"/>
+            </a:avLst>
+          </a:prstGeom>
+          <a:solidFill>
+            <a:srgbClr val="FFF6E5"/>
+          </a:solidFill>
+          <a:ln w="12700">
+            <a:solidFill>
+              <a:srgbClr val="FEDF89"/>
+            </a:solidFill>
+            <a:prstDash val="solid"/>
+          </a:ln>
+        </p:spPr>
+      </p:sp>
+      <p:sp>
+        <p:nvSpPr>
+          <p:cNvPr id="27" name="Text 24"/>
+          <p:cNvSpPr/>
+          <p:nvPr/>
+        </p:nvSpPr>
+        <p:spPr>
+          <a:xfrm>
+            <a:off x="7406640" y="1554480"/>
+            <a:ext cx="1188720" cy="320040"/>
+          </a:xfrm>
+          <a:prstGeom prst="rect">
+            <a:avLst/>
+          </a:prstGeom>
+          <a:noFill/>
+          <a:ln/>
+        </p:spPr>
+        <p:txBody>
+          <a:bodyPr wrap="square" lIns="0" tIns="0" rIns="0" bIns="0" rtlCol="0" anchor="ctr"/>
+          <a:lstStyle/>
+          <a:p>
+            <a:pPr algn="ctr" indent="0" marL="0">
+              <a:buNone/>
+            </a:pPr>
+            <a:r>
+              <a:rPr lang="en-US" sz="1200" b="1" dirty="0">
+                <a:solidFill>
+                  <a:srgbClr val="101828"/>
+                </a:solidFill>
+                <a:latin typeface="Inter" pitchFamily="34" charset="0"/>
+                <a:ea typeface="Inter" pitchFamily="34" charset="-122"/>
+                <a:cs typeface="Inter" pitchFamily="34" charset="-120"/>
+              </a:rPr>
+              <a:t>Probation</a:t>
+            </a:r>
+            <a:endParaRPr lang="en-US" sz="1200" dirty="0"/>
+          </a:p>
+        </p:txBody>
+      </p:sp>
+      <p:sp>
+        <p:nvSpPr>
+          <p:cNvPr id="28" name="Text 25"/>
+          <p:cNvSpPr/>
+          <p:nvPr/>
+        </p:nvSpPr>
+        <p:spPr>
+          <a:xfrm>
+            <a:off x="7461504" y="1874520"/>
+            <a:ext cx="1078992" cy="457200"/>
+          </a:xfrm>
+          <a:prstGeom prst="rect">
+            <a:avLst/>
+          </a:prstGeom>
+          <a:noFill/>
+          <a:ln/>
+        </p:spPr>
+        <p:txBody>
+          <a:bodyPr wrap="square" lIns="0" tIns="0" rIns="0" bIns="0" rtlCol="0" anchor="t"/>
+          <a:lstStyle/>
+          <a:p>
+            <a:pPr algn="ctr" indent="0" marL="0">
+              <a:buNone/>
+            </a:pPr>
+            <a:r>
+              <a:rPr lang="en-US" sz="900" dirty="0">
+                <a:solidFill>
+                  <a:srgbClr val="667085"/>
+                </a:solidFill>
+                <a:latin typeface="Inter" pitchFamily="34" charset="0"/>
+                <a:ea typeface="Inter" pitchFamily="34" charset="-122"/>
+                <a:cs typeface="Inter" pitchFamily="34" charset="-120"/>
+              </a:rPr>
+              <a:t>at most level 1</a:t>
+            </a:r>
+            <a:endParaRPr lang="en-US" sz="900" dirty="0"/>
+          </a:p>
+        </p:txBody>
+      </p:sp>
+      <p:sp>
+        <p:nvSpPr>
+          <p:cNvPr id="29" name="Text 26"/>
+          <p:cNvSpPr/>
+          <p:nvPr/>
+        </p:nvSpPr>
+        <p:spPr>
+          <a:xfrm>
+            <a:off x="4663440" y="2468880"/>
+            <a:ext cx="4023360" cy="594360"/>
+          </a:xfrm>
+          <a:prstGeom prst="rect">
+            <a:avLst/>
+          </a:prstGeom>
+          <a:noFill/>
+          <a:ln/>
+        </p:spPr>
+        <p:txBody>
+          <a:bodyPr wrap="square" lIns="0" tIns="0" rIns="0" bIns="0" rtlCol="0" anchor="t"/>
+          <a:lstStyle/>
+          <a:p>
+            <a:pPr indent="0" marL="0">
+              <a:buNone/>
+            </a:pPr>
+            <a:r>
+              <a:rPr lang="en-US" sz="1050" dirty="0">
+                <a:solidFill>
+                  <a:srgbClr val="101828"/>
+                </a:solidFill>
+                <a:latin typeface="Inter" pitchFamily="34" charset="0"/>
+                <a:ea typeface="Inter" pitchFamily="34" charset="-122"/>
+                <a:cs typeface="Inter" pitchFamily="34" charset="-120"/>
+              </a:rPr>
+              <a:t>A mistake is 1 strike, a scope violation 2, a payment the client undoes 1. Three strikes: quarantine. Five clean results end probation; a mistake on probation means quarantine again.</a:t>
+            </a:r>
+            <a:endParaRPr lang="en-US" sz="1050" dirty="0"/>
+          </a:p>
+        </p:txBody>
+      </p:sp>
+      <p:sp>
+        <p:nvSpPr>
+          <p:cNvPr id="30" name="Shape 27"/>
+          <p:cNvSpPr/>
+          <p:nvPr/>
+        </p:nvSpPr>
+        <p:spPr>
+          <a:xfrm>
+            <a:off x="457200" y="3337560"/>
             <a:ext cx="1920240" cy="1188720"/>
           </a:xfrm>
           <a:prstGeom prst="roundRect">
@@ -12979,13 +14628,13 @@
       </p:sp>
       <p:sp>
         <p:nvSpPr>
-          <p:cNvPr id="11" name="Text 8"/>
-          <p:cNvSpPr/>
-          <p:nvPr/>
-        </p:nvSpPr>
-        <p:spPr>
-          <a:xfrm>
-            <a:off x="594360" y="1645920"/>
+          <p:cNvPr id="31" name="Text 28"/>
+          <p:cNvSpPr/>
+          <p:nvPr/>
+        </p:nvSpPr>
+        <p:spPr>
+          <a:xfrm>
+            <a:off x="594360" y="3429000"/>
             <a:ext cx="1645920" cy="548640"/>
           </a:xfrm>
           <a:prstGeom prst="rect">
@@ -13010,7 +14659,7 @@
                 <a:ea typeface="Inter" pitchFamily="34" charset="-122"/>
                 <a:cs typeface="Inter" pitchFamily="34" charset="-120"/>
               </a:rPr>
-              <a:t>5/5</a:t>
+              <a:t>1</a:t>
             </a:r>
             <a:endParaRPr lang="en-US" sz="2600" dirty="0"/>
           </a:p>
@@ -13018,13 +14667,13 @@
       </p:sp>
       <p:sp>
         <p:nvSpPr>
-          <p:cNvPr id="12" name="Text 9"/>
-          <p:cNvSpPr/>
-          <p:nvPr/>
-        </p:nvSpPr>
-        <p:spPr>
-          <a:xfrm>
-            <a:off x="594360" y="2212848"/>
+          <p:cNvPr id="32" name="Text 29"/>
+          <p:cNvSpPr/>
+          <p:nvPr/>
+        </p:nvSpPr>
+        <p:spPr>
+          <a:xfrm>
+            <a:off x="594360" y="3995928"/>
             <a:ext cx="1645920" cy="457200"/>
           </a:xfrm>
           <a:prstGeom prst="rect">
@@ -13049,7 +14698,7 @@
                 <a:ea typeface="Inter" pitchFamily="34" charset="-122"/>
                 <a:cs typeface="Inter" pitchFamily="34" charset="-120"/>
               </a:rPr>
-              <a:t>planted leaks found, 847 ₽ a month</a:t>
+              <a:t>promotion: subscriptions reach level 2</a:t>
             </a:r>
             <a:endParaRPr lang="en-US" sz="1050" dirty="0"/>
           </a:p>
@@ -13057,13 +14706,13 @@
       </p:sp>
       <p:sp>
         <p:nvSpPr>
-          <p:cNvPr id="13" name="Shape 10"/>
-          <p:cNvSpPr/>
-          <p:nvPr/>
-        </p:nvSpPr>
-        <p:spPr>
-          <a:xfrm>
-            <a:off x="2560320" y="1554480"/>
+          <p:cNvPr id="33" name="Shape 30"/>
+          <p:cNvSpPr/>
+          <p:nvPr/>
+        </p:nvSpPr>
+        <p:spPr>
+          <a:xfrm>
+            <a:off x="2560320" y="3337560"/>
             <a:ext cx="1920240" cy="1188720"/>
           </a:xfrm>
           <a:prstGeom prst="roundRect">
@@ -13084,13 +14733,13 @@
       </p:sp>
       <p:sp>
         <p:nvSpPr>
-          <p:cNvPr id="14" name="Text 11"/>
-          <p:cNvSpPr/>
-          <p:nvPr/>
-        </p:nvSpPr>
-        <p:spPr>
-          <a:xfrm>
-            <a:off x="2697480" y="1645920"/>
+          <p:cNvPr id="34" name="Text 31"/>
+          <p:cNvSpPr/>
+          <p:nvPr/>
+        </p:nvSpPr>
+        <p:spPr>
+          <a:xfrm>
+            <a:off x="2697480" y="3429000"/>
             <a:ext cx="1645920" cy="548640"/>
           </a:xfrm>
           <a:prstGeom prst="rect">
@@ -13109,13 +14758,13 @@
             <a:r>
               <a:rPr lang="en-US" sz="2600" b="1" dirty="0">
                 <a:solidFill>
-                  <a:srgbClr val="101828"/>
-                </a:solidFill>
-                <a:latin typeface="Inter" pitchFamily="34" charset="0"/>
-                <a:ea typeface="Inter" pitchFamily="34" charset="-122"/>
-                <a:cs typeface="Inter" pitchFamily="34" charset="-120"/>
-              </a:rPr>
-              <a:t>27.3%</a:t>
+                  <a:srgbClr val="B42318"/>
+                </a:solidFill>
+                <a:latin typeface="Inter" pitchFamily="34" charset="0"/>
+                <a:ea typeface="Inter" pitchFamily="34" charset="-122"/>
+                <a:cs typeface="Inter" pitchFamily="34" charset="-120"/>
+              </a:rPr>
+              <a:t>1</a:t>
             </a:r>
             <a:endParaRPr lang="en-US" sz="2600" dirty="0"/>
           </a:p>
@@ -13123,13 +14772,13 @@
       </p:sp>
       <p:sp>
         <p:nvSpPr>
-          <p:cNvPr id="15" name="Text 12"/>
-          <p:cNvSpPr/>
-          <p:nvPr/>
-        </p:nvSpPr>
-        <p:spPr>
-          <a:xfrm>
-            <a:off x="2697480" y="2212848"/>
+          <p:cNvPr id="35" name="Text 32"/>
+          <p:cNvSpPr/>
+          <p:nvPr/>
+        </p:nvSpPr>
+        <p:spPr>
+          <a:xfrm>
+            <a:off x="2697480" y="3995928"/>
             <a:ext cx="1645920" cy="457200"/>
           </a:xfrm>
           <a:prstGeom prst="rect">
@@ -13154,7 +14803,7 @@
                 <a:ea typeface="Inter" pitchFamily="34" charset="-122"/>
                 <a:cs typeface="Inter" pitchFamily="34" charset="-120"/>
               </a:rPr>
-              <a:t>spending forecast error (WAPE), held-out months</a:t>
+              <a:t>demotion: a faulty planner, level 2 to 0</a:t>
             </a:r>
             <a:endParaRPr lang="en-US" sz="1050" dirty="0"/>
           </a:p>
@@ -13162,13 +14811,13 @@
       </p:sp>
       <p:sp>
         <p:nvSpPr>
-          <p:cNvPr id="16" name="Shape 13"/>
-          <p:cNvSpPr/>
-          <p:nvPr/>
-        </p:nvSpPr>
-        <p:spPr>
-          <a:xfrm>
-            <a:off x="457200" y="2926080"/>
+          <p:cNvPr id="36" name="Shape 33"/>
+          <p:cNvSpPr/>
+          <p:nvPr/>
+        </p:nvSpPr>
+        <p:spPr>
+          <a:xfrm>
+            <a:off x="4663440" y="3337560"/>
             <a:ext cx="1920240" cy="1188720"/>
           </a:xfrm>
           <a:prstGeom prst="roundRect">
@@ -13189,13 +14838,13 @@
       </p:sp>
       <p:sp>
         <p:nvSpPr>
-          <p:cNvPr id="17" name="Text 14"/>
-          <p:cNvSpPr/>
-          <p:nvPr/>
-        </p:nvSpPr>
-        <p:spPr>
-          <a:xfrm>
-            <a:off x="594360" y="3017520"/>
+          <p:cNvPr id="37" name="Text 34"/>
+          <p:cNvSpPr/>
+          <p:nvPr/>
+        </p:nvSpPr>
+        <p:spPr>
+          <a:xfrm>
+            <a:off x="4800600" y="3429000"/>
             <a:ext cx="1645920" cy="548640"/>
           </a:xfrm>
           <a:prstGeom prst="rect">
@@ -13214,13 +14863,13 @@
             <a:r>
               <a:rPr lang="en-US" sz="2600" b="1" dirty="0">
                 <a:solidFill>
-                  <a:srgbClr val="101828"/>
-                </a:solidFill>
-                <a:latin typeface="Inter" pitchFamily="34" charset="0"/>
-                <a:ea typeface="Inter" pitchFamily="34" charset="-122"/>
-                <a:cs typeface="Inter" pitchFamily="34" charset="-120"/>
-              </a:rPr>
-              <a:t>1/1</a:t>
+                  <a:srgbClr val="B54708"/>
+                </a:solidFill>
+                <a:latin typeface="Inter" pitchFamily="34" charset="0"/>
+                <a:ea typeface="Inter" pitchFamily="34" charset="-122"/>
+                <a:cs typeface="Inter" pitchFamily="34" charset="-120"/>
+              </a:rPr>
+              <a:t>3 › 1</a:t>
             </a:r>
             <a:endParaRPr lang="en-US" sz="2600" dirty="0"/>
           </a:p>
@@ -13228,13 +14877,13 @@
       </p:sp>
       <p:sp>
         <p:nvSpPr>
-          <p:cNvPr id="18" name="Text 15"/>
-          <p:cNvSpPr/>
-          <p:nvPr/>
-        </p:nvSpPr>
-        <p:spPr>
-          <a:xfrm>
-            <a:off x="594360" y="3584448"/>
+          <p:cNvPr id="38" name="Text 35"/>
+          <p:cNvSpPr/>
+          <p:nvPr/>
+        </p:nvSpPr>
+        <p:spPr>
+          <a:xfrm>
+            <a:off x="4800600" y="3995928"/>
             <a:ext cx="1645920" cy="457200"/>
           </a:xfrm>
           <a:prstGeom prst="rect">
@@ -13259,7 +14908,7 @@
                 <a:ea typeface="Inter" pitchFamily="34" charset="-122"/>
                 <a:cs typeface="Inter" pitchFamily="34" charset="-120"/>
               </a:rPr>
-              <a:t>cash gap caught in time, 0 false alarms in 18 probes</a:t>
+              <a:t>strikes, then quarantine; 2 passports revoked</a:t>
             </a:r>
             <a:endParaRPr lang="en-US" sz="1050" dirty="0"/>
           </a:p>
@@ -13267,13 +14916,13 @@
       </p:sp>
       <p:sp>
         <p:nvSpPr>
-          <p:cNvPr id="19" name="Shape 16"/>
-          <p:cNvSpPr/>
-          <p:nvPr/>
-        </p:nvSpPr>
-        <p:spPr>
-          <a:xfrm>
-            <a:off x="2560320" y="2926080"/>
+          <p:cNvPr id="39" name="Shape 36"/>
+          <p:cNvSpPr/>
+          <p:nvPr/>
+        </p:nvSpPr>
+        <p:spPr>
+          <a:xfrm>
+            <a:off x="6766560" y="3337560"/>
             <a:ext cx="1920240" cy="1188720"/>
           </a:xfrm>
           <a:prstGeom prst="roundRect">
@@ -13294,13 +14943,13 @@
       </p:sp>
       <p:sp>
         <p:nvSpPr>
-          <p:cNvPr id="20" name="Text 17"/>
-          <p:cNvSpPr/>
-          <p:nvPr/>
-        </p:nvSpPr>
-        <p:spPr>
-          <a:xfrm>
-            <a:off x="2697480" y="3017520"/>
+          <p:cNvPr id="40" name="Text 37"/>
+          <p:cNvSpPr/>
+          <p:nvPr/>
+        </p:nvSpPr>
+        <p:spPr>
+          <a:xfrm>
+            <a:off x="6903720" y="3429000"/>
             <a:ext cx="1645920" cy="548640"/>
           </a:xfrm>
           <a:prstGeom prst="rect">
@@ -13325,7 +14974,7 @@
                 <a:ea typeface="Inter" pitchFamily="34" charset="-122"/>
                 <a:cs typeface="Inter" pitchFamily="34" charset="-120"/>
               </a:rPr>
-              <a:t>1/1</a:t>
+              <a:t>0/2</a:t>
             </a:r>
             <a:endParaRPr lang="en-US" sz="2600" dirty="0"/>
           </a:p>
@@ -13333,13 +14982,13 @@
       </p:sp>
       <p:sp>
         <p:nvSpPr>
-          <p:cNvPr id="21" name="Text 18"/>
-          <p:cNvSpPr/>
-          <p:nvPr/>
-        </p:nvSpPr>
-        <p:spPr>
-          <a:xfrm>
-            <a:off x="2697480" y="3584448"/>
+          <p:cNvPr id="41" name="Text 38"/>
+          <p:cNvSpPr/>
+          <p:nvPr/>
+        </p:nvSpPr>
+        <p:spPr>
+          <a:xfrm>
+            <a:off x="6903720" y="3995928"/>
             <a:ext cx="1645920" cy="457200"/>
           </a:xfrm>
           <a:prstGeom prst="rect">
@@ -13364,466 +15013,7 @@
                 <a:ea typeface="Inter" pitchFamily="34" charset="-122"/>
                 <a:cs typeface="Inter" pitchFamily="34" charset="-120"/>
               </a:rPr>
-              <a:t>double charge on the same card found</a:t>
-            </a:r>
-            <a:endParaRPr lang="en-US" sz="1050" dirty="0"/>
-          </a:p>
-        </p:txBody>
-      </p:sp>
-      <p:sp>
-        <p:nvSpPr>
-          <p:cNvPr id="22" name="Shape 19"/>
-          <p:cNvSpPr/>
-          <p:nvPr/>
-        </p:nvSpPr>
-        <p:spPr>
-          <a:xfrm>
-            <a:off x="4663440" y="1554480"/>
-            <a:ext cx="1920240" cy="1188720"/>
-          </a:xfrm>
-          <a:prstGeom prst="roundRect">
-            <a:avLst>
-              <a:gd name="adj" fmla="val 7692"/>
-            </a:avLst>
-          </a:prstGeom>
-          <a:solidFill>
-            <a:srgbClr val="F4F5F7"/>
-          </a:solidFill>
-          <a:ln w="12700">
-            <a:solidFill>
-              <a:srgbClr val="F4F5F7"/>
-            </a:solidFill>
-            <a:prstDash val="solid"/>
-          </a:ln>
-        </p:spPr>
-      </p:sp>
-      <p:sp>
-        <p:nvSpPr>
-          <p:cNvPr id="23" name="Text 20"/>
-          <p:cNvSpPr/>
-          <p:nvPr/>
-        </p:nvSpPr>
-        <p:spPr>
-          <a:xfrm>
-            <a:off x="4800600" y="1645920"/>
-            <a:ext cx="1645920" cy="548640"/>
-          </a:xfrm>
-          <a:prstGeom prst="rect">
-            <a:avLst/>
-          </a:prstGeom>
-          <a:noFill/>
-          <a:ln/>
-        </p:spPr>
-        <p:txBody>
-          <a:bodyPr wrap="square" lIns="0" tIns="0" rIns="0" bIns="0" rtlCol="0" anchor="ctr"/>
-          <a:lstStyle/>
-          <a:p>
-            <a:pPr indent="0" marL="0">
-              <a:buNone/>
-            </a:pPr>
-            <a:r>
-              <a:rPr lang="en-US" sz="2600" b="1" dirty="0">
-                <a:solidFill>
-                  <a:srgbClr val="101828"/>
-                </a:solidFill>
-                <a:latin typeface="Inter" pitchFamily="34" charset="0"/>
-                <a:ea typeface="Inter" pitchFamily="34" charset="-122"/>
-                <a:cs typeface="Inter" pitchFamily="34" charset="-120"/>
-              </a:rPr>
-              <a:t>1.00</a:t>
-            </a:r>
-            <a:endParaRPr lang="en-US" sz="2600" dirty="0"/>
-          </a:p>
-        </p:txBody>
-      </p:sp>
-      <p:sp>
-        <p:nvSpPr>
-          <p:cNvPr id="24" name="Text 21"/>
-          <p:cNvSpPr/>
-          <p:nvPr/>
-        </p:nvSpPr>
-        <p:spPr>
-          <a:xfrm>
-            <a:off x="4800600" y="2212848"/>
-            <a:ext cx="1645920" cy="457200"/>
-          </a:xfrm>
-          <a:prstGeom prst="rect">
-            <a:avLst/>
-          </a:prstGeom>
-          <a:noFill/>
-          <a:ln/>
-        </p:spPr>
-        <p:txBody>
-          <a:bodyPr wrap="square" lIns="0" tIns="0" rIns="0" bIns="0" rtlCol="0" anchor="t"/>
-          <a:lstStyle/>
-          <a:p>
-            <a:pPr indent="0" marL="0">
-              <a:buNone/>
-            </a:pPr>
-            <a:r>
-              <a:rPr lang="en-US" sz="1050" dirty="0">
-                <a:solidFill>
-                  <a:srgbClr val="667085"/>
-                </a:solidFill>
-                <a:latin typeface="Inter" pitchFamily="34" charset="0"/>
-                <a:ea typeface="Inter" pitchFamily="34" charset="-122"/>
-                <a:cs typeface="Inter" pitchFamily="34" charset="-120"/>
-              </a:rPr>
-              <a:t>ROC-AUC on held-out graphs</a:t>
-            </a:r>
-            <a:endParaRPr lang="en-US" sz="1050" dirty="0"/>
-          </a:p>
-        </p:txBody>
-      </p:sp>
-      <p:sp>
-        <p:nvSpPr>
-          <p:cNvPr id="25" name="Shape 22"/>
-          <p:cNvSpPr/>
-          <p:nvPr/>
-        </p:nvSpPr>
-        <p:spPr>
-          <a:xfrm>
-            <a:off x="6766560" y="1554480"/>
-            <a:ext cx="1920240" cy="1188720"/>
-          </a:xfrm>
-          <a:prstGeom prst="roundRect">
-            <a:avLst>
-              <a:gd name="adj" fmla="val 7692"/>
-            </a:avLst>
-          </a:prstGeom>
-          <a:solidFill>
-            <a:srgbClr val="F4F5F7"/>
-          </a:solidFill>
-          <a:ln w="12700">
-            <a:solidFill>
-              <a:srgbClr val="F4F5F7"/>
-            </a:solidFill>
-            <a:prstDash val="solid"/>
-          </a:ln>
-        </p:spPr>
-      </p:sp>
-      <p:sp>
-        <p:nvSpPr>
-          <p:cNvPr id="26" name="Text 23"/>
-          <p:cNvSpPr/>
-          <p:nvPr/>
-        </p:nvSpPr>
-        <p:spPr>
-          <a:xfrm>
-            <a:off x="6903720" y="1645920"/>
-            <a:ext cx="1645920" cy="548640"/>
-          </a:xfrm>
-          <a:prstGeom prst="rect">
-            <a:avLst/>
-          </a:prstGeom>
-          <a:noFill/>
-          <a:ln/>
-        </p:spPr>
-        <p:txBody>
-          <a:bodyPr wrap="square" lIns="0" tIns="0" rIns="0" bIns="0" rtlCol="0" anchor="ctr"/>
-          <a:lstStyle/>
-          <a:p>
-            <a:pPr indent="0" marL="0">
-              <a:buNone/>
-            </a:pPr>
-            <a:r>
-              <a:rPr lang="en-US" sz="2600" b="1" dirty="0">
-                <a:solidFill>
-                  <a:srgbClr val="101828"/>
-                </a:solidFill>
-                <a:latin typeface="Inter" pitchFamily="34" charset="0"/>
-                <a:ea typeface="Inter" pitchFamily="34" charset="-122"/>
-                <a:cs typeface="Inter" pitchFamily="34" charset="-120"/>
-              </a:rPr>
-              <a:t>0.993</a:t>
-            </a:r>
-            <a:endParaRPr lang="en-US" sz="2600" dirty="0"/>
-          </a:p>
-        </p:txBody>
-      </p:sp>
-      <p:sp>
-        <p:nvSpPr>
-          <p:cNvPr id="27" name="Text 24"/>
-          <p:cNvSpPr/>
-          <p:nvPr/>
-        </p:nvSpPr>
-        <p:spPr>
-          <a:xfrm>
-            <a:off x="6903720" y="2212848"/>
-            <a:ext cx="1645920" cy="457200"/>
-          </a:xfrm>
-          <a:prstGeom prst="rect">
-            <a:avLst/>
-          </a:prstGeom>
-          <a:noFill/>
-          <a:ln/>
-        </p:spPr>
-        <p:txBody>
-          <a:bodyPr wrap="square" lIns="0" tIns="0" rIns="0" bIns="0" rtlCol="0" anchor="t"/>
-          <a:lstStyle/>
-          <a:p>
-            <a:pPr indent="0" marL="0">
-              <a:buNone/>
-            </a:pPr>
-            <a:r>
-              <a:rPr lang="en-US" sz="1050" dirty="0">
-                <a:solidFill>
-                  <a:srgbClr val="667085"/>
-                </a:solidFill>
-                <a:latin typeface="Inter" pitchFamily="34" charset="0"/>
-                <a:ea typeface="Inter" pitchFamily="34" charset="-122"/>
-                <a:cs typeface="Inter" pitchFamily="34" charset="-120"/>
-              </a:rPr>
-              <a:t>precision at threshold 0.7</a:t>
-            </a:r>
-            <a:endParaRPr lang="en-US" sz="1050" dirty="0"/>
-          </a:p>
-        </p:txBody>
-      </p:sp>
-      <p:sp>
-        <p:nvSpPr>
-          <p:cNvPr id="28" name="Shape 25"/>
-          <p:cNvSpPr/>
-          <p:nvPr/>
-        </p:nvSpPr>
-        <p:spPr>
-          <a:xfrm>
-            <a:off x="4663440" y="2926080"/>
-            <a:ext cx="1920240" cy="1188720"/>
-          </a:xfrm>
-          <a:prstGeom prst="roundRect">
-            <a:avLst>
-              <a:gd name="adj" fmla="val 7692"/>
-            </a:avLst>
-          </a:prstGeom>
-          <a:solidFill>
-            <a:srgbClr val="F4F5F7"/>
-          </a:solidFill>
-          <a:ln w="12700">
-            <a:solidFill>
-              <a:srgbClr val="F4F5F7"/>
-            </a:solidFill>
-            <a:prstDash val="solid"/>
-          </a:ln>
-        </p:spPr>
-      </p:sp>
-      <p:sp>
-        <p:nvSpPr>
-          <p:cNvPr id="29" name="Text 26"/>
-          <p:cNvSpPr/>
-          <p:nvPr/>
-        </p:nvSpPr>
-        <p:spPr>
-          <a:xfrm>
-            <a:off x="4800600" y="3017520"/>
-            <a:ext cx="1645920" cy="548640"/>
-          </a:xfrm>
-          <a:prstGeom prst="rect">
-            <a:avLst/>
-          </a:prstGeom>
-          <a:noFill/>
-          <a:ln/>
-        </p:spPr>
-        <p:txBody>
-          <a:bodyPr wrap="square" lIns="0" tIns="0" rIns="0" bIns="0" rtlCol="0" anchor="ctr"/>
-          <a:lstStyle/>
-          <a:p>
-            <a:pPr indent="0" marL="0">
-              <a:buNone/>
-            </a:pPr>
-            <a:r>
-              <a:rPr lang="en-US" sz="2600" b="1" dirty="0">
-                <a:solidFill>
-                  <a:srgbClr val="101828"/>
-                </a:solidFill>
-                <a:latin typeface="Inter" pitchFamily="34" charset="0"/>
-                <a:ea typeface="Inter" pitchFamily="34" charset="-122"/>
-                <a:cs typeface="Inter" pitchFamily="34" charset="-120"/>
-              </a:rPr>
-              <a:t>0.944</a:t>
-            </a:r>
-            <a:endParaRPr lang="en-US" sz="2600" dirty="0"/>
-          </a:p>
-        </p:txBody>
-      </p:sp>
-      <p:sp>
-        <p:nvSpPr>
-          <p:cNvPr id="30" name="Text 27"/>
-          <p:cNvSpPr/>
-          <p:nvPr/>
-        </p:nvSpPr>
-        <p:spPr>
-          <a:xfrm>
-            <a:off x="4800600" y="3584448"/>
-            <a:ext cx="1645920" cy="457200"/>
-          </a:xfrm>
-          <a:prstGeom prst="rect">
-            <a:avLst/>
-          </a:prstGeom>
-          <a:noFill/>
-          <a:ln/>
-        </p:spPr>
-        <p:txBody>
-          <a:bodyPr wrap="square" lIns="0" tIns="0" rIns="0" bIns="0" rtlCol="0" anchor="t"/>
-          <a:lstStyle/>
-          <a:p>
-            <a:pPr indent="0" marL="0">
-              <a:buNone/>
-            </a:pPr>
-            <a:r>
-              <a:rPr lang="en-US" sz="1050" dirty="0">
-                <a:solidFill>
-                  <a:srgbClr val="667085"/>
-                </a:solidFill>
-                <a:latin typeface="Inter" pitchFamily="34" charset="0"/>
-                <a:ea typeface="Inter" pitchFamily="34" charset="-122"/>
-                <a:cs typeface="Inter" pitchFamily="34" charset="-120"/>
-              </a:rPr>
-              <a:t>recall over mule schemes</a:t>
-            </a:r>
-            <a:endParaRPr lang="en-US" sz="1050" dirty="0"/>
-          </a:p>
-        </p:txBody>
-      </p:sp>
-      <p:sp>
-        <p:nvSpPr>
-          <p:cNvPr id="31" name="Shape 28"/>
-          <p:cNvSpPr/>
-          <p:nvPr/>
-        </p:nvSpPr>
-        <p:spPr>
-          <a:xfrm>
-            <a:off x="6766560" y="2926080"/>
-            <a:ext cx="1920240" cy="1188720"/>
-          </a:xfrm>
-          <a:prstGeom prst="roundRect">
-            <a:avLst>
-              <a:gd name="adj" fmla="val 7692"/>
-            </a:avLst>
-          </a:prstGeom>
-          <a:solidFill>
-            <a:srgbClr val="F4F5F7"/>
-          </a:solidFill>
-          <a:ln w="12700">
-            <a:solidFill>
-              <a:srgbClr val="F4F5F7"/>
-            </a:solidFill>
-            <a:prstDash val="solid"/>
-          </a:ln>
-        </p:spPr>
-      </p:sp>
-      <p:sp>
-        <p:nvSpPr>
-          <p:cNvPr id="32" name="Text 29"/>
-          <p:cNvSpPr/>
-          <p:nvPr/>
-        </p:nvSpPr>
-        <p:spPr>
-          <a:xfrm>
-            <a:off x="6903720" y="3017520"/>
-            <a:ext cx="1645920" cy="548640"/>
-          </a:xfrm>
-          <a:prstGeom prst="rect">
-            <a:avLst/>
-          </a:prstGeom>
-          <a:noFill/>
-          <a:ln/>
-        </p:spPr>
-        <p:txBody>
-          <a:bodyPr wrap="square" lIns="0" tIns="0" rIns="0" bIns="0" rtlCol="0" anchor="ctr"/>
-          <a:lstStyle/>
-          <a:p>
-            <a:pPr indent="0" marL="0">
-              <a:buNone/>
-            </a:pPr>
-            <a:r>
-              <a:rPr lang="en-US" sz="2600" b="1" dirty="0">
-                <a:solidFill>
-                  <a:srgbClr val="101828"/>
-                </a:solidFill>
-                <a:latin typeface="Inter" pitchFamily="34" charset="0"/>
-                <a:ea typeface="Inter" pitchFamily="34" charset="-122"/>
-                <a:cs typeface="Inter" pitchFamily="34" charset="-120"/>
-              </a:rPr>
-              <a:t>0</a:t>
-            </a:r>
-            <a:endParaRPr lang="en-US" sz="2600" dirty="0"/>
-          </a:p>
-        </p:txBody>
-      </p:sp>
-      <p:sp>
-        <p:nvSpPr>
-          <p:cNvPr id="33" name="Text 30"/>
-          <p:cNvSpPr/>
-          <p:nvPr/>
-        </p:nvSpPr>
-        <p:spPr>
-          <a:xfrm>
-            <a:off x="6903720" y="3584448"/>
-            <a:ext cx="1645920" cy="457200"/>
-          </a:xfrm>
-          <a:prstGeom prst="rect">
-            <a:avLst/>
-          </a:prstGeom>
-          <a:noFill/>
-          <a:ln/>
-        </p:spPr>
-        <p:txBody>
-          <a:bodyPr wrap="square" lIns="0" tIns="0" rIns="0" bIns="0" rtlCol="0" anchor="t"/>
-          <a:lstStyle/>
-          <a:p>
-            <a:pPr indent="0" marL="0">
-              <a:buNone/>
-            </a:pPr>
-            <a:r>
-              <a:rPr lang="en-US" sz="1050" dirty="0">
-                <a:solidFill>
-                  <a:srgbClr val="667085"/>
-                </a:solidFill>
-                <a:latin typeface="Inter" pitchFamily="34" charset="0"/>
-                <a:ea typeface="Inter" pitchFamily="34" charset="-122"/>
-                <a:cs typeface="Inter" pitchFamily="34" charset="-120"/>
-              </a:rPr>
-              <a:t>false alarms on employers, merchants, landlords</a:t>
-            </a:r>
-            <a:endParaRPr lang="en-US" sz="1050" dirty="0"/>
-          </a:p>
-        </p:txBody>
-      </p:sp>
-      <p:sp>
-        <p:nvSpPr>
-          <p:cNvPr id="34" name="Text 31"/>
-          <p:cNvSpPr/>
-          <p:nvPr/>
-        </p:nvSpPr>
-        <p:spPr>
-          <a:xfrm>
-            <a:off x="4663440" y="4251960"/>
-            <a:ext cx="4023360" cy="457200"/>
-          </a:xfrm>
-          <a:prstGeom prst="rect">
-            <a:avLst/>
-          </a:prstGeom>
-          <a:noFill/>
-          <a:ln/>
-        </p:spPr>
-        <p:txBody>
-          <a:bodyPr wrap="square" lIns="0" tIns="0" rIns="0" bIns="0" rtlCol="0" anchor="ctr"/>
-          <a:lstStyle/>
-          <a:p>
-            <a:pPr indent="0" marL="0">
-              <a:buNone/>
-            </a:pPr>
-            <a:r>
-              <a:rPr lang="en-US" sz="1050" dirty="0">
-                <a:solidFill>
-                  <a:srgbClr val="667085"/>
-                </a:solidFill>
-                <a:latin typeface="Inter" pitchFamily="34" charset="0"/>
-                <a:ea typeface="Inter" pitchFamily="34" charset="-122"/>
-                <a:cs typeface="Inter" pitchFamily="34" charset="-120"/>
-              </a:rPr>
-              <a:t>Synthetic graphs from our generator; real data will score lower. The model can only add a reason to ask.</a:t>
+              <a:t>faulty agent actions executed</a:t>
             </a:r>
             <a:endParaRPr lang="en-US" sz="1050" dirty="0"/>
           </a:p>
@@ -13894,7 +15084,7 @@
                 <a:ea typeface="Inter" pitchFamily="34" charset="-122"/>
                 <a:cs typeface="Inter" pitchFamily="34" charset="-120"/>
               </a:rPr>
-              <a:t>Red-team: what an attacker gets</a:t>
+              <a:t>Budget and payee risk: measured, not claimed</a:t>
             </a:r>
             <a:endParaRPr lang="en-US" sz="2500" dirty="0"/>
           </a:p>
@@ -14038,7 +15228,7 @@
                 <a:ea typeface="Inter" pitchFamily="34" charset="-122"/>
                 <a:cs typeface="Inter" pitchFamily="34" charset="-120"/>
               </a:rPr>
-              <a:t>9 / 12</a:t>
+              <a:t>9 / 13</a:t>
             </a:r>
             <a:endParaRPr lang="en-US" sz="900" dirty="0"/>
           </a:p>
@@ -14046,13 +15236,91 @@
       </p:sp>
       <p:sp>
         <p:nvSpPr>
-          <p:cNvPr id="8" name="Shape 5"/>
-          <p:cNvSpPr/>
-          <p:nvPr/>
-        </p:nvSpPr>
-        <p:spPr>
-          <a:xfrm>
-            <a:off x="457200" y="1188720"/>
+          <p:cNvPr id="8" name="Text 5"/>
+          <p:cNvSpPr/>
+          <p:nvPr/>
+        </p:nvSpPr>
+        <p:spPr>
+          <a:xfrm>
+            <a:off x="457200" y="1097280"/>
+            <a:ext cx="4023360" cy="365760"/>
+          </a:xfrm>
+          <a:prstGeom prst="rect">
+            <a:avLst/>
+          </a:prstGeom>
+          <a:noFill/>
+          <a:ln/>
+        </p:spPr>
+        <p:txBody>
+          <a:bodyPr wrap="square" lIns="0" tIns="0" rIns="0" bIns="0" rtlCol="0" anchor="ctr"/>
+          <a:lstStyle/>
+          <a:p>
+            <a:pPr indent="0" marL="0">
+              <a:buNone/>
+            </a:pPr>
+            <a:r>
+              <a:rPr lang="en-US" sz="1700" b="1" dirty="0">
+                <a:solidFill>
+                  <a:srgbClr val="1D4ED8"/>
+                </a:solidFill>
+                <a:latin typeface="Inter" pitchFamily="34" charset="0"/>
+                <a:ea typeface="Inter" pitchFamily="34" charset="-122"/>
+                <a:cs typeface="Inter" pitchFamily="34" charset="-120"/>
+              </a:rPr>
+              <a:t>C8 budget</a:t>
+            </a:r>
+            <a:endParaRPr lang="en-US" sz="1700" dirty="0"/>
+          </a:p>
+        </p:txBody>
+      </p:sp>
+      <p:sp>
+        <p:nvSpPr>
+          <p:cNvPr id="9" name="Text 6"/>
+          <p:cNvSpPr/>
+          <p:nvPr/>
+        </p:nvSpPr>
+        <p:spPr>
+          <a:xfrm>
+            <a:off x="4663440" y="1097280"/>
+            <a:ext cx="4023360" cy="365760"/>
+          </a:xfrm>
+          <a:prstGeom prst="rect">
+            <a:avLst/>
+          </a:prstGeom>
+          <a:noFill/>
+          <a:ln/>
+        </p:spPr>
+        <p:txBody>
+          <a:bodyPr wrap="square" lIns="0" tIns="0" rIns="0" bIns="0" rtlCol="0" anchor="ctr"/>
+          <a:lstStyle/>
+          <a:p>
+            <a:pPr indent="0" marL="0">
+              <a:buNone/>
+            </a:pPr>
+            <a:r>
+              <a:rPr lang="en-US" sz="1700" b="1" dirty="0">
+                <a:solidFill>
+                  <a:srgbClr val="1D4ED8"/>
+                </a:solidFill>
+                <a:latin typeface="Inter" pitchFamily="34" charset="0"/>
+                <a:ea typeface="Inter" pitchFamily="34" charset="-122"/>
+                <a:cs typeface="Inter" pitchFamily="34" charset="-120"/>
+              </a:rPr>
+              <a:t>C10 payee risk on the transfer graph</a:t>
+            </a:r>
+            <a:endParaRPr lang="en-US" sz="1700" dirty="0"/>
+          </a:p>
+        </p:txBody>
+      </p:sp>
+      <p:sp>
+        <p:nvSpPr>
+          <p:cNvPr id="10" name="Shape 7"/>
+          <p:cNvSpPr/>
+          <p:nvPr/>
+        </p:nvSpPr>
+        <p:spPr>
+          <a:xfrm>
+            <a:off x="457200" y="1554480"/>
             <a:ext cx="1920240" cy="1188720"/>
           </a:xfrm>
           <a:prstGeom prst="roundRect">
@@ -14073,13 +15341,13 @@
       </p:sp>
       <p:sp>
         <p:nvSpPr>
-          <p:cNvPr id="9" name="Text 6"/>
-          <p:cNvSpPr/>
-          <p:nvPr/>
-        </p:nvSpPr>
-        <p:spPr>
-          <a:xfrm>
-            <a:off x="594360" y="1280160"/>
+          <p:cNvPr id="11" name="Text 8"/>
+          <p:cNvSpPr/>
+          <p:nvPr/>
+        </p:nvSpPr>
+        <p:spPr>
+          <a:xfrm>
+            <a:off x="594360" y="1645920"/>
             <a:ext cx="1645920" cy="548640"/>
           </a:xfrm>
           <a:prstGeom prst="rect">
@@ -14104,7 +15372,7 @@
                 <a:ea typeface="Inter" pitchFamily="34" charset="-122"/>
                 <a:cs typeface="Inter" pitchFamily="34" charset="-120"/>
               </a:rPr>
-              <a:t>39/39</a:t>
+              <a:t>5/5</a:t>
             </a:r>
             <a:endParaRPr lang="en-US" sz="2600" dirty="0"/>
           </a:p>
@@ -14112,13 +15380,13 @@
       </p:sp>
       <p:sp>
         <p:nvSpPr>
-          <p:cNvPr id="10" name="Text 7"/>
-          <p:cNvSpPr/>
-          <p:nvPr/>
-        </p:nvSpPr>
-        <p:spPr>
-          <a:xfrm>
-            <a:off x="594360" y="1847088"/>
+          <p:cNvPr id="12" name="Text 9"/>
+          <p:cNvSpPr/>
+          <p:nvPr/>
+        </p:nvSpPr>
+        <p:spPr>
+          <a:xfrm>
+            <a:off x="594360" y="2212848"/>
             <a:ext cx="1645920" cy="457200"/>
           </a:xfrm>
           <a:prstGeom prst="rect">
@@ -14143,7 +15411,7 @@
                 <a:ea typeface="Inter" pitchFamily="34" charset="-122"/>
                 <a:cs typeface="Inter" pitchFamily="34" charset="-120"/>
               </a:rPr>
-              <a:t>static attacks stopped</a:t>
+              <a:t>planted leaks found, 847 ₽ a month</a:t>
             </a:r>
             <a:endParaRPr lang="en-US" sz="1050" dirty="0"/>
           </a:p>
@@ -14151,13 +15419,13 @@
       </p:sp>
       <p:sp>
         <p:nvSpPr>
-          <p:cNvPr id="11" name="Shape 8"/>
-          <p:cNvSpPr/>
-          <p:nvPr/>
-        </p:nvSpPr>
-        <p:spPr>
-          <a:xfrm>
-            <a:off x="2560320" y="1188720"/>
+          <p:cNvPr id="13" name="Shape 10"/>
+          <p:cNvSpPr/>
+          <p:nvPr/>
+        </p:nvSpPr>
+        <p:spPr>
+          <a:xfrm>
+            <a:off x="2560320" y="1554480"/>
             <a:ext cx="1920240" cy="1188720"/>
           </a:xfrm>
           <a:prstGeom prst="roundRect">
@@ -14178,13 +15446,13 @@
       </p:sp>
       <p:sp>
         <p:nvSpPr>
-          <p:cNvPr id="12" name="Text 9"/>
-          <p:cNvSpPr/>
-          <p:nvPr/>
-        </p:nvSpPr>
-        <p:spPr>
-          <a:xfrm>
-            <a:off x="2697480" y="1280160"/>
+          <p:cNvPr id="14" name="Text 11"/>
+          <p:cNvSpPr/>
+          <p:nvPr/>
+        </p:nvSpPr>
+        <p:spPr>
+          <a:xfrm>
+            <a:off x="2697480" y="1645920"/>
             <a:ext cx="1645920" cy="548640"/>
           </a:xfrm>
           <a:prstGeom prst="rect">
@@ -14209,7 +15477,7 @@
                 <a:ea typeface="Inter" pitchFamily="34" charset="-122"/>
                 <a:cs typeface="Inter" pitchFamily="34" charset="-120"/>
               </a:rPr>
-              <a:t>5/5</a:t>
+              <a:t>27.3%</a:t>
             </a:r>
             <a:endParaRPr lang="en-US" sz="2600" dirty="0"/>
           </a:p>
@@ -14217,13 +15485,13 @@
       </p:sp>
       <p:sp>
         <p:nvSpPr>
-          <p:cNvPr id="13" name="Text 10"/>
-          <p:cNvSpPr/>
-          <p:nvPr/>
-        </p:nvSpPr>
-        <p:spPr>
-          <a:xfrm>
-            <a:off x="2697480" y="1847088"/>
+          <p:cNvPr id="15" name="Text 12"/>
+          <p:cNvSpPr/>
+          <p:nvPr/>
+        </p:nvSpPr>
+        <p:spPr>
+          <a:xfrm>
+            <a:off x="2697480" y="2212848"/>
             <a:ext cx="1645920" cy="457200"/>
           </a:xfrm>
           <a:prstGeom prst="rect">
@@ -14248,7 +15516,7 @@
                 <a:ea typeface="Inter" pitchFamily="34" charset="-122"/>
                 <a:cs typeface="Inter" pitchFamily="34" charset="-120"/>
               </a:rPr>
-              <a:t>memory-planting attacks stopped</a:t>
+              <a:t>spending forecast error (WAPE), held-out months</a:t>
             </a:r>
             <a:endParaRPr lang="en-US" sz="1050" dirty="0"/>
           </a:p>
@@ -14256,13 +15524,13 @@
       </p:sp>
       <p:sp>
         <p:nvSpPr>
-          <p:cNvPr id="14" name="Shape 11"/>
-          <p:cNvSpPr/>
-          <p:nvPr/>
-        </p:nvSpPr>
-        <p:spPr>
-          <a:xfrm>
-            <a:off x="4663440" y="1188720"/>
+          <p:cNvPr id="16" name="Shape 13"/>
+          <p:cNvSpPr/>
+          <p:nvPr/>
+        </p:nvSpPr>
+        <p:spPr>
+          <a:xfrm>
+            <a:off x="457200" y="2926080"/>
             <a:ext cx="1920240" cy="1188720"/>
           </a:xfrm>
           <a:prstGeom prst="roundRect">
@@ -14283,13 +15551,13 @@
       </p:sp>
       <p:sp>
         <p:nvSpPr>
-          <p:cNvPr id="15" name="Text 12"/>
-          <p:cNvSpPr/>
-          <p:nvPr/>
-        </p:nvSpPr>
-        <p:spPr>
-          <a:xfrm>
-            <a:off x="4800600" y="1280160"/>
+          <p:cNvPr id="17" name="Text 14"/>
+          <p:cNvSpPr/>
+          <p:nvPr/>
+        </p:nvSpPr>
+        <p:spPr>
+          <a:xfrm>
+            <a:off x="594360" y="3017520"/>
             <a:ext cx="1645920" cy="548640"/>
           </a:xfrm>
           <a:prstGeom prst="rect">
@@ -14314,7 +15582,7 @@
                 <a:ea typeface="Inter" pitchFamily="34" charset="-122"/>
                 <a:cs typeface="Inter" pitchFamily="34" charset="-120"/>
               </a:rPr>
-              <a:t>0/360</a:t>
+              <a:t>1/1</a:t>
             </a:r>
             <a:endParaRPr lang="en-US" sz="2600" dirty="0"/>
           </a:p>
@@ -14322,13 +15590,13 @@
       </p:sp>
       <p:sp>
         <p:nvSpPr>
-          <p:cNvPr id="16" name="Text 13"/>
-          <p:cNvSpPr/>
-          <p:nvPr/>
-        </p:nvSpPr>
-        <p:spPr>
-          <a:xfrm>
-            <a:off x="4800600" y="1847088"/>
+          <p:cNvPr id="18" name="Text 15"/>
+          <p:cNvSpPr/>
+          <p:nvPr/>
+        </p:nvSpPr>
+        <p:spPr>
+          <a:xfrm>
+            <a:off x="594360" y="3584448"/>
             <a:ext cx="1645920" cy="457200"/>
           </a:xfrm>
           <a:prstGeom prst="rect">
@@ -14353,7 +15621,7 @@
                 <a:ea typeface="Inter" pitchFamily="34" charset="-122"/>
                 <a:cs typeface="Inter" pitchFamily="34" charset="-120"/>
               </a:rPr>
-              <a:t>adaptive attacker's tries outside the mandate</a:t>
+              <a:t>cash gap caught in time, 0 false alarms in 18 probes</a:t>
             </a:r>
             <a:endParaRPr lang="en-US" sz="1050" dirty="0"/>
           </a:p>
@@ -14361,13 +15629,13 @@
       </p:sp>
       <p:sp>
         <p:nvSpPr>
-          <p:cNvPr id="17" name="Shape 14"/>
-          <p:cNvSpPr/>
-          <p:nvPr/>
-        </p:nvSpPr>
-        <p:spPr>
-          <a:xfrm>
-            <a:off x="6766560" y="1188720"/>
+          <p:cNvPr id="19" name="Shape 16"/>
+          <p:cNvSpPr/>
+          <p:nvPr/>
+        </p:nvSpPr>
+        <p:spPr>
+          <a:xfrm>
+            <a:off x="2560320" y="2926080"/>
             <a:ext cx="1920240" cy="1188720"/>
           </a:xfrm>
           <a:prstGeom prst="roundRect">
@@ -14388,13 +15656,13 @@
       </p:sp>
       <p:sp>
         <p:nvSpPr>
-          <p:cNvPr id="18" name="Text 15"/>
-          <p:cNvSpPr/>
-          <p:nvPr/>
-        </p:nvSpPr>
-        <p:spPr>
-          <a:xfrm>
-            <a:off x="6903720" y="1280160"/>
+          <p:cNvPr id="20" name="Text 17"/>
+          <p:cNvSpPr/>
+          <p:nvPr/>
+        </p:nvSpPr>
+        <p:spPr>
+          <a:xfrm>
+            <a:off x="2697480" y="3017520"/>
             <a:ext cx="1645920" cy="548640"/>
           </a:xfrm>
           <a:prstGeom prst="rect">
@@ -14419,7 +15687,7 @@
                 <a:ea typeface="Inter" pitchFamily="34" charset="-122"/>
                 <a:cs typeface="Inter" pitchFamily="34" charset="-120"/>
               </a:rPr>
-              <a:t>20/21</a:t>
+              <a:t>1/1</a:t>
             </a:r>
             <a:endParaRPr lang="en-US" sz="2600" dirty="0"/>
           </a:p>
@@ -14427,13 +15695,13 @@
       </p:sp>
       <p:sp>
         <p:nvSpPr>
-          <p:cNvPr id="19" name="Text 16"/>
-          <p:cNvSpPr/>
-          <p:nvPr/>
-        </p:nvSpPr>
-        <p:spPr>
-          <a:xfrm>
-            <a:off x="6903720" y="1847088"/>
+          <p:cNvPr id="21" name="Text 18"/>
+          <p:cNvSpPr/>
+          <p:nvPr/>
+        </p:nvSpPr>
+        <p:spPr>
+          <a:xfrm>
+            <a:off x="2697480" y="3584448"/>
             <a:ext cx="1645920" cy="457200"/>
           </a:xfrm>
           <a:prstGeom prst="rect">
@@ -14458,7 +15726,7 @@
                 <a:ea typeface="Inter" pitchFamily="34" charset="-122"/>
                 <a:cs typeface="Inter" pitchFamily="34" charset="-120"/>
               </a:rPr>
-              <a:t>earlier prototype's suite, 1 bounded by the limit</a:t>
+              <a:t>double charge on the same card found</a:t>
             </a:r>
             <a:endParaRPr lang="en-US" sz="1050" dirty="0"/>
           </a:p>
@@ -14466,30 +15734,57 @@
       </p:sp>
       <p:sp>
         <p:nvSpPr>
-          <p:cNvPr id="20" name="Text 17"/>
-          <p:cNvSpPr/>
-          <p:nvPr/>
-        </p:nvSpPr>
-        <p:spPr>
-          <a:xfrm>
-            <a:off x="457200" y="2697480"/>
-            <a:ext cx="3657600" cy="365760"/>
-          </a:xfrm>
-          <a:prstGeom prst="rect">
-            <a:avLst/>
-          </a:prstGeom>
-          <a:noFill/>
-          <a:ln/>
-        </p:spPr>
-        <p:txBody>
-          <a:bodyPr wrap="square" lIns="0" tIns="0" rIns="0" bIns="0" rtlCol="0" anchor="ctr"/>
-          <a:lstStyle/>
-          <a:p>
-            <a:pPr indent="0" marL="0">
-              <a:buNone/>
-            </a:pPr>
-            <a:r>
-              <a:rPr lang="en-US" sz="1600" b="1" dirty="0">
+          <p:cNvPr id="22" name="Shape 19"/>
+          <p:cNvSpPr/>
+          <p:nvPr/>
+        </p:nvSpPr>
+        <p:spPr>
+          <a:xfrm>
+            <a:off x="4663440" y="1554480"/>
+            <a:ext cx="1920240" cy="1188720"/>
+          </a:xfrm>
+          <a:prstGeom prst="roundRect">
+            <a:avLst>
+              <a:gd name="adj" fmla="val 7692"/>
+            </a:avLst>
+          </a:prstGeom>
+          <a:solidFill>
+            <a:srgbClr val="F4F5F7"/>
+          </a:solidFill>
+          <a:ln w="12700">
+            <a:solidFill>
+              <a:srgbClr val="F4F5F7"/>
+            </a:solidFill>
+            <a:prstDash val="solid"/>
+          </a:ln>
+        </p:spPr>
+      </p:sp>
+      <p:sp>
+        <p:nvSpPr>
+          <p:cNvPr id="23" name="Text 20"/>
+          <p:cNvSpPr/>
+          <p:nvPr/>
+        </p:nvSpPr>
+        <p:spPr>
+          <a:xfrm>
+            <a:off x="4800600" y="1645920"/>
+            <a:ext cx="1645920" cy="548640"/>
+          </a:xfrm>
+          <a:prstGeom prst="rect">
+            <a:avLst/>
+          </a:prstGeom>
+          <a:noFill/>
+          <a:ln/>
+        </p:spPr>
+        <p:txBody>
+          <a:bodyPr wrap="square" lIns="0" tIns="0" rIns="0" bIns="0" rtlCol="0" anchor="ctr"/>
+          <a:lstStyle/>
+          <a:p>
+            <a:pPr indent="0" marL="0">
+              <a:buNone/>
+            </a:pPr>
+            <a:r>
+              <a:rPr lang="en-US" sz="2600" b="1" dirty="0">
                 <a:solidFill>
                   <a:srgbClr val="101828"/>
                 </a:solidFill>
@@ -14497,91 +15792,38 @@
                 <a:ea typeface="Inter" pitchFamily="34" charset="-122"/>
                 <a:cs typeface="Inter" pitchFamily="34" charset="-120"/>
               </a:rPr>
-              <a:t>Without the kernel</a:t>
-            </a:r>
-            <a:endParaRPr lang="en-US" sz="1600" dirty="0"/>
-          </a:p>
-        </p:txBody>
-      </p:sp>
-      <p:sp>
-        <p:nvSpPr>
-          <p:cNvPr id="21" name="Text 18"/>
-          <p:cNvSpPr/>
-          <p:nvPr/>
-        </p:nvSpPr>
-        <p:spPr>
-          <a:xfrm>
-            <a:off x="457200" y="3063240"/>
-            <a:ext cx="4023360" cy="411480"/>
-          </a:xfrm>
-          <a:prstGeom prst="rect">
-            <a:avLst/>
-          </a:prstGeom>
-          <a:noFill/>
-          <a:ln/>
-        </p:spPr>
-        <p:txBody>
-          <a:bodyPr wrap="square" lIns="0" tIns="0" rIns="0" bIns="0" rtlCol="0" anchor="ctr"/>
-          <a:lstStyle/>
-          <a:p>
-            <a:pPr indent="0" marL="0">
-              <a:buNone/>
-            </a:pPr>
-            <a:r>
-              <a:rPr lang="en-US" sz="1800" b="1" dirty="0">
-                <a:solidFill>
-                  <a:srgbClr val="B42318"/>
-                </a:solidFill>
-                <a:latin typeface="Inter" pitchFamily="34" charset="0"/>
-                <a:ea typeface="Inter" pitchFamily="34" charset="-122"/>
-                <a:cs typeface="Inter" pitchFamily="34" charset="-120"/>
-              </a:rPr>
-              <a:t>39/39 succeeded · </a:t>
-            </a:r>
-            <a:pPr indent="0" marL="0">
-              <a:buNone/>
-            </a:pPr>
-            <a:r>
-              <a:rPr lang="en-US" sz="1800" b="1" dirty="0">
-                <a:solidFill>
-                  <a:srgbClr val="B42318"/>
-                </a:solidFill>
-                <a:latin typeface="Inter" pitchFamily="34" charset="0"/>
-                <a:ea typeface="Inter" pitchFamily="34" charset="-122"/>
-                <a:cs typeface="Inter" pitchFamily="34" charset="-120"/>
-              </a:rPr>
-              <a:t>532 038.76 ₽ lost</a:t>
-            </a:r>
-            <a:endParaRPr lang="en-US" sz="1800" dirty="0"/>
-          </a:p>
-        </p:txBody>
-      </p:sp>
-      <p:sp>
-        <p:nvSpPr>
-          <p:cNvPr id="22" name="Text 19"/>
-          <p:cNvSpPr/>
-          <p:nvPr/>
-        </p:nvSpPr>
-        <p:spPr>
-          <a:xfrm>
-            <a:off x="457200" y="3611880"/>
-            <a:ext cx="4023360" cy="822960"/>
-          </a:xfrm>
-          <a:prstGeom prst="rect">
-            <a:avLst/>
-          </a:prstGeom>
-          <a:noFill/>
-          <a:ln/>
-        </p:spPr>
-        <p:txBody>
-          <a:bodyPr wrap="square" lIns="0" tIns="0" rIns="0" bIns="0" rtlCol="0" anchor="ctr"/>
-          <a:lstStyle/>
-          <a:p>
-            <a:pPr indent="0" marL="0">
-              <a:buNone/>
-            </a:pPr>
-            <a:r>
-              <a:rPr lang="en-US" sz="1200" dirty="0">
+              <a:t>1.00</a:t>
+            </a:r>
+            <a:endParaRPr lang="en-US" sz="2600" dirty="0"/>
+          </a:p>
+        </p:txBody>
+      </p:sp>
+      <p:sp>
+        <p:nvSpPr>
+          <p:cNvPr id="24" name="Text 21"/>
+          <p:cNvSpPr/>
+          <p:nvPr/>
+        </p:nvSpPr>
+        <p:spPr>
+          <a:xfrm>
+            <a:off x="4800600" y="2212848"/>
+            <a:ext cx="1645920" cy="457200"/>
+          </a:xfrm>
+          <a:prstGeom prst="rect">
+            <a:avLst/>
+          </a:prstGeom>
+          <a:noFill/>
+          <a:ln/>
+        </p:spPr>
+        <p:txBody>
+          <a:bodyPr wrap="square" lIns="0" tIns="0" rIns="0" bIns="0" rtlCol="0" anchor="t"/>
+          <a:lstStyle/>
+          <a:p>
+            <a:pPr indent="0" marL="0">
+              <a:buNone/>
+            </a:pPr>
+            <a:r>
+              <a:rPr lang="en-US" sz="1050" dirty="0">
                 <a:solidFill>
                   <a:srgbClr val="667085"/>
                 </a:solidFill>
@@ -14589,28 +15831,366 @@
                 <a:ea typeface="Inter" pitchFamily="34" charset="-122"/>
                 <a:cs typeface="Inter" pitchFamily="34" charset="-120"/>
               </a:rPr>
-              <a:t>Known risks are listed openly in the security report (K1 to K14): a compromised client device, a colluding analyst, synthetic training data, no SD-JWT yet.</a:t>
-            </a:r>
-            <a:endParaRPr lang="en-US" sz="1200" dirty="0"/>
-          </a:p>
-        </p:txBody>
-      </p:sp>
-      <p:graphicFrame>
-        <p:nvGraphicFramePr>
-          <p:cNvPr id="23" name="Chart 0" descr=""/>
-          <p:cNvGraphicFramePr/>
-          <p:nvPr/>
-        </p:nvGraphicFramePr>
-        <p:xfrm>
-          <a:off x="4663440" y="2606040"/>
-          <a:ext cx="4023360" cy="2011680"/>
-        </p:xfrm>
-        <a:graphic xmlns:a="http://schemas.openxmlformats.org/drawingml/2006/main">
-          <a:graphicData uri="http://schemas.openxmlformats.org/drawingml/2006/chart">
-            <c:chart xmlns:c="http://schemas.openxmlformats.org/drawingml/2006/chart" r:id="rId1"/>
-          </a:graphicData>
-        </a:graphic>
-      </p:graphicFrame>
+              <a:t>ROC-AUC on held-out graphs</a:t>
+            </a:r>
+            <a:endParaRPr lang="en-US" sz="1050" dirty="0"/>
+          </a:p>
+        </p:txBody>
+      </p:sp>
+      <p:sp>
+        <p:nvSpPr>
+          <p:cNvPr id="25" name="Shape 22"/>
+          <p:cNvSpPr/>
+          <p:nvPr/>
+        </p:nvSpPr>
+        <p:spPr>
+          <a:xfrm>
+            <a:off x="6766560" y="1554480"/>
+            <a:ext cx="1920240" cy="1188720"/>
+          </a:xfrm>
+          <a:prstGeom prst="roundRect">
+            <a:avLst>
+              <a:gd name="adj" fmla="val 7692"/>
+            </a:avLst>
+          </a:prstGeom>
+          <a:solidFill>
+            <a:srgbClr val="F4F5F7"/>
+          </a:solidFill>
+          <a:ln w="12700">
+            <a:solidFill>
+              <a:srgbClr val="F4F5F7"/>
+            </a:solidFill>
+            <a:prstDash val="solid"/>
+          </a:ln>
+        </p:spPr>
+      </p:sp>
+      <p:sp>
+        <p:nvSpPr>
+          <p:cNvPr id="26" name="Text 23"/>
+          <p:cNvSpPr/>
+          <p:nvPr/>
+        </p:nvSpPr>
+        <p:spPr>
+          <a:xfrm>
+            <a:off x="6903720" y="1645920"/>
+            <a:ext cx="1645920" cy="548640"/>
+          </a:xfrm>
+          <a:prstGeom prst="rect">
+            <a:avLst/>
+          </a:prstGeom>
+          <a:noFill/>
+          <a:ln/>
+        </p:spPr>
+        <p:txBody>
+          <a:bodyPr wrap="square" lIns="0" tIns="0" rIns="0" bIns="0" rtlCol="0" anchor="ctr"/>
+          <a:lstStyle/>
+          <a:p>
+            <a:pPr indent="0" marL="0">
+              <a:buNone/>
+            </a:pPr>
+            <a:r>
+              <a:rPr lang="en-US" sz="2600" b="1" dirty="0">
+                <a:solidFill>
+                  <a:srgbClr val="101828"/>
+                </a:solidFill>
+                <a:latin typeface="Inter" pitchFamily="34" charset="0"/>
+                <a:ea typeface="Inter" pitchFamily="34" charset="-122"/>
+                <a:cs typeface="Inter" pitchFamily="34" charset="-120"/>
+              </a:rPr>
+              <a:t>0.993</a:t>
+            </a:r>
+            <a:endParaRPr lang="en-US" sz="2600" dirty="0"/>
+          </a:p>
+        </p:txBody>
+      </p:sp>
+      <p:sp>
+        <p:nvSpPr>
+          <p:cNvPr id="27" name="Text 24"/>
+          <p:cNvSpPr/>
+          <p:nvPr/>
+        </p:nvSpPr>
+        <p:spPr>
+          <a:xfrm>
+            <a:off x="6903720" y="2212848"/>
+            <a:ext cx="1645920" cy="457200"/>
+          </a:xfrm>
+          <a:prstGeom prst="rect">
+            <a:avLst/>
+          </a:prstGeom>
+          <a:noFill/>
+          <a:ln/>
+        </p:spPr>
+        <p:txBody>
+          <a:bodyPr wrap="square" lIns="0" tIns="0" rIns="0" bIns="0" rtlCol="0" anchor="t"/>
+          <a:lstStyle/>
+          <a:p>
+            <a:pPr indent="0" marL="0">
+              <a:buNone/>
+            </a:pPr>
+            <a:r>
+              <a:rPr lang="en-US" sz="1050" dirty="0">
+                <a:solidFill>
+                  <a:srgbClr val="667085"/>
+                </a:solidFill>
+                <a:latin typeface="Inter" pitchFamily="34" charset="0"/>
+                <a:ea typeface="Inter" pitchFamily="34" charset="-122"/>
+                <a:cs typeface="Inter" pitchFamily="34" charset="-120"/>
+              </a:rPr>
+              <a:t>precision at threshold 0.7</a:t>
+            </a:r>
+            <a:endParaRPr lang="en-US" sz="1050" dirty="0"/>
+          </a:p>
+        </p:txBody>
+      </p:sp>
+      <p:sp>
+        <p:nvSpPr>
+          <p:cNvPr id="28" name="Shape 25"/>
+          <p:cNvSpPr/>
+          <p:nvPr/>
+        </p:nvSpPr>
+        <p:spPr>
+          <a:xfrm>
+            <a:off x="4663440" y="2926080"/>
+            <a:ext cx="1920240" cy="1188720"/>
+          </a:xfrm>
+          <a:prstGeom prst="roundRect">
+            <a:avLst>
+              <a:gd name="adj" fmla="val 7692"/>
+            </a:avLst>
+          </a:prstGeom>
+          <a:solidFill>
+            <a:srgbClr val="F4F5F7"/>
+          </a:solidFill>
+          <a:ln w="12700">
+            <a:solidFill>
+              <a:srgbClr val="F4F5F7"/>
+            </a:solidFill>
+            <a:prstDash val="solid"/>
+          </a:ln>
+        </p:spPr>
+      </p:sp>
+      <p:sp>
+        <p:nvSpPr>
+          <p:cNvPr id="29" name="Text 26"/>
+          <p:cNvSpPr/>
+          <p:nvPr/>
+        </p:nvSpPr>
+        <p:spPr>
+          <a:xfrm>
+            <a:off x="4800600" y="3017520"/>
+            <a:ext cx="1645920" cy="548640"/>
+          </a:xfrm>
+          <a:prstGeom prst="rect">
+            <a:avLst/>
+          </a:prstGeom>
+          <a:noFill/>
+          <a:ln/>
+        </p:spPr>
+        <p:txBody>
+          <a:bodyPr wrap="square" lIns="0" tIns="0" rIns="0" bIns="0" rtlCol="0" anchor="ctr"/>
+          <a:lstStyle/>
+          <a:p>
+            <a:pPr indent="0" marL="0">
+              <a:buNone/>
+            </a:pPr>
+            <a:r>
+              <a:rPr lang="en-US" sz="2600" b="1" dirty="0">
+                <a:solidFill>
+                  <a:srgbClr val="101828"/>
+                </a:solidFill>
+                <a:latin typeface="Inter" pitchFamily="34" charset="0"/>
+                <a:ea typeface="Inter" pitchFamily="34" charset="-122"/>
+                <a:cs typeface="Inter" pitchFamily="34" charset="-120"/>
+              </a:rPr>
+              <a:t>0.944</a:t>
+            </a:r>
+            <a:endParaRPr lang="en-US" sz="2600" dirty="0"/>
+          </a:p>
+        </p:txBody>
+      </p:sp>
+      <p:sp>
+        <p:nvSpPr>
+          <p:cNvPr id="30" name="Text 27"/>
+          <p:cNvSpPr/>
+          <p:nvPr/>
+        </p:nvSpPr>
+        <p:spPr>
+          <a:xfrm>
+            <a:off x="4800600" y="3584448"/>
+            <a:ext cx="1645920" cy="457200"/>
+          </a:xfrm>
+          <a:prstGeom prst="rect">
+            <a:avLst/>
+          </a:prstGeom>
+          <a:noFill/>
+          <a:ln/>
+        </p:spPr>
+        <p:txBody>
+          <a:bodyPr wrap="square" lIns="0" tIns="0" rIns="0" bIns="0" rtlCol="0" anchor="t"/>
+          <a:lstStyle/>
+          <a:p>
+            <a:pPr indent="0" marL="0">
+              <a:buNone/>
+            </a:pPr>
+            <a:r>
+              <a:rPr lang="en-US" sz="1050" dirty="0">
+                <a:solidFill>
+                  <a:srgbClr val="667085"/>
+                </a:solidFill>
+                <a:latin typeface="Inter" pitchFamily="34" charset="0"/>
+                <a:ea typeface="Inter" pitchFamily="34" charset="-122"/>
+                <a:cs typeface="Inter" pitchFamily="34" charset="-120"/>
+              </a:rPr>
+              <a:t>recall over mule schemes</a:t>
+            </a:r>
+            <a:endParaRPr lang="en-US" sz="1050" dirty="0"/>
+          </a:p>
+        </p:txBody>
+      </p:sp>
+      <p:sp>
+        <p:nvSpPr>
+          <p:cNvPr id="31" name="Shape 28"/>
+          <p:cNvSpPr/>
+          <p:nvPr/>
+        </p:nvSpPr>
+        <p:spPr>
+          <a:xfrm>
+            <a:off x="6766560" y="2926080"/>
+            <a:ext cx="1920240" cy="1188720"/>
+          </a:xfrm>
+          <a:prstGeom prst="roundRect">
+            <a:avLst>
+              <a:gd name="adj" fmla="val 7692"/>
+            </a:avLst>
+          </a:prstGeom>
+          <a:solidFill>
+            <a:srgbClr val="F4F5F7"/>
+          </a:solidFill>
+          <a:ln w="12700">
+            <a:solidFill>
+              <a:srgbClr val="F4F5F7"/>
+            </a:solidFill>
+            <a:prstDash val="solid"/>
+          </a:ln>
+        </p:spPr>
+      </p:sp>
+      <p:sp>
+        <p:nvSpPr>
+          <p:cNvPr id="32" name="Text 29"/>
+          <p:cNvSpPr/>
+          <p:nvPr/>
+        </p:nvSpPr>
+        <p:spPr>
+          <a:xfrm>
+            <a:off x="6903720" y="3017520"/>
+            <a:ext cx="1645920" cy="548640"/>
+          </a:xfrm>
+          <a:prstGeom prst="rect">
+            <a:avLst/>
+          </a:prstGeom>
+          <a:noFill/>
+          <a:ln/>
+        </p:spPr>
+        <p:txBody>
+          <a:bodyPr wrap="square" lIns="0" tIns="0" rIns="0" bIns="0" rtlCol="0" anchor="ctr"/>
+          <a:lstStyle/>
+          <a:p>
+            <a:pPr indent="0" marL="0">
+              <a:buNone/>
+            </a:pPr>
+            <a:r>
+              <a:rPr lang="en-US" sz="2600" b="1" dirty="0">
+                <a:solidFill>
+                  <a:srgbClr val="101828"/>
+                </a:solidFill>
+                <a:latin typeface="Inter" pitchFamily="34" charset="0"/>
+                <a:ea typeface="Inter" pitchFamily="34" charset="-122"/>
+                <a:cs typeface="Inter" pitchFamily="34" charset="-120"/>
+              </a:rPr>
+              <a:t>0</a:t>
+            </a:r>
+            <a:endParaRPr lang="en-US" sz="2600" dirty="0"/>
+          </a:p>
+        </p:txBody>
+      </p:sp>
+      <p:sp>
+        <p:nvSpPr>
+          <p:cNvPr id="33" name="Text 30"/>
+          <p:cNvSpPr/>
+          <p:nvPr/>
+        </p:nvSpPr>
+        <p:spPr>
+          <a:xfrm>
+            <a:off x="6903720" y="3584448"/>
+            <a:ext cx="1645920" cy="457200"/>
+          </a:xfrm>
+          <a:prstGeom prst="rect">
+            <a:avLst/>
+          </a:prstGeom>
+          <a:noFill/>
+          <a:ln/>
+        </p:spPr>
+        <p:txBody>
+          <a:bodyPr wrap="square" lIns="0" tIns="0" rIns="0" bIns="0" rtlCol="0" anchor="t"/>
+          <a:lstStyle/>
+          <a:p>
+            <a:pPr indent="0" marL="0">
+              <a:buNone/>
+            </a:pPr>
+            <a:r>
+              <a:rPr lang="en-US" sz="1050" dirty="0">
+                <a:solidFill>
+                  <a:srgbClr val="667085"/>
+                </a:solidFill>
+                <a:latin typeface="Inter" pitchFamily="34" charset="0"/>
+                <a:ea typeface="Inter" pitchFamily="34" charset="-122"/>
+                <a:cs typeface="Inter" pitchFamily="34" charset="-120"/>
+              </a:rPr>
+              <a:t>false alarms on employers, merchants, landlords</a:t>
+            </a:r>
+            <a:endParaRPr lang="en-US" sz="1050" dirty="0"/>
+          </a:p>
+        </p:txBody>
+      </p:sp>
+      <p:sp>
+        <p:nvSpPr>
+          <p:cNvPr id="34" name="Text 31"/>
+          <p:cNvSpPr/>
+          <p:nvPr/>
+        </p:nvSpPr>
+        <p:spPr>
+          <a:xfrm>
+            <a:off x="4663440" y="4251960"/>
+            <a:ext cx="4023360" cy="457200"/>
+          </a:xfrm>
+          <a:prstGeom prst="rect">
+            <a:avLst/>
+          </a:prstGeom>
+          <a:noFill/>
+          <a:ln/>
+        </p:spPr>
+        <p:txBody>
+          <a:bodyPr wrap="square" lIns="0" tIns="0" rIns="0" bIns="0" rtlCol="0" anchor="ctr"/>
+          <a:lstStyle/>
+          <a:p>
+            <a:pPr indent="0" marL="0">
+              <a:buNone/>
+            </a:pPr>
+            <a:r>
+              <a:rPr lang="en-US" sz="1050" dirty="0">
+                <a:solidFill>
+                  <a:srgbClr val="667085"/>
+                </a:solidFill>
+                <a:latin typeface="Inter" pitchFamily="34" charset="0"/>
+                <a:ea typeface="Inter" pitchFamily="34" charset="-122"/>
+                <a:cs typeface="Inter" pitchFamily="34" charset="-120"/>
+              </a:rPr>
+              <a:t>Synthetic graphs from our generator; real data will score lower. The model can only add a reason to ask.</a:t>
+            </a:r>
+            <a:endParaRPr lang="en-US" sz="1050" dirty="0"/>
+          </a:p>
+        </p:txBody>
+      </p:sp>
     </p:spTree>
   </p:cSld>
   <p:clrMapOvr>

--- a/docs/presentation.pptx
+++ b/docs/presentation.pptx
@@ -18,9 +18,10 @@
     <p:sldId id="266" r:id="rId12"/>
     <p:sldId id="267" r:id="rId13"/>
     <p:sldId id="268" r:id="rId14"/>
+    <p:sldId id="269" r:id="rId15"/>
   </p:sldIdLst>
   <p:notesMasterIdLst>
-    <p:notesMasterId r:id="rId15"/>
+    <p:notesMasterId r:id="rId16"/>
   </p:notesMasterIdLst>
   <p:sldSz cx="9144000" cy="5143500"/>
   <p:notesSz cx="5143500" cy="9144000"/>
@@ -237,7 +238,7 @@
                 <c:formatCode>General</c:formatCode>
                 <c:ptCount val="5"/>
                 <c:pt idx="0">
-                  <c:v>31</c:v>
+                  <c:v>40</c:v>
                 </c:pt>
                 <c:pt idx="1">
                   <c:v>9</c:v>
@@ -426,7 +427,7 @@
                 </a:solidFill>
                 <a:latin typeface="Arial"/>
               </a:rPr>
-              <a:t>₽ per task, one client</a:t>
+              <a:t>US dollars per task, one client</a:t>
             </a:r>
           </a:p>
         </c:rich>
@@ -508,7 +509,7 @@
                     <c:v>How much can I spend today?</c:v>
                   </c:pt>
                   <c:pt idx="5">
-                    <c:v>Can I afford headphones for 15 000?</c:v>
+                    <c:v>Can I afford headphones for $181.05?</c:v>
                   </c:pt>
                   <c:pt idx="6">
                     <c:v>Month review</c:v>
@@ -524,25 +525,25 @@
                 <c:formatCode>General</c:formatCode>
                 <c:ptCount val="7"/>
                 <c:pt idx="0">
-                  <c:v>0.3129</c:v>
+                  <c:v>0.003122</c:v>
                 </c:pt>
                 <c:pt idx="1">
-                  <c:v>0.0222</c:v>
+                  <c:v>0.000222</c:v>
                 </c:pt>
                 <c:pt idx="2">
-                  <c:v>0.0397</c:v>
+                  <c:v>0.000395</c:v>
                 </c:pt>
                 <c:pt idx="3">
-                  <c:v>0.2628</c:v>
+                  <c:v>0.00261</c:v>
                 </c:pt>
                 <c:pt idx="4">
-                  <c:v>0.0321</c:v>
+                  <c:v>0.000306</c:v>
                 </c:pt>
                 <c:pt idx="5">
-                  <c:v>0.0428</c:v>
+                  <c:v>0.000413</c:v>
                 </c:pt>
                 <c:pt idx="6">
-                  <c:v>0.0172</c:v>
+                  <c:v>0.000172</c:v>
                 </c:pt>
               </c:numCache>
             </c:numRef>
@@ -615,7 +616,7 @@
                     <c:v>How much can I spend today?</c:v>
                   </c:pt>
                   <c:pt idx="5">
-                    <c:v>Can I afford headphones for 15 000?</c:v>
+                    <c:v>Can I afford headphones for $181.05?</c:v>
                   </c:pt>
                   <c:pt idx="6">
                     <c:v>Month review</c:v>
@@ -634,22 +635,22 @@
                   <c:v>0</c:v>
                 </c:pt>
                 <c:pt idx="1">
-                  <c:v>0.0222</c:v>
+                  <c:v>0.000222</c:v>
                 </c:pt>
                 <c:pt idx="2">
                   <c:v>0</c:v>
                 </c:pt>
                 <c:pt idx="3">
-                  <c:v>0.1811</c:v>
+                  <c:v>0.001796</c:v>
                 </c:pt>
                 <c:pt idx="4">
-                  <c:v>0.0196</c:v>
+                  <c:v>0.000187</c:v>
                 </c:pt>
                 <c:pt idx="5">
-                  <c:v>0.0301</c:v>
+                  <c:v>0.000286</c:v>
                 </c:pt>
                 <c:pt idx="6">
-                  <c:v>0.0166</c:v>
+                  <c:v>0.000166</c:v>
                 </c:pt>
               </c:numCache>
             </c:numRef>
@@ -1297,7 +1298,7 @@
           <a:p>
             <a:r>
               <a:rPr lang="en-US" dirty="0"/>
-              <a:t>We attacked the kernel four ways. 39 static attacks: fake bills, injected instructions, swapped payees, look-alike merchants, replayed signatures, over-limit requests. All 39 stopped. 5 attacks that try to plant something in the assistant's memory for later: all stopped. An adaptive attacker that learns from the kernel's answers, 10 rounds, 360 attempts: zero payments outside the mandate. And the earlier prototype's suite: 20 of 21 prevented, one bounded by the limit. Without the kernel the same static set lost 532 038.76 ₽.</a:t>
+              <a:t>Two analytical parts, each measured on held-out data. The budget agent found all five planted leaks and the double charge. The spending forecast has a weighted error of about 27 percent on held-out months, and the cash-gap back-test found the real gap with no false alarms. The payee risk model is gradient boosting over 14 features of the bank's transfer graph. On held-out synthetic graphs it scores ROC-AUC 1.0, precision 0.993 and recall 0.944. These are synthetic graphs from our own generator; real bank data will score lower. The point is that the pipeline is in place and the model only adds a reason to ask: it never moves money by itself.</a:t>
             </a:r>
             <a:endParaRPr lang="en-US" dirty="0"/>
           </a:p>
@@ -1385,7 +1386,7 @@
           <a:p>
             <a:r>
               <a:rPr lang="en-US" dirty="0"/>
-              <a:t>Compliance. The self-regulatory code for agent payment apps has three stages; we implement stage one and two, and we do not offer stage three. Whoever provides the payment service is responsible: Guardian is a bank module, only the bank's executor moves money. Know your agent: every agent has a passport checked at every step. Withdrawal of authorisation is one press. Records are immutable and anchored. There is a human fallback and stricter rules for the elderly. And the assistant sells nothing. On the right, our mandates map onto Mastercard Verifiable Intent and Google AP2 concepts. The full tables with where to check each line are in the security report.</a:t>
+              <a:t>We attacked the kernel four ways. 48 static attacks: fake bills, injected instructions, swapped payees, look-alike merchants, replayed signatures, over-limit requests, off-list investment orders. All 48 stopped. 5 attacks that try to plant something in the assistant's memory for later: all stopped. An adaptive attacker that learns from the kernel's answers, 10 rounds, 360 attempts: zero payments outside the mandate. And the earlier prototype's suite: 20 of 21 prevented, one bounded by the limit. Without the kernel the same static set lost $6,546.63.</a:t>
             </a:r>
             <a:endParaRPr lang="en-US" dirty="0"/>
           </a:p>
@@ -1473,7 +1474,7 @@
           <a:p>
             <a:r>
               <a:rPr lang="en-US" dirty="0"/>
-              <a:t>Cost. Models sit on a three-level ladder: rules and templates cost nothing, then a small model, then larger ones only when risk is high. For one client's typical month the first month costs 0.73 rubles in tokens; the next month 0.27, 63.1 percent less, because the repeat payment and the repeated check run from templates with no model call. In the full demo 97.1 percent of the work stays on levels zero and one. At the next-month rate a million clients cost about 270 000 rubles a month. These are token counts on the real prompts with stub answers; a live run will replace the estimate.</a:t>
+              <a:t>Compliance. The Self-Regulatory Convention for Agent Payment Applications has three stages; we implement stage one and two, and we do not offer stage three. Whoever provides the payment service is responsible: Guardian is a bank module, only the bank's executor moves money. Know your agent: every agent has a passport checked at every step. Withdrawal of authorisation is one press. Records are immutable and anchored. There is a human fallback and stricter rules for the elderly. And the assistant sells nothing. On the right, our mandates map onto Mastercard Verifiable Intent and Google AP2 concepts. The full tables with where to check each line are in the security report.</a:t>
             </a:r>
             <a:endParaRPr lang="en-US" dirty="0"/>
           </a:p>
@@ -1561,7 +1562,7 @@
           <a:p>
             <a:r>
               <a:rPr lang="en-US" dirty="0"/>
-              <a:t>To sum up. 48 of 48 functional tasks pass in English, Russian and Chinese, 50 of 50 attacks in the evaluation set are stopped, and the whole repository has an automated test suite that runs in the Docker build. Everything is reproducible from the repository in replay mode without any keys. Next: live runs with real models, anchoring on a public test network, the payee model on real bank graphs, and SD-JWT selective disclosure for mandates. Agents propose; the kernel decides, checks and records. Thank you.</a:t>
+              <a:t>Cost. Models sit on a three-level ladder: rules and templates cost nothing, then a small model, then larger ones only when risk is high. For one client's typical month the first month costs $0.0072 in tokens; the next month $0.0027, 63.3 percent less, because the repeat payment and the repeated check run from templates with no model call. In the full demo 97.6 percent of the work stays on levels zero and one. At the next-month rate a million clients cost about $3,000 a month. These are token counts on the real prompts with stub answers; a live run will replace the estimate.</a:t>
             </a:r>
             <a:endParaRPr lang="en-US" dirty="0"/>
           </a:p>
@@ -1585,6 +1586,94 @@
             <a:fld id="{F7021451-1387-4CA6-816F-3879F97B5CBC}" type="slidenum">
               <a:rPr lang="en-US"/>
               <a:t>13</a:t>
+            </a:fld>
+            <a:endParaRPr lang="en-US"/>
+          </a:p>
+        </p:txBody>
+      </p:sp>
+    </p:spTree>
+    <p:extLst>
+      <p:ext uri="{BB962C8B-B14F-4D97-AF65-F5344CB8AC3E}">
+        <p14:creationId xmlns:p14="http://schemas.microsoft.com/office/powerpoint/2010/main" val="1024086991"/>
+      </p:ext>
+    </p:extLst>
+  </p:cSld>
+  <p:clrMapOvr>
+    <a:masterClrMapping/>
+  </p:clrMapOvr>
+</p:notes>
+</file>
+
+<file path=ppt/notesSlides/notesSlide14.xml><?xml version="1.0" encoding="utf-8"?>
+<p:notes xmlns:a="http://schemas.openxmlformats.org/drawingml/2006/main" xmlns:r="http://schemas.openxmlformats.org/officeDocument/2006/relationships" xmlns:p="http://schemas.openxmlformats.org/presentationml/2006/main">
+  <p:cSld>
+    <p:spTree>
+      <p:nvGrpSpPr>
+        <p:cNvPr id="1" name=""/>
+        <p:cNvGrpSpPr/>
+        <p:nvPr/>
+      </p:nvGrpSpPr>
+      <p:grpSpPr>
+        <a:xfrm>
+          <a:off x="0" y="0"/>
+          <a:ext cx="0" cy="0"/>
+          <a:chOff x="0" y="0"/>
+          <a:chExt cx="0" cy="0"/>
+        </a:xfrm>
+      </p:grpSpPr>
+      <p:sp>
+        <p:nvSpPr>
+          <p:cNvPr id="2" name="Slide Image Placeholder 1"/>
+          <p:cNvSpPr>
+            <a:spLocks noGrp="1" noRot="1" noChangeAspect="1"/>
+          </p:cNvSpPr>
+          <p:nvPr>
+            <p:ph type="sldImg"/>
+          </p:nvPr>
+        </p:nvSpPr>
+        <p:spPr/>
+      </p:sp>
+      <p:sp>
+        <p:nvSpPr>
+          <p:cNvPr id="3" name="Notes Placeholder 2"/>
+          <p:cNvSpPr>
+            <a:spLocks noGrp="1"/>
+          </p:cNvSpPr>
+          <p:nvPr>
+            <p:ph type="body" idx="1"/>
+          </p:nvPr>
+        </p:nvSpPr>
+        <p:spPr/>
+        <p:txBody>
+          <a:bodyPr/>
+          <a:lstStyle/>
+          <a:p>
+            <a:r>
+              <a:rPr lang="en-US" dirty="0"/>
+              <a:t>To sum up. 48 of 48 functional tasks pass in English, Russian and Chinese, 59 of 59 attacks in the evaluation set are stopped, and the whole repository has an automated test suite that runs in the Docker build. Everything is reproducible from the repository in replay mode without any keys. Next: live runs with real models, anchoring on a public test network, the payee model on real bank graphs, and SD-JWT selective disclosure for mandates. Agents propose; the kernel decides, checks and records. Thank you.</a:t>
+            </a:r>
+            <a:endParaRPr lang="en-US" dirty="0"/>
+          </a:p>
+        </p:txBody>
+      </p:sp>
+      <p:sp>
+        <p:nvSpPr>
+          <p:cNvPr id="4" name="Slide Number Placeholder 3"/>
+          <p:cNvSpPr>
+            <a:spLocks noGrp="1"/>
+          </p:cNvSpPr>
+          <p:nvPr>
+            <p:ph type="sldNum" sz="quarter" idx="10"/>
+          </p:nvPr>
+        </p:nvSpPr>
+        <p:spPr/>
+        <p:txBody>
+          <a:bodyPr/>
+          <a:lstStyle/>
+          <a:p>
+            <a:fld id="{F7021451-1387-4CA6-816F-3879F97B5CBC}" type="slidenum">
+              <a:rPr lang="en-US"/>
+              <a:t>14</a:t>
             </a:fld>
             <a:endParaRPr lang="en-US"/>
           </a:p>
@@ -1649,7 +1738,7 @@
           <a:p>
             <a:r>
               <a:rPr lang="en-US" dirty="0"/>
-              <a:t>Agents can now pay. That brings three new problems. First, intent: a model can get the payee or the amount wrong, and nobody can prove what the client actually approved. Second, manipulation: a fake bill, a hidden instruction for AI agents in a document, or a scam call can turn the agent against its owner. Third, accountability: when something goes wrong, there is no record of who authorised what. To make it concrete: we ran our 39 attacks against an agent without our kernel. 39 succeeded and it lost 532 038.76 ₽.</a:t>
+              <a:t>Agents can now pay. That brings three new problems. First, intent: a model can get the payee or the amount wrong, and nobody can prove what the client actually approved. Second, manipulation: a fake bill, a hidden instruction for AI agents in a document, or a scam call can turn the agent against its owner. Third, accountability: when something goes wrong, there is no record of who authorised what. To make it concrete: we ran our 48 attacks against an agent without our kernel. 48 succeeded and it lost $6,546.63.</a:t>
             </a:r>
             <a:endParaRPr lang="en-US" dirty="0"/>
           </a:p>
@@ -1825,7 +1914,7 @@
           <a:p>
             <a:r>
               <a:rPr lang="en-US" dirty="0"/>
-              <a:t>The demo is one month in a sandbox bank with synthetic data. Ten scenarios. Pay a subscription and allow it monthly; cancel one through the merchant's API; find leaks; a double charge; bills where one is fake; a free trial turning paid; a budget with a goal; a 'safe account' scam call; and a risky payee on the transfer graph. Over the month Guardian saved 797 ₽ a month, did 11 things, asked 12 times and stopped 4. The whole run is in the evidence folder: 347 signed journal entries, chain verified.</a:t>
+              <a:t>The demo is one month in a sandbox bank with synthetic data. Ten scenarios. Pay a subscription and allow it monthly; cancel one through the merchant's API; find leaks; a double charge; bills where one is fake; a free trial turning paid; a budget with a goal; a 'safe account' scam call; and a risky payee on the transfer graph. Over the month Guardian saved $9.63 a month, did 13 things, asked 13 times and stopped 6. The whole run is in the evidence folder: 437 signed journal entries, chain verified.</a:t>
             </a:r>
             <a:endParaRPr lang="en-US" dirty="0"/>
           </a:p>
@@ -2177,7 +2266,7 @@
           <a:p>
             <a:r>
               <a:rPr lang="en-US" dirty="0"/>
-              <a:t>Autonomy is earned, and it is lost faster than it is earned. Every kind of task starts at level 1: inside a standing permission an agent may act alone up to 1 000 rubles. Five results in a row that the kernel verified in the bank raise it to level 2. One mistake lowers it a level, and acting outside the signed permission drops it straight to zero. The second axis is the agent itself: its role, model and the hash of its instructions. A mistake is a strike, a scope violation two. Three strikes mean 24 hours of quarantine: the kernel revokes its passports and everything it proposes needs a card. Then probation until five clean results. The client can also press Undo on any payment made alone, and that counts too. In the demo the fifth verified result promotes subscriptions; then a faulty planner tries twice, is stopped twice, and is quarantined. 0 of 2 faulty actions executed. Every change is in the signed journal.</a:t>
+              <a:t>Autonomy is earned, and it is lost faster than it is earned. Every kind of task starts at level 1: inside a standing permission an agent may act alone up to $12.07. Five results in a row that the kernel verified in the bank raise it to level 2. One mistake lowers it a level, and acting outside the signed permission drops it straight to zero. The second axis is the agent itself: its role, model and the hash of its instructions. A mistake is a strike, a scope violation two. Three strikes mean 24 hours of quarantine: the kernel revokes its passports and everything it proposes needs a card. Then probation until five clean results. The client can also press Undo on any payment made alone, and that counts too. In the demo the fifth verified result promotes subscriptions; then a faulty planner tries twice, is stopped twice, and is quarantined. 0 of 2 faulty actions executed. Every change is in the signed journal.</a:t>
             </a:r>
             <a:endParaRPr lang="en-US" dirty="0"/>
           </a:p>
@@ -2265,7 +2354,7 @@
           <a:p>
             <a:r>
               <a:rPr lang="en-US" dirty="0"/>
-              <a:t>Two analytical parts, each measured on held-out data. The budget agent found all five planted leaks and the double charge. The spending forecast has a weighted error of about 27 percent on held-out months, and the cash-gap back-test found the real gap with no false alarms. The payee risk model is gradient boosting over 14 features of the bank's transfer graph. On held-out synthetic graphs it scores ROC-AUC 1.0, precision 0.993 and recall 0.944. These are synthetic graphs from our own generator; real bank data will score lower. The point is that the pipeline is in place and the model only adds a reason to ask: it never moves money by itself.</a:t>
+              <a:t>The client says: invest ten dollars a month in SPY. The agent can only propose the order. The kernel's broker step fetches its own quote and asset record from the broker and checks the order against the client's investment mandate: a short list of broad funds, plain tickers only, so no options, crypto, penny stocks, short selling or margin; $1 to $25 an order inside a $50 investment envelope; any price the agent cites must be within 2 percent of the market; one order per fund a day. The client signs the first order and can allow a monthly plan. The kernel picks the order type by the market session: a market order in regular hours, a limit order in pre market and after hours, otherwise the order waits for the open. Then it reads the order back from the broker and journals the fill. The demo uses a sandbox broker with US market hours; the same code runs on an Alpaca paper account. In the red-team, 9 of 9 attacks on orders are stopped.</a:t>
             </a:r>
             <a:endParaRPr lang="en-US" dirty="0"/>
           </a:p>
@@ -2964,7 +3053,7 @@
                 <a:ea typeface="Inter" pitchFamily="34" charset="-122"/>
                 <a:cs typeface="Inter" pitchFamily="34" charset="-120"/>
               </a:rPr>
-              <a:t>Red-team: what an attacker gets</a:t>
+              <a:t>Budget and payee risk: measured, not claimed</a:t>
             </a:r>
             <a:endParaRPr lang="en-US" sz="2500" dirty="0"/>
           </a:p>
@@ -3108,7 +3197,7 @@
                 <a:ea typeface="Inter" pitchFamily="34" charset="-122"/>
                 <a:cs typeface="Inter" pitchFamily="34" charset="-120"/>
               </a:rPr>
-              <a:t>10 / 13</a:t>
+              <a:t>10 / 14</a:t>
             </a:r>
             <a:endParaRPr lang="en-US" sz="900" dirty="0"/>
           </a:p>
@@ -3116,13 +3205,91 @@
       </p:sp>
       <p:sp>
         <p:nvSpPr>
-          <p:cNvPr id="8" name="Shape 5"/>
-          <p:cNvSpPr/>
-          <p:nvPr/>
-        </p:nvSpPr>
-        <p:spPr>
-          <a:xfrm>
-            <a:off x="457200" y="1188720"/>
+          <p:cNvPr id="8" name="Text 5"/>
+          <p:cNvSpPr/>
+          <p:nvPr/>
+        </p:nvSpPr>
+        <p:spPr>
+          <a:xfrm>
+            <a:off x="457200" y="1097280"/>
+            <a:ext cx="4023360" cy="365760"/>
+          </a:xfrm>
+          <a:prstGeom prst="rect">
+            <a:avLst/>
+          </a:prstGeom>
+          <a:noFill/>
+          <a:ln/>
+        </p:spPr>
+        <p:txBody>
+          <a:bodyPr wrap="square" lIns="0" tIns="0" rIns="0" bIns="0" rtlCol="0" anchor="ctr"/>
+          <a:lstStyle/>
+          <a:p>
+            <a:pPr indent="0" marL="0">
+              <a:buNone/>
+            </a:pPr>
+            <a:r>
+              <a:rPr lang="en-US" sz="1700" b="1" dirty="0">
+                <a:solidFill>
+                  <a:srgbClr val="1D4ED8"/>
+                </a:solidFill>
+                <a:latin typeface="Inter" pitchFamily="34" charset="0"/>
+                <a:ea typeface="Inter" pitchFamily="34" charset="-122"/>
+                <a:cs typeface="Inter" pitchFamily="34" charset="-120"/>
+              </a:rPr>
+              <a:t>C8 budget</a:t>
+            </a:r>
+            <a:endParaRPr lang="en-US" sz="1700" dirty="0"/>
+          </a:p>
+        </p:txBody>
+      </p:sp>
+      <p:sp>
+        <p:nvSpPr>
+          <p:cNvPr id="9" name="Text 6"/>
+          <p:cNvSpPr/>
+          <p:nvPr/>
+        </p:nvSpPr>
+        <p:spPr>
+          <a:xfrm>
+            <a:off x="4663440" y="1097280"/>
+            <a:ext cx="4023360" cy="365760"/>
+          </a:xfrm>
+          <a:prstGeom prst="rect">
+            <a:avLst/>
+          </a:prstGeom>
+          <a:noFill/>
+          <a:ln/>
+        </p:spPr>
+        <p:txBody>
+          <a:bodyPr wrap="square" lIns="0" tIns="0" rIns="0" bIns="0" rtlCol="0" anchor="ctr"/>
+          <a:lstStyle/>
+          <a:p>
+            <a:pPr indent="0" marL="0">
+              <a:buNone/>
+            </a:pPr>
+            <a:r>
+              <a:rPr lang="en-US" sz="1700" b="1" dirty="0">
+                <a:solidFill>
+                  <a:srgbClr val="1D4ED8"/>
+                </a:solidFill>
+                <a:latin typeface="Inter" pitchFamily="34" charset="0"/>
+                <a:ea typeface="Inter" pitchFamily="34" charset="-122"/>
+                <a:cs typeface="Inter" pitchFamily="34" charset="-120"/>
+              </a:rPr>
+              <a:t>C10 payee risk on the transfer graph</a:t>
+            </a:r>
+            <a:endParaRPr lang="en-US" sz="1700" dirty="0"/>
+          </a:p>
+        </p:txBody>
+      </p:sp>
+      <p:sp>
+        <p:nvSpPr>
+          <p:cNvPr id="10" name="Shape 7"/>
+          <p:cNvSpPr/>
+          <p:nvPr/>
+        </p:nvSpPr>
+        <p:spPr>
+          <a:xfrm>
+            <a:off x="457200" y="1554480"/>
             <a:ext cx="1920240" cy="1188720"/>
           </a:xfrm>
           <a:prstGeom prst="roundRect">
@@ -3143,13 +3310,13 @@
       </p:sp>
       <p:sp>
         <p:nvSpPr>
-          <p:cNvPr id="9" name="Text 6"/>
-          <p:cNvSpPr/>
-          <p:nvPr/>
-        </p:nvSpPr>
-        <p:spPr>
-          <a:xfrm>
-            <a:off x="594360" y="1280160"/>
+          <p:cNvPr id="11" name="Text 8"/>
+          <p:cNvSpPr/>
+          <p:nvPr/>
+        </p:nvSpPr>
+        <p:spPr>
+          <a:xfrm>
+            <a:off x="594360" y="1645920"/>
             <a:ext cx="1645920" cy="548640"/>
           </a:xfrm>
           <a:prstGeom prst="rect">
@@ -3174,7 +3341,7 @@
                 <a:ea typeface="Inter" pitchFamily="34" charset="-122"/>
                 <a:cs typeface="Inter" pitchFamily="34" charset="-120"/>
               </a:rPr>
-              <a:t>39/39</a:t>
+              <a:t>5/5</a:t>
             </a:r>
             <a:endParaRPr lang="en-US" sz="2600" dirty="0"/>
           </a:p>
@@ -3182,13 +3349,13 @@
       </p:sp>
       <p:sp>
         <p:nvSpPr>
-          <p:cNvPr id="10" name="Text 7"/>
-          <p:cNvSpPr/>
-          <p:nvPr/>
-        </p:nvSpPr>
-        <p:spPr>
-          <a:xfrm>
-            <a:off x="594360" y="1847088"/>
+          <p:cNvPr id="12" name="Text 9"/>
+          <p:cNvSpPr/>
+          <p:nvPr/>
+        </p:nvSpPr>
+        <p:spPr>
+          <a:xfrm>
+            <a:off x="594360" y="2212848"/>
             <a:ext cx="1645920" cy="457200"/>
           </a:xfrm>
           <a:prstGeom prst="rect">
@@ -3213,7 +3380,7 @@
                 <a:ea typeface="Inter" pitchFamily="34" charset="-122"/>
                 <a:cs typeface="Inter" pitchFamily="34" charset="-120"/>
               </a:rPr>
-              <a:t>static attacks stopped</a:t>
+              <a:t>planted leaks found, $10.23 a month</a:t>
             </a:r>
             <a:endParaRPr lang="en-US" sz="1050" dirty="0"/>
           </a:p>
@@ -3221,13 +3388,13 @@
       </p:sp>
       <p:sp>
         <p:nvSpPr>
-          <p:cNvPr id="11" name="Shape 8"/>
-          <p:cNvSpPr/>
-          <p:nvPr/>
-        </p:nvSpPr>
-        <p:spPr>
-          <a:xfrm>
-            <a:off x="2560320" y="1188720"/>
+          <p:cNvPr id="13" name="Shape 10"/>
+          <p:cNvSpPr/>
+          <p:nvPr/>
+        </p:nvSpPr>
+        <p:spPr>
+          <a:xfrm>
+            <a:off x="2560320" y="1554480"/>
             <a:ext cx="1920240" cy="1188720"/>
           </a:xfrm>
           <a:prstGeom prst="roundRect">
@@ -3248,13 +3415,13 @@
       </p:sp>
       <p:sp>
         <p:nvSpPr>
-          <p:cNvPr id="12" name="Text 9"/>
-          <p:cNvSpPr/>
-          <p:nvPr/>
-        </p:nvSpPr>
-        <p:spPr>
-          <a:xfrm>
-            <a:off x="2697480" y="1280160"/>
+          <p:cNvPr id="14" name="Text 11"/>
+          <p:cNvSpPr/>
+          <p:nvPr/>
+        </p:nvSpPr>
+        <p:spPr>
+          <a:xfrm>
+            <a:off x="2697480" y="1645920"/>
             <a:ext cx="1645920" cy="548640"/>
           </a:xfrm>
           <a:prstGeom prst="rect">
@@ -3279,7 +3446,7 @@
                 <a:ea typeface="Inter" pitchFamily="34" charset="-122"/>
                 <a:cs typeface="Inter" pitchFamily="34" charset="-120"/>
               </a:rPr>
-              <a:t>5/5</a:t>
+              <a:t>27.2%</a:t>
             </a:r>
             <a:endParaRPr lang="en-US" sz="2600" dirty="0"/>
           </a:p>
@@ -3287,13 +3454,13 @@
       </p:sp>
       <p:sp>
         <p:nvSpPr>
-          <p:cNvPr id="13" name="Text 10"/>
-          <p:cNvSpPr/>
-          <p:nvPr/>
-        </p:nvSpPr>
-        <p:spPr>
-          <a:xfrm>
-            <a:off x="2697480" y="1847088"/>
+          <p:cNvPr id="15" name="Text 12"/>
+          <p:cNvSpPr/>
+          <p:nvPr/>
+        </p:nvSpPr>
+        <p:spPr>
+          <a:xfrm>
+            <a:off x="2697480" y="2212848"/>
             <a:ext cx="1645920" cy="457200"/>
           </a:xfrm>
           <a:prstGeom prst="rect">
@@ -3318,7 +3485,7 @@
                 <a:ea typeface="Inter" pitchFamily="34" charset="-122"/>
                 <a:cs typeface="Inter" pitchFamily="34" charset="-120"/>
               </a:rPr>
-              <a:t>memory-planting attacks stopped</a:t>
+              <a:t>spending forecast error (WAPE), held-out months</a:t>
             </a:r>
             <a:endParaRPr lang="en-US" sz="1050" dirty="0"/>
           </a:p>
@@ -3326,13 +3493,13 @@
       </p:sp>
       <p:sp>
         <p:nvSpPr>
-          <p:cNvPr id="14" name="Shape 11"/>
-          <p:cNvSpPr/>
-          <p:nvPr/>
-        </p:nvSpPr>
-        <p:spPr>
-          <a:xfrm>
-            <a:off x="4663440" y="1188720"/>
+          <p:cNvPr id="16" name="Shape 13"/>
+          <p:cNvSpPr/>
+          <p:nvPr/>
+        </p:nvSpPr>
+        <p:spPr>
+          <a:xfrm>
+            <a:off x="457200" y="2926080"/>
             <a:ext cx="1920240" cy="1188720"/>
           </a:xfrm>
           <a:prstGeom prst="roundRect">
@@ -3353,13 +3520,13 @@
       </p:sp>
       <p:sp>
         <p:nvSpPr>
-          <p:cNvPr id="15" name="Text 12"/>
-          <p:cNvSpPr/>
-          <p:nvPr/>
-        </p:nvSpPr>
-        <p:spPr>
-          <a:xfrm>
-            <a:off x="4800600" y="1280160"/>
+          <p:cNvPr id="17" name="Text 14"/>
+          <p:cNvSpPr/>
+          <p:nvPr/>
+        </p:nvSpPr>
+        <p:spPr>
+          <a:xfrm>
+            <a:off x="594360" y="3017520"/>
             <a:ext cx="1645920" cy="548640"/>
           </a:xfrm>
           <a:prstGeom prst="rect">
@@ -3384,7 +3551,7 @@
                 <a:ea typeface="Inter" pitchFamily="34" charset="-122"/>
                 <a:cs typeface="Inter" pitchFamily="34" charset="-120"/>
               </a:rPr>
-              <a:t>0/360</a:t>
+              <a:t>1/1</a:t>
             </a:r>
             <a:endParaRPr lang="en-US" sz="2600" dirty="0"/>
           </a:p>
@@ -3392,13 +3559,13 @@
       </p:sp>
       <p:sp>
         <p:nvSpPr>
-          <p:cNvPr id="16" name="Text 13"/>
-          <p:cNvSpPr/>
-          <p:nvPr/>
-        </p:nvSpPr>
-        <p:spPr>
-          <a:xfrm>
-            <a:off x="4800600" y="1847088"/>
+          <p:cNvPr id="18" name="Text 15"/>
+          <p:cNvSpPr/>
+          <p:nvPr/>
+        </p:nvSpPr>
+        <p:spPr>
+          <a:xfrm>
+            <a:off x="594360" y="3584448"/>
             <a:ext cx="1645920" cy="457200"/>
           </a:xfrm>
           <a:prstGeom prst="rect">
@@ -3423,7 +3590,7 @@
                 <a:ea typeface="Inter" pitchFamily="34" charset="-122"/>
                 <a:cs typeface="Inter" pitchFamily="34" charset="-120"/>
               </a:rPr>
-              <a:t>adaptive attacker's tries outside the mandate</a:t>
+              <a:t>cash gap caught in time, 0 false alarms in 18 probes</a:t>
             </a:r>
             <a:endParaRPr lang="en-US" sz="1050" dirty="0"/>
           </a:p>
@@ -3431,13 +3598,13 @@
       </p:sp>
       <p:sp>
         <p:nvSpPr>
-          <p:cNvPr id="17" name="Shape 14"/>
-          <p:cNvSpPr/>
-          <p:nvPr/>
-        </p:nvSpPr>
-        <p:spPr>
-          <a:xfrm>
-            <a:off x="6766560" y="1188720"/>
+          <p:cNvPr id="19" name="Shape 16"/>
+          <p:cNvSpPr/>
+          <p:nvPr/>
+        </p:nvSpPr>
+        <p:spPr>
+          <a:xfrm>
+            <a:off x="2560320" y="2926080"/>
             <a:ext cx="1920240" cy="1188720"/>
           </a:xfrm>
           <a:prstGeom prst="roundRect">
@@ -3458,13 +3625,13 @@
       </p:sp>
       <p:sp>
         <p:nvSpPr>
-          <p:cNvPr id="18" name="Text 15"/>
-          <p:cNvSpPr/>
-          <p:nvPr/>
-        </p:nvSpPr>
-        <p:spPr>
-          <a:xfrm>
-            <a:off x="6903720" y="1280160"/>
+          <p:cNvPr id="20" name="Text 17"/>
+          <p:cNvSpPr/>
+          <p:nvPr/>
+        </p:nvSpPr>
+        <p:spPr>
+          <a:xfrm>
+            <a:off x="2697480" y="3017520"/>
             <a:ext cx="1645920" cy="548640"/>
           </a:xfrm>
           <a:prstGeom prst="rect">
@@ -3489,7 +3656,7 @@
                 <a:ea typeface="Inter" pitchFamily="34" charset="-122"/>
                 <a:cs typeface="Inter" pitchFamily="34" charset="-120"/>
               </a:rPr>
-              <a:t>20/21</a:t>
+              <a:t>1/1</a:t>
             </a:r>
             <a:endParaRPr lang="en-US" sz="2600" dirty="0"/>
           </a:p>
@@ -3497,13 +3664,13 @@
       </p:sp>
       <p:sp>
         <p:nvSpPr>
-          <p:cNvPr id="19" name="Text 16"/>
-          <p:cNvSpPr/>
-          <p:nvPr/>
-        </p:nvSpPr>
-        <p:spPr>
-          <a:xfrm>
-            <a:off x="6903720" y="1847088"/>
+          <p:cNvPr id="21" name="Text 18"/>
+          <p:cNvSpPr/>
+          <p:nvPr/>
+        </p:nvSpPr>
+        <p:spPr>
+          <a:xfrm>
+            <a:off x="2697480" y="3584448"/>
             <a:ext cx="1645920" cy="457200"/>
           </a:xfrm>
           <a:prstGeom prst="rect">
@@ -3528,7 +3695,7 @@
                 <a:ea typeface="Inter" pitchFamily="34" charset="-122"/>
                 <a:cs typeface="Inter" pitchFamily="34" charset="-120"/>
               </a:rPr>
-              <a:t>earlier prototype's suite, 1 bounded by the limit</a:t>
+              <a:t>double charge on the same card found</a:t>
             </a:r>
             <a:endParaRPr lang="en-US" sz="1050" dirty="0"/>
           </a:p>
@@ -3536,30 +3703,57 @@
       </p:sp>
       <p:sp>
         <p:nvSpPr>
-          <p:cNvPr id="20" name="Text 17"/>
-          <p:cNvSpPr/>
-          <p:nvPr/>
-        </p:nvSpPr>
-        <p:spPr>
-          <a:xfrm>
-            <a:off x="457200" y="2697480"/>
-            <a:ext cx="3657600" cy="365760"/>
-          </a:xfrm>
-          <a:prstGeom prst="rect">
-            <a:avLst/>
-          </a:prstGeom>
-          <a:noFill/>
-          <a:ln/>
-        </p:spPr>
-        <p:txBody>
-          <a:bodyPr wrap="square" lIns="0" tIns="0" rIns="0" bIns="0" rtlCol="0" anchor="ctr"/>
-          <a:lstStyle/>
-          <a:p>
-            <a:pPr indent="0" marL="0">
-              <a:buNone/>
-            </a:pPr>
-            <a:r>
-              <a:rPr lang="en-US" sz="1600" b="1" dirty="0">
+          <p:cNvPr id="22" name="Shape 19"/>
+          <p:cNvSpPr/>
+          <p:nvPr/>
+        </p:nvSpPr>
+        <p:spPr>
+          <a:xfrm>
+            <a:off x="4663440" y="1554480"/>
+            <a:ext cx="1920240" cy="1188720"/>
+          </a:xfrm>
+          <a:prstGeom prst="roundRect">
+            <a:avLst>
+              <a:gd name="adj" fmla="val 7692"/>
+            </a:avLst>
+          </a:prstGeom>
+          <a:solidFill>
+            <a:srgbClr val="F4F5F7"/>
+          </a:solidFill>
+          <a:ln w="12700">
+            <a:solidFill>
+              <a:srgbClr val="F4F5F7"/>
+            </a:solidFill>
+            <a:prstDash val="solid"/>
+          </a:ln>
+        </p:spPr>
+      </p:sp>
+      <p:sp>
+        <p:nvSpPr>
+          <p:cNvPr id="23" name="Text 20"/>
+          <p:cNvSpPr/>
+          <p:nvPr/>
+        </p:nvSpPr>
+        <p:spPr>
+          <a:xfrm>
+            <a:off x="4800600" y="1645920"/>
+            <a:ext cx="1645920" cy="548640"/>
+          </a:xfrm>
+          <a:prstGeom prst="rect">
+            <a:avLst/>
+          </a:prstGeom>
+          <a:noFill/>
+          <a:ln/>
+        </p:spPr>
+        <p:txBody>
+          <a:bodyPr wrap="square" lIns="0" tIns="0" rIns="0" bIns="0" rtlCol="0" anchor="ctr"/>
+          <a:lstStyle/>
+          <a:p>
+            <a:pPr indent="0" marL="0">
+              <a:buNone/>
+            </a:pPr>
+            <a:r>
+              <a:rPr lang="en-US" sz="2600" b="1" dirty="0">
                 <a:solidFill>
                   <a:srgbClr val="101828"/>
                 </a:solidFill>
@@ -3567,91 +3761,38 @@
                 <a:ea typeface="Inter" pitchFamily="34" charset="-122"/>
                 <a:cs typeface="Inter" pitchFamily="34" charset="-120"/>
               </a:rPr>
-              <a:t>Without the kernel</a:t>
-            </a:r>
-            <a:endParaRPr lang="en-US" sz="1600" dirty="0"/>
-          </a:p>
-        </p:txBody>
-      </p:sp>
-      <p:sp>
-        <p:nvSpPr>
-          <p:cNvPr id="21" name="Text 18"/>
-          <p:cNvSpPr/>
-          <p:nvPr/>
-        </p:nvSpPr>
-        <p:spPr>
-          <a:xfrm>
-            <a:off x="457200" y="3063240"/>
-            <a:ext cx="4023360" cy="411480"/>
-          </a:xfrm>
-          <a:prstGeom prst="rect">
-            <a:avLst/>
-          </a:prstGeom>
-          <a:noFill/>
-          <a:ln/>
-        </p:spPr>
-        <p:txBody>
-          <a:bodyPr wrap="square" lIns="0" tIns="0" rIns="0" bIns="0" rtlCol="0" anchor="ctr"/>
-          <a:lstStyle/>
-          <a:p>
-            <a:pPr indent="0" marL="0">
-              <a:buNone/>
-            </a:pPr>
-            <a:r>
-              <a:rPr lang="en-US" sz="1800" b="1" dirty="0">
-                <a:solidFill>
-                  <a:srgbClr val="B42318"/>
-                </a:solidFill>
-                <a:latin typeface="Inter" pitchFamily="34" charset="0"/>
-                <a:ea typeface="Inter" pitchFamily="34" charset="-122"/>
-                <a:cs typeface="Inter" pitchFamily="34" charset="-120"/>
-              </a:rPr>
-              <a:t>39/39 succeeded · </a:t>
-            </a:r>
-            <a:pPr indent="0" marL="0">
-              <a:buNone/>
-            </a:pPr>
-            <a:r>
-              <a:rPr lang="en-US" sz="1800" b="1" dirty="0">
-                <a:solidFill>
-                  <a:srgbClr val="B42318"/>
-                </a:solidFill>
-                <a:latin typeface="Inter" pitchFamily="34" charset="0"/>
-                <a:ea typeface="Inter" pitchFamily="34" charset="-122"/>
-                <a:cs typeface="Inter" pitchFamily="34" charset="-120"/>
-              </a:rPr>
-              <a:t>532 038.76 ₽ lost</a:t>
-            </a:r>
-            <a:endParaRPr lang="en-US" sz="1800" dirty="0"/>
-          </a:p>
-        </p:txBody>
-      </p:sp>
-      <p:sp>
-        <p:nvSpPr>
-          <p:cNvPr id="22" name="Text 19"/>
-          <p:cNvSpPr/>
-          <p:nvPr/>
-        </p:nvSpPr>
-        <p:spPr>
-          <a:xfrm>
-            <a:off x="457200" y="3611880"/>
-            <a:ext cx="4023360" cy="822960"/>
-          </a:xfrm>
-          <a:prstGeom prst="rect">
-            <a:avLst/>
-          </a:prstGeom>
-          <a:noFill/>
-          <a:ln/>
-        </p:spPr>
-        <p:txBody>
-          <a:bodyPr wrap="square" lIns="0" tIns="0" rIns="0" bIns="0" rtlCol="0" anchor="ctr"/>
-          <a:lstStyle/>
-          <a:p>
-            <a:pPr indent="0" marL="0">
-              <a:buNone/>
-            </a:pPr>
-            <a:r>
-              <a:rPr lang="en-US" sz="1200" dirty="0">
+              <a:t>1.00</a:t>
+            </a:r>
+            <a:endParaRPr lang="en-US" sz="2600" dirty="0"/>
+          </a:p>
+        </p:txBody>
+      </p:sp>
+      <p:sp>
+        <p:nvSpPr>
+          <p:cNvPr id="24" name="Text 21"/>
+          <p:cNvSpPr/>
+          <p:nvPr/>
+        </p:nvSpPr>
+        <p:spPr>
+          <a:xfrm>
+            <a:off x="4800600" y="2212848"/>
+            <a:ext cx="1645920" cy="457200"/>
+          </a:xfrm>
+          <a:prstGeom prst="rect">
+            <a:avLst/>
+          </a:prstGeom>
+          <a:noFill/>
+          <a:ln/>
+        </p:spPr>
+        <p:txBody>
+          <a:bodyPr wrap="square" lIns="0" tIns="0" rIns="0" bIns="0" rtlCol="0" anchor="t"/>
+          <a:lstStyle/>
+          <a:p>
+            <a:pPr indent="0" marL="0">
+              <a:buNone/>
+            </a:pPr>
+            <a:r>
+              <a:rPr lang="en-US" sz="1050" dirty="0">
                 <a:solidFill>
                   <a:srgbClr val="667085"/>
                 </a:solidFill>
@@ -3659,28 +3800,366 @@
                 <a:ea typeface="Inter" pitchFamily="34" charset="-122"/>
                 <a:cs typeface="Inter" pitchFamily="34" charset="-120"/>
               </a:rPr>
-              <a:t>Known risks are listed openly in the security report (K1 to K14): a compromised client device, a colluding analyst, synthetic training data, no SD-JWT yet.</a:t>
-            </a:r>
-            <a:endParaRPr lang="en-US" sz="1200" dirty="0"/>
-          </a:p>
-        </p:txBody>
-      </p:sp>
-      <p:graphicFrame>
-        <p:nvGraphicFramePr>
-          <p:cNvPr id="23" name="Chart 0" descr=""/>
-          <p:cNvGraphicFramePr/>
-          <p:nvPr/>
-        </p:nvGraphicFramePr>
-        <p:xfrm>
-          <a:off x="4663440" y="2606040"/>
-          <a:ext cx="4023360" cy="2011680"/>
-        </p:xfrm>
-        <a:graphic xmlns:a="http://schemas.openxmlformats.org/drawingml/2006/main">
-          <a:graphicData uri="http://schemas.openxmlformats.org/drawingml/2006/chart">
-            <c:chart xmlns:c="http://schemas.openxmlformats.org/drawingml/2006/chart" r:id="rId1"/>
-          </a:graphicData>
-        </a:graphic>
-      </p:graphicFrame>
+              <a:t>ROC-AUC on held-out graphs</a:t>
+            </a:r>
+            <a:endParaRPr lang="en-US" sz="1050" dirty="0"/>
+          </a:p>
+        </p:txBody>
+      </p:sp>
+      <p:sp>
+        <p:nvSpPr>
+          <p:cNvPr id="25" name="Shape 22"/>
+          <p:cNvSpPr/>
+          <p:nvPr/>
+        </p:nvSpPr>
+        <p:spPr>
+          <a:xfrm>
+            <a:off x="6766560" y="1554480"/>
+            <a:ext cx="1920240" cy="1188720"/>
+          </a:xfrm>
+          <a:prstGeom prst="roundRect">
+            <a:avLst>
+              <a:gd name="adj" fmla="val 7692"/>
+            </a:avLst>
+          </a:prstGeom>
+          <a:solidFill>
+            <a:srgbClr val="F4F5F7"/>
+          </a:solidFill>
+          <a:ln w="12700">
+            <a:solidFill>
+              <a:srgbClr val="F4F5F7"/>
+            </a:solidFill>
+            <a:prstDash val="solid"/>
+          </a:ln>
+        </p:spPr>
+      </p:sp>
+      <p:sp>
+        <p:nvSpPr>
+          <p:cNvPr id="26" name="Text 23"/>
+          <p:cNvSpPr/>
+          <p:nvPr/>
+        </p:nvSpPr>
+        <p:spPr>
+          <a:xfrm>
+            <a:off x="6903720" y="1645920"/>
+            <a:ext cx="1645920" cy="548640"/>
+          </a:xfrm>
+          <a:prstGeom prst="rect">
+            <a:avLst/>
+          </a:prstGeom>
+          <a:noFill/>
+          <a:ln/>
+        </p:spPr>
+        <p:txBody>
+          <a:bodyPr wrap="square" lIns="0" tIns="0" rIns="0" bIns="0" rtlCol="0" anchor="ctr"/>
+          <a:lstStyle/>
+          <a:p>
+            <a:pPr indent="0" marL="0">
+              <a:buNone/>
+            </a:pPr>
+            <a:r>
+              <a:rPr lang="en-US" sz="2600" b="1" dirty="0">
+                <a:solidFill>
+                  <a:srgbClr val="101828"/>
+                </a:solidFill>
+                <a:latin typeface="Inter" pitchFamily="34" charset="0"/>
+                <a:ea typeface="Inter" pitchFamily="34" charset="-122"/>
+                <a:cs typeface="Inter" pitchFamily="34" charset="-120"/>
+              </a:rPr>
+              <a:t>0.993</a:t>
+            </a:r>
+            <a:endParaRPr lang="en-US" sz="2600" dirty="0"/>
+          </a:p>
+        </p:txBody>
+      </p:sp>
+      <p:sp>
+        <p:nvSpPr>
+          <p:cNvPr id="27" name="Text 24"/>
+          <p:cNvSpPr/>
+          <p:nvPr/>
+        </p:nvSpPr>
+        <p:spPr>
+          <a:xfrm>
+            <a:off x="6903720" y="2212848"/>
+            <a:ext cx="1645920" cy="457200"/>
+          </a:xfrm>
+          <a:prstGeom prst="rect">
+            <a:avLst/>
+          </a:prstGeom>
+          <a:noFill/>
+          <a:ln/>
+        </p:spPr>
+        <p:txBody>
+          <a:bodyPr wrap="square" lIns="0" tIns="0" rIns="0" bIns="0" rtlCol="0" anchor="t"/>
+          <a:lstStyle/>
+          <a:p>
+            <a:pPr indent="0" marL="0">
+              <a:buNone/>
+            </a:pPr>
+            <a:r>
+              <a:rPr lang="en-US" sz="1050" dirty="0">
+                <a:solidFill>
+                  <a:srgbClr val="667085"/>
+                </a:solidFill>
+                <a:latin typeface="Inter" pitchFamily="34" charset="0"/>
+                <a:ea typeface="Inter" pitchFamily="34" charset="-122"/>
+                <a:cs typeface="Inter" pitchFamily="34" charset="-120"/>
+              </a:rPr>
+              <a:t>precision at threshold 0.7</a:t>
+            </a:r>
+            <a:endParaRPr lang="en-US" sz="1050" dirty="0"/>
+          </a:p>
+        </p:txBody>
+      </p:sp>
+      <p:sp>
+        <p:nvSpPr>
+          <p:cNvPr id="28" name="Shape 25"/>
+          <p:cNvSpPr/>
+          <p:nvPr/>
+        </p:nvSpPr>
+        <p:spPr>
+          <a:xfrm>
+            <a:off x="4663440" y="2926080"/>
+            <a:ext cx="1920240" cy="1188720"/>
+          </a:xfrm>
+          <a:prstGeom prst="roundRect">
+            <a:avLst>
+              <a:gd name="adj" fmla="val 7692"/>
+            </a:avLst>
+          </a:prstGeom>
+          <a:solidFill>
+            <a:srgbClr val="F4F5F7"/>
+          </a:solidFill>
+          <a:ln w="12700">
+            <a:solidFill>
+              <a:srgbClr val="F4F5F7"/>
+            </a:solidFill>
+            <a:prstDash val="solid"/>
+          </a:ln>
+        </p:spPr>
+      </p:sp>
+      <p:sp>
+        <p:nvSpPr>
+          <p:cNvPr id="29" name="Text 26"/>
+          <p:cNvSpPr/>
+          <p:nvPr/>
+        </p:nvSpPr>
+        <p:spPr>
+          <a:xfrm>
+            <a:off x="4800600" y="3017520"/>
+            <a:ext cx="1645920" cy="548640"/>
+          </a:xfrm>
+          <a:prstGeom prst="rect">
+            <a:avLst/>
+          </a:prstGeom>
+          <a:noFill/>
+          <a:ln/>
+        </p:spPr>
+        <p:txBody>
+          <a:bodyPr wrap="square" lIns="0" tIns="0" rIns="0" bIns="0" rtlCol="0" anchor="ctr"/>
+          <a:lstStyle/>
+          <a:p>
+            <a:pPr indent="0" marL="0">
+              <a:buNone/>
+            </a:pPr>
+            <a:r>
+              <a:rPr lang="en-US" sz="2600" b="1" dirty="0">
+                <a:solidFill>
+                  <a:srgbClr val="101828"/>
+                </a:solidFill>
+                <a:latin typeface="Inter" pitchFamily="34" charset="0"/>
+                <a:ea typeface="Inter" pitchFamily="34" charset="-122"/>
+                <a:cs typeface="Inter" pitchFamily="34" charset="-120"/>
+              </a:rPr>
+              <a:t>0.944</a:t>
+            </a:r>
+            <a:endParaRPr lang="en-US" sz="2600" dirty="0"/>
+          </a:p>
+        </p:txBody>
+      </p:sp>
+      <p:sp>
+        <p:nvSpPr>
+          <p:cNvPr id="30" name="Text 27"/>
+          <p:cNvSpPr/>
+          <p:nvPr/>
+        </p:nvSpPr>
+        <p:spPr>
+          <a:xfrm>
+            <a:off x="4800600" y="3584448"/>
+            <a:ext cx="1645920" cy="457200"/>
+          </a:xfrm>
+          <a:prstGeom prst="rect">
+            <a:avLst/>
+          </a:prstGeom>
+          <a:noFill/>
+          <a:ln/>
+        </p:spPr>
+        <p:txBody>
+          <a:bodyPr wrap="square" lIns="0" tIns="0" rIns="0" bIns="0" rtlCol="0" anchor="t"/>
+          <a:lstStyle/>
+          <a:p>
+            <a:pPr indent="0" marL="0">
+              <a:buNone/>
+            </a:pPr>
+            <a:r>
+              <a:rPr lang="en-US" sz="1050" dirty="0">
+                <a:solidFill>
+                  <a:srgbClr val="667085"/>
+                </a:solidFill>
+                <a:latin typeface="Inter" pitchFamily="34" charset="0"/>
+                <a:ea typeface="Inter" pitchFamily="34" charset="-122"/>
+                <a:cs typeface="Inter" pitchFamily="34" charset="-120"/>
+              </a:rPr>
+              <a:t>recall over mule schemes</a:t>
+            </a:r>
+            <a:endParaRPr lang="en-US" sz="1050" dirty="0"/>
+          </a:p>
+        </p:txBody>
+      </p:sp>
+      <p:sp>
+        <p:nvSpPr>
+          <p:cNvPr id="31" name="Shape 28"/>
+          <p:cNvSpPr/>
+          <p:nvPr/>
+        </p:nvSpPr>
+        <p:spPr>
+          <a:xfrm>
+            <a:off x="6766560" y="2926080"/>
+            <a:ext cx="1920240" cy="1188720"/>
+          </a:xfrm>
+          <a:prstGeom prst="roundRect">
+            <a:avLst>
+              <a:gd name="adj" fmla="val 7692"/>
+            </a:avLst>
+          </a:prstGeom>
+          <a:solidFill>
+            <a:srgbClr val="F4F5F7"/>
+          </a:solidFill>
+          <a:ln w="12700">
+            <a:solidFill>
+              <a:srgbClr val="F4F5F7"/>
+            </a:solidFill>
+            <a:prstDash val="solid"/>
+          </a:ln>
+        </p:spPr>
+      </p:sp>
+      <p:sp>
+        <p:nvSpPr>
+          <p:cNvPr id="32" name="Text 29"/>
+          <p:cNvSpPr/>
+          <p:nvPr/>
+        </p:nvSpPr>
+        <p:spPr>
+          <a:xfrm>
+            <a:off x="6903720" y="3017520"/>
+            <a:ext cx="1645920" cy="548640"/>
+          </a:xfrm>
+          <a:prstGeom prst="rect">
+            <a:avLst/>
+          </a:prstGeom>
+          <a:noFill/>
+          <a:ln/>
+        </p:spPr>
+        <p:txBody>
+          <a:bodyPr wrap="square" lIns="0" tIns="0" rIns="0" bIns="0" rtlCol="0" anchor="ctr"/>
+          <a:lstStyle/>
+          <a:p>
+            <a:pPr indent="0" marL="0">
+              <a:buNone/>
+            </a:pPr>
+            <a:r>
+              <a:rPr lang="en-US" sz="2600" b="1" dirty="0">
+                <a:solidFill>
+                  <a:srgbClr val="101828"/>
+                </a:solidFill>
+                <a:latin typeface="Inter" pitchFamily="34" charset="0"/>
+                <a:ea typeface="Inter" pitchFamily="34" charset="-122"/>
+                <a:cs typeface="Inter" pitchFamily="34" charset="-120"/>
+              </a:rPr>
+              <a:t>0</a:t>
+            </a:r>
+            <a:endParaRPr lang="en-US" sz="2600" dirty="0"/>
+          </a:p>
+        </p:txBody>
+      </p:sp>
+      <p:sp>
+        <p:nvSpPr>
+          <p:cNvPr id="33" name="Text 30"/>
+          <p:cNvSpPr/>
+          <p:nvPr/>
+        </p:nvSpPr>
+        <p:spPr>
+          <a:xfrm>
+            <a:off x="6903720" y="3584448"/>
+            <a:ext cx="1645920" cy="457200"/>
+          </a:xfrm>
+          <a:prstGeom prst="rect">
+            <a:avLst/>
+          </a:prstGeom>
+          <a:noFill/>
+          <a:ln/>
+        </p:spPr>
+        <p:txBody>
+          <a:bodyPr wrap="square" lIns="0" tIns="0" rIns="0" bIns="0" rtlCol="0" anchor="t"/>
+          <a:lstStyle/>
+          <a:p>
+            <a:pPr indent="0" marL="0">
+              <a:buNone/>
+            </a:pPr>
+            <a:r>
+              <a:rPr lang="en-US" sz="1050" dirty="0">
+                <a:solidFill>
+                  <a:srgbClr val="667085"/>
+                </a:solidFill>
+                <a:latin typeface="Inter" pitchFamily="34" charset="0"/>
+                <a:ea typeface="Inter" pitchFamily="34" charset="-122"/>
+                <a:cs typeface="Inter" pitchFamily="34" charset="-120"/>
+              </a:rPr>
+              <a:t>false alarms on employers, merchants, landlords</a:t>
+            </a:r>
+            <a:endParaRPr lang="en-US" sz="1050" dirty="0"/>
+          </a:p>
+        </p:txBody>
+      </p:sp>
+      <p:sp>
+        <p:nvSpPr>
+          <p:cNvPr id="34" name="Text 31"/>
+          <p:cNvSpPr/>
+          <p:nvPr/>
+        </p:nvSpPr>
+        <p:spPr>
+          <a:xfrm>
+            <a:off x="4663440" y="4251960"/>
+            <a:ext cx="4023360" cy="457200"/>
+          </a:xfrm>
+          <a:prstGeom prst="rect">
+            <a:avLst/>
+          </a:prstGeom>
+          <a:noFill/>
+          <a:ln/>
+        </p:spPr>
+        <p:txBody>
+          <a:bodyPr wrap="square" lIns="0" tIns="0" rIns="0" bIns="0" rtlCol="0" anchor="ctr"/>
+          <a:lstStyle/>
+          <a:p>
+            <a:pPr indent="0" marL="0">
+              <a:buNone/>
+            </a:pPr>
+            <a:r>
+              <a:rPr lang="en-US" sz="1050" dirty="0">
+                <a:solidFill>
+                  <a:srgbClr val="667085"/>
+                </a:solidFill>
+                <a:latin typeface="Inter" pitchFamily="34" charset="0"/>
+                <a:ea typeface="Inter" pitchFamily="34" charset="-122"/>
+                <a:cs typeface="Inter" pitchFamily="34" charset="-120"/>
+              </a:rPr>
+              <a:t>Synthetic graphs from our generator; real data will score lower. The model can only add a reason to ask.</a:t>
+            </a:r>
+            <a:endParaRPr lang="en-US" sz="1050" dirty="0"/>
+          </a:p>
+        </p:txBody>
+      </p:sp>
     </p:spTree>
   </p:cSld>
   <p:clrMapOvr>
@@ -3746,7 +4225,7 @@
                 <a:ea typeface="Inter" pitchFamily="34" charset="-122"/>
                 <a:cs typeface="Inter" pitchFamily="34" charset="-120"/>
               </a:rPr>
-              <a:t>Compliance: 智能体支付应用自律公约 · VI / AP2</a:t>
+              <a:t>Red-team: what an attacker gets</a:t>
             </a:r>
             <a:endParaRPr lang="en-US" sz="2500" dirty="0"/>
           </a:p>
@@ -3890,15 +4369,797 @@
                 <a:ea typeface="Inter" pitchFamily="34" charset="-122"/>
                 <a:cs typeface="Inter" pitchFamily="34" charset="-120"/>
               </a:rPr>
-              <a:t>11 / 13</a:t>
+              <a:t>11 / 14</a:t>
             </a:r>
             <a:endParaRPr lang="en-US" sz="900" dirty="0"/>
+          </a:p>
+        </p:txBody>
+      </p:sp>
+      <p:sp>
+        <p:nvSpPr>
+          <p:cNvPr id="8" name="Shape 5"/>
+          <p:cNvSpPr/>
+          <p:nvPr/>
+        </p:nvSpPr>
+        <p:spPr>
+          <a:xfrm>
+            <a:off x="457200" y="1188720"/>
+            <a:ext cx="1920240" cy="1188720"/>
+          </a:xfrm>
+          <a:prstGeom prst="roundRect">
+            <a:avLst>
+              <a:gd name="adj" fmla="val 7692"/>
+            </a:avLst>
+          </a:prstGeom>
+          <a:solidFill>
+            <a:srgbClr val="F4F5F7"/>
+          </a:solidFill>
+          <a:ln w="12700">
+            <a:solidFill>
+              <a:srgbClr val="F4F5F7"/>
+            </a:solidFill>
+            <a:prstDash val="solid"/>
+          </a:ln>
+        </p:spPr>
+      </p:sp>
+      <p:sp>
+        <p:nvSpPr>
+          <p:cNvPr id="9" name="Text 6"/>
+          <p:cNvSpPr/>
+          <p:nvPr/>
+        </p:nvSpPr>
+        <p:spPr>
+          <a:xfrm>
+            <a:off x="594360" y="1280160"/>
+            <a:ext cx="1645920" cy="548640"/>
+          </a:xfrm>
+          <a:prstGeom prst="rect">
+            <a:avLst/>
+          </a:prstGeom>
+          <a:noFill/>
+          <a:ln/>
+        </p:spPr>
+        <p:txBody>
+          <a:bodyPr wrap="square" lIns="0" tIns="0" rIns="0" bIns="0" rtlCol="0" anchor="ctr"/>
+          <a:lstStyle/>
+          <a:p>
+            <a:pPr indent="0" marL="0">
+              <a:buNone/>
+            </a:pPr>
+            <a:r>
+              <a:rPr lang="en-US" sz="2600" b="1" dirty="0">
+                <a:solidFill>
+                  <a:srgbClr val="101828"/>
+                </a:solidFill>
+                <a:latin typeface="Inter" pitchFamily="34" charset="0"/>
+                <a:ea typeface="Inter" pitchFamily="34" charset="-122"/>
+                <a:cs typeface="Inter" pitchFamily="34" charset="-120"/>
+              </a:rPr>
+              <a:t>48/48</a:t>
+            </a:r>
+            <a:endParaRPr lang="en-US" sz="2600" dirty="0"/>
+          </a:p>
+        </p:txBody>
+      </p:sp>
+      <p:sp>
+        <p:nvSpPr>
+          <p:cNvPr id="10" name="Text 7"/>
+          <p:cNvSpPr/>
+          <p:nvPr/>
+        </p:nvSpPr>
+        <p:spPr>
+          <a:xfrm>
+            <a:off x="594360" y="1847088"/>
+            <a:ext cx="1645920" cy="457200"/>
+          </a:xfrm>
+          <a:prstGeom prst="rect">
+            <a:avLst/>
+          </a:prstGeom>
+          <a:noFill/>
+          <a:ln/>
+        </p:spPr>
+        <p:txBody>
+          <a:bodyPr wrap="square" lIns="0" tIns="0" rIns="0" bIns="0" rtlCol="0" anchor="t"/>
+          <a:lstStyle/>
+          <a:p>
+            <a:pPr indent="0" marL="0">
+              <a:buNone/>
+            </a:pPr>
+            <a:r>
+              <a:rPr lang="en-US" sz="1050" dirty="0">
+                <a:solidFill>
+                  <a:srgbClr val="667085"/>
+                </a:solidFill>
+                <a:latin typeface="Inter" pitchFamily="34" charset="0"/>
+                <a:ea typeface="Inter" pitchFamily="34" charset="-122"/>
+                <a:cs typeface="Inter" pitchFamily="34" charset="-120"/>
+              </a:rPr>
+              <a:t>static attacks stopped</a:t>
+            </a:r>
+            <a:endParaRPr lang="en-US" sz="1050" dirty="0"/>
+          </a:p>
+        </p:txBody>
+      </p:sp>
+      <p:sp>
+        <p:nvSpPr>
+          <p:cNvPr id="11" name="Shape 8"/>
+          <p:cNvSpPr/>
+          <p:nvPr/>
+        </p:nvSpPr>
+        <p:spPr>
+          <a:xfrm>
+            <a:off x="2560320" y="1188720"/>
+            <a:ext cx="1920240" cy="1188720"/>
+          </a:xfrm>
+          <a:prstGeom prst="roundRect">
+            <a:avLst>
+              <a:gd name="adj" fmla="val 7692"/>
+            </a:avLst>
+          </a:prstGeom>
+          <a:solidFill>
+            <a:srgbClr val="F4F5F7"/>
+          </a:solidFill>
+          <a:ln w="12700">
+            <a:solidFill>
+              <a:srgbClr val="F4F5F7"/>
+            </a:solidFill>
+            <a:prstDash val="solid"/>
+          </a:ln>
+        </p:spPr>
+      </p:sp>
+      <p:sp>
+        <p:nvSpPr>
+          <p:cNvPr id="12" name="Text 9"/>
+          <p:cNvSpPr/>
+          <p:nvPr/>
+        </p:nvSpPr>
+        <p:spPr>
+          <a:xfrm>
+            <a:off x="2697480" y="1280160"/>
+            <a:ext cx="1645920" cy="548640"/>
+          </a:xfrm>
+          <a:prstGeom prst="rect">
+            <a:avLst/>
+          </a:prstGeom>
+          <a:noFill/>
+          <a:ln/>
+        </p:spPr>
+        <p:txBody>
+          <a:bodyPr wrap="square" lIns="0" tIns="0" rIns="0" bIns="0" rtlCol="0" anchor="ctr"/>
+          <a:lstStyle/>
+          <a:p>
+            <a:pPr indent="0" marL="0">
+              <a:buNone/>
+            </a:pPr>
+            <a:r>
+              <a:rPr lang="en-US" sz="2600" b="1" dirty="0">
+                <a:solidFill>
+                  <a:srgbClr val="101828"/>
+                </a:solidFill>
+                <a:latin typeface="Inter" pitchFamily="34" charset="0"/>
+                <a:ea typeface="Inter" pitchFamily="34" charset="-122"/>
+                <a:cs typeface="Inter" pitchFamily="34" charset="-120"/>
+              </a:rPr>
+              <a:t>5/5</a:t>
+            </a:r>
+            <a:endParaRPr lang="en-US" sz="2600" dirty="0"/>
+          </a:p>
+        </p:txBody>
+      </p:sp>
+      <p:sp>
+        <p:nvSpPr>
+          <p:cNvPr id="13" name="Text 10"/>
+          <p:cNvSpPr/>
+          <p:nvPr/>
+        </p:nvSpPr>
+        <p:spPr>
+          <a:xfrm>
+            <a:off x="2697480" y="1847088"/>
+            <a:ext cx="1645920" cy="457200"/>
+          </a:xfrm>
+          <a:prstGeom prst="rect">
+            <a:avLst/>
+          </a:prstGeom>
+          <a:noFill/>
+          <a:ln/>
+        </p:spPr>
+        <p:txBody>
+          <a:bodyPr wrap="square" lIns="0" tIns="0" rIns="0" bIns="0" rtlCol="0" anchor="t"/>
+          <a:lstStyle/>
+          <a:p>
+            <a:pPr indent="0" marL="0">
+              <a:buNone/>
+            </a:pPr>
+            <a:r>
+              <a:rPr lang="en-US" sz="1050" dirty="0">
+                <a:solidFill>
+                  <a:srgbClr val="667085"/>
+                </a:solidFill>
+                <a:latin typeface="Inter" pitchFamily="34" charset="0"/>
+                <a:ea typeface="Inter" pitchFamily="34" charset="-122"/>
+                <a:cs typeface="Inter" pitchFamily="34" charset="-120"/>
+              </a:rPr>
+              <a:t>memory-planting attacks stopped</a:t>
+            </a:r>
+            <a:endParaRPr lang="en-US" sz="1050" dirty="0"/>
+          </a:p>
+        </p:txBody>
+      </p:sp>
+      <p:sp>
+        <p:nvSpPr>
+          <p:cNvPr id="14" name="Shape 11"/>
+          <p:cNvSpPr/>
+          <p:nvPr/>
+        </p:nvSpPr>
+        <p:spPr>
+          <a:xfrm>
+            <a:off x="4663440" y="1188720"/>
+            <a:ext cx="1920240" cy="1188720"/>
+          </a:xfrm>
+          <a:prstGeom prst="roundRect">
+            <a:avLst>
+              <a:gd name="adj" fmla="val 7692"/>
+            </a:avLst>
+          </a:prstGeom>
+          <a:solidFill>
+            <a:srgbClr val="F4F5F7"/>
+          </a:solidFill>
+          <a:ln w="12700">
+            <a:solidFill>
+              <a:srgbClr val="F4F5F7"/>
+            </a:solidFill>
+            <a:prstDash val="solid"/>
+          </a:ln>
+        </p:spPr>
+      </p:sp>
+      <p:sp>
+        <p:nvSpPr>
+          <p:cNvPr id="15" name="Text 12"/>
+          <p:cNvSpPr/>
+          <p:nvPr/>
+        </p:nvSpPr>
+        <p:spPr>
+          <a:xfrm>
+            <a:off x="4800600" y="1280160"/>
+            <a:ext cx="1645920" cy="548640"/>
+          </a:xfrm>
+          <a:prstGeom prst="rect">
+            <a:avLst/>
+          </a:prstGeom>
+          <a:noFill/>
+          <a:ln/>
+        </p:spPr>
+        <p:txBody>
+          <a:bodyPr wrap="square" lIns="0" tIns="0" rIns="0" bIns="0" rtlCol="0" anchor="ctr"/>
+          <a:lstStyle/>
+          <a:p>
+            <a:pPr indent="0" marL="0">
+              <a:buNone/>
+            </a:pPr>
+            <a:r>
+              <a:rPr lang="en-US" sz="2600" b="1" dirty="0">
+                <a:solidFill>
+                  <a:srgbClr val="101828"/>
+                </a:solidFill>
+                <a:latin typeface="Inter" pitchFamily="34" charset="0"/>
+                <a:ea typeface="Inter" pitchFamily="34" charset="-122"/>
+                <a:cs typeface="Inter" pitchFamily="34" charset="-120"/>
+              </a:rPr>
+              <a:t>0/360</a:t>
+            </a:r>
+            <a:endParaRPr lang="en-US" sz="2600" dirty="0"/>
+          </a:p>
+        </p:txBody>
+      </p:sp>
+      <p:sp>
+        <p:nvSpPr>
+          <p:cNvPr id="16" name="Text 13"/>
+          <p:cNvSpPr/>
+          <p:nvPr/>
+        </p:nvSpPr>
+        <p:spPr>
+          <a:xfrm>
+            <a:off x="4800600" y="1847088"/>
+            <a:ext cx="1645920" cy="457200"/>
+          </a:xfrm>
+          <a:prstGeom prst="rect">
+            <a:avLst/>
+          </a:prstGeom>
+          <a:noFill/>
+          <a:ln/>
+        </p:spPr>
+        <p:txBody>
+          <a:bodyPr wrap="square" lIns="0" tIns="0" rIns="0" bIns="0" rtlCol="0" anchor="t"/>
+          <a:lstStyle/>
+          <a:p>
+            <a:pPr indent="0" marL="0">
+              <a:buNone/>
+            </a:pPr>
+            <a:r>
+              <a:rPr lang="en-US" sz="1050" dirty="0">
+                <a:solidFill>
+                  <a:srgbClr val="667085"/>
+                </a:solidFill>
+                <a:latin typeface="Inter" pitchFamily="34" charset="0"/>
+                <a:ea typeface="Inter" pitchFamily="34" charset="-122"/>
+                <a:cs typeface="Inter" pitchFamily="34" charset="-120"/>
+              </a:rPr>
+              <a:t>adaptive attacker's tries outside the mandate</a:t>
+            </a:r>
+            <a:endParaRPr lang="en-US" sz="1050" dirty="0"/>
+          </a:p>
+        </p:txBody>
+      </p:sp>
+      <p:sp>
+        <p:nvSpPr>
+          <p:cNvPr id="17" name="Shape 14"/>
+          <p:cNvSpPr/>
+          <p:nvPr/>
+        </p:nvSpPr>
+        <p:spPr>
+          <a:xfrm>
+            <a:off x="6766560" y="1188720"/>
+            <a:ext cx="1920240" cy="1188720"/>
+          </a:xfrm>
+          <a:prstGeom prst="roundRect">
+            <a:avLst>
+              <a:gd name="adj" fmla="val 7692"/>
+            </a:avLst>
+          </a:prstGeom>
+          <a:solidFill>
+            <a:srgbClr val="F4F5F7"/>
+          </a:solidFill>
+          <a:ln w="12700">
+            <a:solidFill>
+              <a:srgbClr val="F4F5F7"/>
+            </a:solidFill>
+            <a:prstDash val="solid"/>
+          </a:ln>
+        </p:spPr>
+      </p:sp>
+      <p:sp>
+        <p:nvSpPr>
+          <p:cNvPr id="18" name="Text 15"/>
+          <p:cNvSpPr/>
+          <p:nvPr/>
+        </p:nvSpPr>
+        <p:spPr>
+          <a:xfrm>
+            <a:off x="6903720" y="1280160"/>
+            <a:ext cx="1645920" cy="548640"/>
+          </a:xfrm>
+          <a:prstGeom prst="rect">
+            <a:avLst/>
+          </a:prstGeom>
+          <a:noFill/>
+          <a:ln/>
+        </p:spPr>
+        <p:txBody>
+          <a:bodyPr wrap="square" lIns="0" tIns="0" rIns="0" bIns="0" rtlCol="0" anchor="ctr"/>
+          <a:lstStyle/>
+          <a:p>
+            <a:pPr indent="0" marL="0">
+              <a:buNone/>
+            </a:pPr>
+            <a:r>
+              <a:rPr lang="en-US" sz="2600" b="1" dirty="0">
+                <a:solidFill>
+                  <a:srgbClr val="101828"/>
+                </a:solidFill>
+                <a:latin typeface="Inter" pitchFamily="34" charset="0"/>
+                <a:ea typeface="Inter" pitchFamily="34" charset="-122"/>
+                <a:cs typeface="Inter" pitchFamily="34" charset="-120"/>
+              </a:rPr>
+              <a:t>20/21</a:t>
+            </a:r>
+            <a:endParaRPr lang="en-US" sz="2600" dirty="0"/>
+          </a:p>
+        </p:txBody>
+      </p:sp>
+      <p:sp>
+        <p:nvSpPr>
+          <p:cNvPr id="19" name="Text 16"/>
+          <p:cNvSpPr/>
+          <p:nvPr/>
+        </p:nvSpPr>
+        <p:spPr>
+          <a:xfrm>
+            <a:off x="6903720" y="1847088"/>
+            <a:ext cx="1645920" cy="457200"/>
+          </a:xfrm>
+          <a:prstGeom prst="rect">
+            <a:avLst/>
+          </a:prstGeom>
+          <a:noFill/>
+          <a:ln/>
+        </p:spPr>
+        <p:txBody>
+          <a:bodyPr wrap="square" lIns="0" tIns="0" rIns="0" bIns="0" rtlCol="0" anchor="t"/>
+          <a:lstStyle/>
+          <a:p>
+            <a:pPr indent="0" marL="0">
+              <a:buNone/>
+            </a:pPr>
+            <a:r>
+              <a:rPr lang="en-US" sz="1050" dirty="0">
+                <a:solidFill>
+                  <a:srgbClr val="667085"/>
+                </a:solidFill>
+                <a:latin typeface="Inter" pitchFamily="34" charset="0"/>
+                <a:ea typeface="Inter" pitchFamily="34" charset="-122"/>
+                <a:cs typeface="Inter" pitchFamily="34" charset="-120"/>
+              </a:rPr>
+              <a:t>earlier prototype's suite, 1 bounded by the limit</a:t>
+            </a:r>
+            <a:endParaRPr lang="en-US" sz="1050" dirty="0"/>
+          </a:p>
+        </p:txBody>
+      </p:sp>
+      <p:sp>
+        <p:nvSpPr>
+          <p:cNvPr id="20" name="Text 17"/>
+          <p:cNvSpPr/>
+          <p:nvPr/>
+        </p:nvSpPr>
+        <p:spPr>
+          <a:xfrm>
+            <a:off x="457200" y="2697480"/>
+            <a:ext cx="3657600" cy="365760"/>
+          </a:xfrm>
+          <a:prstGeom prst="rect">
+            <a:avLst/>
+          </a:prstGeom>
+          <a:noFill/>
+          <a:ln/>
+        </p:spPr>
+        <p:txBody>
+          <a:bodyPr wrap="square" lIns="0" tIns="0" rIns="0" bIns="0" rtlCol="0" anchor="ctr"/>
+          <a:lstStyle/>
+          <a:p>
+            <a:pPr indent="0" marL="0">
+              <a:buNone/>
+            </a:pPr>
+            <a:r>
+              <a:rPr lang="en-US" sz="1600" b="1" dirty="0">
+                <a:solidFill>
+                  <a:srgbClr val="101828"/>
+                </a:solidFill>
+                <a:latin typeface="Inter" pitchFamily="34" charset="0"/>
+                <a:ea typeface="Inter" pitchFamily="34" charset="-122"/>
+                <a:cs typeface="Inter" pitchFamily="34" charset="-120"/>
+              </a:rPr>
+              <a:t>Without the kernel</a:t>
+            </a:r>
+            <a:endParaRPr lang="en-US" sz="1600" dirty="0"/>
+          </a:p>
+        </p:txBody>
+      </p:sp>
+      <p:sp>
+        <p:nvSpPr>
+          <p:cNvPr id="21" name="Text 18"/>
+          <p:cNvSpPr/>
+          <p:nvPr/>
+        </p:nvSpPr>
+        <p:spPr>
+          <a:xfrm>
+            <a:off x="457200" y="3063240"/>
+            <a:ext cx="4023360" cy="411480"/>
+          </a:xfrm>
+          <a:prstGeom prst="rect">
+            <a:avLst/>
+          </a:prstGeom>
+          <a:noFill/>
+          <a:ln/>
+        </p:spPr>
+        <p:txBody>
+          <a:bodyPr wrap="square" lIns="0" tIns="0" rIns="0" bIns="0" rtlCol="0" anchor="ctr"/>
+          <a:lstStyle/>
+          <a:p>
+            <a:pPr indent="0" marL="0">
+              <a:buNone/>
+            </a:pPr>
+            <a:r>
+              <a:rPr lang="en-US" sz="1800" b="1" dirty="0">
+                <a:solidFill>
+                  <a:srgbClr val="B42318"/>
+                </a:solidFill>
+                <a:latin typeface="Inter" pitchFamily="34" charset="0"/>
+                <a:ea typeface="Inter" pitchFamily="34" charset="-122"/>
+                <a:cs typeface="Inter" pitchFamily="34" charset="-120"/>
+              </a:rPr>
+              <a:t>48/48 succeeded · </a:t>
+            </a:r>
+            <a:pPr indent="0" marL="0">
+              <a:buNone/>
+            </a:pPr>
+            <a:r>
+              <a:rPr lang="en-US" sz="1800" b="1" dirty="0">
+                <a:solidFill>
+                  <a:srgbClr val="B42318"/>
+                </a:solidFill>
+                <a:latin typeface="Inter" pitchFamily="34" charset="0"/>
+                <a:ea typeface="Inter" pitchFamily="34" charset="-122"/>
+                <a:cs typeface="Inter" pitchFamily="34" charset="-120"/>
+              </a:rPr>
+              <a:t>$6,546.63 lost</a:t>
+            </a:r>
+            <a:endParaRPr lang="en-US" sz="1800" dirty="0"/>
+          </a:p>
+        </p:txBody>
+      </p:sp>
+      <p:sp>
+        <p:nvSpPr>
+          <p:cNvPr id="22" name="Text 19"/>
+          <p:cNvSpPr/>
+          <p:nvPr/>
+        </p:nvSpPr>
+        <p:spPr>
+          <a:xfrm>
+            <a:off x="457200" y="3611880"/>
+            <a:ext cx="4023360" cy="822960"/>
+          </a:xfrm>
+          <a:prstGeom prst="rect">
+            <a:avLst/>
+          </a:prstGeom>
+          <a:noFill/>
+          <a:ln/>
+        </p:spPr>
+        <p:txBody>
+          <a:bodyPr wrap="square" lIns="0" tIns="0" rIns="0" bIns="0" rtlCol="0" anchor="ctr"/>
+          <a:lstStyle/>
+          <a:p>
+            <a:pPr indent="0" marL="0">
+              <a:buNone/>
+            </a:pPr>
+            <a:r>
+              <a:rPr lang="en-US" sz="1200" dirty="0">
+                <a:solidFill>
+                  <a:srgbClr val="667085"/>
+                </a:solidFill>
+                <a:latin typeface="Inter" pitchFamily="34" charset="0"/>
+                <a:ea typeface="Inter" pitchFamily="34" charset="-122"/>
+                <a:cs typeface="Inter" pitchFamily="34" charset="-120"/>
+              </a:rPr>
+              <a:t>Known risks are listed openly in the security report (K1 to K15): a compromised client device, a colluding analyst, synthetic training data, no SD-JWT yet.</a:t>
+            </a:r>
+            <a:endParaRPr lang="en-US" sz="1200" dirty="0"/>
           </a:p>
         </p:txBody>
       </p:sp>
       <p:graphicFrame>
         <p:nvGraphicFramePr>
-          <p:cNvPr id="12" name="Table 0"/>
+          <p:cNvPr id="23" name="Chart 0" descr=""/>
+          <p:cNvGraphicFramePr/>
+          <p:nvPr/>
+        </p:nvGraphicFramePr>
+        <p:xfrm>
+          <a:off x="4663440" y="2606040"/>
+          <a:ext cx="4023360" cy="2011680"/>
+        </p:xfrm>
+        <a:graphic xmlns:a="http://schemas.openxmlformats.org/drawingml/2006/main">
+          <a:graphicData uri="http://schemas.openxmlformats.org/drawingml/2006/chart">
+            <c:chart xmlns:c="http://schemas.openxmlformats.org/drawingml/2006/chart" r:id="rId1"/>
+          </a:graphicData>
+        </a:graphic>
+      </p:graphicFrame>
+    </p:spTree>
+  </p:cSld>
+  <p:clrMapOvr>
+    <a:masterClrMapping/>
+  </p:clrMapOvr>
+</p:sld>
+</file>
+
+<file path=ppt/slides/slide12.xml><?xml version="1.0" encoding="utf-8"?>
+<p:sld xmlns:a="http://schemas.openxmlformats.org/drawingml/2006/main" xmlns:r="http://schemas.openxmlformats.org/officeDocument/2006/relationships" xmlns:p="http://schemas.openxmlformats.org/presentationml/2006/main">
+  <p:cSld name="Slide 12">
+    <p:bg>
+      <p:bgPr>
+        <a:solidFill>
+          <a:srgbClr val="FFFFFF"/>
+        </a:solidFill>
+      </p:bgPr>
+    </p:bg>
+    <p:spTree>
+      <p:nvGrpSpPr>
+        <p:cNvPr id="1" name=""/>
+        <p:cNvGrpSpPr/>
+        <p:nvPr/>
+      </p:nvGrpSpPr>
+      <p:grpSpPr>
+        <a:xfrm>
+          <a:off x="0" y="0"/>
+          <a:ext cx="0" cy="0"/>
+          <a:chOff x="0" y="0"/>
+          <a:chExt cx="0" cy="0"/>
+        </a:xfrm>
+      </p:grpSpPr>
+      <p:sp>
+        <p:nvSpPr>
+          <p:cNvPr id="2" name="Text 0"/>
+          <p:cNvSpPr/>
+          <p:nvPr/>
+        </p:nvSpPr>
+        <p:spPr>
+          <a:xfrm>
+            <a:off x="457200" y="384048"/>
+            <a:ext cx="8229600" cy="548640"/>
+          </a:xfrm>
+          <a:prstGeom prst="rect">
+            <a:avLst/>
+          </a:prstGeom>
+          <a:noFill/>
+          <a:ln/>
+        </p:spPr>
+        <p:txBody>
+          <a:bodyPr wrap="square" lIns="0" tIns="0" rIns="0" bIns="0" rtlCol="0" anchor="ctr"/>
+          <a:lstStyle/>
+          <a:p>
+            <a:pPr indent="0" marL="0">
+              <a:buNone/>
+            </a:pPr>
+            <a:r>
+              <a:rPr lang="en-US" sz="2100" b="1" dirty="0">
+                <a:solidFill>
+                  <a:srgbClr val="101828"/>
+                </a:solidFill>
+                <a:latin typeface="Inter" pitchFamily="34" charset="0"/>
+                <a:ea typeface="Inter" pitchFamily="34" charset="-122"/>
+                <a:cs typeface="Inter" pitchFamily="34" charset="-120"/>
+              </a:rPr>
+              <a:t>Compliance: the agent payment convention · VI / AP2</a:t>
+            </a:r>
+            <a:endParaRPr lang="en-US" sz="2100" dirty="0"/>
+          </a:p>
+        </p:txBody>
+      </p:sp>
+      <p:sp>
+        <p:nvSpPr>
+          <p:cNvPr id="3" name="Shape 1"/>
+          <p:cNvSpPr/>
+          <p:nvPr/>
+        </p:nvSpPr>
+        <p:spPr>
+          <a:xfrm>
+            <a:off x="457200" y="4754880"/>
+            <a:ext cx="210312" cy="210312"/>
+          </a:xfrm>
+          <a:prstGeom prst="roundRect">
+            <a:avLst>
+              <a:gd name="adj" fmla="val 22000"/>
+            </a:avLst>
+          </a:prstGeom>
+          <a:solidFill>
+            <a:srgbClr val="C2361F"/>
+          </a:solidFill>
+          <a:ln w="12700">
+            <a:solidFill>
+              <a:srgbClr val="C2361F"/>
+            </a:solidFill>
+            <a:prstDash val="solid"/>
+          </a:ln>
+        </p:spPr>
+      </p:sp>
+      <p:sp>
+        <p:nvSpPr>
+          <p:cNvPr id="4" name="Text 2"/>
+          <p:cNvSpPr/>
+          <p:nvPr/>
+        </p:nvSpPr>
+        <p:spPr>
+          <a:xfrm>
+            <a:off x="457200" y="4754880"/>
+            <a:ext cx="210312" cy="210312"/>
+          </a:xfrm>
+          <a:prstGeom prst="rect">
+            <a:avLst/>
+          </a:prstGeom>
+          <a:noFill/>
+          <a:ln/>
+        </p:spPr>
+        <p:txBody>
+          <a:bodyPr wrap="square" lIns="0" tIns="0" rIns="0" bIns="0" rtlCol="0" anchor="ctr"/>
+          <a:lstStyle/>
+          <a:p>
+            <a:pPr algn="ctr" indent="0" marL="0">
+              <a:buNone/>
+            </a:pPr>
+            <a:r>
+              <a:rPr lang="en-US" sz="920" dirty="0">
+                <a:solidFill>
+                  <a:srgbClr val="FFFFFF"/>
+                </a:solidFill>
+                <a:latin typeface="Noto Sans CJK SC" pitchFamily="34" charset="0"/>
+                <a:ea typeface="Noto Sans CJK SC" pitchFamily="34" charset="-122"/>
+                <a:cs typeface="Noto Sans CJK SC" pitchFamily="34" charset="-120"/>
+              </a:rPr>
+              <a:t>守</a:t>
+            </a:r>
+            <a:endParaRPr lang="en-US" sz="920" dirty="0"/>
+          </a:p>
+        </p:txBody>
+      </p:sp>
+      <p:sp>
+        <p:nvSpPr>
+          <p:cNvPr id="5" name="Text 3"/>
+          <p:cNvSpPr/>
+          <p:nvPr/>
+        </p:nvSpPr>
+        <p:spPr>
+          <a:xfrm>
+            <a:off x="731520" y="4754880"/>
+            <a:ext cx="1828800" cy="210312"/>
+          </a:xfrm>
+          <a:prstGeom prst="rect">
+            <a:avLst/>
+          </a:prstGeom>
+          <a:noFill/>
+          <a:ln/>
+        </p:spPr>
+        <p:txBody>
+          <a:bodyPr wrap="square" lIns="0" tIns="0" rIns="0" bIns="0" rtlCol="0" anchor="ctr"/>
+          <a:lstStyle/>
+          <a:p>
+            <a:pPr indent="0" marL="0">
+              <a:buNone/>
+            </a:pPr>
+            <a:r>
+              <a:rPr lang="en-US" sz="900" b="1" dirty="0">
+                <a:solidFill>
+                  <a:srgbClr val="101828"/>
+                </a:solidFill>
+                <a:latin typeface="Inter" pitchFamily="34" charset="0"/>
+                <a:ea typeface="Inter" pitchFamily="34" charset="-122"/>
+                <a:cs typeface="Inter" pitchFamily="34" charset="-120"/>
+              </a:rPr>
+              <a:t>Guardian</a:t>
+            </a:r>
+            <a:endParaRPr lang="en-US" sz="900" dirty="0"/>
+          </a:p>
+        </p:txBody>
+      </p:sp>
+      <p:sp>
+        <p:nvSpPr>
+          <p:cNvPr id="6" name="Text 4"/>
+          <p:cNvSpPr/>
+          <p:nvPr/>
+        </p:nvSpPr>
+        <p:spPr>
+          <a:xfrm>
+            <a:off x="6858000" y="4754880"/>
+            <a:ext cx="1828800" cy="210312"/>
+          </a:xfrm>
+          <a:prstGeom prst="rect">
+            <a:avLst/>
+          </a:prstGeom>
+          <a:noFill/>
+          <a:ln/>
+        </p:spPr>
+        <p:txBody>
+          <a:bodyPr wrap="square" lIns="0" tIns="0" rIns="0" bIns="0" rtlCol="0" anchor="ctr"/>
+          <a:lstStyle/>
+          <a:p>
+            <a:pPr algn="r" indent="0" marL="0">
+              <a:buNone/>
+            </a:pPr>
+            <a:r>
+              <a:rPr lang="en-US" sz="900" dirty="0">
+                <a:solidFill>
+                  <a:srgbClr val="667085"/>
+                </a:solidFill>
+                <a:latin typeface="Inter" pitchFamily="34" charset="0"/>
+                <a:ea typeface="Inter" pitchFamily="34" charset="-122"/>
+                <a:cs typeface="Inter" pitchFamily="34" charset="-120"/>
+              </a:rPr>
+              <a:t>12 / 14</a:t>
+            </a:r>
+            <a:endParaRPr lang="en-US" sz="900" dirty="0"/>
+          </a:p>
+        </p:txBody>
+      </p:sp>
+      <p:graphicFrame>
+        <p:nvGraphicFramePr>
+          <p:cNvPr id="13" name="Table 0"/>
           <p:cNvGraphicFramePr>
             <a:graphicFrameLocks noGrp="1"/>
           </p:cNvGraphicFramePr>
@@ -3940,7 +5201,7 @@
                           <a:ea typeface="Inter" pitchFamily="34" charset="-122"/>
                           <a:cs typeface="Inter" pitchFamily="34" charset="-120"/>
                         </a:rPr>
-                        <a:t>公约 requirement</a:t>
+                        <a:t>Convention requirement</a:t>
                       </a:r>
                       <a:endParaRPr lang="en-US" sz="1000" dirty="0">
                         <a:latin typeface="Inter" charset="0"/>
@@ -5308,7 +6569,7 @@
       </p:graphicFrame>
       <p:graphicFrame>
         <p:nvGraphicFramePr>
-          <p:cNvPr id="23" name="Table 1"/>
+          <p:cNvPr id="25" name="Table 1"/>
           <p:cNvGraphicFramePr>
             <a:graphicFrameLocks noGrp="1"/>
           </p:cNvGraphicFramePr>
@@ -6172,552 +7433,6 @@
 </p:sld>
 </file>
 
-<file path=ppt/slides/slide12.xml><?xml version="1.0" encoding="utf-8"?>
-<p:sld xmlns:a="http://schemas.openxmlformats.org/drawingml/2006/main" xmlns:r="http://schemas.openxmlformats.org/officeDocument/2006/relationships" xmlns:p="http://schemas.openxmlformats.org/presentationml/2006/main">
-  <p:cSld name="Slide 12">
-    <p:bg>
-      <p:bgPr>
-        <a:solidFill>
-          <a:srgbClr val="FFFFFF"/>
-        </a:solidFill>
-      </p:bgPr>
-    </p:bg>
-    <p:spTree>
-      <p:nvGrpSpPr>
-        <p:cNvPr id="1" name=""/>
-        <p:cNvGrpSpPr/>
-        <p:nvPr/>
-      </p:nvGrpSpPr>
-      <p:grpSpPr>
-        <a:xfrm>
-          <a:off x="0" y="0"/>
-          <a:ext cx="0" cy="0"/>
-          <a:chOff x="0" y="0"/>
-          <a:chExt cx="0" cy="0"/>
-        </a:xfrm>
-      </p:grpSpPr>
-      <p:sp>
-        <p:nvSpPr>
-          <p:cNvPr id="2" name="Text 0"/>
-          <p:cNvSpPr/>
-          <p:nvPr/>
-        </p:nvSpPr>
-        <p:spPr>
-          <a:xfrm>
-            <a:off x="457200" y="384048"/>
-            <a:ext cx="8229600" cy="548640"/>
-          </a:xfrm>
-          <a:prstGeom prst="rect">
-            <a:avLst/>
-          </a:prstGeom>
-          <a:noFill/>
-          <a:ln/>
-        </p:spPr>
-        <p:txBody>
-          <a:bodyPr wrap="square" lIns="0" tIns="0" rIns="0" bIns="0" rtlCol="0" anchor="ctr"/>
-          <a:lstStyle/>
-          <a:p>
-            <a:pPr indent="0" marL="0">
-              <a:buNone/>
-            </a:pPr>
-            <a:r>
-              <a:rPr lang="en-US" sz="2500" b="1" dirty="0">
-                <a:solidFill>
-                  <a:srgbClr val="101828"/>
-                </a:solidFill>
-                <a:latin typeface="Inter" pitchFamily="34" charset="0"/>
-                <a:ea typeface="Inter" pitchFamily="34" charset="-122"/>
-                <a:cs typeface="Inter" pitchFamily="34" charset="-120"/>
-              </a:rPr>
-              <a:t>Cost: most of the work needs no large model</a:t>
-            </a:r>
-            <a:endParaRPr lang="en-US" sz="2500" dirty="0"/>
-          </a:p>
-        </p:txBody>
-      </p:sp>
-      <p:sp>
-        <p:nvSpPr>
-          <p:cNvPr id="3" name="Shape 1"/>
-          <p:cNvSpPr/>
-          <p:nvPr/>
-        </p:nvSpPr>
-        <p:spPr>
-          <a:xfrm>
-            <a:off x="457200" y="4754880"/>
-            <a:ext cx="210312" cy="210312"/>
-          </a:xfrm>
-          <a:prstGeom prst="roundRect">
-            <a:avLst>
-              <a:gd name="adj" fmla="val 22000"/>
-            </a:avLst>
-          </a:prstGeom>
-          <a:solidFill>
-            <a:srgbClr val="C2361F"/>
-          </a:solidFill>
-          <a:ln w="12700">
-            <a:solidFill>
-              <a:srgbClr val="C2361F"/>
-            </a:solidFill>
-            <a:prstDash val="solid"/>
-          </a:ln>
-        </p:spPr>
-      </p:sp>
-      <p:sp>
-        <p:nvSpPr>
-          <p:cNvPr id="4" name="Text 2"/>
-          <p:cNvSpPr/>
-          <p:nvPr/>
-        </p:nvSpPr>
-        <p:spPr>
-          <a:xfrm>
-            <a:off x="457200" y="4754880"/>
-            <a:ext cx="210312" cy="210312"/>
-          </a:xfrm>
-          <a:prstGeom prst="rect">
-            <a:avLst/>
-          </a:prstGeom>
-          <a:noFill/>
-          <a:ln/>
-        </p:spPr>
-        <p:txBody>
-          <a:bodyPr wrap="square" lIns="0" tIns="0" rIns="0" bIns="0" rtlCol="0" anchor="ctr"/>
-          <a:lstStyle/>
-          <a:p>
-            <a:pPr algn="ctr" indent="0" marL="0">
-              <a:buNone/>
-            </a:pPr>
-            <a:r>
-              <a:rPr lang="en-US" sz="920" dirty="0">
-                <a:solidFill>
-                  <a:srgbClr val="FFFFFF"/>
-                </a:solidFill>
-                <a:latin typeface="Noto Sans CJK SC" pitchFamily="34" charset="0"/>
-                <a:ea typeface="Noto Sans CJK SC" pitchFamily="34" charset="-122"/>
-                <a:cs typeface="Noto Sans CJK SC" pitchFamily="34" charset="-120"/>
-              </a:rPr>
-              <a:t>守</a:t>
-            </a:r>
-            <a:endParaRPr lang="en-US" sz="920" dirty="0"/>
-          </a:p>
-        </p:txBody>
-      </p:sp>
-      <p:sp>
-        <p:nvSpPr>
-          <p:cNvPr id="5" name="Text 3"/>
-          <p:cNvSpPr/>
-          <p:nvPr/>
-        </p:nvSpPr>
-        <p:spPr>
-          <a:xfrm>
-            <a:off x="731520" y="4754880"/>
-            <a:ext cx="1828800" cy="210312"/>
-          </a:xfrm>
-          <a:prstGeom prst="rect">
-            <a:avLst/>
-          </a:prstGeom>
-          <a:noFill/>
-          <a:ln/>
-        </p:spPr>
-        <p:txBody>
-          <a:bodyPr wrap="square" lIns="0" tIns="0" rIns="0" bIns="0" rtlCol="0" anchor="ctr"/>
-          <a:lstStyle/>
-          <a:p>
-            <a:pPr indent="0" marL="0">
-              <a:buNone/>
-            </a:pPr>
-            <a:r>
-              <a:rPr lang="en-US" sz="900" b="1" dirty="0">
-                <a:solidFill>
-                  <a:srgbClr val="101828"/>
-                </a:solidFill>
-                <a:latin typeface="Inter" pitchFamily="34" charset="0"/>
-                <a:ea typeface="Inter" pitchFamily="34" charset="-122"/>
-                <a:cs typeface="Inter" pitchFamily="34" charset="-120"/>
-              </a:rPr>
-              <a:t>Guardian</a:t>
-            </a:r>
-            <a:endParaRPr lang="en-US" sz="900" dirty="0"/>
-          </a:p>
-        </p:txBody>
-      </p:sp>
-      <p:sp>
-        <p:nvSpPr>
-          <p:cNvPr id="6" name="Text 4"/>
-          <p:cNvSpPr/>
-          <p:nvPr/>
-        </p:nvSpPr>
-        <p:spPr>
-          <a:xfrm>
-            <a:off x="6858000" y="4754880"/>
-            <a:ext cx="1828800" cy="210312"/>
-          </a:xfrm>
-          <a:prstGeom prst="rect">
-            <a:avLst/>
-          </a:prstGeom>
-          <a:noFill/>
-          <a:ln/>
-        </p:spPr>
-        <p:txBody>
-          <a:bodyPr wrap="square" lIns="0" tIns="0" rIns="0" bIns="0" rtlCol="0" anchor="ctr"/>
-          <a:lstStyle/>
-          <a:p>
-            <a:pPr algn="r" indent="0" marL="0">
-              <a:buNone/>
-            </a:pPr>
-            <a:r>
-              <a:rPr lang="en-US" sz="900" dirty="0">
-                <a:solidFill>
-                  <a:srgbClr val="667085"/>
-                </a:solidFill>
-                <a:latin typeface="Inter" pitchFamily="34" charset="0"/>
-                <a:ea typeface="Inter" pitchFamily="34" charset="-122"/>
-                <a:cs typeface="Inter" pitchFamily="34" charset="-120"/>
-              </a:rPr>
-              <a:t>12 / 13</a:t>
-            </a:r>
-            <a:endParaRPr lang="en-US" sz="900" dirty="0"/>
-          </a:p>
-        </p:txBody>
-      </p:sp>
-      <p:graphicFrame>
-        <p:nvGraphicFramePr>
-          <p:cNvPr id="8" name="Chart 0" descr=""/>
-          <p:cNvGraphicFramePr/>
-          <p:nvPr/>
-        </p:nvGraphicFramePr>
-        <p:xfrm>
-          <a:off x="365760" y="1051560"/>
-          <a:ext cx="5120640" cy="3566160"/>
-        </p:xfrm>
-        <a:graphic xmlns:a="http://schemas.openxmlformats.org/drawingml/2006/main">
-          <a:graphicData uri="http://schemas.openxmlformats.org/drawingml/2006/chart">
-            <c:chart xmlns:c="http://schemas.openxmlformats.org/drawingml/2006/chart" r:id="rId1"/>
-          </a:graphicData>
-        </a:graphic>
-      </p:graphicFrame>
-      <p:sp>
-        <p:nvSpPr>
-          <p:cNvPr id="9" name="Shape 5"/>
-          <p:cNvSpPr/>
-          <p:nvPr/>
-        </p:nvSpPr>
-        <p:spPr>
-          <a:xfrm>
-            <a:off x="5760720" y="1097280"/>
-            <a:ext cx="2926080" cy="1188720"/>
-          </a:xfrm>
-          <a:prstGeom prst="roundRect">
-            <a:avLst>
-              <a:gd name="adj" fmla="val 7692"/>
-            </a:avLst>
-          </a:prstGeom>
-          <a:solidFill>
-            <a:srgbClr val="F4F5F7"/>
-          </a:solidFill>
-          <a:ln w="12700">
-            <a:solidFill>
-              <a:srgbClr val="F4F5F7"/>
-            </a:solidFill>
-            <a:prstDash val="solid"/>
-          </a:ln>
-        </p:spPr>
-      </p:sp>
-      <p:sp>
-        <p:nvSpPr>
-          <p:cNvPr id="10" name="Text 6"/>
-          <p:cNvSpPr/>
-          <p:nvPr/>
-        </p:nvSpPr>
-        <p:spPr>
-          <a:xfrm>
-            <a:off x="5897880" y="1188720"/>
-            <a:ext cx="2651760" cy="548640"/>
-          </a:xfrm>
-          <a:prstGeom prst="rect">
-            <a:avLst/>
-          </a:prstGeom>
-          <a:noFill/>
-          <a:ln/>
-        </p:spPr>
-        <p:txBody>
-          <a:bodyPr wrap="square" lIns="0" tIns="0" rIns="0" bIns="0" rtlCol="0" anchor="ctr"/>
-          <a:lstStyle/>
-          <a:p>
-            <a:pPr indent="0" marL="0">
-              <a:buNone/>
-            </a:pPr>
-            <a:r>
-              <a:rPr lang="en-US" sz="2000" b="1" dirty="0">
-                <a:solidFill>
-                  <a:srgbClr val="101828"/>
-                </a:solidFill>
-                <a:latin typeface="Inter" pitchFamily="34" charset="0"/>
-                <a:ea typeface="Inter" pitchFamily="34" charset="-122"/>
-                <a:cs typeface="Inter" pitchFamily="34" charset="-120"/>
-              </a:rPr>
-              <a:t>0.73 → 0.27 ₽</a:t>
-            </a:r>
-            <a:endParaRPr lang="en-US" sz="2000" dirty="0"/>
-          </a:p>
-        </p:txBody>
-      </p:sp>
-      <p:sp>
-        <p:nvSpPr>
-          <p:cNvPr id="11" name="Text 7"/>
-          <p:cNvSpPr/>
-          <p:nvPr/>
-        </p:nvSpPr>
-        <p:spPr>
-          <a:xfrm>
-            <a:off x="5897880" y="1755648"/>
-            <a:ext cx="2651760" cy="457200"/>
-          </a:xfrm>
-          <a:prstGeom prst="rect">
-            <a:avLst/>
-          </a:prstGeom>
-          <a:noFill/>
-          <a:ln/>
-        </p:spPr>
-        <p:txBody>
-          <a:bodyPr wrap="square" lIns="0" tIns="0" rIns="0" bIns="0" rtlCol="0" anchor="t"/>
-          <a:lstStyle/>
-          <a:p>
-            <a:pPr indent="0" marL="0">
-              <a:buNone/>
-            </a:pPr>
-            <a:r>
-              <a:rPr lang="en-US" sz="1050" dirty="0">
-                <a:solidFill>
-                  <a:srgbClr val="667085"/>
-                </a:solidFill>
-                <a:latin typeface="Inter" pitchFamily="34" charset="0"/>
-                <a:ea typeface="Inter" pitchFamily="34" charset="-122"/>
-                <a:cs typeface="Inter" pitchFamily="34" charset="-120"/>
-              </a:rPr>
-              <a:t>one client's month, 63% less in the second</a:t>
-            </a:r>
-            <a:endParaRPr lang="en-US" sz="1050" dirty="0"/>
-          </a:p>
-        </p:txBody>
-      </p:sp>
-      <p:sp>
-        <p:nvSpPr>
-          <p:cNvPr id="12" name="Shape 8"/>
-          <p:cNvSpPr/>
-          <p:nvPr/>
-        </p:nvSpPr>
-        <p:spPr>
-          <a:xfrm>
-            <a:off x="5760720" y="2423160"/>
-            <a:ext cx="2926080" cy="1188720"/>
-          </a:xfrm>
-          <a:prstGeom prst="roundRect">
-            <a:avLst>
-              <a:gd name="adj" fmla="val 7692"/>
-            </a:avLst>
-          </a:prstGeom>
-          <a:solidFill>
-            <a:srgbClr val="F4F5F7"/>
-          </a:solidFill>
-          <a:ln w="12700">
-            <a:solidFill>
-              <a:srgbClr val="F4F5F7"/>
-            </a:solidFill>
-            <a:prstDash val="solid"/>
-          </a:ln>
-        </p:spPr>
-      </p:sp>
-      <p:sp>
-        <p:nvSpPr>
-          <p:cNvPr id="13" name="Text 9"/>
-          <p:cNvSpPr/>
-          <p:nvPr/>
-        </p:nvSpPr>
-        <p:spPr>
-          <a:xfrm>
-            <a:off x="5897880" y="2514600"/>
-            <a:ext cx="2651760" cy="548640"/>
-          </a:xfrm>
-          <a:prstGeom prst="rect">
-            <a:avLst/>
-          </a:prstGeom>
-          <a:noFill/>
-          <a:ln/>
-        </p:spPr>
-        <p:txBody>
-          <a:bodyPr wrap="square" lIns="0" tIns="0" rIns="0" bIns="0" rtlCol="0" anchor="ctr"/>
-          <a:lstStyle/>
-          <a:p>
-            <a:pPr indent="0" marL="0">
-              <a:buNone/>
-            </a:pPr>
-            <a:r>
-              <a:rPr lang="en-US" sz="2600" b="1" dirty="0">
-                <a:solidFill>
-                  <a:srgbClr val="101828"/>
-                </a:solidFill>
-                <a:latin typeface="Inter" pitchFamily="34" charset="0"/>
-                <a:ea typeface="Inter" pitchFamily="34" charset="-122"/>
-                <a:cs typeface="Inter" pitchFamily="34" charset="-120"/>
-              </a:rPr>
-              <a:t>97.1%</a:t>
-            </a:r>
-            <a:endParaRPr lang="en-US" sz="2600" dirty="0"/>
-          </a:p>
-        </p:txBody>
-      </p:sp>
-      <p:sp>
-        <p:nvSpPr>
-          <p:cNvPr id="14" name="Text 10"/>
-          <p:cNvSpPr/>
-          <p:nvPr/>
-        </p:nvSpPr>
-        <p:spPr>
-          <a:xfrm>
-            <a:off x="5897880" y="3081528"/>
-            <a:ext cx="2651760" cy="457200"/>
-          </a:xfrm>
-          <a:prstGeom prst="rect">
-            <a:avLst/>
-          </a:prstGeom>
-          <a:noFill/>
-          <a:ln/>
-        </p:spPr>
-        <p:txBody>
-          <a:bodyPr wrap="square" lIns="0" tIns="0" rIns="0" bIns="0" rtlCol="0" anchor="t"/>
-          <a:lstStyle/>
-          <a:p>
-            <a:pPr indent="0" marL="0">
-              <a:buNone/>
-            </a:pPr>
-            <a:r>
-              <a:rPr lang="en-US" sz="1050" dirty="0">
-                <a:solidFill>
-                  <a:srgbClr val="667085"/>
-                </a:solidFill>
-                <a:latin typeface="Inter" pitchFamily="34" charset="0"/>
-                <a:ea typeface="Inter" pitchFamily="34" charset="-122"/>
-                <a:cs typeface="Inter" pitchFamily="34" charset="-120"/>
-              </a:rPr>
-              <a:t>of work on levels 0 and 1 (rules, templates, small model)</a:t>
-            </a:r>
-            <a:endParaRPr lang="en-US" sz="1050" dirty="0"/>
-          </a:p>
-        </p:txBody>
-      </p:sp>
-      <p:sp>
-        <p:nvSpPr>
-          <p:cNvPr id="15" name="Shape 11"/>
-          <p:cNvSpPr/>
-          <p:nvPr/>
-        </p:nvSpPr>
-        <p:spPr>
-          <a:xfrm>
-            <a:off x="5760720" y="3749040"/>
-            <a:ext cx="2926080" cy="1188720"/>
-          </a:xfrm>
-          <a:prstGeom prst="roundRect">
-            <a:avLst>
-              <a:gd name="adj" fmla="val 7692"/>
-            </a:avLst>
-          </a:prstGeom>
-          <a:solidFill>
-            <a:srgbClr val="F4F5F7"/>
-          </a:solidFill>
-          <a:ln w="12700">
-            <a:solidFill>
-              <a:srgbClr val="F4F5F7"/>
-            </a:solidFill>
-            <a:prstDash val="solid"/>
-          </a:ln>
-        </p:spPr>
-      </p:sp>
-      <p:sp>
-        <p:nvSpPr>
-          <p:cNvPr id="16" name="Text 12"/>
-          <p:cNvSpPr/>
-          <p:nvPr/>
-        </p:nvSpPr>
-        <p:spPr>
-          <a:xfrm>
-            <a:off x="5897880" y="3840480"/>
-            <a:ext cx="2651760" cy="548640"/>
-          </a:xfrm>
-          <a:prstGeom prst="rect">
-            <a:avLst/>
-          </a:prstGeom>
-          <a:noFill/>
-          <a:ln/>
-        </p:spPr>
-        <p:txBody>
-          <a:bodyPr wrap="square" lIns="0" tIns="0" rIns="0" bIns="0" rtlCol="0" anchor="ctr"/>
-          <a:lstStyle/>
-          <a:p>
-            <a:pPr indent="0" marL="0">
-              <a:buNone/>
-            </a:pPr>
-            <a:r>
-              <a:rPr lang="en-US" sz="2600" b="1" dirty="0">
-                <a:solidFill>
-                  <a:srgbClr val="101828"/>
-                </a:solidFill>
-                <a:latin typeface="Inter" pitchFamily="34" charset="0"/>
-                <a:ea typeface="Inter" pitchFamily="34" charset="-122"/>
-                <a:cs typeface="Inter" pitchFamily="34" charset="-120"/>
-              </a:rPr>
-              <a:t>≈ 270 000 ₽</a:t>
-            </a:r>
-            <a:endParaRPr lang="en-US" sz="2600" dirty="0"/>
-          </a:p>
-        </p:txBody>
-      </p:sp>
-      <p:sp>
-        <p:nvSpPr>
-          <p:cNvPr id="17" name="Text 13"/>
-          <p:cNvSpPr/>
-          <p:nvPr/>
-        </p:nvSpPr>
-        <p:spPr>
-          <a:xfrm>
-            <a:off x="5897880" y="4407408"/>
-            <a:ext cx="2651760" cy="457200"/>
-          </a:xfrm>
-          <a:prstGeom prst="rect">
-            <a:avLst/>
-          </a:prstGeom>
-          <a:noFill/>
-          <a:ln/>
-        </p:spPr>
-        <p:txBody>
-          <a:bodyPr wrap="square" lIns="0" tIns="0" rIns="0" bIns="0" rtlCol="0" anchor="t"/>
-          <a:lstStyle/>
-          <a:p>
-            <a:pPr indent="0" marL="0">
-              <a:buNone/>
-            </a:pPr>
-            <a:r>
-              <a:rPr lang="en-US" sz="1050" dirty="0">
-                <a:solidFill>
-                  <a:srgbClr val="667085"/>
-                </a:solidFill>
-                <a:latin typeface="Inter" pitchFamily="34" charset="0"/>
-                <a:ea typeface="Inter" pitchFamily="34" charset="-122"/>
-                <a:cs typeface="Inter" pitchFamily="34" charset="-120"/>
-              </a:rPr>
-              <a:t>a month for 1 million clients</a:t>
-            </a:r>
-            <a:endParaRPr lang="en-US" sz="1050" dirty="0"/>
-          </a:p>
-        </p:txBody>
-      </p:sp>
-    </p:spTree>
-  </p:cSld>
-  <p:clrMapOvr>
-    <a:masterClrMapping/>
-  </p:clrMapOvr>
-</p:sld>
-</file>
-
 <file path=ppt/slides/slide13.xml><?xml version="1.0" encoding="utf-8"?>
 <p:sld xmlns:a="http://schemas.openxmlformats.org/drawingml/2006/main" xmlns:r="http://schemas.openxmlformats.org/officeDocument/2006/relationships" xmlns:p="http://schemas.openxmlformats.org/presentationml/2006/main">
   <p:cSld name="Slide 13">
@@ -6775,7 +7490,7 @@
                 <a:ea typeface="Inter" pitchFamily="34" charset="-122"/>
                 <a:cs typeface="Inter" pitchFamily="34" charset="-120"/>
               </a:rPr>
-              <a:t>Results and what comes next</a:t>
+              <a:t>Cost: most of the work needs no large model</a:t>
             </a:r>
             <a:endParaRPr lang="en-US" sz="2500" dirty="0"/>
           </a:p>
@@ -6919,22 +7634,38 @@
                 <a:ea typeface="Inter" pitchFamily="34" charset="-122"/>
                 <a:cs typeface="Inter" pitchFamily="34" charset="-120"/>
               </a:rPr>
-              <a:t>13 / 13</a:t>
+              <a:t>13 / 14</a:t>
             </a:r>
             <a:endParaRPr lang="en-US" sz="900" dirty="0"/>
           </a:p>
         </p:txBody>
       </p:sp>
-      <p:sp>
-        <p:nvSpPr>
-          <p:cNvPr id="8" name="Shape 5"/>
-          <p:cNvSpPr/>
-          <p:nvPr/>
-        </p:nvSpPr>
-        <p:spPr>
-          <a:xfrm>
-            <a:off x="457200" y="1188720"/>
-            <a:ext cx="1920240" cy="1188720"/>
+      <p:graphicFrame>
+        <p:nvGraphicFramePr>
+          <p:cNvPr id="8" name="Chart 0" descr=""/>
+          <p:cNvGraphicFramePr/>
+          <p:nvPr/>
+        </p:nvGraphicFramePr>
+        <p:xfrm>
+          <a:off x="365760" y="1051560"/>
+          <a:ext cx="5120640" cy="3566160"/>
+        </p:xfrm>
+        <a:graphic xmlns:a="http://schemas.openxmlformats.org/drawingml/2006/main">
+          <a:graphicData uri="http://schemas.openxmlformats.org/drawingml/2006/chart">
+            <c:chart xmlns:c="http://schemas.openxmlformats.org/drawingml/2006/chart" r:id="rId1"/>
+          </a:graphicData>
+        </a:graphic>
+      </p:graphicFrame>
+      <p:sp>
+        <p:nvSpPr>
+          <p:cNvPr id="9" name="Shape 5"/>
+          <p:cNvSpPr/>
+          <p:nvPr/>
+        </p:nvSpPr>
+        <p:spPr>
+          <a:xfrm>
+            <a:off x="5760720" y="1097280"/>
+            <a:ext cx="2926080" cy="1188720"/>
           </a:xfrm>
           <a:prstGeom prst="roundRect">
             <a:avLst>
@@ -6954,30 +7685,30 @@
       </p:sp>
       <p:sp>
         <p:nvSpPr>
-          <p:cNvPr id="9" name="Text 6"/>
-          <p:cNvSpPr/>
-          <p:nvPr/>
-        </p:nvSpPr>
-        <p:spPr>
-          <a:xfrm>
-            <a:off x="594360" y="1280160"/>
-            <a:ext cx="1645920" cy="548640"/>
-          </a:xfrm>
-          <a:prstGeom prst="rect">
-            <a:avLst/>
-          </a:prstGeom>
-          <a:noFill/>
-          <a:ln/>
-        </p:spPr>
-        <p:txBody>
-          <a:bodyPr wrap="square" lIns="0" tIns="0" rIns="0" bIns="0" rtlCol="0" anchor="ctr"/>
-          <a:lstStyle/>
-          <a:p>
-            <a:pPr indent="0" marL="0">
-              <a:buNone/>
-            </a:pPr>
-            <a:r>
-              <a:rPr lang="en-US" sz="2600" b="1" dirty="0">
+          <p:cNvPr id="10" name="Text 6"/>
+          <p:cNvSpPr/>
+          <p:nvPr/>
+        </p:nvSpPr>
+        <p:spPr>
+          <a:xfrm>
+            <a:off x="5897880" y="1188720"/>
+            <a:ext cx="2651760" cy="548640"/>
+          </a:xfrm>
+          <a:prstGeom prst="rect">
+            <a:avLst/>
+          </a:prstGeom>
+          <a:noFill/>
+          <a:ln/>
+        </p:spPr>
+        <p:txBody>
+          <a:bodyPr wrap="square" lIns="0" tIns="0" rIns="0" bIns="0" rtlCol="0" anchor="ctr"/>
+          <a:lstStyle/>
+          <a:p>
+            <a:pPr indent="0" marL="0">
+              <a:buNone/>
+            </a:pPr>
+            <a:r>
+              <a:rPr lang="en-US" sz="2000" b="1" dirty="0">
                 <a:solidFill>
                   <a:srgbClr val="101828"/>
                 </a:solidFill>
@@ -6985,22 +7716,22 @@
                 <a:ea typeface="Inter" pitchFamily="34" charset="-122"/>
                 <a:cs typeface="Inter" pitchFamily="34" charset="-120"/>
               </a:rPr>
-              <a:t>48/48</a:t>
-            </a:r>
-            <a:endParaRPr lang="en-US" sz="2600" dirty="0"/>
-          </a:p>
-        </p:txBody>
-      </p:sp>
-      <p:sp>
-        <p:nvSpPr>
-          <p:cNvPr id="10" name="Text 7"/>
-          <p:cNvSpPr/>
-          <p:nvPr/>
-        </p:nvSpPr>
-        <p:spPr>
-          <a:xfrm>
-            <a:off x="594360" y="1847088"/>
-            <a:ext cx="1645920" cy="457200"/>
+              <a:t>$0.0072 → $0.0027</a:t>
+            </a:r>
+            <a:endParaRPr lang="en-US" sz="2000" dirty="0"/>
+          </a:p>
+        </p:txBody>
+      </p:sp>
+      <p:sp>
+        <p:nvSpPr>
+          <p:cNvPr id="11" name="Text 7"/>
+          <p:cNvSpPr/>
+          <p:nvPr/>
+        </p:nvSpPr>
+        <p:spPr>
+          <a:xfrm>
+            <a:off x="5897880" y="1755648"/>
+            <a:ext cx="2651760" cy="457200"/>
           </a:xfrm>
           <a:prstGeom prst="rect">
             <a:avLst/>
@@ -7024,7 +7755,7 @@
                 <a:ea typeface="Inter" pitchFamily="34" charset="-122"/>
                 <a:cs typeface="Inter" pitchFamily="34" charset="-120"/>
               </a:rPr>
-              <a:t>functional tasks, EN / RU / ZH</a:t>
+              <a:t>one client's month, 63% less in the second</a:t>
             </a:r>
             <a:endParaRPr lang="en-US" sz="1050" dirty="0"/>
           </a:p>
@@ -7032,14 +7763,14 @@
       </p:sp>
       <p:sp>
         <p:nvSpPr>
-          <p:cNvPr id="11" name="Shape 8"/>
-          <p:cNvSpPr/>
-          <p:nvPr/>
-        </p:nvSpPr>
-        <p:spPr>
-          <a:xfrm>
-            <a:off x="2560320" y="1188720"/>
-            <a:ext cx="1920240" cy="1188720"/>
+          <p:cNvPr id="12" name="Shape 8"/>
+          <p:cNvSpPr/>
+          <p:nvPr/>
+        </p:nvSpPr>
+        <p:spPr>
+          <a:xfrm>
+            <a:off x="5760720" y="2423160"/>
+            <a:ext cx="2926080" cy="1188720"/>
           </a:xfrm>
           <a:prstGeom prst="roundRect">
             <a:avLst>
@@ -7059,14 +7790,14 @@
       </p:sp>
       <p:sp>
         <p:nvSpPr>
-          <p:cNvPr id="12" name="Text 9"/>
-          <p:cNvSpPr/>
-          <p:nvPr/>
-        </p:nvSpPr>
-        <p:spPr>
-          <a:xfrm>
-            <a:off x="2697480" y="1280160"/>
-            <a:ext cx="1645920" cy="548640"/>
+          <p:cNvPr id="13" name="Text 9"/>
+          <p:cNvSpPr/>
+          <p:nvPr/>
+        </p:nvSpPr>
+        <p:spPr>
+          <a:xfrm>
+            <a:off x="5897880" y="2514600"/>
+            <a:ext cx="2651760" cy="548640"/>
           </a:xfrm>
           <a:prstGeom prst="rect">
             <a:avLst/>
@@ -7090,7 +7821,7 @@
                 <a:ea typeface="Inter" pitchFamily="34" charset="-122"/>
                 <a:cs typeface="Inter" pitchFamily="34" charset="-120"/>
               </a:rPr>
-              <a:t>50/50</a:t>
+              <a:t>97.6%</a:t>
             </a:r>
             <a:endParaRPr lang="en-US" sz="2600" dirty="0"/>
           </a:p>
@@ -7098,14 +7829,14 @@
       </p:sp>
       <p:sp>
         <p:nvSpPr>
-          <p:cNvPr id="13" name="Text 10"/>
-          <p:cNvSpPr/>
-          <p:nvPr/>
-        </p:nvSpPr>
-        <p:spPr>
-          <a:xfrm>
-            <a:off x="2697480" y="1847088"/>
-            <a:ext cx="1645920" cy="457200"/>
+          <p:cNvPr id="14" name="Text 10"/>
+          <p:cNvSpPr/>
+          <p:nvPr/>
+        </p:nvSpPr>
+        <p:spPr>
+          <a:xfrm>
+            <a:off x="5897880" y="3081528"/>
+            <a:ext cx="2651760" cy="457200"/>
           </a:xfrm>
           <a:prstGeom prst="rect">
             <a:avLst/>
@@ -7129,7 +7860,7 @@
                 <a:ea typeface="Inter" pitchFamily="34" charset="-122"/>
                 <a:cs typeface="Inter" pitchFamily="34" charset="-120"/>
               </a:rPr>
-              <a:t>attacks in the evaluation set stopped</a:t>
+              <a:t>of work on levels 0 and 1 (rules, templates, small model)</a:t>
             </a:r>
             <a:endParaRPr lang="en-US" sz="1050" dirty="0"/>
           </a:p>
@@ -7137,14 +7868,14 @@
       </p:sp>
       <p:sp>
         <p:nvSpPr>
-          <p:cNvPr id="14" name="Shape 11"/>
-          <p:cNvSpPr/>
-          <p:nvPr/>
-        </p:nvSpPr>
-        <p:spPr>
-          <a:xfrm>
-            <a:off x="4663440" y="1188720"/>
-            <a:ext cx="1920240" cy="1188720"/>
+          <p:cNvPr id="15" name="Shape 11"/>
+          <p:cNvSpPr/>
+          <p:nvPr/>
+        </p:nvSpPr>
+        <p:spPr>
+          <a:xfrm>
+            <a:off x="5760720" y="3749040"/>
+            <a:ext cx="2926080" cy="1188720"/>
           </a:xfrm>
           <a:prstGeom prst="roundRect">
             <a:avLst>
@@ -7164,6 +7895,536 @@
       </p:sp>
       <p:sp>
         <p:nvSpPr>
+          <p:cNvPr id="16" name="Text 12"/>
+          <p:cNvSpPr/>
+          <p:nvPr/>
+        </p:nvSpPr>
+        <p:spPr>
+          <a:xfrm>
+            <a:off x="5897880" y="3840480"/>
+            <a:ext cx="2651760" cy="548640"/>
+          </a:xfrm>
+          <a:prstGeom prst="rect">
+            <a:avLst/>
+          </a:prstGeom>
+          <a:noFill/>
+          <a:ln/>
+        </p:spPr>
+        <p:txBody>
+          <a:bodyPr wrap="square" lIns="0" tIns="0" rIns="0" bIns="0" rtlCol="0" anchor="ctr"/>
+          <a:lstStyle/>
+          <a:p>
+            <a:pPr indent="0" marL="0">
+              <a:buNone/>
+            </a:pPr>
+            <a:r>
+              <a:rPr lang="en-US" sz="2600" b="1" dirty="0">
+                <a:solidFill>
+                  <a:srgbClr val="101828"/>
+                </a:solidFill>
+                <a:latin typeface="Inter" pitchFamily="34" charset="0"/>
+                <a:ea typeface="Inter" pitchFamily="34" charset="-122"/>
+                <a:cs typeface="Inter" pitchFamily="34" charset="-120"/>
+              </a:rPr>
+              <a:t>≈ $3,000</a:t>
+            </a:r>
+            <a:endParaRPr lang="en-US" sz="2600" dirty="0"/>
+          </a:p>
+        </p:txBody>
+      </p:sp>
+      <p:sp>
+        <p:nvSpPr>
+          <p:cNvPr id="17" name="Text 13"/>
+          <p:cNvSpPr/>
+          <p:nvPr/>
+        </p:nvSpPr>
+        <p:spPr>
+          <a:xfrm>
+            <a:off x="5897880" y="4407408"/>
+            <a:ext cx="2651760" cy="457200"/>
+          </a:xfrm>
+          <a:prstGeom prst="rect">
+            <a:avLst/>
+          </a:prstGeom>
+          <a:noFill/>
+          <a:ln/>
+        </p:spPr>
+        <p:txBody>
+          <a:bodyPr wrap="square" lIns="0" tIns="0" rIns="0" bIns="0" rtlCol="0" anchor="t"/>
+          <a:lstStyle/>
+          <a:p>
+            <a:pPr indent="0" marL="0">
+              <a:buNone/>
+            </a:pPr>
+            <a:r>
+              <a:rPr lang="en-US" sz="1050" dirty="0">
+                <a:solidFill>
+                  <a:srgbClr val="667085"/>
+                </a:solidFill>
+                <a:latin typeface="Inter" pitchFamily="34" charset="0"/>
+                <a:ea typeface="Inter" pitchFamily="34" charset="-122"/>
+                <a:cs typeface="Inter" pitchFamily="34" charset="-120"/>
+              </a:rPr>
+              <a:t>a month for 1 million clients</a:t>
+            </a:r>
+            <a:endParaRPr lang="en-US" sz="1050" dirty="0"/>
+          </a:p>
+        </p:txBody>
+      </p:sp>
+    </p:spTree>
+  </p:cSld>
+  <p:clrMapOvr>
+    <a:masterClrMapping/>
+  </p:clrMapOvr>
+</p:sld>
+</file>
+
+<file path=ppt/slides/slide14.xml><?xml version="1.0" encoding="utf-8"?>
+<p:sld xmlns:a="http://schemas.openxmlformats.org/drawingml/2006/main" xmlns:r="http://schemas.openxmlformats.org/officeDocument/2006/relationships" xmlns:p="http://schemas.openxmlformats.org/presentationml/2006/main">
+  <p:cSld name="Slide 14">
+    <p:bg>
+      <p:bgPr>
+        <a:solidFill>
+          <a:srgbClr val="FFFFFF"/>
+        </a:solidFill>
+      </p:bgPr>
+    </p:bg>
+    <p:spTree>
+      <p:nvGrpSpPr>
+        <p:cNvPr id="1" name=""/>
+        <p:cNvGrpSpPr/>
+        <p:nvPr/>
+      </p:nvGrpSpPr>
+      <p:grpSpPr>
+        <a:xfrm>
+          <a:off x="0" y="0"/>
+          <a:ext cx="0" cy="0"/>
+          <a:chOff x="0" y="0"/>
+          <a:chExt cx="0" cy="0"/>
+        </a:xfrm>
+      </p:grpSpPr>
+      <p:sp>
+        <p:nvSpPr>
+          <p:cNvPr id="2" name="Text 0"/>
+          <p:cNvSpPr/>
+          <p:nvPr/>
+        </p:nvSpPr>
+        <p:spPr>
+          <a:xfrm>
+            <a:off x="457200" y="384048"/>
+            <a:ext cx="8229600" cy="548640"/>
+          </a:xfrm>
+          <a:prstGeom prst="rect">
+            <a:avLst/>
+          </a:prstGeom>
+          <a:noFill/>
+          <a:ln/>
+        </p:spPr>
+        <p:txBody>
+          <a:bodyPr wrap="square" lIns="0" tIns="0" rIns="0" bIns="0" rtlCol="0" anchor="ctr"/>
+          <a:lstStyle/>
+          <a:p>
+            <a:pPr indent="0" marL="0">
+              <a:buNone/>
+            </a:pPr>
+            <a:r>
+              <a:rPr lang="en-US" sz="2500" b="1" dirty="0">
+                <a:solidFill>
+                  <a:srgbClr val="101828"/>
+                </a:solidFill>
+                <a:latin typeface="Inter" pitchFamily="34" charset="0"/>
+                <a:ea typeface="Inter" pitchFamily="34" charset="-122"/>
+                <a:cs typeface="Inter" pitchFamily="34" charset="-120"/>
+              </a:rPr>
+              <a:t>Results and what comes next</a:t>
+            </a:r>
+            <a:endParaRPr lang="en-US" sz="2500" dirty="0"/>
+          </a:p>
+        </p:txBody>
+      </p:sp>
+      <p:sp>
+        <p:nvSpPr>
+          <p:cNvPr id="3" name="Shape 1"/>
+          <p:cNvSpPr/>
+          <p:nvPr/>
+        </p:nvSpPr>
+        <p:spPr>
+          <a:xfrm>
+            <a:off x="457200" y="4754880"/>
+            <a:ext cx="210312" cy="210312"/>
+          </a:xfrm>
+          <a:prstGeom prst="roundRect">
+            <a:avLst>
+              <a:gd name="adj" fmla="val 22000"/>
+            </a:avLst>
+          </a:prstGeom>
+          <a:solidFill>
+            <a:srgbClr val="C2361F"/>
+          </a:solidFill>
+          <a:ln w="12700">
+            <a:solidFill>
+              <a:srgbClr val="C2361F"/>
+            </a:solidFill>
+            <a:prstDash val="solid"/>
+          </a:ln>
+        </p:spPr>
+      </p:sp>
+      <p:sp>
+        <p:nvSpPr>
+          <p:cNvPr id="4" name="Text 2"/>
+          <p:cNvSpPr/>
+          <p:nvPr/>
+        </p:nvSpPr>
+        <p:spPr>
+          <a:xfrm>
+            <a:off x="457200" y="4754880"/>
+            <a:ext cx="210312" cy="210312"/>
+          </a:xfrm>
+          <a:prstGeom prst="rect">
+            <a:avLst/>
+          </a:prstGeom>
+          <a:noFill/>
+          <a:ln/>
+        </p:spPr>
+        <p:txBody>
+          <a:bodyPr wrap="square" lIns="0" tIns="0" rIns="0" bIns="0" rtlCol="0" anchor="ctr"/>
+          <a:lstStyle/>
+          <a:p>
+            <a:pPr algn="ctr" indent="0" marL="0">
+              <a:buNone/>
+            </a:pPr>
+            <a:r>
+              <a:rPr lang="en-US" sz="920" dirty="0">
+                <a:solidFill>
+                  <a:srgbClr val="FFFFFF"/>
+                </a:solidFill>
+                <a:latin typeface="Noto Sans CJK SC" pitchFamily="34" charset="0"/>
+                <a:ea typeface="Noto Sans CJK SC" pitchFamily="34" charset="-122"/>
+                <a:cs typeface="Noto Sans CJK SC" pitchFamily="34" charset="-120"/>
+              </a:rPr>
+              <a:t>守</a:t>
+            </a:r>
+            <a:endParaRPr lang="en-US" sz="920" dirty="0"/>
+          </a:p>
+        </p:txBody>
+      </p:sp>
+      <p:sp>
+        <p:nvSpPr>
+          <p:cNvPr id="5" name="Text 3"/>
+          <p:cNvSpPr/>
+          <p:nvPr/>
+        </p:nvSpPr>
+        <p:spPr>
+          <a:xfrm>
+            <a:off x="731520" y="4754880"/>
+            <a:ext cx="1828800" cy="210312"/>
+          </a:xfrm>
+          <a:prstGeom prst="rect">
+            <a:avLst/>
+          </a:prstGeom>
+          <a:noFill/>
+          <a:ln/>
+        </p:spPr>
+        <p:txBody>
+          <a:bodyPr wrap="square" lIns="0" tIns="0" rIns="0" bIns="0" rtlCol="0" anchor="ctr"/>
+          <a:lstStyle/>
+          <a:p>
+            <a:pPr indent="0" marL="0">
+              <a:buNone/>
+            </a:pPr>
+            <a:r>
+              <a:rPr lang="en-US" sz="900" b="1" dirty="0">
+                <a:solidFill>
+                  <a:srgbClr val="101828"/>
+                </a:solidFill>
+                <a:latin typeface="Inter" pitchFamily="34" charset="0"/>
+                <a:ea typeface="Inter" pitchFamily="34" charset="-122"/>
+                <a:cs typeface="Inter" pitchFamily="34" charset="-120"/>
+              </a:rPr>
+              <a:t>Guardian</a:t>
+            </a:r>
+            <a:endParaRPr lang="en-US" sz="900" dirty="0"/>
+          </a:p>
+        </p:txBody>
+      </p:sp>
+      <p:sp>
+        <p:nvSpPr>
+          <p:cNvPr id="6" name="Text 4"/>
+          <p:cNvSpPr/>
+          <p:nvPr/>
+        </p:nvSpPr>
+        <p:spPr>
+          <a:xfrm>
+            <a:off x="6858000" y="4754880"/>
+            <a:ext cx="1828800" cy="210312"/>
+          </a:xfrm>
+          <a:prstGeom prst="rect">
+            <a:avLst/>
+          </a:prstGeom>
+          <a:noFill/>
+          <a:ln/>
+        </p:spPr>
+        <p:txBody>
+          <a:bodyPr wrap="square" lIns="0" tIns="0" rIns="0" bIns="0" rtlCol="0" anchor="ctr"/>
+          <a:lstStyle/>
+          <a:p>
+            <a:pPr algn="r" indent="0" marL="0">
+              <a:buNone/>
+            </a:pPr>
+            <a:r>
+              <a:rPr lang="en-US" sz="900" dirty="0">
+                <a:solidFill>
+                  <a:srgbClr val="667085"/>
+                </a:solidFill>
+                <a:latin typeface="Inter" pitchFamily="34" charset="0"/>
+                <a:ea typeface="Inter" pitchFamily="34" charset="-122"/>
+                <a:cs typeface="Inter" pitchFamily="34" charset="-120"/>
+              </a:rPr>
+              <a:t>14 / 14</a:t>
+            </a:r>
+            <a:endParaRPr lang="en-US" sz="900" dirty="0"/>
+          </a:p>
+        </p:txBody>
+      </p:sp>
+      <p:sp>
+        <p:nvSpPr>
+          <p:cNvPr id="8" name="Shape 5"/>
+          <p:cNvSpPr/>
+          <p:nvPr/>
+        </p:nvSpPr>
+        <p:spPr>
+          <a:xfrm>
+            <a:off x="457200" y="1188720"/>
+            <a:ext cx="1920240" cy="1188720"/>
+          </a:xfrm>
+          <a:prstGeom prst="roundRect">
+            <a:avLst>
+              <a:gd name="adj" fmla="val 7692"/>
+            </a:avLst>
+          </a:prstGeom>
+          <a:solidFill>
+            <a:srgbClr val="F4F5F7"/>
+          </a:solidFill>
+          <a:ln w="12700">
+            <a:solidFill>
+              <a:srgbClr val="F4F5F7"/>
+            </a:solidFill>
+            <a:prstDash val="solid"/>
+          </a:ln>
+        </p:spPr>
+      </p:sp>
+      <p:sp>
+        <p:nvSpPr>
+          <p:cNvPr id="9" name="Text 6"/>
+          <p:cNvSpPr/>
+          <p:nvPr/>
+        </p:nvSpPr>
+        <p:spPr>
+          <a:xfrm>
+            <a:off x="594360" y="1280160"/>
+            <a:ext cx="1645920" cy="548640"/>
+          </a:xfrm>
+          <a:prstGeom prst="rect">
+            <a:avLst/>
+          </a:prstGeom>
+          <a:noFill/>
+          <a:ln/>
+        </p:spPr>
+        <p:txBody>
+          <a:bodyPr wrap="square" lIns="0" tIns="0" rIns="0" bIns="0" rtlCol="0" anchor="ctr"/>
+          <a:lstStyle/>
+          <a:p>
+            <a:pPr indent="0" marL="0">
+              <a:buNone/>
+            </a:pPr>
+            <a:r>
+              <a:rPr lang="en-US" sz="2600" b="1" dirty="0">
+                <a:solidFill>
+                  <a:srgbClr val="101828"/>
+                </a:solidFill>
+                <a:latin typeface="Inter" pitchFamily="34" charset="0"/>
+                <a:ea typeface="Inter" pitchFamily="34" charset="-122"/>
+                <a:cs typeface="Inter" pitchFamily="34" charset="-120"/>
+              </a:rPr>
+              <a:t>48/48</a:t>
+            </a:r>
+            <a:endParaRPr lang="en-US" sz="2600" dirty="0"/>
+          </a:p>
+        </p:txBody>
+      </p:sp>
+      <p:sp>
+        <p:nvSpPr>
+          <p:cNvPr id="10" name="Text 7"/>
+          <p:cNvSpPr/>
+          <p:nvPr/>
+        </p:nvSpPr>
+        <p:spPr>
+          <a:xfrm>
+            <a:off x="594360" y="1847088"/>
+            <a:ext cx="1645920" cy="457200"/>
+          </a:xfrm>
+          <a:prstGeom prst="rect">
+            <a:avLst/>
+          </a:prstGeom>
+          <a:noFill/>
+          <a:ln/>
+        </p:spPr>
+        <p:txBody>
+          <a:bodyPr wrap="square" lIns="0" tIns="0" rIns="0" bIns="0" rtlCol="0" anchor="t"/>
+          <a:lstStyle/>
+          <a:p>
+            <a:pPr indent="0" marL="0">
+              <a:buNone/>
+            </a:pPr>
+            <a:r>
+              <a:rPr lang="en-US" sz="1050" dirty="0">
+                <a:solidFill>
+                  <a:srgbClr val="667085"/>
+                </a:solidFill>
+                <a:latin typeface="Inter" pitchFamily="34" charset="0"/>
+                <a:ea typeface="Inter" pitchFamily="34" charset="-122"/>
+                <a:cs typeface="Inter" pitchFamily="34" charset="-120"/>
+              </a:rPr>
+              <a:t>functional tasks, EN / RU / ZH</a:t>
+            </a:r>
+            <a:endParaRPr lang="en-US" sz="1050" dirty="0"/>
+          </a:p>
+        </p:txBody>
+      </p:sp>
+      <p:sp>
+        <p:nvSpPr>
+          <p:cNvPr id="11" name="Shape 8"/>
+          <p:cNvSpPr/>
+          <p:nvPr/>
+        </p:nvSpPr>
+        <p:spPr>
+          <a:xfrm>
+            <a:off x="2560320" y="1188720"/>
+            <a:ext cx="1920240" cy="1188720"/>
+          </a:xfrm>
+          <a:prstGeom prst="roundRect">
+            <a:avLst>
+              <a:gd name="adj" fmla="val 7692"/>
+            </a:avLst>
+          </a:prstGeom>
+          <a:solidFill>
+            <a:srgbClr val="F4F5F7"/>
+          </a:solidFill>
+          <a:ln w="12700">
+            <a:solidFill>
+              <a:srgbClr val="F4F5F7"/>
+            </a:solidFill>
+            <a:prstDash val="solid"/>
+          </a:ln>
+        </p:spPr>
+      </p:sp>
+      <p:sp>
+        <p:nvSpPr>
+          <p:cNvPr id="12" name="Text 9"/>
+          <p:cNvSpPr/>
+          <p:nvPr/>
+        </p:nvSpPr>
+        <p:spPr>
+          <a:xfrm>
+            <a:off x="2697480" y="1280160"/>
+            <a:ext cx="1645920" cy="548640"/>
+          </a:xfrm>
+          <a:prstGeom prst="rect">
+            <a:avLst/>
+          </a:prstGeom>
+          <a:noFill/>
+          <a:ln/>
+        </p:spPr>
+        <p:txBody>
+          <a:bodyPr wrap="square" lIns="0" tIns="0" rIns="0" bIns="0" rtlCol="0" anchor="ctr"/>
+          <a:lstStyle/>
+          <a:p>
+            <a:pPr indent="0" marL="0">
+              <a:buNone/>
+            </a:pPr>
+            <a:r>
+              <a:rPr lang="en-US" sz="2600" b="1" dirty="0">
+                <a:solidFill>
+                  <a:srgbClr val="101828"/>
+                </a:solidFill>
+                <a:latin typeface="Inter" pitchFamily="34" charset="0"/>
+                <a:ea typeface="Inter" pitchFamily="34" charset="-122"/>
+                <a:cs typeface="Inter" pitchFamily="34" charset="-120"/>
+              </a:rPr>
+              <a:t>59/59</a:t>
+            </a:r>
+            <a:endParaRPr lang="en-US" sz="2600" dirty="0"/>
+          </a:p>
+        </p:txBody>
+      </p:sp>
+      <p:sp>
+        <p:nvSpPr>
+          <p:cNvPr id="13" name="Text 10"/>
+          <p:cNvSpPr/>
+          <p:nvPr/>
+        </p:nvSpPr>
+        <p:spPr>
+          <a:xfrm>
+            <a:off x="2697480" y="1847088"/>
+            <a:ext cx="1645920" cy="457200"/>
+          </a:xfrm>
+          <a:prstGeom prst="rect">
+            <a:avLst/>
+          </a:prstGeom>
+          <a:noFill/>
+          <a:ln/>
+        </p:spPr>
+        <p:txBody>
+          <a:bodyPr wrap="square" lIns="0" tIns="0" rIns="0" bIns="0" rtlCol="0" anchor="t"/>
+          <a:lstStyle/>
+          <a:p>
+            <a:pPr indent="0" marL="0">
+              <a:buNone/>
+            </a:pPr>
+            <a:r>
+              <a:rPr lang="en-US" sz="1050" dirty="0">
+                <a:solidFill>
+                  <a:srgbClr val="667085"/>
+                </a:solidFill>
+                <a:latin typeface="Inter" pitchFamily="34" charset="0"/>
+                <a:ea typeface="Inter" pitchFamily="34" charset="-122"/>
+                <a:cs typeface="Inter" pitchFamily="34" charset="-120"/>
+              </a:rPr>
+              <a:t>attacks in the evaluation set stopped</a:t>
+            </a:r>
+            <a:endParaRPr lang="en-US" sz="1050" dirty="0"/>
+          </a:p>
+        </p:txBody>
+      </p:sp>
+      <p:sp>
+        <p:nvSpPr>
+          <p:cNvPr id="14" name="Shape 11"/>
+          <p:cNvSpPr/>
+          <p:nvPr/>
+        </p:nvSpPr>
+        <p:spPr>
+          <a:xfrm>
+            <a:off x="4663440" y="1188720"/>
+            <a:ext cx="1920240" cy="1188720"/>
+          </a:xfrm>
+          <a:prstGeom prst="roundRect">
+            <a:avLst>
+              <a:gd name="adj" fmla="val 7692"/>
+            </a:avLst>
+          </a:prstGeom>
+          <a:solidFill>
+            <a:srgbClr val="F4F5F7"/>
+          </a:solidFill>
+          <a:ln w="12700">
+            <a:solidFill>
+              <a:srgbClr val="F4F5F7"/>
+            </a:solidFill>
+            <a:prstDash val="solid"/>
+          </a:ln>
+        </p:spPr>
+      </p:sp>
+      <p:sp>
+        <p:nvSpPr>
           <p:cNvPr id="15" name="Text 12"/>
           <p:cNvSpPr/>
           <p:nvPr/>
@@ -7195,7 +8456,7 @@
                 <a:ea typeface="Inter" pitchFamily="34" charset="-122"/>
                 <a:cs typeface="Inter" pitchFamily="34" charset="-120"/>
               </a:rPr>
-              <a:t>347</a:t>
+              <a:t>437</a:t>
             </a:r>
             <a:endParaRPr lang="en-US" sz="2600" dirty="0"/>
           </a:p>
@@ -7782,7 +9043,7 @@
                 <a:ea typeface="Inter" pitchFamily="34" charset="-122"/>
                 <a:cs typeface="Inter" pitchFamily="34" charset="-120"/>
               </a:rPr>
-              <a:t>2 / 13</a:t>
+              <a:t>2 / 14</a:t>
             </a:r>
             <a:endParaRPr lang="en-US" sz="900" dirty="0"/>
           </a:p>
@@ -8238,7 +9499,7 @@
                 <a:ea typeface="Inter" pitchFamily="34" charset="-122"/>
                 <a:cs typeface="Inter" pitchFamily="34" charset="-120"/>
               </a:rPr>
-              <a:t>39 / 39</a:t>
+              <a:t>48 / 48</a:t>
             </a:r>
             <a:endParaRPr lang="en-US" sz="4400" dirty="0"/>
           </a:p>
@@ -8316,7 +9577,7 @@
                 <a:ea typeface="Inter" pitchFamily="34" charset="-122"/>
                 <a:cs typeface="Inter" pitchFamily="34" charset="-120"/>
               </a:rPr>
-              <a:t>532 038.76 ₽</a:t>
+              <a:t>$6,546.63</a:t>
             </a:r>
             <a:endParaRPr lang="en-US" sz="2600" dirty="0"/>
           </a:p>
@@ -8570,7 +9831,7 @@
                 <a:ea typeface="Inter" pitchFamily="34" charset="-122"/>
                 <a:cs typeface="Inter" pitchFamily="34" charset="-120"/>
               </a:rPr>
-              <a:t>3 / 13</a:t>
+              <a:t>3 / 14</a:t>
             </a:r>
             <a:endParaRPr lang="en-US" sz="900" dirty="0"/>
           </a:p>
@@ -9256,7 +10517,7 @@
                 <a:ea typeface="Inter" pitchFamily="34" charset="-122"/>
                 <a:cs typeface="Inter" pitchFamily="34" charset="-120"/>
               </a:rPr>
-              <a:t>4 / 13</a:t>
+              <a:t>4 / 14</a:t>
             </a:r>
             <a:endParaRPr lang="en-US" sz="900" dirty="0"/>
           </a:p>
@@ -9400,7 +10661,7 @@
                 <a:ea typeface="Inter" pitchFamily="34" charset="-122"/>
                 <a:cs typeface="Inter" pitchFamily="34" charset="-120"/>
               </a:rPr>
-              <a:t>standing, ≤ 344 ₽</a:t>
+              <a:t>standing, ≤ $5</a:t>
             </a:r>
             <a:endParaRPr lang="en-US" sz="1000" dirty="0"/>
           </a:p>
@@ -9688,7 +10949,7 @@
                 <a:ea typeface="Inter" pitchFamily="34" charset="-122"/>
                 <a:cs typeface="Inter" pitchFamily="34" charset="-120"/>
               </a:rPr>
-              <a:t>847 ₽ a month</a:t>
+              <a:t>$10.23 a month</a:t>
             </a:r>
             <a:endParaRPr lang="en-US" sz="1000" dirty="0"/>
           </a:p>
@@ -10735,7 +11996,7 @@
                 <a:ea typeface="Inter" pitchFamily="34" charset="-122"/>
                 <a:cs typeface="Inter" pitchFamily="34" charset="-120"/>
               </a:rPr>
-              <a:t>797 ₽ </a:t>
+              <a:t>$9.63 </a:t>
             </a:r>
             <a:pPr indent="0" marL="0">
               <a:buNone/>
@@ -10788,7 +12049,7 @@
                 <a:ea typeface="Inter" pitchFamily="34" charset="-122"/>
                 <a:cs typeface="Inter" pitchFamily="34" charset="-120"/>
               </a:rPr>
-              <a:t>11 </a:t>
+              <a:t>13 </a:t>
             </a:r>
             <a:pPr indent="0" marL="0">
               <a:buNone/>
@@ -10841,7 +12102,7 @@
                 <a:ea typeface="Inter" pitchFamily="34" charset="-122"/>
                 <a:cs typeface="Inter" pitchFamily="34" charset="-120"/>
               </a:rPr>
-              <a:t>12 </a:t>
+              <a:t>13 </a:t>
             </a:r>
             <a:pPr indent="0" marL="0">
               <a:buNone/>
@@ -10894,7 +12155,7 @@
                 <a:ea typeface="Inter" pitchFamily="34" charset="-122"/>
                 <a:cs typeface="Inter" pitchFamily="34" charset="-120"/>
               </a:rPr>
-              <a:t>4 </a:t>
+              <a:t>6 </a:t>
             </a:r>
             <a:pPr indent="0" marL="0">
               <a:buNone/>
@@ -10947,7 +12208,7 @@
                 <a:ea typeface="Inter" pitchFamily="34" charset="-122"/>
                 <a:cs typeface="Inter" pitchFamily="34" charset="-120"/>
               </a:rPr>
-              <a:t>347 </a:t>
+              <a:t>437 </a:t>
             </a:r>
             <a:pPr indent="0" marL="0">
               <a:buNone/>
@@ -11176,7 +12437,7 @@
                 <a:ea typeface="Inter" pitchFamily="34" charset="-122"/>
                 <a:cs typeface="Inter" pitchFamily="34" charset="-120"/>
               </a:rPr>
-              <a:t>5 / 13</a:t>
+              <a:t>5 / 14</a:t>
             </a:r>
             <a:endParaRPr lang="en-US" sz="900" dirty="0"/>
           </a:p>
@@ -11565,7 +12826,7 @@
                 <a:ea typeface="Inter" pitchFamily="34" charset="-122"/>
                 <a:cs typeface="Inter" pitchFamily="34" charset="-120"/>
               </a:rPr>
-              <a:t>6 / 13</a:t>
+              <a:t>6 / 14</a:t>
             </a:r>
             <a:endParaRPr lang="en-US" sz="900" dirty="0"/>
           </a:p>
@@ -11804,7 +13065,7 @@
                 <a:ea typeface="Inter" pitchFamily="34" charset="-122"/>
                 <a:cs typeface="Inter" pitchFamily="34" charset="-120"/>
               </a:rPr>
-              <a:t>7 / 13</a:t>
+              <a:t>7 / 14</a:t>
             </a:r>
             <a:endParaRPr lang="en-US" sz="900" dirty="0"/>
           </a:p>
@@ -13522,7 +14783,7 @@
                 <a:ea typeface="Inter" pitchFamily="34" charset="-122"/>
                 <a:cs typeface="Inter" pitchFamily="34" charset="-120"/>
               </a:rPr>
-              <a:t>Level 1 limit 1 000 ₽; promotion after 5 verified results in a row. Autonomy stages 1 and 2, stage 3 not offered.</a:t>
+              <a:t>Level 1 limit $12.07; promotion after 5 verified results in a row. Autonomy stages 1 and 2, stage 3 not offered.</a:t>
             </a:r>
             <a:endParaRPr lang="en-US" sz="1200" dirty="0"/>
           </a:p>
@@ -13737,7 +14998,7 @@
                 <a:ea typeface="Inter" pitchFamily="34" charset="-122"/>
                 <a:cs typeface="Inter" pitchFamily="34" charset="-120"/>
               </a:rPr>
-              <a:t>8 / 13</a:t>
+              <a:t>8 / 14</a:t>
             </a:r>
             <a:endParaRPr lang="en-US" sz="900" dirty="0"/>
           </a:p>
@@ -13936,7 +15197,7 @@
                 <a:ea typeface="Inter" pitchFamily="34" charset="-122"/>
                 <a:cs typeface="Inter" pitchFamily="34" charset="-120"/>
               </a:rPr>
-              <a:t>alone up to 1 000 ₽ · the start</a:t>
+              <a:t>alone up to $12.07 · the start</a:t>
             </a:r>
             <a:endParaRPr lang="en-US" sz="1100" dirty="0"/>
           </a:p>
@@ -15076,7 +16337,7 @@
               <a:buNone/>
             </a:pPr>
             <a:r>
-              <a:rPr lang="en-US" sz="2500" b="1" dirty="0">
+              <a:rPr lang="en-US" sz="2100" b="1" dirty="0">
                 <a:solidFill>
                   <a:srgbClr val="101828"/>
                 </a:solidFill>
@@ -15084,9 +16345,9 @@
                 <a:ea typeface="Inter" pitchFamily="34" charset="-122"/>
                 <a:cs typeface="Inter" pitchFamily="34" charset="-120"/>
               </a:rPr>
-              <a:t>Budget and payee risk: measured, not claimed</a:t>
-            </a:r>
-            <a:endParaRPr lang="en-US" sz="2500" dirty="0"/>
+              <a:t>Investing: the agent proposes, the kernel trades</a:t>
+            </a:r>
+            <a:endParaRPr lang="en-US" sz="2100" dirty="0"/>
           </a:p>
         </p:txBody>
       </p:sp>
@@ -15228,7 +16489,7 @@
                 <a:ea typeface="Inter" pitchFamily="34" charset="-122"/>
                 <a:cs typeface="Inter" pitchFamily="34" charset="-120"/>
               </a:rPr>
-              <a:t>9 / 13</a:t>
+              <a:t>9 / 14</a:t>
             </a:r>
             <a:endParaRPr lang="en-US" sz="900" dirty="0"/>
           </a:p>
@@ -15242,7 +16503,7 @@
         </p:nvSpPr>
         <p:spPr>
           <a:xfrm>
-            <a:off x="457200" y="1097280"/>
+            <a:off x="457200" y="1051560"/>
             <a:ext cx="4023360" cy="365760"/>
           </a:xfrm>
           <a:prstGeom prst="rect">
@@ -15259,7 +16520,7 @@
               <a:buNone/>
             </a:pPr>
             <a:r>
-              <a:rPr lang="en-US" sz="1700" b="1" dirty="0">
+              <a:rPr lang="en-US" sz="1600" b="1" dirty="0">
                 <a:solidFill>
                   <a:srgbClr val="1D4ED8"/>
                 </a:solidFill>
@@ -15267,65 +16528,26 @@
                 <a:ea typeface="Inter" pitchFamily="34" charset="-122"/>
                 <a:cs typeface="Inter" pitchFamily="34" charset="-120"/>
               </a:rPr>
-              <a:t>C8 budget</a:t>
-            </a:r>
-            <a:endParaRPr lang="en-US" sz="1700" dirty="0"/>
-          </a:p>
-        </p:txBody>
-      </p:sp>
-      <p:sp>
-        <p:nvSpPr>
-          <p:cNvPr id="9" name="Text 6"/>
-          <p:cNvSpPr/>
-          <p:nvPr/>
-        </p:nvSpPr>
-        <p:spPr>
-          <a:xfrm>
-            <a:off x="4663440" y="1097280"/>
-            <a:ext cx="4023360" cy="365760"/>
-          </a:xfrm>
-          <a:prstGeom prst="rect">
-            <a:avLst/>
-          </a:prstGeom>
-          <a:noFill/>
-          <a:ln/>
-        </p:spPr>
-        <p:txBody>
-          <a:bodyPr wrap="square" lIns="0" tIns="0" rIns="0" bIns="0" rtlCol="0" anchor="ctr"/>
-          <a:lstStyle/>
-          <a:p>
-            <a:pPr indent="0" marL="0">
-              <a:buNone/>
-            </a:pPr>
-            <a:r>
-              <a:rPr lang="en-US" sz="1700" b="1" dirty="0">
-                <a:solidFill>
-                  <a:srgbClr val="1D4ED8"/>
-                </a:solidFill>
-                <a:latin typeface="Inter" pitchFamily="34" charset="0"/>
-                <a:ea typeface="Inter" pitchFamily="34" charset="-122"/>
-                <a:cs typeface="Inter" pitchFamily="34" charset="-120"/>
-              </a:rPr>
-              <a:t>C10 payee risk on the transfer graph</a:t>
-            </a:r>
-            <a:endParaRPr lang="en-US" sz="1700" dirty="0"/>
-          </a:p>
-        </p:txBody>
-      </p:sp>
-      <p:sp>
-        <p:nvSpPr>
-          <p:cNvPr id="10" name="Shape 7"/>
-          <p:cNvSpPr/>
-          <p:nvPr/>
-        </p:nvSpPr>
-        <p:spPr>
-          <a:xfrm>
-            <a:off x="457200" y="1554480"/>
-            <a:ext cx="1920240" cy="1188720"/>
+              <a:t>Broker step: the kernel's own quote</a:t>
+            </a:r>
+            <a:endParaRPr lang="en-US" sz="1600" dirty="0"/>
+          </a:p>
+        </p:txBody>
+      </p:sp>
+      <p:sp>
+        <p:nvSpPr>
+          <p:cNvPr id="9" name="Shape 6"/>
+          <p:cNvSpPr/>
+          <p:nvPr/>
+        </p:nvSpPr>
+        <p:spPr>
+          <a:xfrm>
+            <a:off x="457200" y="1463040"/>
+            <a:ext cx="4023360" cy="310896"/>
           </a:xfrm>
           <a:prstGeom prst="roundRect">
             <a:avLst>
-              <a:gd name="adj" fmla="val 7692"/>
+              <a:gd name="adj" fmla="val 17647"/>
             </a:avLst>
           </a:prstGeom>
           <a:solidFill>
@@ -15341,30 +16563,30 @@
       </p:sp>
       <p:sp>
         <p:nvSpPr>
-          <p:cNvPr id="11" name="Text 8"/>
-          <p:cNvSpPr/>
-          <p:nvPr/>
-        </p:nvSpPr>
-        <p:spPr>
-          <a:xfrm>
-            <a:off x="594360" y="1645920"/>
-            <a:ext cx="1645920" cy="548640"/>
-          </a:xfrm>
-          <a:prstGeom prst="rect">
-            <a:avLst/>
-          </a:prstGeom>
-          <a:noFill/>
-          <a:ln/>
-        </p:spPr>
-        <p:txBody>
-          <a:bodyPr wrap="square" lIns="0" tIns="0" rIns="0" bIns="0" rtlCol="0" anchor="ctr"/>
-          <a:lstStyle/>
-          <a:p>
-            <a:pPr indent="0" marL="0">
-              <a:buNone/>
-            </a:pPr>
-            <a:r>
-              <a:rPr lang="en-US" sz="2600" b="1" dirty="0">
+          <p:cNvPr id="10" name="Text 7"/>
+          <p:cNvSpPr/>
+          <p:nvPr/>
+        </p:nvSpPr>
+        <p:spPr>
+          <a:xfrm>
+            <a:off x="548640" y="1463040"/>
+            <a:ext cx="3886200" cy="310896"/>
+          </a:xfrm>
+          <a:prstGeom prst="rect">
+            <a:avLst/>
+          </a:prstGeom>
+          <a:noFill/>
+          <a:ln/>
+        </p:spPr>
+        <p:txBody>
+          <a:bodyPr wrap="square" lIns="0" tIns="0" rIns="0" bIns="0" rtlCol="0" anchor="ctr"/>
+          <a:lstStyle/>
+          <a:p>
+            <a:pPr indent="0" marL="0">
+              <a:buNone/>
+            </a:pPr>
+            <a:r>
+              <a:rPr lang="en-US" sz="950" b="1" dirty="0">
                 <a:solidFill>
                   <a:srgbClr val="101828"/>
                 </a:solidFill>
@@ -15372,65 +16594,40 @@
                 <a:ea typeface="Inter" pitchFamily="34" charset="-122"/>
                 <a:cs typeface="Inter" pitchFamily="34" charset="-120"/>
               </a:rPr>
-              <a:t>5/5</a:t>
-            </a:r>
-            <a:endParaRPr lang="en-US" sz="2600" dirty="0"/>
-          </a:p>
-        </p:txBody>
-      </p:sp>
-      <p:sp>
-        <p:nvSpPr>
-          <p:cNvPr id="12" name="Text 9"/>
-          <p:cNvSpPr/>
-          <p:nvPr/>
-        </p:nvSpPr>
-        <p:spPr>
-          <a:xfrm>
-            <a:off x="594360" y="2212848"/>
-            <a:ext cx="1645920" cy="457200"/>
-          </a:xfrm>
-          <a:prstGeom prst="rect">
-            <a:avLst/>
-          </a:prstGeom>
-          <a:noFill/>
-          <a:ln/>
-        </p:spPr>
-        <p:txBody>
-          <a:bodyPr wrap="square" lIns="0" tIns="0" rIns="0" bIns="0" rtlCol="0" anchor="t"/>
-          <a:lstStyle/>
-          <a:p>
-            <a:pPr indent="0" marL="0">
-              <a:buNone/>
-            </a:pPr>
-            <a:r>
-              <a:rPr lang="en-US" sz="1050" dirty="0">
-                <a:solidFill>
-                  <a:srgbClr val="667085"/>
-                </a:solidFill>
-                <a:latin typeface="Inter" pitchFamily="34" charset="0"/>
-                <a:ea typeface="Inter" pitchFamily="34" charset="-122"/>
-                <a:cs typeface="Inter" pitchFamily="34" charset="-120"/>
-              </a:rPr>
-              <a:t>planted leaks found, 847 ₽ a month</a:t>
-            </a:r>
-            <a:endParaRPr lang="en-US" sz="1050" dirty="0"/>
-          </a:p>
-        </p:txBody>
-      </p:sp>
-      <p:sp>
-        <p:nvSpPr>
-          <p:cNvPr id="13" name="Shape 10"/>
-          <p:cNvSpPr/>
-          <p:nvPr/>
-        </p:nvSpPr>
-        <p:spPr>
-          <a:xfrm>
-            <a:off x="2560320" y="1554480"/>
-            <a:ext cx="1920240" cy="1188720"/>
+              <a:t>What  </a:t>
+            </a:r>
+            <a:pPr indent="0" marL="0">
+              <a:buNone/>
+            </a:pPr>
+            <a:r>
+              <a:rPr lang="en-US" sz="950" dirty="0">
+                <a:solidFill>
+                  <a:srgbClr val="101828"/>
+                </a:solidFill>
+                <a:latin typeface="Inter" pitchFamily="34" charset="0"/>
+                <a:ea typeface="Inter" pitchFamily="34" charset="-122"/>
+                <a:cs typeface="Inter" pitchFamily="34" charset="-120"/>
+              </a:rPr>
+              <a:t>SPY, VTI, QQQ, BND only; no options, crypto, OTC or shorts</a:t>
+            </a:r>
+            <a:endParaRPr lang="en-US" sz="950" dirty="0"/>
+          </a:p>
+        </p:txBody>
+      </p:sp>
+      <p:sp>
+        <p:nvSpPr>
+          <p:cNvPr id="11" name="Shape 8"/>
+          <p:cNvSpPr/>
+          <p:nvPr/>
+        </p:nvSpPr>
+        <p:spPr>
+          <a:xfrm>
+            <a:off x="457200" y="1828800"/>
+            <a:ext cx="4023360" cy="310896"/>
           </a:xfrm>
           <a:prstGeom prst="roundRect">
             <a:avLst>
-              <a:gd name="adj" fmla="val 7692"/>
+              <a:gd name="adj" fmla="val 17647"/>
             </a:avLst>
           </a:prstGeom>
           <a:solidFill>
@@ -15446,30 +16643,30 @@
       </p:sp>
       <p:sp>
         <p:nvSpPr>
-          <p:cNvPr id="14" name="Text 11"/>
-          <p:cNvSpPr/>
-          <p:nvPr/>
-        </p:nvSpPr>
-        <p:spPr>
-          <a:xfrm>
-            <a:off x="2697480" y="1645920"/>
-            <a:ext cx="1645920" cy="548640"/>
-          </a:xfrm>
-          <a:prstGeom prst="rect">
-            <a:avLst/>
-          </a:prstGeom>
-          <a:noFill/>
-          <a:ln/>
-        </p:spPr>
-        <p:txBody>
-          <a:bodyPr wrap="square" lIns="0" tIns="0" rIns="0" bIns="0" rtlCol="0" anchor="ctr"/>
-          <a:lstStyle/>
-          <a:p>
-            <a:pPr indent="0" marL="0">
-              <a:buNone/>
-            </a:pPr>
-            <a:r>
-              <a:rPr lang="en-US" sz="2600" b="1" dirty="0">
+          <p:cNvPr id="12" name="Text 9"/>
+          <p:cNvSpPr/>
+          <p:nvPr/>
+        </p:nvSpPr>
+        <p:spPr>
+          <a:xfrm>
+            <a:off x="548640" y="1828800"/>
+            <a:ext cx="3886200" cy="310896"/>
+          </a:xfrm>
+          <a:prstGeom prst="rect">
+            <a:avLst/>
+          </a:prstGeom>
+          <a:noFill/>
+          <a:ln/>
+        </p:spPr>
+        <p:txBody>
+          <a:bodyPr wrap="square" lIns="0" tIns="0" rIns="0" bIns="0" rtlCol="0" anchor="ctr"/>
+          <a:lstStyle/>
+          <a:p>
+            <a:pPr indent="0" marL="0">
+              <a:buNone/>
+            </a:pPr>
+            <a:r>
+              <a:rPr lang="en-US" sz="950" b="1" dirty="0">
                 <a:solidFill>
                   <a:srgbClr val="101828"/>
                 </a:solidFill>
@@ -15477,65 +16674,40 @@
                 <a:ea typeface="Inter" pitchFamily="34" charset="-122"/>
                 <a:cs typeface="Inter" pitchFamily="34" charset="-120"/>
               </a:rPr>
-              <a:t>27.3%</a:t>
-            </a:r>
-            <a:endParaRPr lang="en-US" sz="2600" dirty="0"/>
-          </a:p>
-        </p:txBody>
-      </p:sp>
-      <p:sp>
-        <p:nvSpPr>
-          <p:cNvPr id="15" name="Text 12"/>
-          <p:cNvSpPr/>
-          <p:nvPr/>
-        </p:nvSpPr>
-        <p:spPr>
-          <a:xfrm>
-            <a:off x="2697480" y="2212848"/>
-            <a:ext cx="1645920" cy="457200"/>
-          </a:xfrm>
-          <a:prstGeom prst="rect">
-            <a:avLst/>
-          </a:prstGeom>
-          <a:noFill/>
-          <a:ln/>
-        </p:spPr>
-        <p:txBody>
-          <a:bodyPr wrap="square" lIns="0" tIns="0" rIns="0" bIns="0" rtlCol="0" anchor="t"/>
-          <a:lstStyle/>
-          <a:p>
-            <a:pPr indent="0" marL="0">
-              <a:buNone/>
-            </a:pPr>
-            <a:r>
-              <a:rPr lang="en-US" sz="1050" dirty="0">
-                <a:solidFill>
-                  <a:srgbClr val="667085"/>
-                </a:solidFill>
-                <a:latin typeface="Inter" pitchFamily="34" charset="0"/>
-                <a:ea typeface="Inter" pitchFamily="34" charset="-122"/>
-                <a:cs typeface="Inter" pitchFamily="34" charset="-120"/>
-              </a:rPr>
-              <a:t>spending forecast error (WAPE), held-out months</a:t>
-            </a:r>
-            <a:endParaRPr lang="en-US" sz="1050" dirty="0"/>
-          </a:p>
-        </p:txBody>
-      </p:sp>
-      <p:sp>
-        <p:nvSpPr>
-          <p:cNvPr id="16" name="Shape 13"/>
-          <p:cNvSpPr/>
-          <p:nvPr/>
-        </p:nvSpPr>
-        <p:spPr>
-          <a:xfrm>
-            <a:off x="457200" y="2926080"/>
-            <a:ext cx="1920240" cy="1188720"/>
+              <a:t>How much  </a:t>
+            </a:r>
+            <a:pPr indent="0" marL="0">
+              <a:buNone/>
+            </a:pPr>
+            <a:r>
+              <a:rPr lang="en-US" sz="950" dirty="0">
+                <a:solidFill>
+                  <a:srgbClr val="101828"/>
+                </a:solidFill>
+                <a:latin typeface="Inter" pitchFamily="34" charset="0"/>
+                <a:ea typeface="Inter" pitchFamily="34" charset="-122"/>
+                <a:cs typeface="Inter" pitchFamily="34" charset="-120"/>
+              </a:rPr>
+              <a:t>$1 to $25 in dollars, inside the $50 envelope</a:t>
+            </a:r>
+            <a:endParaRPr lang="en-US" sz="950" dirty="0"/>
+          </a:p>
+        </p:txBody>
+      </p:sp>
+      <p:sp>
+        <p:nvSpPr>
+          <p:cNvPr id="13" name="Shape 10"/>
+          <p:cNvSpPr/>
+          <p:nvPr/>
+        </p:nvSpPr>
+        <p:spPr>
+          <a:xfrm>
+            <a:off x="457200" y="2194560"/>
+            <a:ext cx="4023360" cy="310896"/>
           </a:xfrm>
           <a:prstGeom prst="roundRect">
             <a:avLst>
-              <a:gd name="adj" fmla="val 7692"/>
+              <a:gd name="adj" fmla="val 17647"/>
             </a:avLst>
           </a:prstGeom>
           <a:solidFill>
@@ -15551,30 +16723,30 @@
       </p:sp>
       <p:sp>
         <p:nvSpPr>
-          <p:cNvPr id="17" name="Text 14"/>
-          <p:cNvSpPr/>
-          <p:nvPr/>
-        </p:nvSpPr>
-        <p:spPr>
-          <a:xfrm>
-            <a:off x="594360" y="3017520"/>
-            <a:ext cx="1645920" cy="548640"/>
-          </a:xfrm>
-          <a:prstGeom prst="rect">
-            <a:avLst/>
-          </a:prstGeom>
-          <a:noFill/>
-          <a:ln/>
-        </p:spPr>
-        <p:txBody>
-          <a:bodyPr wrap="square" lIns="0" tIns="0" rIns="0" bIns="0" rtlCol="0" anchor="ctr"/>
-          <a:lstStyle/>
-          <a:p>
-            <a:pPr indent="0" marL="0">
-              <a:buNone/>
-            </a:pPr>
-            <a:r>
-              <a:rPr lang="en-US" sz="2600" b="1" dirty="0">
+          <p:cNvPr id="14" name="Text 11"/>
+          <p:cNvSpPr/>
+          <p:nvPr/>
+        </p:nvSpPr>
+        <p:spPr>
+          <a:xfrm>
+            <a:off x="548640" y="2194560"/>
+            <a:ext cx="3886200" cy="310896"/>
+          </a:xfrm>
+          <a:prstGeom prst="rect">
+            <a:avLst/>
+          </a:prstGeom>
+          <a:noFill/>
+          <a:ln/>
+        </p:spPr>
+        <p:txBody>
+          <a:bodyPr wrap="square" lIns="0" tIns="0" rIns="0" bIns="0" rtlCol="0" anchor="ctr"/>
+          <a:lstStyle/>
+          <a:p>
+            <a:pPr indent="0" marL="0">
+              <a:buNone/>
+            </a:pPr>
+            <a:r>
+              <a:rPr lang="en-US" sz="950" b="1" dirty="0">
                 <a:solidFill>
                   <a:srgbClr val="101828"/>
                 </a:solidFill>
@@ -15582,65 +16754,40 @@
                 <a:ea typeface="Inter" pitchFamily="34" charset="-122"/>
                 <a:cs typeface="Inter" pitchFamily="34" charset="-120"/>
               </a:rPr>
-              <a:t>1/1</a:t>
-            </a:r>
-            <a:endParaRPr lang="en-US" sz="2600" dirty="0"/>
-          </a:p>
-        </p:txBody>
-      </p:sp>
-      <p:sp>
-        <p:nvSpPr>
-          <p:cNvPr id="18" name="Text 15"/>
-          <p:cNvSpPr/>
-          <p:nvPr/>
-        </p:nvSpPr>
-        <p:spPr>
-          <a:xfrm>
-            <a:off x="594360" y="3584448"/>
-            <a:ext cx="1645920" cy="457200"/>
-          </a:xfrm>
-          <a:prstGeom prst="rect">
-            <a:avLst/>
-          </a:prstGeom>
-          <a:noFill/>
-          <a:ln/>
-        </p:spPr>
-        <p:txBody>
-          <a:bodyPr wrap="square" lIns="0" tIns="0" rIns="0" bIns="0" rtlCol="0" anchor="t"/>
-          <a:lstStyle/>
-          <a:p>
-            <a:pPr indent="0" marL="0">
-              <a:buNone/>
-            </a:pPr>
-            <a:r>
-              <a:rPr lang="en-US" sz="1050" dirty="0">
-                <a:solidFill>
-                  <a:srgbClr val="667085"/>
-                </a:solidFill>
-                <a:latin typeface="Inter" pitchFamily="34" charset="0"/>
-                <a:ea typeface="Inter" pitchFamily="34" charset="-122"/>
-                <a:cs typeface="Inter" pitchFamily="34" charset="-120"/>
-              </a:rPr>
-              <a:t>cash gap caught in time, 0 false alarms in 18 probes</a:t>
-            </a:r>
-            <a:endParaRPr lang="en-US" sz="1050" dirty="0"/>
-          </a:p>
-        </p:txBody>
-      </p:sp>
-      <p:sp>
-        <p:nvSpPr>
-          <p:cNvPr id="19" name="Shape 16"/>
-          <p:cNvSpPr/>
-          <p:nvPr/>
-        </p:nvSpPr>
-        <p:spPr>
-          <a:xfrm>
-            <a:off x="2560320" y="2926080"/>
-            <a:ext cx="1920240" cy="1188720"/>
+              <a:t>Price  </a:t>
+            </a:r>
+            <a:pPr indent="0" marL="0">
+              <a:buNone/>
+            </a:pPr>
+            <a:r>
+              <a:rPr lang="en-US" sz="950" dirty="0">
+                <a:solidFill>
+                  <a:srgbClr val="101828"/>
+                </a:solidFill>
+                <a:latin typeface="Inter" pitchFamily="34" charset="0"/>
+                <a:ea typeface="Inter" pitchFamily="34" charset="-122"/>
+                <a:cs typeface="Inter" pitchFamily="34" charset="-120"/>
+              </a:rPr>
+              <a:t>fresh quote; a cited price within 2% of it</a:t>
+            </a:r>
+            <a:endParaRPr lang="en-US" sz="950" dirty="0"/>
+          </a:p>
+        </p:txBody>
+      </p:sp>
+      <p:sp>
+        <p:nvSpPr>
+          <p:cNvPr id="15" name="Shape 12"/>
+          <p:cNvSpPr/>
+          <p:nvPr/>
+        </p:nvSpPr>
+        <p:spPr>
+          <a:xfrm>
+            <a:off x="457200" y="2560320"/>
+            <a:ext cx="4023360" cy="310896"/>
           </a:xfrm>
           <a:prstGeom prst="roundRect">
             <a:avLst>
-              <a:gd name="adj" fmla="val 7692"/>
+              <a:gd name="adj" fmla="val 17647"/>
             </a:avLst>
           </a:prstGeom>
           <a:solidFill>
@@ -15656,30 +16803,30 @@
       </p:sp>
       <p:sp>
         <p:nvSpPr>
-          <p:cNvPr id="20" name="Text 17"/>
-          <p:cNvSpPr/>
-          <p:nvPr/>
-        </p:nvSpPr>
-        <p:spPr>
-          <a:xfrm>
-            <a:off x="2697480" y="3017520"/>
-            <a:ext cx="1645920" cy="548640"/>
-          </a:xfrm>
-          <a:prstGeom prst="rect">
-            <a:avLst/>
-          </a:prstGeom>
-          <a:noFill/>
-          <a:ln/>
-        </p:spPr>
-        <p:txBody>
-          <a:bodyPr wrap="square" lIns="0" tIns="0" rIns="0" bIns="0" rtlCol="0" anchor="ctr"/>
-          <a:lstStyle/>
-          <a:p>
-            <a:pPr indent="0" marL="0">
-              <a:buNone/>
-            </a:pPr>
-            <a:r>
-              <a:rPr lang="en-US" sz="2600" b="1" dirty="0">
+          <p:cNvPr id="16" name="Text 13"/>
+          <p:cNvSpPr/>
+          <p:nvPr/>
+        </p:nvSpPr>
+        <p:spPr>
+          <a:xfrm>
+            <a:off x="548640" y="2560320"/>
+            <a:ext cx="3886200" cy="310896"/>
+          </a:xfrm>
+          <a:prstGeom prst="rect">
+            <a:avLst/>
+          </a:prstGeom>
+          <a:noFill/>
+          <a:ln/>
+        </p:spPr>
+        <p:txBody>
+          <a:bodyPr wrap="square" lIns="0" tIns="0" rIns="0" bIns="0" rtlCol="0" anchor="ctr"/>
+          <a:lstStyle/>
+          <a:p>
+            <a:pPr indent="0" marL="0">
+              <a:buNone/>
+            </a:pPr>
+            <a:r>
+              <a:rPr lang="en-US" sz="950" b="1" dirty="0">
                 <a:solidFill>
                   <a:srgbClr val="101828"/>
                 </a:solidFill>
@@ -15687,65 +16834,40 @@
                 <a:ea typeface="Inter" pitchFamily="34" charset="-122"/>
                 <a:cs typeface="Inter" pitchFamily="34" charset="-120"/>
               </a:rPr>
-              <a:t>1/1</a:t>
-            </a:r>
-            <a:endParaRPr lang="en-US" sz="2600" dirty="0"/>
-          </a:p>
-        </p:txBody>
-      </p:sp>
-      <p:sp>
-        <p:nvSpPr>
-          <p:cNvPr id="21" name="Text 18"/>
-          <p:cNvSpPr/>
-          <p:nvPr/>
-        </p:nvSpPr>
-        <p:spPr>
-          <a:xfrm>
-            <a:off x="2697480" y="3584448"/>
-            <a:ext cx="1645920" cy="457200"/>
-          </a:xfrm>
-          <a:prstGeom prst="rect">
-            <a:avLst/>
-          </a:prstGeom>
-          <a:noFill/>
-          <a:ln/>
-        </p:spPr>
-        <p:txBody>
-          <a:bodyPr wrap="square" lIns="0" tIns="0" rIns="0" bIns="0" rtlCol="0" anchor="t"/>
-          <a:lstStyle/>
-          <a:p>
-            <a:pPr indent="0" marL="0">
-              <a:buNone/>
-            </a:pPr>
-            <a:r>
-              <a:rPr lang="en-US" sz="1050" dirty="0">
-                <a:solidFill>
-                  <a:srgbClr val="667085"/>
-                </a:solidFill>
-                <a:latin typeface="Inter" pitchFamily="34" charset="0"/>
-                <a:ea typeface="Inter" pitchFamily="34" charset="-122"/>
-                <a:cs typeface="Inter" pitchFamily="34" charset="-120"/>
-              </a:rPr>
-              <a:t>double charge on the same card found</a:t>
-            </a:r>
-            <a:endParaRPr lang="en-US" sz="1050" dirty="0"/>
-          </a:p>
-        </p:txBody>
-      </p:sp>
-      <p:sp>
-        <p:nvSpPr>
-          <p:cNvPr id="22" name="Shape 19"/>
-          <p:cNvSpPr/>
-          <p:nvPr/>
-        </p:nvSpPr>
-        <p:spPr>
-          <a:xfrm>
-            <a:off x="4663440" y="1554480"/>
-            <a:ext cx="1920240" cy="1188720"/>
+              <a:t>How often  </a:t>
+            </a:r>
+            <a:pPr indent="0" marL="0">
+              <a:buNone/>
+            </a:pPr>
+            <a:r>
+              <a:rPr lang="en-US" sz="950" dirty="0">
+                <a:solidFill>
+                  <a:srgbClr val="101828"/>
+                </a:solidFill>
+                <a:latin typeface="Inter" pitchFamily="34" charset="0"/>
+                <a:ea typeface="Inter" pitchFamily="34" charset="-122"/>
+                <a:cs typeface="Inter" pitchFamily="34" charset="-120"/>
+              </a:rPr>
+              <a:t>1 order per security a day</a:t>
+            </a:r>
+            <a:endParaRPr lang="en-US" sz="950" dirty="0"/>
+          </a:p>
+        </p:txBody>
+      </p:sp>
+      <p:sp>
+        <p:nvSpPr>
+          <p:cNvPr id="17" name="Shape 14"/>
+          <p:cNvSpPr/>
+          <p:nvPr/>
+        </p:nvSpPr>
+        <p:spPr>
+          <a:xfrm>
+            <a:off x="457200" y="2926080"/>
+            <a:ext cx="4023360" cy="310896"/>
           </a:xfrm>
           <a:prstGeom prst="roundRect">
             <a:avLst>
-              <a:gd name="adj" fmla="val 7692"/>
+              <a:gd name="adj" fmla="val 17647"/>
             </a:avLst>
           </a:prstGeom>
           <a:solidFill>
@@ -15761,30 +16883,232 @@
       </p:sp>
       <p:sp>
         <p:nvSpPr>
+          <p:cNvPr id="18" name="Text 15"/>
+          <p:cNvSpPr/>
+          <p:nvPr/>
+        </p:nvSpPr>
+        <p:spPr>
+          <a:xfrm>
+            <a:off x="548640" y="2926080"/>
+            <a:ext cx="3886200" cy="310896"/>
+          </a:xfrm>
+          <a:prstGeom prst="rect">
+            <a:avLst/>
+          </a:prstGeom>
+          <a:noFill/>
+          <a:ln/>
+        </p:spPr>
+        <p:txBody>
+          <a:bodyPr wrap="square" lIns="0" tIns="0" rIns="0" bIns="0" rtlCol="0" anchor="ctr"/>
+          <a:lstStyle/>
+          <a:p>
+            <a:pPr indent="0" marL="0">
+              <a:buNone/>
+            </a:pPr>
+            <a:r>
+              <a:rPr lang="en-US" sz="950" b="1" dirty="0">
+                <a:solidFill>
+                  <a:srgbClr val="101828"/>
+                </a:solidFill>
+                <a:latin typeface="Inter" pitchFamily="34" charset="0"/>
+                <a:ea typeface="Inter" pitchFamily="34" charset="-122"/>
+                <a:cs typeface="Inter" pitchFamily="34" charset="-120"/>
+              </a:rPr>
+              <a:t>Result  </a:t>
+            </a:r>
+            <a:pPr indent="0" marL="0">
+              <a:buNone/>
+            </a:pPr>
+            <a:r>
+              <a:rPr lang="en-US" sz="950" dirty="0">
+                <a:solidFill>
+                  <a:srgbClr val="101828"/>
+                </a:solidFill>
+                <a:latin typeface="Inter" pitchFamily="34" charset="0"/>
+                <a:ea typeface="Inter" pitchFamily="34" charset="-122"/>
+                <a:cs typeface="Inter" pitchFamily="34" charset="-120"/>
+              </a:rPr>
+              <a:t>order read back from the broker, fill journaled</a:t>
+            </a:r>
+            <a:endParaRPr lang="en-US" sz="950" dirty="0"/>
+          </a:p>
+        </p:txBody>
+      </p:sp>
+      <p:sp>
+        <p:nvSpPr>
+          <p:cNvPr id="19" name="Text 16"/>
+          <p:cNvSpPr/>
+          <p:nvPr/>
+        </p:nvSpPr>
+        <p:spPr>
+          <a:xfrm>
+            <a:off x="4663440" y="1051560"/>
+            <a:ext cx="4023360" cy="365760"/>
+          </a:xfrm>
+          <a:prstGeom prst="rect">
+            <a:avLst/>
+          </a:prstGeom>
+          <a:noFill/>
+          <a:ln/>
+        </p:spPr>
+        <p:txBody>
+          <a:bodyPr wrap="square" lIns="0" tIns="0" rIns="0" bIns="0" rtlCol="0" anchor="ctr"/>
+          <a:lstStyle/>
+          <a:p>
+            <a:pPr indent="0" marL="0">
+              <a:buNone/>
+            </a:pPr>
+            <a:r>
+              <a:rPr lang="en-US" sz="1600" b="1" dirty="0">
+                <a:solidFill>
+                  <a:srgbClr val="1D4ED8"/>
+                </a:solidFill>
+                <a:latin typeface="Inter" pitchFamily="34" charset="0"/>
+                <a:ea typeface="Inter" pitchFamily="34" charset="-122"/>
+                <a:cs typeface="Inter" pitchFamily="34" charset="-120"/>
+              </a:rPr>
+              <a:t>Order type by market session</a:t>
+            </a:r>
+            <a:endParaRPr lang="en-US" sz="1600" dirty="0"/>
+          </a:p>
+        </p:txBody>
+      </p:sp>
+      <p:sp>
+        <p:nvSpPr>
+          <p:cNvPr id="20" name="Shape 17"/>
+          <p:cNvSpPr/>
+          <p:nvPr/>
+        </p:nvSpPr>
+        <p:spPr>
+          <a:xfrm>
+            <a:off x="4663440" y="1463040"/>
+            <a:ext cx="4023360" cy="457200"/>
+          </a:xfrm>
+          <a:prstGeom prst="roundRect">
+            <a:avLst>
+              <a:gd name="adj" fmla="val 16000"/>
+            </a:avLst>
+          </a:prstGeom>
+          <a:solidFill>
+            <a:srgbClr val="E8F6F3"/>
+          </a:solidFill>
+          <a:ln w="12700">
+            <a:solidFill>
+              <a:srgbClr val="B7E4D9"/>
+            </a:solidFill>
+            <a:prstDash val="solid"/>
+          </a:ln>
+        </p:spPr>
+      </p:sp>
+      <p:sp>
+        <p:nvSpPr>
+          <p:cNvPr id="21" name="Text 18"/>
+          <p:cNvSpPr/>
+          <p:nvPr/>
+        </p:nvSpPr>
+        <p:spPr>
+          <a:xfrm>
+            <a:off x="4773168" y="1463040"/>
+            <a:ext cx="3840480" cy="457200"/>
+          </a:xfrm>
+          <a:prstGeom prst="rect">
+            <a:avLst/>
+          </a:prstGeom>
+          <a:noFill/>
+          <a:ln/>
+        </p:spPr>
+        <p:txBody>
+          <a:bodyPr wrap="square" lIns="0" tIns="0" rIns="0" bIns="0" rtlCol="0" anchor="ctr"/>
+          <a:lstStyle/>
+          <a:p>
+            <a:pPr indent="0" marL="0">
+              <a:buNone/>
+            </a:pPr>
+            <a:r>
+              <a:rPr lang="en-US" sz="1000" b="1" dirty="0">
+                <a:solidFill>
+                  <a:srgbClr val="101828"/>
+                </a:solidFill>
+                <a:latin typeface="Inter" pitchFamily="34" charset="0"/>
+                <a:ea typeface="Inter" pitchFamily="34" charset="-122"/>
+                <a:cs typeface="Inter" pitchFamily="34" charset="-120"/>
+              </a:rPr>
+              <a:t>Regular hours, 9:30 to 16:00 New York</a:t>
+            </a:r>
+            <a:endParaRPr lang="en-US" sz="1000" dirty="0"/>
+          </a:p>
+          <a:p>
+            <a:pPr indent="0" marL="0">
+              <a:buNone/>
+            </a:pPr>
+            <a:r>
+              <a:rPr lang="en-US" sz="1000" dirty="0">
+                <a:solidFill>
+                  <a:srgbClr val="667085"/>
+                </a:solidFill>
+                <a:latin typeface="Inter" pitchFamily="34" charset="0"/>
+                <a:ea typeface="Inter" pitchFamily="34" charset="-122"/>
+                <a:cs typeface="Inter" pitchFamily="34" charset="-120"/>
+              </a:rPr>
+              <a:t>market order for the dollar amount</a:t>
+            </a:r>
+            <a:endParaRPr lang="en-US" sz="1000" dirty="0"/>
+          </a:p>
+        </p:txBody>
+      </p:sp>
+      <p:sp>
+        <p:nvSpPr>
+          <p:cNvPr id="22" name="Shape 19"/>
+          <p:cNvSpPr/>
+          <p:nvPr/>
+        </p:nvSpPr>
+        <p:spPr>
+          <a:xfrm>
+            <a:off x="4663440" y="1993392"/>
+            <a:ext cx="4023360" cy="457200"/>
+          </a:xfrm>
+          <a:prstGeom prst="roundRect">
+            <a:avLst>
+              <a:gd name="adj" fmla="val 16000"/>
+            </a:avLst>
+          </a:prstGeom>
+          <a:solidFill>
+            <a:srgbClr val="EEF4FF"/>
+          </a:solidFill>
+          <a:ln w="12700">
+            <a:solidFill>
+              <a:srgbClr val="C7D7FE"/>
+            </a:solidFill>
+            <a:prstDash val="solid"/>
+          </a:ln>
+        </p:spPr>
+      </p:sp>
+      <p:sp>
+        <p:nvSpPr>
           <p:cNvPr id="23" name="Text 20"/>
           <p:cNvSpPr/>
           <p:nvPr/>
         </p:nvSpPr>
         <p:spPr>
           <a:xfrm>
-            <a:off x="4800600" y="1645920"/>
-            <a:ext cx="1645920" cy="548640"/>
-          </a:xfrm>
-          <a:prstGeom prst="rect">
-            <a:avLst/>
-          </a:prstGeom>
-          <a:noFill/>
-          <a:ln/>
-        </p:spPr>
-        <p:txBody>
-          <a:bodyPr wrap="square" lIns="0" tIns="0" rIns="0" bIns="0" rtlCol="0" anchor="ctr"/>
-          <a:lstStyle/>
-          <a:p>
-            <a:pPr indent="0" marL="0">
-              <a:buNone/>
-            </a:pPr>
-            <a:r>
-              <a:rPr lang="en-US" sz="2600" b="1" dirty="0">
+            <a:off x="4773168" y="1993392"/>
+            <a:ext cx="3840480" cy="457200"/>
+          </a:xfrm>
+          <a:prstGeom prst="rect">
+            <a:avLst/>
+          </a:prstGeom>
+          <a:noFill/>
+          <a:ln/>
+        </p:spPr>
+        <p:txBody>
+          <a:bodyPr wrap="square" lIns="0" tIns="0" rIns="0" bIns="0" rtlCol="0" anchor="ctr"/>
+          <a:lstStyle/>
+          <a:p>
+            <a:pPr indent="0" marL="0">
+              <a:buNone/>
+            </a:pPr>
+            <a:r>
+              <a:rPr lang="en-US" sz="1000" b="1" dirty="0">
                 <a:solidFill>
                   <a:srgbClr val="101828"/>
                 </a:solidFill>
@@ -15792,38 +17116,16 @@
                 <a:ea typeface="Inter" pitchFamily="34" charset="-122"/>
                 <a:cs typeface="Inter" pitchFamily="34" charset="-120"/>
               </a:rPr>
-              <a:t>1.00</a:t>
-            </a:r>
-            <a:endParaRPr lang="en-US" sz="2600" dirty="0"/>
-          </a:p>
-        </p:txBody>
-      </p:sp>
-      <p:sp>
-        <p:nvSpPr>
-          <p:cNvPr id="24" name="Text 21"/>
-          <p:cNvSpPr/>
-          <p:nvPr/>
-        </p:nvSpPr>
-        <p:spPr>
-          <a:xfrm>
-            <a:off x="4800600" y="2212848"/>
-            <a:ext cx="1645920" cy="457200"/>
-          </a:xfrm>
-          <a:prstGeom prst="rect">
-            <a:avLst/>
-          </a:prstGeom>
-          <a:noFill/>
-          <a:ln/>
-        </p:spPr>
-        <p:txBody>
-          <a:bodyPr wrap="square" lIns="0" tIns="0" rIns="0" bIns="0" rtlCol="0" anchor="t"/>
-          <a:lstStyle/>
-          <a:p>
-            <a:pPr indent="0" marL="0">
-              <a:buNone/>
-            </a:pPr>
-            <a:r>
-              <a:rPr lang="en-US" sz="1050" dirty="0">
+              <a:t>Pre market from 4:00, after hours until 20:00</a:t>
+            </a:r>
+            <a:endParaRPr lang="en-US" sz="1000" dirty="0"/>
+          </a:p>
+          <a:p>
+            <a:pPr indent="0" marL="0">
+              <a:buNone/>
+            </a:pPr>
+            <a:r>
+              <a:rPr lang="en-US" sz="1000" dirty="0">
                 <a:solidFill>
                   <a:srgbClr val="667085"/>
                 </a:solidFill>
@@ -15831,21 +17133,143 @@
                 <a:ea typeface="Inter" pitchFamily="34" charset="-122"/>
                 <a:cs typeface="Inter" pitchFamily="34" charset="-120"/>
               </a:rPr>
-              <a:t>ROC-AUC on held-out graphs</a:t>
-            </a:r>
-            <a:endParaRPr lang="en-US" sz="1050" dirty="0"/>
-          </a:p>
-        </p:txBody>
-      </p:sp>
-      <p:sp>
-        <p:nvSpPr>
-          <p:cNvPr id="25" name="Shape 22"/>
-          <p:cNvSpPr/>
-          <p:nvPr/>
-        </p:nvSpPr>
-        <p:spPr>
-          <a:xfrm>
-            <a:off x="6766560" y="1554480"/>
+              <a:t>limit order at the quote + 0.5%, extended hours</a:t>
+            </a:r>
+            <a:endParaRPr lang="en-US" sz="1000" dirty="0"/>
+          </a:p>
+        </p:txBody>
+      </p:sp>
+      <p:sp>
+        <p:nvSpPr>
+          <p:cNvPr id="24" name="Shape 21"/>
+          <p:cNvSpPr/>
+          <p:nvPr/>
+        </p:nvSpPr>
+        <p:spPr>
+          <a:xfrm>
+            <a:off x="4663440" y="2523744"/>
+            <a:ext cx="4023360" cy="457200"/>
+          </a:xfrm>
+          <a:prstGeom prst="roundRect">
+            <a:avLst>
+              <a:gd name="adj" fmla="val 16000"/>
+            </a:avLst>
+          </a:prstGeom>
+          <a:solidFill>
+            <a:srgbClr val="FFF6E5"/>
+          </a:solidFill>
+          <a:ln w="12700">
+            <a:solidFill>
+              <a:srgbClr val="FEDF89"/>
+            </a:solidFill>
+            <a:prstDash val="solid"/>
+          </a:ln>
+        </p:spPr>
+      </p:sp>
+      <p:sp>
+        <p:nvSpPr>
+          <p:cNvPr id="25" name="Text 22"/>
+          <p:cNvSpPr/>
+          <p:nvPr/>
+        </p:nvSpPr>
+        <p:spPr>
+          <a:xfrm>
+            <a:off x="4773168" y="2523744"/>
+            <a:ext cx="3840480" cy="457200"/>
+          </a:xfrm>
+          <a:prstGeom prst="rect">
+            <a:avLst/>
+          </a:prstGeom>
+          <a:noFill/>
+          <a:ln/>
+        </p:spPr>
+        <p:txBody>
+          <a:bodyPr wrap="square" lIns="0" tIns="0" rIns="0" bIns="0" rtlCol="0" anchor="ctr"/>
+          <a:lstStyle/>
+          <a:p>
+            <a:pPr indent="0" marL="0">
+              <a:buNone/>
+            </a:pPr>
+            <a:r>
+              <a:rPr lang="en-US" sz="1000" b="1" dirty="0">
+                <a:solidFill>
+                  <a:srgbClr val="101828"/>
+                </a:solidFill>
+                <a:latin typeface="Inter" pitchFamily="34" charset="0"/>
+                <a:ea typeface="Inter" pitchFamily="34" charset="-122"/>
+                <a:cs typeface="Inter" pitchFamily="34" charset="-120"/>
+              </a:rPr>
+              <a:t>Closed</a:t>
+            </a:r>
+            <a:endParaRPr lang="en-US" sz="1000" dirty="0"/>
+          </a:p>
+          <a:p>
+            <a:pPr indent="0" marL="0">
+              <a:buNone/>
+            </a:pPr>
+            <a:r>
+              <a:rPr lang="en-US" sz="1000" dirty="0">
+                <a:solidFill>
+                  <a:srgbClr val="667085"/>
+                </a:solidFill>
+                <a:latin typeface="Inter" pitchFamily="34" charset="0"/>
+                <a:ea typeface="Inter" pitchFamily="34" charset="-122"/>
+                <a:cs typeface="Inter" pitchFamily="34" charset="-120"/>
+              </a:rPr>
+              <a:t>market order queued for the open</a:t>
+            </a:r>
+            <a:endParaRPr lang="en-US" sz="1000" dirty="0"/>
+          </a:p>
+        </p:txBody>
+      </p:sp>
+      <p:sp>
+        <p:nvSpPr>
+          <p:cNvPr id="26" name="Text 23"/>
+          <p:cNvSpPr/>
+          <p:nvPr/>
+        </p:nvSpPr>
+        <p:spPr>
+          <a:xfrm>
+            <a:off x="4663440" y="3081528"/>
+            <a:ext cx="4023360" cy="228600"/>
+          </a:xfrm>
+          <a:prstGeom prst="rect">
+            <a:avLst/>
+          </a:prstGeom>
+          <a:noFill/>
+          <a:ln/>
+        </p:spPr>
+        <p:txBody>
+          <a:bodyPr wrap="square" lIns="0" tIns="0" rIns="0" bIns="0" rtlCol="0" anchor="ctr"/>
+          <a:lstStyle/>
+          <a:p>
+            <a:pPr indent="0" marL="0">
+              <a:buNone/>
+            </a:pPr>
+            <a:r>
+              <a:rPr lang="en-US" sz="950" dirty="0">
+                <a:solidFill>
+                  <a:srgbClr val="667085"/>
+                </a:solidFill>
+                <a:latin typeface="Inter" pitchFamily="34" charset="0"/>
+                <a:ea typeface="Inter" pitchFamily="34" charset="-122"/>
+                <a:cs typeface="Inter" pitchFamily="34" charset="-120"/>
+              </a:rPr>
+              <a:t>Demo: sandbox broker. Live: Alpaca paper, GUARDIAN_BROKER=alpaca.</a:t>
+            </a:r>
+            <a:endParaRPr lang="en-US" sz="950" dirty="0"/>
+          </a:p>
+        </p:txBody>
+      </p:sp>
+      <p:sp>
+        <p:nvSpPr>
+          <p:cNvPr id="27" name="Shape 24"/>
+          <p:cNvSpPr/>
+          <p:nvPr/>
+        </p:nvSpPr>
+        <p:spPr>
+          <a:xfrm>
+            <a:off x="457200" y="3429000"/>
             <a:ext cx="1920240" cy="1188720"/>
           </a:xfrm>
           <a:prstGeom prst="roundRect">
@@ -15866,13 +17290,13 @@
       </p:sp>
       <p:sp>
         <p:nvSpPr>
-          <p:cNvPr id="26" name="Text 23"/>
-          <p:cNvSpPr/>
-          <p:nvPr/>
-        </p:nvSpPr>
-        <p:spPr>
-          <a:xfrm>
-            <a:off x="6903720" y="1645920"/>
+          <p:cNvPr id="28" name="Text 25"/>
+          <p:cNvSpPr/>
+          <p:nvPr/>
+        </p:nvSpPr>
+        <p:spPr>
+          <a:xfrm>
+            <a:off x="594360" y="3520440"/>
             <a:ext cx="1645920" cy="548640"/>
           </a:xfrm>
           <a:prstGeom prst="rect">
@@ -15897,7 +17321,7 @@
                 <a:ea typeface="Inter" pitchFamily="34" charset="-122"/>
                 <a:cs typeface="Inter" pitchFamily="34" charset="-120"/>
               </a:rPr>
-              <a:t>0.993</a:t>
+              <a:t>2</a:t>
             </a:r>
             <a:endParaRPr lang="en-US" sz="2600" dirty="0"/>
           </a:p>
@@ -15905,13 +17329,13 @@
       </p:sp>
       <p:sp>
         <p:nvSpPr>
-          <p:cNvPr id="27" name="Text 24"/>
-          <p:cNvSpPr/>
-          <p:nvPr/>
-        </p:nvSpPr>
-        <p:spPr>
-          <a:xfrm>
-            <a:off x="6903720" y="2212848"/>
+          <p:cNvPr id="29" name="Text 26"/>
+          <p:cNvSpPr/>
+          <p:nvPr/>
+        </p:nvSpPr>
+        <p:spPr>
+          <a:xfrm>
+            <a:off x="594360" y="4087368"/>
             <a:ext cx="1645920" cy="457200"/>
           </a:xfrm>
           <a:prstGeom prst="rect">
@@ -15936,7 +17360,7 @@
                 <a:ea typeface="Inter" pitchFamily="34" charset="-122"/>
                 <a:cs typeface="Inter" pitchFamily="34" charset="-120"/>
               </a:rPr>
-              <a:t>precision at threshold 0.7</a:t>
+              <a:t>orders placed in the demo month, each read back</a:t>
             </a:r>
             <a:endParaRPr lang="en-US" sz="1050" dirty="0"/>
           </a:p>
@@ -15944,13 +17368,13 @@
       </p:sp>
       <p:sp>
         <p:nvSpPr>
-          <p:cNvPr id="28" name="Shape 25"/>
-          <p:cNvSpPr/>
-          <p:nvPr/>
-        </p:nvSpPr>
-        <p:spPr>
-          <a:xfrm>
-            <a:off x="4663440" y="2926080"/>
+          <p:cNvPr id="30" name="Shape 27"/>
+          <p:cNvSpPr/>
+          <p:nvPr/>
+        </p:nvSpPr>
+        <p:spPr>
+          <a:xfrm>
+            <a:off x="2560320" y="3429000"/>
             <a:ext cx="1920240" cy="1188720"/>
           </a:xfrm>
           <a:prstGeom prst="roundRect">
@@ -15971,13 +17395,13 @@
       </p:sp>
       <p:sp>
         <p:nvSpPr>
-          <p:cNvPr id="29" name="Text 26"/>
-          <p:cNvSpPr/>
-          <p:nvPr/>
-        </p:nvSpPr>
-        <p:spPr>
-          <a:xfrm>
-            <a:off x="4800600" y="3017520"/>
+          <p:cNvPr id="31" name="Text 28"/>
+          <p:cNvSpPr/>
+          <p:nvPr/>
+        </p:nvSpPr>
+        <p:spPr>
+          <a:xfrm>
+            <a:off x="2697480" y="3520440"/>
             <a:ext cx="1645920" cy="548640"/>
           </a:xfrm>
           <a:prstGeom prst="rect">
@@ -15996,13 +17420,13 @@
             <a:r>
               <a:rPr lang="en-US" sz="2600" b="1" dirty="0">
                 <a:solidFill>
-                  <a:srgbClr val="101828"/>
-                </a:solidFill>
-                <a:latin typeface="Inter" pitchFamily="34" charset="0"/>
-                <a:ea typeface="Inter" pitchFamily="34" charset="-122"/>
-                <a:cs typeface="Inter" pitchFamily="34" charset="-120"/>
-              </a:rPr>
-              <a:t>0.944</a:t>
+                  <a:srgbClr val="B42318"/>
+                </a:solidFill>
+                <a:latin typeface="Inter" pitchFamily="34" charset="0"/>
+                <a:ea typeface="Inter" pitchFamily="34" charset="-122"/>
+                <a:cs typeface="Inter" pitchFamily="34" charset="-120"/>
+              </a:rPr>
+              <a:t>2</a:t>
             </a:r>
             <a:endParaRPr lang="en-US" sz="2600" dirty="0"/>
           </a:p>
@@ -16010,13 +17434,13 @@
       </p:sp>
       <p:sp>
         <p:nvSpPr>
-          <p:cNvPr id="30" name="Text 27"/>
-          <p:cNvSpPr/>
-          <p:nvPr/>
-        </p:nvSpPr>
-        <p:spPr>
-          <a:xfrm>
-            <a:off x="4800600" y="3584448"/>
+          <p:cNvPr id="32" name="Text 29"/>
+          <p:cNvSpPr/>
+          <p:nvPr/>
+        </p:nvSpPr>
+        <p:spPr>
+          <a:xfrm>
+            <a:off x="2697480" y="4087368"/>
             <a:ext cx="1645920" cy="457200"/>
           </a:xfrm>
           <a:prstGeom prst="rect">
@@ -16041,7 +17465,7 @@
                 <a:ea typeface="Inter" pitchFamily="34" charset="-122"/>
                 <a:cs typeface="Inter" pitchFamily="34" charset="-120"/>
               </a:rPr>
-              <a:t>recall over mule schemes</a:t>
+              <a:t>off-list requests stopped (a meme stock, an option)</a:t>
             </a:r>
             <a:endParaRPr lang="en-US" sz="1050" dirty="0"/>
           </a:p>
@@ -16049,13 +17473,13 @@
       </p:sp>
       <p:sp>
         <p:nvSpPr>
-          <p:cNvPr id="31" name="Shape 28"/>
-          <p:cNvSpPr/>
-          <p:nvPr/>
-        </p:nvSpPr>
-        <p:spPr>
-          <a:xfrm>
-            <a:off x="6766560" y="2926080"/>
+          <p:cNvPr id="33" name="Shape 30"/>
+          <p:cNvSpPr/>
+          <p:nvPr/>
+        </p:nvSpPr>
+        <p:spPr>
+          <a:xfrm>
+            <a:off x="4663440" y="3429000"/>
             <a:ext cx="1920240" cy="1188720"/>
           </a:xfrm>
           <a:prstGeom prst="roundRect">
@@ -16076,13 +17500,13 @@
       </p:sp>
       <p:sp>
         <p:nvSpPr>
-          <p:cNvPr id="32" name="Text 29"/>
-          <p:cNvSpPr/>
-          <p:nvPr/>
-        </p:nvSpPr>
-        <p:spPr>
-          <a:xfrm>
-            <a:off x="6903720" y="3017520"/>
+          <p:cNvPr id="34" name="Text 31"/>
+          <p:cNvSpPr/>
+          <p:nvPr/>
+        </p:nvSpPr>
+        <p:spPr>
+          <a:xfrm>
+            <a:off x="4800600" y="3520440"/>
             <a:ext cx="1645920" cy="548640"/>
           </a:xfrm>
           <a:prstGeom prst="rect">
@@ -16107,7 +17531,7 @@
                 <a:ea typeface="Inter" pitchFamily="34" charset="-122"/>
                 <a:cs typeface="Inter" pitchFamily="34" charset="-120"/>
               </a:rPr>
-              <a:t>0</a:t>
+              <a:t>9/9</a:t>
             </a:r>
             <a:endParaRPr lang="en-US" sz="2600" dirty="0"/>
           </a:p>
@@ -16115,13 +17539,13 @@
       </p:sp>
       <p:sp>
         <p:nvSpPr>
-          <p:cNvPr id="33" name="Text 30"/>
-          <p:cNvSpPr/>
-          <p:nvPr/>
-        </p:nvSpPr>
-        <p:spPr>
-          <a:xfrm>
-            <a:off x="6903720" y="3584448"/>
+          <p:cNvPr id="35" name="Text 32"/>
+          <p:cNvSpPr/>
+          <p:nvPr/>
+        </p:nvSpPr>
+        <p:spPr>
+          <a:xfrm>
+            <a:off x="4800600" y="4087368"/>
             <a:ext cx="1645920" cy="457200"/>
           </a:xfrm>
           <a:prstGeom prst="rect">
@@ -16146,7 +17570,7 @@
                 <a:ea typeface="Inter" pitchFamily="34" charset="-122"/>
                 <a:cs typeface="Inter" pitchFamily="34" charset="-120"/>
               </a:rPr>
-              <a:t>false alarms on employers, merchants, landlords</a:t>
+              <a:t>red-team attacks on orders stopped</a:t>
             </a:r>
             <a:endParaRPr lang="en-US" sz="1050" dirty="0"/>
           </a:p>
@@ -16154,23 +17578,89 @@
       </p:sp>
       <p:sp>
         <p:nvSpPr>
-          <p:cNvPr id="34" name="Text 31"/>
-          <p:cNvSpPr/>
-          <p:nvPr/>
-        </p:nvSpPr>
-        <p:spPr>
-          <a:xfrm>
-            <a:off x="4663440" y="4251960"/>
-            <a:ext cx="4023360" cy="457200"/>
-          </a:xfrm>
-          <a:prstGeom prst="rect">
-            <a:avLst/>
-          </a:prstGeom>
-          <a:noFill/>
-          <a:ln/>
-        </p:spPr>
-        <p:txBody>
-          <a:bodyPr wrap="square" lIns="0" tIns="0" rIns="0" bIns="0" rtlCol="0" anchor="ctr"/>
+          <p:cNvPr id="36" name="Shape 33"/>
+          <p:cNvSpPr/>
+          <p:nvPr/>
+        </p:nvSpPr>
+        <p:spPr>
+          <a:xfrm>
+            <a:off x="6766560" y="3429000"/>
+            <a:ext cx="1920240" cy="1188720"/>
+          </a:xfrm>
+          <a:prstGeom prst="roundRect">
+            <a:avLst>
+              <a:gd name="adj" fmla="val 7692"/>
+            </a:avLst>
+          </a:prstGeom>
+          <a:solidFill>
+            <a:srgbClr val="F4F5F7"/>
+          </a:solidFill>
+          <a:ln w="12700">
+            <a:solidFill>
+              <a:srgbClr val="F4F5F7"/>
+            </a:solidFill>
+            <a:prstDash val="solid"/>
+          </a:ln>
+        </p:spPr>
+      </p:sp>
+      <p:sp>
+        <p:nvSpPr>
+          <p:cNvPr id="37" name="Text 34"/>
+          <p:cNvSpPr/>
+          <p:nvPr/>
+        </p:nvSpPr>
+        <p:spPr>
+          <a:xfrm>
+            <a:off x="6903720" y="3520440"/>
+            <a:ext cx="1645920" cy="548640"/>
+          </a:xfrm>
+          <a:prstGeom prst="rect">
+            <a:avLst/>
+          </a:prstGeom>
+          <a:noFill/>
+          <a:ln/>
+        </p:spPr>
+        <p:txBody>
+          <a:bodyPr wrap="square" lIns="0" tIns="0" rIns="0" bIns="0" rtlCol="0" anchor="ctr"/>
+          <a:lstStyle/>
+          <a:p>
+            <a:pPr indent="0" marL="0">
+              <a:buNone/>
+            </a:pPr>
+            <a:r>
+              <a:rPr lang="en-US" sz="2600" b="1" dirty="0">
+                <a:solidFill>
+                  <a:srgbClr val="101828"/>
+                </a:solidFill>
+                <a:latin typeface="Inter" pitchFamily="34" charset="0"/>
+                <a:ea typeface="Inter" pitchFamily="34" charset="-122"/>
+                <a:cs typeface="Inter" pitchFamily="34" charset="-120"/>
+              </a:rPr>
+              <a:t>1</a:t>
+            </a:r>
+            <a:endParaRPr lang="en-US" sz="2600" dirty="0"/>
+          </a:p>
+        </p:txBody>
+      </p:sp>
+      <p:sp>
+        <p:nvSpPr>
+          <p:cNvPr id="38" name="Text 35"/>
+          <p:cNvSpPr/>
+          <p:nvPr/>
+        </p:nvSpPr>
+        <p:spPr>
+          <a:xfrm>
+            <a:off x="6903720" y="4087368"/>
+            <a:ext cx="1645920" cy="457200"/>
+          </a:xfrm>
+          <a:prstGeom prst="rect">
+            <a:avLst/>
+          </a:prstGeom>
+          <a:noFill/>
+          <a:ln/>
+        </p:spPr>
+        <p:txBody>
+          <a:bodyPr wrap="square" lIns="0" tIns="0" rIns="0" bIns="0" rtlCol="0" anchor="t"/>
           <a:lstStyle/>
           <a:p>
             <a:pPr indent="0" marL="0">
@@ -16185,7 +17675,7 @@
                 <a:ea typeface="Inter" pitchFamily="34" charset="-122"/>
                 <a:cs typeface="Inter" pitchFamily="34" charset="-120"/>
               </a:rPr>
-              <a:t>Synthetic graphs from our generator; real data will score lower. The model can only add a reason to ask.</a:t>
+              <a:t>fill journaled at the next open</a:t>
             </a:r>
             <a:endParaRPr lang="en-US" sz="1050" dirty="0"/>
           </a:p>

--- a/docs/presentation.pptx
+++ b/docs/presentation.pptx
@@ -17255,7 +17255,7 @@
                 <a:ea typeface="Inter" pitchFamily="34" charset="-122"/>
                 <a:cs typeface="Inter" pitchFamily="34" charset="-120"/>
               </a:rPr>
-              <a:t>Demo: sandbox broker. Live: Alpaca paper, GUARDIAN_BROKER=alpaca.</a:t>
+              <a:t>Live, Alpaca paper: SPY limit up to $770.57, filled at $767.57</a:t>
             </a:r>
             <a:endParaRPr lang="en-US" sz="950" dirty="0"/>
           </a:p>

--- a/docs/presentation.pptx
+++ b/docs/presentation.pptx
@@ -19,9 +19,10 @@
     <p:sldId id="267" r:id="rId13"/>
     <p:sldId id="268" r:id="rId14"/>
     <p:sldId id="269" r:id="rId15"/>
+    <p:sldId id="270" r:id="rId16"/>
   </p:sldIdLst>
   <p:notesMasterIdLst>
-    <p:notesMasterId r:id="rId16"/>
+    <p:notesMasterId r:id="rId17"/>
   </p:notesMasterIdLst>
   <p:sldSz cx="9144000" cy="5143500"/>
   <p:notesSz cx="5143500" cy="9144000"/>
@@ -427,7 +428,7 @@
                 </a:solidFill>
                 <a:latin typeface="Arial"/>
               </a:rPr>
-              <a:t>US dollars per task, one client</a:t>
+              <a:t>US dollars per task, one client, measured live</a:t>
             </a:r>
           </a:p>
         </c:rich>
@@ -525,25 +526,25 @@
                 <c:formatCode>General</c:formatCode>
                 <c:ptCount val="7"/>
                 <c:pt idx="0">
-                  <c:v>0.003122</c:v>
+                  <c:v>0.004558</c:v>
                 </c:pt>
                 <c:pt idx="1">
-                  <c:v>0.000222</c:v>
+                  <c:v>0.000308</c:v>
                 </c:pt>
                 <c:pt idx="2">
-                  <c:v>0.000395</c:v>
+                  <c:v>0.000684</c:v>
                 </c:pt>
                 <c:pt idx="3">
-                  <c:v>0.00261</c:v>
+                  <c:v>0.004408</c:v>
                 </c:pt>
                 <c:pt idx="4">
-                  <c:v>0.000306</c:v>
+                  <c:v>0.000545</c:v>
                 </c:pt>
                 <c:pt idx="5">
-                  <c:v>0.000413</c:v>
+                  <c:v>0.000606</c:v>
                 </c:pt>
                 <c:pt idx="6">
-                  <c:v>0.000172</c:v>
+                  <c:v>0.000305</c:v>
                 </c:pt>
               </c:numCache>
             </c:numRef>
@@ -635,22 +636,22 @@
                   <c:v>0</c:v>
                 </c:pt>
                 <c:pt idx="1">
-                  <c:v>0.000222</c:v>
+                  <c:v>0.000313</c:v>
                 </c:pt>
                 <c:pt idx="2">
                   <c:v>0</c:v>
                 </c:pt>
                 <c:pt idx="3">
-                  <c:v>0.001796</c:v>
+                  <c:v>0.002751</c:v>
                 </c:pt>
                 <c:pt idx="4">
-                  <c:v>0.000187</c:v>
+                  <c:v>0.000437</c:v>
                 </c:pt>
                 <c:pt idx="5">
-                  <c:v>0.000286</c:v>
+                  <c:v>0.000461</c:v>
                 </c:pt>
                 <c:pt idx="6">
-                  <c:v>0.000166</c:v>
+                  <c:v>0.000307</c:v>
                 </c:pt>
               </c:numCache>
             </c:numRef>
@@ -1210,7 +1211,7 @@
           <a:p>
             <a:r>
               <a:rPr lang="en-US" dirty="0"/>
-              <a:t>Hello. We are Kseniia Kuzmina and Nikita Stepanov, the Guardian team. Our topic is A: an AI agent that pays, cancels and budgets for a bank client. In ten minutes: the problem, the idea, a month of the demo, how the kernel works, the security results, compliance, cost and what is next.</a:t>
+              <a:t>Hello. We are Kseniia Kuzmina and Nikita Stepanov, the Guardian team. Our topic is A: an AI agent that pays, cancels and budgets for a bank client. Our whole project in one sentence: An AI agent may propose any payment, but money moves only inside what the client signed, and the bank can prove it. In ten minutes: the problem, the idea, three scenes from the demo, how the kernel works, the security results, cost and a pilot with a bank.</a:t>
             </a:r>
             <a:endParaRPr lang="en-US" dirty="0"/>
           </a:p>
@@ -1562,7 +1563,7 @@
           <a:p>
             <a:r>
               <a:rPr lang="en-US" dirty="0"/>
-              <a:t>Cost. Models sit on a three-level ladder: rules and templates cost nothing, then a small model, then larger ones only when risk is high. For one client's typical month the first month costs $0.0072 in tokens; the next month $0.0027, 63.3 percent less, because the repeat payment and the repeated check run from templates with no model call. In the full demo 97.6 percent of the work stays on levels zero and one. At the next-month rate a million clients cost about $3,000 a month. These are token counts on the real prompts with stub answers; a live run will replace the estimate.</a:t>
+              <a:t>Cost. Models sit on a three-level ladder: rules and templates cost nothing, then a small model, then larger ones only when risk is high. For one client's typical month the first month costs $0.0114 in tokens; the next month $0.0043, 62.6 percent less, because the repeat payment and the repeated check run from templates with no model call. In the full demo 97.6 percent of the work stays on levels zero and one. At the next-month rate a million clients cost about $4,000 a month. These numbers are measured on a live run with real models: claude-haiku-4-5-20251001 on level one, claude-sonnet-5-5 and claude-opus-5-5 above it.</a:t>
             </a:r>
             <a:endParaRPr lang="en-US" dirty="0"/>
           </a:p>
@@ -1650,7 +1651,7 @@
           <a:p>
             <a:r>
               <a:rPr lang="en-US" dirty="0"/>
-              <a:t>To sum up. 48 of 48 functional tasks pass in English, Russian and Chinese, 59 of 59 attacks in the evaluation set are stopped, and the whole repository has an automated test suite that runs in the Docker build. Everything is reproducible from the repository in replay mode without any keys. Next: live runs with real models, anchoring on a public test network, the payee model on real bank graphs, and SD-JWT selective disclosure for mandates. Agents propose; the kernel decides, checks and records. Thank you.</a:t>
+              <a:t>How this reaches real clients. The customer is the bank, not the client: Guardian runs inside the bank as the gate for its agent channel. The bank gets three things: fraud losses it does not pay out, a safe way to let third party AI assistants act for its clients, and audit evidence for the regulator. We propose a pilot in three stages. First, shadow mode for about three months: the kernel sees real agent requests and fraud cases, decides, but does not act, and we compare its decisions with the fraud team's. Second, the bank's own employees with real money and small caps. Third, a few thousand volunteer clients, starting with subscriptions and bills, then investing. We measure what the bank cares about: attacks stopped compared with its fraud team, how often a card asks the client without need, zero payments outside a mandate, and cost per client, which today is about $0.0043 a month in tokens.</a:t>
             </a:r>
             <a:endParaRPr lang="en-US" dirty="0"/>
           </a:p>
@@ -1674,6 +1675,94 @@
             <a:fld id="{F7021451-1387-4CA6-816F-3879F97B5CBC}" type="slidenum">
               <a:rPr lang="en-US"/>
               <a:t>14</a:t>
+            </a:fld>
+            <a:endParaRPr lang="en-US"/>
+          </a:p>
+        </p:txBody>
+      </p:sp>
+    </p:spTree>
+    <p:extLst>
+      <p:ext uri="{BB962C8B-B14F-4D97-AF65-F5344CB8AC3E}">
+        <p14:creationId xmlns:p14="http://schemas.microsoft.com/office/powerpoint/2010/main" val="1024086991"/>
+      </p:ext>
+    </p:extLst>
+  </p:cSld>
+  <p:clrMapOvr>
+    <a:masterClrMapping/>
+  </p:clrMapOvr>
+</p:notes>
+</file>
+
+<file path=ppt/notesSlides/notesSlide15.xml><?xml version="1.0" encoding="utf-8"?>
+<p:notes xmlns:a="http://schemas.openxmlformats.org/drawingml/2006/main" xmlns:r="http://schemas.openxmlformats.org/officeDocument/2006/relationships" xmlns:p="http://schemas.openxmlformats.org/presentationml/2006/main">
+  <p:cSld>
+    <p:spTree>
+      <p:nvGrpSpPr>
+        <p:cNvPr id="1" name=""/>
+        <p:cNvGrpSpPr/>
+        <p:nvPr/>
+      </p:nvGrpSpPr>
+      <p:grpSpPr>
+        <a:xfrm>
+          <a:off x="0" y="0"/>
+          <a:ext cx="0" cy="0"/>
+          <a:chOff x="0" y="0"/>
+          <a:chExt cx="0" cy="0"/>
+        </a:xfrm>
+      </p:grpSpPr>
+      <p:sp>
+        <p:nvSpPr>
+          <p:cNvPr id="2" name="Slide Image Placeholder 1"/>
+          <p:cNvSpPr>
+            <a:spLocks noGrp="1" noRot="1" noChangeAspect="1"/>
+          </p:cNvSpPr>
+          <p:nvPr>
+            <p:ph type="sldImg"/>
+          </p:nvPr>
+        </p:nvSpPr>
+        <p:spPr/>
+      </p:sp>
+      <p:sp>
+        <p:nvSpPr>
+          <p:cNvPr id="3" name="Notes Placeholder 2"/>
+          <p:cNvSpPr>
+            <a:spLocks noGrp="1"/>
+          </p:cNvSpPr>
+          <p:nvPr>
+            <p:ph type="body" idx="1"/>
+          </p:nvPr>
+        </p:nvSpPr>
+        <p:spPr/>
+        <p:txBody>
+          <a:bodyPr/>
+          <a:lstStyle/>
+          <a:p>
+            <a:r>
+              <a:rPr lang="en-US" dirty="0"/>
+              <a:t>To sum up. 48 of 48 functional tasks pass in English, Russian and Chinese, 59 of 59 attacks in the evaluation set are stopped, and the whole repository has an automated test suite that runs in the Docker build. With real models the same evaluation passes 44 of 48; every miss is the live critic stopping something a card was expected for. Everything is reproducible from the repository in replay mode without any keys. Next: the pilot with a bank, anchoring on a public test network, the payee model on real bank graphs, and SD-JWT selective disclosure for mandates. Agents propose; the kernel decides, checks and records. Thank you.</a:t>
+            </a:r>
+            <a:endParaRPr lang="en-US" dirty="0"/>
+          </a:p>
+        </p:txBody>
+      </p:sp>
+      <p:sp>
+        <p:nvSpPr>
+          <p:cNvPr id="4" name="Slide Number Placeholder 3"/>
+          <p:cNvSpPr>
+            <a:spLocks noGrp="1"/>
+          </p:cNvSpPr>
+          <p:nvPr>
+            <p:ph type="sldNum" sz="quarter" idx="10"/>
+          </p:nvPr>
+        </p:nvSpPr>
+        <p:spPr/>
+        <p:txBody>
+          <a:bodyPr/>
+          <a:lstStyle/>
+          <a:p>
+            <a:fld id="{F7021451-1387-4CA6-816F-3879F97B5CBC}" type="slidenum">
+              <a:rPr lang="en-US"/>
+              <a:t>15</a:t>
             </a:fld>
             <a:endParaRPr lang="en-US"/>
           </a:p>
@@ -2002,7 +2091,7 @@
           <a:p>
             <a:r>
               <a:rPr lang="en-US" dirty="0"/>
-              <a:t>Here is the real interface. On the left, a card. The kernel renders it, every field has its source, and you hold to sign with the device key. On the right, the fake bill. It imitates Mosenergo, the account is not Mosenergo's, it uses pressure and has a hidden instruction for AI agents, and it is linked to an earlier phishing email. The scam call, where the ladder goes from explain to ask to a pause and then holds the money for a person at the bank, is in the demo video.</a:t>
+              <a:t>If you remember three scenes from our demo, let it be these. One: a payment the client can prove. The kernel renders the card, every field has its source, the client signs it with the device key, and next month the same payment runs alone under a standing permission. Two: an attack that goes nowhere. A fake bill imitates the electricity company, the account is not theirs, and it carries a hidden instruction for AI agents. The kernel stops it with reasons and sends the case to analysts. Three: real money logic on a real exchange. The client asks to invest ten dollars a month in SPY; the kernel checks the order with its own quote and places it. On an Alpaca paper account the order filled at $767.57. Everything else in the demo, the budget, the scam call, earned trust, is the same kernel doing the same thing.</a:t>
             </a:r>
             <a:endParaRPr lang="en-US" dirty="0"/>
           </a:p>
@@ -2840,24 +2929,63 @@
         </p:nvSpPr>
         <p:spPr>
           <a:xfrm>
-            <a:off x="640080" y="3291840"/>
-            <a:ext cx="7863840" cy="457200"/>
-          </a:xfrm>
-          <a:prstGeom prst="rect">
-            <a:avLst/>
-          </a:prstGeom>
-          <a:noFill/>
-          <a:ln/>
-        </p:spPr>
-        <p:txBody>
-          <a:bodyPr wrap="square" lIns="0" tIns="0" rIns="0" bIns="0" rtlCol="0" anchor="ctr"/>
-          <a:lstStyle/>
-          <a:p>
-            <a:pPr indent="0" marL="0">
-              <a:buNone/>
-            </a:pPr>
-            <a:r>
-              <a:rPr lang="en-US" sz="2200" dirty="0">
+            <a:off x="640080" y="3063240"/>
+            <a:ext cx="7863840" cy="411480"/>
+          </a:xfrm>
+          <a:prstGeom prst="rect">
+            <a:avLst/>
+          </a:prstGeom>
+          <a:noFill/>
+          <a:ln/>
+        </p:spPr>
+        <p:txBody>
+          <a:bodyPr wrap="square" lIns="0" tIns="0" rIns="0" bIns="0" rtlCol="0" anchor="ctr"/>
+          <a:lstStyle/>
+          <a:p>
+            <a:pPr indent="0" marL="0">
+              <a:buNone/>
+            </a:pPr>
+            <a:r>
+              <a:rPr lang="en-US" sz="2000" dirty="0">
+                <a:solidFill>
+                  <a:srgbClr val="667085"/>
+                </a:solidFill>
+                <a:latin typeface="Inter" pitchFamily="34" charset="0"/>
+                <a:ea typeface="Inter" pitchFamily="34" charset="-122"/>
+                <a:cs typeface="Inter" pitchFamily="34" charset="-120"/>
+              </a:rPr>
+              <a:t>A bank-side safety kernel for AI payment agents</a:t>
+            </a:r>
+            <a:endParaRPr lang="en-US" sz="2000" dirty="0"/>
+          </a:p>
+        </p:txBody>
+      </p:sp>
+      <p:sp>
+        <p:nvSpPr>
+          <p:cNvPr id="7" name="Text 4"/>
+          <p:cNvSpPr/>
+          <p:nvPr/>
+        </p:nvSpPr>
+        <p:spPr>
+          <a:xfrm>
+            <a:off x="640080" y="3474720"/>
+            <a:ext cx="7863840" cy="685800"/>
+          </a:xfrm>
+          <a:prstGeom prst="rect">
+            <a:avLst/>
+          </a:prstGeom>
+          <a:noFill/>
+          <a:ln/>
+        </p:spPr>
+        <p:txBody>
+          <a:bodyPr wrap="square" lIns="0" tIns="0" rIns="0" bIns="0" rtlCol="0" anchor="t"/>
+          <a:lstStyle/>
+          <a:p>
+            <a:pPr indent="0" marL="0">
+              <a:buNone/>
+            </a:pPr>
+            <a:r>
+              <a:rPr lang="en-US" sz="1700" b="1" dirty="0">
                 <a:solidFill>
                   <a:srgbClr val="101828"/>
                 </a:solidFill>
@@ -2865,48 +2993,9 @@
                 <a:ea typeface="Inter" pitchFamily="34" charset="-122"/>
                 <a:cs typeface="Inter" pitchFamily="34" charset="-120"/>
               </a:rPr>
-              <a:t>A bank-side safety kernel for AI payment agents</a:t>
-            </a:r>
-            <a:endParaRPr lang="en-US" sz="2200" dirty="0"/>
-          </a:p>
-        </p:txBody>
-      </p:sp>
-      <p:sp>
-        <p:nvSpPr>
-          <p:cNvPr id="7" name="Text 4"/>
-          <p:cNvSpPr/>
-          <p:nvPr/>
-        </p:nvSpPr>
-        <p:spPr>
-          <a:xfrm>
-            <a:off x="640080" y="3749040"/>
-            <a:ext cx="7863840" cy="365760"/>
-          </a:xfrm>
-          <a:prstGeom prst="rect">
-            <a:avLst/>
-          </a:prstGeom>
-          <a:noFill/>
-          <a:ln/>
-        </p:spPr>
-        <p:txBody>
-          <a:bodyPr wrap="square" lIns="0" tIns="0" rIns="0" bIns="0" rtlCol="0" anchor="ctr"/>
-          <a:lstStyle/>
-          <a:p>
-            <a:pPr indent="0" marL="0">
-              <a:buNone/>
-            </a:pPr>
-            <a:r>
-              <a:rPr lang="en-US" sz="1500" dirty="0">
-                <a:solidFill>
-                  <a:srgbClr val="667085"/>
-                </a:solidFill>
-                <a:latin typeface="Inter" pitchFamily="34" charset="0"/>
-                <a:ea typeface="Inter" pitchFamily="34" charset="-122"/>
-                <a:cs typeface="Inter" pitchFamily="34" charset="-120"/>
-              </a:rPr>
-              <a:t>Agents propose. The kernel decides, checks and records.</a:t>
-            </a:r>
-            <a:endParaRPr lang="en-US" sz="1500" dirty="0"/>
+              <a:t>An AI agent may propose any payment, but money moves only inside what the client signed, and the bank can prove it.</a:t>
+            </a:r>
+            <a:endParaRPr lang="en-US" sz="1700" dirty="0"/>
           </a:p>
         </p:txBody>
       </p:sp>
@@ -3197,7 +3286,7 @@
                 <a:ea typeface="Inter" pitchFamily="34" charset="-122"/>
                 <a:cs typeface="Inter" pitchFamily="34" charset="-120"/>
               </a:rPr>
-              <a:t>10 / 14</a:t>
+              <a:t>10 / 15</a:t>
             </a:r>
             <a:endParaRPr lang="en-US" sz="900" dirty="0"/>
           </a:p>
@@ -4369,7 +4458,7 @@
                 <a:ea typeface="Inter" pitchFamily="34" charset="-122"/>
                 <a:cs typeface="Inter" pitchFamily="34" charset="-120"/>
               </a:rPr>
-              <a:t>11 / 14</a:t>
+              <a:t>11 / 15</a:t>
             </a:r>
             <a:endParaRPr lang="en-US" sz="900" dirty="0"/>
           </a:p>
@@ -5151,7 +5240,7 @@
                 <a:ea typeface="Inter" pitchFamily="34" charset="-122"/>
                 <a:cs typeface="Inter" pitchFamily="34" charset="-120"/>
               </a:rPr>
-              <a:t>12 / 14</a:t>
+              <a:t>12 / 15</a:t>
             </a:r>
             <a:endParaRPr lang="en-US" sz="900" dirty="0"/>
           </a:p>
@@ -7634,7 +7723,7 @@
                 <a:ea typeface="Inter" pitchFamily="34" charset="-122"/>
                 <a:cs typeface="Inter" pitchFamily="34" charset="-120"/>
               </a:rPr>
-              <a:t>13 / 14</a:t>
+              <a:t>13 / 15</a:t>
             </a:r>
             <a:endParaRPr lang="en-US" sz="900" dirty="0"/>
           </a:p>
@@ -7716,7 +7805,7 @@
                 <a:ea typeface="Inter" pitchFamily="34" charset="-122"/>
                 <a:cs typeface="Inter" pitchFamily="34" charset="-120"/>
               </a:rPr>
-              <a:t>$0.0072 → $0.0027</a:t>
+              <a:t>$0.0114 → $0.0043</a:t>
             </a:r>
             <a:endParaRPr lang="en-US" sz="2000" dirty="0"/>
           </a:p>
@@ -7926,7 +8015,7 @@
                 <a:ea typeface="Inter" pitchFamily="34" charset="-122"/>
                 <a:cs typeface="Inter" pitchFamily="34" charset="-120"/>
               </a:rPr>
-              <a:t>≈ $3,000</a:t>
+              <a:t>≈ $4,000</a:t>
             </a:r>
             <a:endParaRPr lang="en-US" sz="2600" dirty="0"/>
           </a:p>
@@ -8028,7 +8117,7 @@
               <a:buNone/>
             </a:pPr>
             <a:r>
-              <a:rPr lang="en-US" sz="2500" b="1" dirty="0">
+              <a:rPr lang="en-US" sz="2100" b="1" dirty="0">
                 <a:solidFill>
                   <a:srgbClr val="101828"/>
                 </a:solidFill>
@@ -8036,9 +8125,9 @@
                 <a:ea typeface="Inter" pitchFamily="34" charset="-122"/>
                 <a:cs typeface="Inter" pitchFamily="34" charset="-120"/>
               </a:rPr>
-              <a:t>Results and what comes next</a:t>
-            </a:r>
-            <a:endParaRPr lang="en-US" sz="2500" dirty="0"/>
+              <a:t>Pilot with a bank: who pays, how, what we measure</a:t>
+            </a:r>
+            <a:endParaRPr lang="en-US" sz="2100" dirty="0"/>
           </a:p>
         </p:txBody>
       </p:sp>
@@ -8180,7 +8269,714 @@
                 <a:ea typeface="Inter" pitchFamily="34" charset="-122"/>
                 <a:cs typeface="Inter" pitchFamily="34" charset="-120"/>
               </a:rPr>
-              <a:t>14 / 14</a:t>
+              <a:t>14 / 15</a:t>
+            </a:r>
+            <a:endParaRPr lang="en-US" sz="900" dirty="0"/>
+          </a:p>
+        </p:txBody>
+      </p:sp>
+      <p:sp>
+        <p:nvSpPr>
+          <p:cNvPr id="8" name="Shape 5"/>
+          <p:cNvSpPr/>
+          <p:nvPr/>
+        </p:nvSpPr>
+        <p:spPr>
+          <a:xfrm>
+            <a:off x="457200" y="1143000"/>
+            <a:ext cx="2651760" cy="3429000"/>
+          </a:xfrm>
+          <a:prstGeom prst="roundRect">
+            <a:avLst>
+              <a:gd name="adj" fmla="val 4138"/>
+            </a:avLst>
+          </a:prstGeom>
+          <a:solidFill>
+            <a:srgbClr val="EEF4FF"/>
+          </a:solidFill>
+          <a:ln w="12700">
+            <a:solidFill>
+              <a:srgbClr val="EEF4FF"/>
+            </a:solidFill>
+            <a:prstDash val="solid"/>
+          </a:ln>
+        </p:spPr>
+      </p:sp>
+      <p:sp>
+        <p:nvSpPr>
+          <p:cNvPr id="9" name="Text 6"/>
+          <p:cNvSpPr/>
+          <p:nvPr/>
+        </p:nvSpPr>
+        <p:spPr>
+          <a:xfrm>
+            <a:off x="640080" y="1261872"/>
+            <a:ext cx="2286000" cy="365760"/>
+          </a:xfrm>
+          <a:prstGeom prst="rect">
+            <a:avLst/>
+          </a:prstGeom>
+          <a:noFill/>
+          <a:ln/>
+        </p:spPr>
+        <p:txBody>
+          <a:bodyPr wrap="square" lIns="0" tIns="0" rIns="0" bIns="0" rtlCol="0" anchor="ctr"/>
+          <a:lstStyle/>
+          <a:p>
+            <a:pPr indent="0" marL="0">
+              <a:buNone/>
+            </a:pPr>
+            <a:r>
+              <a:rPr lang="en-US" sz="1600" b="1" dirty="0">
+                <a:solidFill>
+                  <a:srgbClr val="101828"/>
+                </a:solidFill>
+                <a:latin typeface="Inter" pitchFamily="34" charset="0"/>
+                <a:ea typeface="Inter" pitchFamily="34" charset="-122"/>
+                <a:cs typeface="Inter" pitchFamily="34" charset="-120"/>
+              </a:rPr>
+              <a:t>Who pays</a:t>
+            </a:r>
+            <a:endParaRPr lang="en-US" sz="1600" dirty="0"/>
+          </a:p>
+        </p:txBody>
+      </p:sp>
+      <p:sp>
+        <p:nvSpPr>
+          <p:cNvPr id="10" name="Text 7"/>
+          <p:cNvSpPr/>
+          <p:nvPr/>
+        </p:nvSpPr>
+        <p:spPr>
+          <a:xfrm>
+            <a:off x="640080" y="1691640"/>
+            <a:ext cx="2331720" cy="2788920"/>
+          </a:xfrm>
+          <a:prstGeom prst="rect">
+            <a:avLst/>
+          </a:prstGeom>
+          <a:noFill/>
+          <a:ln/>
+        </p:spPr>
+        <p:txBody>
+          <a:bodyPr wrap="square" lIns="0" tIns="0" rIns="0" bIns="0" rtlCol="0" anchor="t"/>
+          <a:lstStyle/>
+          <a:p>
+            <a:pPr marL="342900" indent="-342900">
+              <a:spcAft>
+                <a:spcPts val="700"/>
+              </a:spcAft>
+              <a:buSzPct val="100000"/>
+              <a:buChar char="•"/>
+            </a:pPr>
+            <a:r>
+              <a:rPr lang="en-US" sz="1150" dirty="0">
+                <a:solidFill>
+                  <a:srgbClr val="101828"/>
+                </a:solidFill>
+                <a:latin typeface="Inter" pitchFamily="34" charset="0"/>
+                <a:ea typeface="Inter" pitchFamily="34" charset="-122"/>
+                <a:cs typeface="Inter" pitchFamily="34" charset="-120"/>
+              </a:rPr>
+              <a:t>The bank: Guardian is the gate of its agent channel, a fee per active client a month</a:t>
+            </a:r>
+            <a:endParaRPr lang="en-US" sz="1150" dirty="0"/>
+          </a:p>
+          <a:p>
+            <a:pPr marL="342900" indent="-342900">
+              <a:spcAft>
+                <a:spcPts val="700"/>
+              </a:spcAft>
+              <a:buSzPct val="100000"/>
+              <a:buChar char="•"/>
+            </a:pPr>
+            <a:r>
+              <a:rPr lang="en-US" sz="1150" dirty="0">
+                <a:solidFill>
+                  <a:srgbClr val="101828"/>
+                </a:solidFill>
+                <a:latin typeface="Inter" pitchFamily="34" charset="0"/>
+                <a:ea typeface="Inter" pitchFamily="34" charset="-122"/>
+                <a:cs typeface="Inter" pitchFamily="34" charset="-120"/>
+              </a:rPr>
+              <a:t>Fraud losses not paid out</a:t>
+            </a:r>
+            <a:endParaRPr lang="en-US" sz="1150" dirty="0"/>
+          </a:p>
+          <a:p>
+            <a:pPr marL="342900" indent="-342900">
+              <a:spcAft>
+                <a:spcPts val="700"/>
+              </a:spcAft>
+              <a:buSzPct val="100000"/>
+              <a:buChar char="•"/>
+            </a:pPr>
+            <a:r>
+              <a:rPr lang="en-US" sz="1150" dirty="0">
+                <a:solidFill>
+                  <a:srgbClr val="101828"/>
+                </a:solidFill>
+                <a:latin typeface="Inter" pitchFamily="34" charset="0"/>
+                <a:ea typeface="Inter" pitchFamily="34" charset="-122"/>
+                <a:cs typeface="Inter" pitchFamily="34" charset="-120"/>
+              </a:rPr>
+              <a:t>Third party AI assistants admitted safely</a:t>
+            </a:r>
+            <a:endParaRPr lang="en-US" sz="1150" dirty="0"/>
+          </a:p>
+          <a:p>
+            <a:pPr marL="342900" indent="-342900">
+              <a:spcAft>
+                <a:spcPts val="700"/>
+              </a:spcAft>
+              <a:buSzPct val="100000"/>
+              <a:buChar char="•"/>
+            </a:pPr>
+            <a:r>
+              <a:rPr lang="en-US" sz="1150" dirty="0">
+                <a:solidFill>
+                  <a:srgbClr val="101828"/>
+                </a:solidFill>
+                <a:latin typeface="Inter" pitchFamily="34" charset="0"/>
+                <a:ea typeface="Inter" pitchFamily="34" charset="-122"/>
+                <a:cs typeface="Inter" pitchFamily="34" charset="-120"/>
+              </a:rPr>
+              <a:t>Audit evidence for the regulator</a:t>
+            </a:r>
+            <a:endParaRPr lang="en-US" sz="1150" dirty="0"/>
+          </a:p>
+        </p:txBody>
+      </p:sp>
+      <p:sp>
+        <p:nvSpPr>
+          <p:cNvPr id="11" name="Shape 8"/>
+          <p:cNvSpPr/>
+          <p:nvPr/>
+        </p:nvSpPr>
+        <p:spPr>
+          <a:xfrm>
+            <a:off x="3291840" y="1143000"/>
+            <a:ext cx="2651760" cy="3429000"/>
+          </a:xfrm>
+          <a:prstGeom prst="roundRect">
+            <a:avLst>
+              <a:gd name="adj" fmla="val 4138"/>
+            </a:avLst>
+          </a:prstGeom>
+          <a:solidFill>
+            <a:srgbClr val="F3F0FF"/>
+          </a:solidFill>
+          <a:ln w="12700">
+            <a:solidFill>
+              <a:srgbClr val="F3F0FF"/>
+            </a:solidFill>
+            <a:prstDash val="solid"/>
+          </a:ln>
+        </p:spPr>
+      </p:sp>
+      <p:sp>
+        <p:nvSpPr>
+          <p:cNvPr id="12" name="Text 9"/>
+          <p:cNvSpPr/>
+          <p:nvPr/>
+        </p:nvSpPr>
+        <p:spPr>
+          <a:xfrm>
+            <a:off x="3474720" y="1261872"/>
+            <a:ext cx="2286000" cy="365760"/>
+          </a:xfrm>
+          <a:prstGeom prst="rect">
+            <a:avLst/>
+          </a:prstGeom>
+          <a:noFill/>
+          <a:ln/>
+        </p:spPr>
+        <p:txBody>
+          <a:bodyPr wrap="square" lIns="0" tIns="0" rIns="0" bIns="0" rtlCol="0" anchor="ctr"/>
+          <a:lstStyle/>
+          <a:p>
+            <a:pPr indent="0" marL="0">
+              <a:buNone/>
+            </a:pPr>
+            <a:r>
+              <a:rPr lang="en-US" sz="1600" b="1" dirty="0">
+                <a:solidFill>
+                  <a:srgbClr val="101828"/>
+                </a:solidFill>
+                <a:latin typeface="Inter" pitchFamily="34" charset="0"/>
+                <a:ea typeface="Inter" pitchFamily="34" charset="-122"/>
+                <a:cs typeface="Inter" pitchFamily="34" charset="-120"/>
+              </a:rPr>
+              <a:t>Stages</a:t>
+            </a:r>
+            <a:endParaRPr lang="en-US" sz="1600" dirty="0"/>
+          </a:p>
+        </p:txBody>
+      </p:sp>
+      <p:sp>
+        <p:nvSpPr>
+          <p:cNvPr id="13" name="Text 10"/>
+          <p:cNvSpPr/>
+          <p:nvPr/>
+        </p:nvSpPr>
+        <p:spPr>
+          <a:xfrm>
+            <a:off x="3474720" y="1691640"/>
+            <a:ext cx="2331720" cy="2788920"/>
+          </a:xfrm>
+          <a:prstGeom prst="rect">
+            <a:avLst/>
+          </a:prstGeom>
+          <a:noFill/>
+          <a:ln/>
+        </p:spPr>
+        <p:txBody>
+          <a:bodyPr wrap="square" lIns="0" tIns="0" rIns="0" bIns="0" rtlCol="0" anchor="t"/>
+          <a:lstStyle/>
+          <a:p>
+            <a:pPr indent="0" marL="0">
+              <a:spcAft>
+                <a:spcPts val="700"/>
+              </a:spcAft>
+              <a:buNone/>
+            </a:pPr>
+            <a:r>
+              <a:rPr lang="en-US" sz="1150" dirty="0">
+                <a:solidFill>
+                  <a:srgbClr val="101828"/>
+                </a:solidFill>
+                <a:latin typeface="Inter" pitchFamily="34" charset="0"/>
+                <a:ea typeface="Inter" pitchFamily="34" charset="-122"/>
+                <a:cs typeface="Inter" pitchFamily="34" charset="-120"/>
+              </a:rPr>
+              <a:t>1  Shadow, about 3 months: decide, do not act; compare with the fraud team</a:t>
+            </a:r>
+            <a:endParaRPr lang="en-US" sz="1150" dirty="0"/>
+          </a:p>
+          <a:p>
+            <a:pPr indent="0" marL="0">
+              <a:spcAft>
+                <a:spcPts val="700"/>
+              </a:spcAft>
+              <a:buNone/>
+            </a:pPr>
+            <a:r>
+              <a:rPr lang="en-US" sz="1150" dirty="0">
+                <a:solidFill>
+                  <a:srgbClr val="101828"/>
+                </a:solidFill>
+                <a:latin typeface="Inter" pitchFamily="34" charset="0"/>
+                <a:ea typeface="Inter" pitchFamily="34" charset="-122"/>
+                <a:cs typeface="Inter" pitchFamily="34" charset="-120"/>
+              </a:rPr>
+              <a:t>2  Employees: real money, small caps, device signatures</a:t>
+            </a:r>
+            <a:endParaRPr lang="en-US" sz="1150" dirty="0"/>
+          </a:p>
+          <a:p>
+            <a:pPr indent="0" marL="0">
+              <a:spcAft>
+                <a:spcPts val="700"/>
+              </a:spcAft>
+              <a:buNone/>
+            </a:pPr>
+            <a:r>
+              <a:rPr lang="en-US" sz="1150" dirty="0">
+                <a:solidFill>
+                  <a:srgbClr val="101828"/>
+                </a:solidFill>
+                <a:latin typeface="Inter" pitchFamily="34" charset="0"/>
+                <a:ea typeface="Inter" pitchFamily="34" charset="-122"/>
+                <a:cs typeface="Inter" pitchFamily="34" charset="-120"/>
+              </a:rPr>
+              <a:t>3  Volunteer clients: subscriptions and bills, then investing</a:t>
+            </a:r>
+            <a:endParaRPr lang="en-US" sz="1150" dirty="0"/>
+          </a:p>
+        </p:txBody>
+      </p:sp>
+      <p:sp>
+        <p:nvSpPr>
+          <p:cNvPr id="14" name="Shape 11"/>
+          <p:cNvSpPr/>
+          <p:nvPr/>
+        </p:nvSpPr>
+        <p:spPr>
+          <a:xfrm>
+            <a:off x="6126480" y="1143000"/>
+            <a:ext cx="2651760" cy="3429000"/>
+          </a:xfrm>
+          <a:prstGeom prst="roundRect">
+            <a:avLst>
+              <a:gd name="adj" fmla="val 4138"/>
+            </a:avLst>
+          </a:prstGeom>
+          <a:solidFill>
+            <a:srgbClr val="E8F6F3"/>
+          </a:solidFill>
+          <a:ln w="12700">
+            <a:solidFill>
+              <a:srgbClr val="E8F6F3"/>
+            </a:solidFill>
+            <a:prstDash val="solid"/>
+          </a:ln>
+        </p:spPr>
+      </p:sp>
+      <p:sp>
+        <p:nvSpPr>
+          <p:cNvPr id="15" name="Text 12"/>
+          <p:cNvSpPr/>
+          <p:nvPr/>
+        </p:nvSpPr>
+        <p:spPr>
+          <a:xfrm>
+            <a:off x="6309360" y="1261872"/>
+            <a:ext cx="2286000" cy="365760"/>
+          </a:xfrm>
+          <a:prstGeom prst="rect">
+            <a:avLst/>
+          </a:prstGeom>
+          <a:noFill/>
+          <a:ln/>
+        </p:spPr>
+        <p:txBody>
+          <a:bodyPr wrap="square" lIns="0" tIns="0" rIns="0" bIns="0" rtlCol="0" anchor="ctr"/>
+          <a:lstStyle/>
+          <a:p>
+            <a:pPr indent="0" marL="0">
+              <a:buNone/>
+            </a:pPr>
+            <a:r>
+              <a:rPr lang="en-US" sz="1600" b="1" dirty="0">
+                <a:solidFill>
+                  <a:srgbClr val="101828"/>
+                </a:solidFill>
+                <a:latin typeface="Inter" pitchFamily="34" charset="0"/>
+                <a:ea typeface="Inter" pitchFamily="34" charset="-122"/>
+                <a:cs typeface="Inter" pitchFamily="34" charset="-120"/>
+              </a:rPr>
+              <a:t>What we measure</a:t>
+            </a:r>
+            <a:endParaRPr lang="en-US" sz="1600" dirty="0"/>
+          </a:p>
+        </p:txBody>
+      </p:sp>
+      <p:sp>
+        <p:nvSpPr>
+          <p:cNvPr id="16" name="Text 13"/>
+          <p:cNvSpPr/>
+          <p:nvPr/>
+        </p:nvSpPr>
+        <p:spPr>
+          <a:xfrm>
+            <a:off x="6309360" y="1691640"/>
+            <a:ext cx="2331720" cy="2788920"/>
+          </a:xfrm>
+          <a:prstGeom prst="rect">
+            <a:avLst/>
+          </a:prstGeom>
+          <a:noFill/>
+          <a:ln/>
+        </p:spPr>
+        <p:txBody>
+          <a:bodyPr wrap="square" lIns="0" tIns="0" rIns="0" bIns="0" rtlCol="0" anchor="t"/>
+          <a:lstStyle/>
+          <a:p>
+            <a:pPr marL="342900" indent="-342900">
+              <a:spcAft>
+                <a:spcPts val="700"/>
+              </a:spcAft>
+              <a:buSzPct val="100000"/>
+              <a:buChar char="•"/>
+            </a:pPr>
+            <a:r>
+              <a:rPr lang="en-US" sz="1150" dirty="0">
+                <a:solidFill>
+                  <a:srgbClr val="101828"/>
+                </a:solidFill>
+                <a:latin typeface="Inter" pitchFamily="34" charset="0"/>
+                <a:ea typeface="Inter" pitchFamily="34" charset="-122"/>
+                <a:cs typeface="Inter" pitchFamily="34" charset="-120"/>
+              </a:rPr>
+              <a:t>Attacks stopped vs the fraud team</a:t>
+            </a:r>
+            <a:endParaRPr lang="en-US" sz="1150" dirty="0"/>
+          </a:p>
+          <a:p>
+            <a:pPr marL="342900" indent="-342900">
+              <a:spcAft>
+                <a:spcPts val="700"/>
+              </a:spcAft>
+              <a:buSzPct val="100000"/>
+              <a:buChar char="•"/>
+            </a:pPr>
+            <a:r>
+              <a:rPr lang="en-US" sz="1150" dirty="0">
+                <a:solidFill>
+                  <a:srgbClr val="101828"/>
+                </a:solidFill>
+                <a:latin typeface="Inter" pitchFamily="34" charset="0"/>
+                <a:ea typeface="Inter" pitchFamily="34" charset="-122"/>
+                <a:cs typeface="Inter" pitchFamily="34" charset="-120"/>
+              </a:rPr>
+              <a:t>Cards that asked without need</a:t>
+            </a:r>
+            <a:endParaRPr lang="en-US" sz="1150" dirty="0"/>
+          </a:p>
+          <a:p>
+            <a:pPr marL="342900" indent="-342900">
+              <a:spcAft>
+                <a:spcPts val="700"/>
+              </a:spcAft>
+              <a:buSzPct val="100000"/>
+              <a:buChar char="•"/>
+            </a:pPr>
+            <a:r>
+              <a:rPr lang="en-US" sz="1150" dirty="0">
+                <a:solidFill>
+                  <a:srgbClr val="101828"/>
+                </a:solidFill>
+                <a:latin typeface="Inter" pitchFamily="34" charset="0"/>
+                <a:ea typeface="Inter" pitchFamily="34" charset="-122"/>
+                <a:cs typeface="Inter" pitchFamily="34" charset="-120"/>
+              </a:rPr>
+              <a:t>Payments outside a mandate: 0</a:t>
+            </a:r>
+            <a:endParaRPr lang="en-US" sz="1150" dirty="0"/>
+          </a:p>
+          <a:p>
+            <a:pPr marL="342900" indent="-342900">
+              <a:spcAft>
+                <a:spcPts val="700"/>
+              </a:spcAft>
+              <a:buSzPct val="100000"/>
+              <a:buChar char="•"/>
+            </a:pPr>
+            <a:r>
+              <a:rPr lang="en-US" sz="1150" dirty="0">
+                <a:solidFill>
+                  <a:srgbClr val="101828"/>
+                </a:solidFill>
+                <a:latin typeface="Inter" pitchFamily="34" charset="0"/>
+                <a:ea typeface="Inter" pitchFamily="34" charset="-122"/>
+                <a:cs typeface="Inter" pitchFamily="34" charset="-120"/>
+              </a:rPr>
+              <a:t>Token cost per client: $0.0043 a month</a:t>
+            </a:r>
+            <a:endParaRPr lang="en-US" sz="1150" dirty="0"/>
+          </a:p>
+        </p:txBody>
+      </p:sp>
+    </p:spTree>
+  </p:cSld>
+  <p:clrMapOvr>
+    <a:masterClrMapping/>
+  </p:clrMapOvr>
+</p:sld>
+</file>
+
+<file path=ppt/slides/slide15.xml><?xml version="1.0" encoding="utf-8"?>
+<p:sld xmlns:a="http://schemas.openxmlformats.org/drawingml/2006/main" xmlns:r="http://schemas.openxmlformats.org/officeDocument/2006/relationships" xmlns:p="http://schemas.openxmlformats.org/presentationml/2006/main">
+  <p:cSld name="Slide 15">
+    <p:bg>
+      <p:bgPr>
+        <a:solidFill>
+          <a:srgbClr val="FFFFFF"/>
+        </a:solidFill>
+      </p:bgPr>
+    </p:bg>
+    <p:spTree>
+      <p:nvGrpSpPr>
+        <p:cNvPr id="1" name=""/>
+        <p:cNvGrpSpPr/>
+        <p:nvPr/>
+      </p:nvGrpSpPr>
+      <p:grpSpPr>
+        <a:xfrm>
+          <a:off x="0" y="0"/>
+          <a:ext cx="0" cy="0"/>
+          <a:chOff x="0" y="0"/>
+          <a:chExt cx="0" cy="0"/>
+        </a:xfrm>
+      </p:grpSpPr>
+      <p:sp>
+        <p:nvSpPr>
+          <p:cNvPr id="2" name="Text 0"/>
+          <p:cNvSpPr/>
+          <p:nvPr/>
+        </p:nvSpPr>
+        <p:spPr>
+          <a:xfrm>
+            <a:off x="457200" y="384048"/>
+            <a:ext cx="8229600" cy="548640"/>
+          </a:xfrm>
+          <a:prstGeom prst="rect">
+            <a:avLst/>
+          </a:prstGeom>
+          <a:noFill/>
+          <a:ln/>
+        </p:spPr>
+        <p:txBody>
+          <a:bodyPr wrap="square" lIns="0" tIns="0" rIns="0" bIns="0" rtlCol="0" anchor="ctr"/>
+          <a:lstStyle/>
+          <a:p>
+            <a:pPr indent="0" marL="0">
+              <a:buNone/>
+            </a:pPr>
+            <a:r>
+              <a:rPr lang="en-US" sz="2500" b="1" dirty="0">
+                <a:solidFill>
+                  <a:srgbClr val="101828"/>
+                </a:solidFill>
+                <a:latin typeface="Inter" pitchFamily="34" charset="0"/>
+                <a:ea typeface="Inter" pitchFamily="34" charset="-122"/>
+                <a:cs typeface="Inter" pitchFamily="34" charset="-120"/>
+              </a:rPr>
+              <a:t>Results and what comes next</a:t>
+            </a:r>
+            <a:endParaRPr lang="en-US" sz="2500" dirty="0"/>
+          </a:p>
+        </p:txBody>
+      </p:sp>
+      <p:sp>
+        <p:nvSpPr>
+          <p:cNvPr id="3" name="Shape 1"/>
+          <p:cNvSpPr/>
+          <p:nvPr/>
+        </p:nvSpPr>
+        <p:spPr>
+          <a:xfrm>
+            <a:off x="457200" y="4754880"/>
+            <a:ext cx="210312" cy="210312"/>
+          </a:xfrm>
+          <a:prstGeom prst="roundRect">
+            <a:avLst>
+              <a:gd name="adj" fmla="val 22000"/>
+            </a:avLst>
+          </a:prstGeom>
+          <a:solidFill>
+            <a:srgbClr val="C2361F"/>
+          </a:solidFill>
+          <a:ln w="12700">
+            <a:solidFill>
+              <a:srgbClr val="C2361F"/>
+            </a:solidFill>
+            <a:prstDash val="solid"/>
+          </a:ln>
+        </p:spPr>
+      </p:sp>
+      <p:sp>
+        <p:nvSpPr>
+          <p:cNvPr id="4" name="Text 2"/>
+          <p:cNvSpPr/>
+          <p:nvPr/>
+        </p:nvSpPr>
+        <p:spPr>
+          <a:xfrm>
+            <a:off x="457200" y="4754880"/>
+            <a:ext cx="210312" cy="210312"/>
+          </a:xfrm>
+          <a:prstGeom prst="rect">
+            <a:avLst/>
+          </a:prstGeom>
+          <a:noFill/>
+          <a:ln/>
+        </p:spPr>
+        <p:txBody>
+          <a:bodyPr wrap="square" lIns="0" tIns="0" rIns="0" bIns="0" rtlCol="0" anchor="ctr"/>
+          <a:lstStyle/>
+          <a:p>
+            <a:pPr algn="ctr" indent="0" marL="0">
+              <a:buNone/>
+            </a:pPr>
+            <a:r>
+              <a:rPr lang="en-US" sz="920" dirty="0">
+                <a:solidFill>
+                  <a:srgbClr val="FFFFFF"/>
+                </a:solidFill>
+                <a:latin typeface="Noto Sans CJK SC" pitchFamily="34" charset="0"/>
+                <a:ea typeface="Noto Sans CJK SC" pitchFamily="34" charset="-122"/>
+                <a:cs typeface="Noto Sans CJK SC" pitchFamily="34" charset="-120"/>
+              </a:rPr>
+              <a:t>守</a:t>
+            </a:r>
+            <a:endParaRPr lang="en-US" sz="920" dirty="0"/>
+          </a:p>
+        </p:txBody>
+      </p:sp>
+      <p:sp>
+        <p:nvSpPr>
+          <p:cNvPr id="5" name="Text 3"/>
+          <p:cNvSpPr/>
+          <p:nvPr/>
+        </p:nvSpPr>
+        <p:spPr>
+          <a:xfrm>
+            <a:off x="731520" y="4754880"/>
+            <a:ext cx="1828800" cy="210312"/>
+          </a:xfrm>
+          <a:prstGeom prst="rect">
+            <a:avLst/>
+          </a:prstGeom>
+          <a:noFill/>
+          <a:ln/>
+        </p:spPr>
+        <p:txBody>
+          <a:bodyPr wrap="square" lIns="0" tIns="0" rIns="0" bIns="0" rtlCol="0" anchor="ctr"/>
+          <a:lstStyle/>
+          <a:p>
+            <a:pPr indent="0" marL="0">
+              <a:buNone/>
+            </a:pPr>
+            <a:r>
+              <a:rPr lang="en-US" sz="900" b="1" dirty="0">
+                <a:solidFill>
+                  <a:srgbClr val="101828"/>
+                </a:solidFill>
+                <a:latin typeface="Inter" pitchFamily="34" charset="0"/>
+                <a:ea typeface="Inter" pitchFamily="34" charset="-122"/>
+                <a:cs typeface="Inter" pitchFamily="34" charset="-120"/>
+              </a:rPr>
+              <a:t>Guardian</a:t>
+            </a:r>
+            <a:endParaRPr lang="en-US" sz="900" dirty="0"/>
+          </a:p>
+        </p:txBody>
+      </p:sp>
+      <p:sp>
+        <p:nvSpPr>
+          <p:cNvPr id="6" name="Text 4"/>
+          <p:cNvSpPr/>
+          <p:nvPr/>
+        </p:nvSpPr>
+        <p:spPr>
+          <a:xfrm>
+            <a:off x="6858000" y="4754880"/>
+            <a:ext cx="1828800" cy="210312"/>
+          </a:xfrm>
+          <a:prstGeom prst="rect">
+            <a:avLst/>
+          </a:prstGeom>
+          <a:noFill/>
+          <a:ln/>
+        </p:spPr>
+        <p:txBody>
+          <a:bodyPr wrap="square" lIns="0" tIns="0" rIns="0" bIns="0" rtlCol="0" anchor="ctr"/>
+          <a:lstStyle/>
+          <a:p>
+            <a:pPr algn="r" indent="0" marL="0">
+              <a:buNone/>
+            </a:pPr>
+            <a:r>
+              <a:rPr lang="en-US" sz="900" dirty="0">
+                <a:solidFill>
+                  <a:srgbClr val="667085"/>
+                </a:solidFill>
+                <a:latin typeface="Inter" pitchFamily="34" charset="0"/>
+                <a:ea typeface="Inter" pitchFamily="34" charset="-122"/>
+                <a:cs typeface="Inter" pitchFamily="34" charset="-120"/>
+              </a:rPr>
+              <a:t>15 / 15</a:t>
             </a:r>
             <a:endParaRPr lang="en-US" sz="900" dirty="0"/>
           </a:p>
@@ -8285,7 +9081,7 @@
                 <a:ea typeface="Inter" pitchFamily="34" charset="-122"/>
                 <a:cs typeface="Inter" pitchFamily="34" charset="-120"/>
               </a:rPr>
-              <a:t>functional tasks, EN / RU / ZH</a:t>
+              <a:t>functional tasks, EN / RU / ZH; 44/48 live</a:t>
             </a:r>
             <a:endParaRPr lang="en-US" sz="1050" dirty="0"/>
           </a:p>
@@ -8682,7 +9478,7 @@
                 <a:ea typeface="Inter" pitchFamily="34" charset="-122"/>
                 <a:cs typeface="Inter" pitchFamily="34" charset="-120"/>
               </a:rPr>
-              <a:t>Live runs with real models; measured cost replaces the estimate</a:t>
+              <a:t>Pilot with a bank: shadow mode next to its fraud team first</a:t>
             </a:r>
             <a:endParaRPr lang="en-US" sz="1300" dirty="0"/>
           </a:p>
@@ -8745,7 +9541,7 @@
                 <a:ea typeface="Inter" pitchFamily="34" charset="-122"/>
                 <a:cs typeface="Inter" pitchFamily="34" charset="-120"/>
               </a:rPr>
-              <a:t>SD-JWT selective disclosure for mandates; pilot with a bank's fraud team</a:t>
+              <a:t>SD-JWT selective disclosure for mandates</a:t>
             </a:r>
             <a:endParaRPr lang="en-US" sz="1300" dirty="0"/>
           </a:p>
@@ -9043,7 +9839,7 @@
                 <a:ea typeface="Inter" pitchFamily="34" charset="-122"/>
                 <a:cs typeface="Inter" pitchFamily="34" charset="-120"/>
               </a:rPr>
-              <a:t>2 / 14</a:t>
+              <a:t>2 / 15</a:t>
             </a:r>
             <a:endParaRPr lang="en-US" sz="900" dirty="0"/>
           </a:p>
@@ -9831,7 +10627,7 @@
                 <a:ea typeface="Inter" pitchFamily="34" charset="-122"/>
                 <a:cs typeface="Inter" pitchFamily="34" charset="-120"/>
               </a:rPr>
-              <a:t>3 / 14</a:t>
+              <a:t>3 / 15</a:t>
             </a:r>
             <a:endParaRPr lang="en-US" sz="900" dirty="0"/>
           </a:p>
@@ -10517,7 +11313,7 @@
                 <a:ea typeface="Inter" pitchFamily="34" charset="-122"/>
                 <a:cs typeface="Inter" pitchFamily="34" charset="-120"/>
               </a:rPr>
-              <a:t>4 / 14</a:t>
+              <a:t>4 / 15</a:t>
             </a:r>
             <a:endParaRPr lang="en-US" sz="900" dirty="0"/>
           </a:p>
@@ -12293,7 +13089,7 @@
                 <a:ea typeface="Inter" pitchFamily="34" charset="-122"/>
                 <a:cs typeface="Inter" pitchFamily="34" charset="-120"/>
               </a:rPr>
-              <a:t>What the client sees</a:t>
+              <a:t>Three scenes to remember</a:t>
             </a:r>
             <a:endParaRPr lang="en-US" sz="2500" dirty="0"/>
           </a:p>
@@ -12437,7 +13233,7 @@
                 <a:ea typeface="Inter" pitchFamily="34" charset="-122"/>
                 <a:cs typeface="Inter" pitchFamily="34" charset="-120"/>
               </a:rPr>
-              <a:t>5 / 14</a:t>
+              <a:t>5 / 15</a:t>
             </a:r>
             <a:endParaRPr lang="en-US" sz="900" dirty="0"/>
           </a:p>
@@ -12459,8 +13255,8 @@
         </p:blipFill>
         <p:spPr>
           <a:xfrm>
-            <a:off x="914400" y="1188720"/>
-            <a:ext cx="3108960" cy="3152140"/>
+            <a:off x="457200" y="1097280"/>
+            <a:ext cx="2560320" cy="2595880"/>
           </a:xfrm>
           <a:prstGeom prst="rect">
             <a:avLst/>
@@ -12475,12 +13271,12 @@
         </p:nvSpPr>
         <p:spPr>
           <a:xfrm>
-            <a:off x="914400" y="1188720"/>
-            <a:ext cx="3108960" cy="3152140"/>
+            <a:off x="457200" y="1097280"/>
+            <a:ext cx="2560320" cy="2595880"/>
           </a:xfrm>
           <a:prstGeom prst="roundRect">
             <a:avLst>
-              <a:gd name="adj" fmla="val 1765"/>
+              <a:gd name="adj" fmla="val 2143"/>
             </a:avLst>
           </a:prstGeom>
           <a:ln w="12700">
@@ -12499,24 +13295,24 @@
         </p:nvSpPr>
         <p:spPr>
           <a:xfrm>
-            <a:off x="457200" y="4377436"/>
-            <a:ext cx="4023360" cy="274320"/>
-          </a:xfrm>
-          <a:prstGeom prst="rect">
-            <a:avLst/>
-          </a:prstGeom>
-          <a:noFill/>
-          <a:ln/>
-        </p:spPr>
-        <p:txBody>
-          <a:bodyPr wrap="square" lIns="0" tIns="0" rIns="0" bIns="0" rtlCol="0" anchor="ctr"/>
-          <a:lstStyle/>
-          <a:p>
-            <a:pPr algn="ctr" indent="0" marL="0">
-              <a:buNone/>
-            </a:pPr>
-            <a:r>
-              <a:rPr lang="en-US" sz="1100" dirty="0">
+            <a:off x="457200" y="3766312"/>
+            <a:ext cx="2560320" cy="274320"/>
+          </a:xfrm>
+          <a:prstGeom prst="rect">
+            <a:avLst/>
+          </a:prstGeom>
+          <a:noFill/>
+          <a:ln/>
+        </p:spPr>
+        <p:txBody>
+          <a:bodyPr wrap="square" lIns="0" tIns="0" rIns="0" bIns="0" rtlCol="0" anchor="ctr"/>
+          <a:lstStyle/>
+          <a:p>
+            <a:pPr indent="0" marL="0">
+              <a:buNone/>
+            </a:pPr>
+            <a:r>
+              <a:rPr lang="en-US" sz="1200" b="1" dirty="0">
                 <a:solidFill>
                   <a:srgbClr val="101828"/>
                 </a:solidFill>
@@ -12524,15 +13320,54 @@
                 <a:ea typeface="Inter" pitchFamily="34" charset="-122"/>
                 <a:cs typeface="Inter" pitchFamily="34" charset="-120"/>
               </a:rPr>
-              <a:t>A card: every field with its source, signed with the device key</a:t>
-            </a:r>
-            <a:endParaRPr lang="en-US" sz="1100" dirty="0"/>
+              <a:t>1  A payment the client can prove</a:t>
+            </a:r>
+            <a:endParaRPr lang="en-US" sz="1200" dirty="0"/>
+          </a:p>
+        </p:txBody>
+      </p:sp>
+      <p:sp>
+        <p:nvSpPr>
+          <p:cNvPr id="11" name="Text 7"/>
+          <p:cNvSpPr/>
+          <p:nvPr/>
+        </p:nvSpPr>
+        <p:spPr>
+          <a:xfrm>
+            <a:off x="457200" y="4040632"/>
+            <a:ext cx="2560320" cy="365760"/>
+          </a:xfrm>
+          <a:prstGeom prst="rect">
+            <a:avLst/>
+          </a:prstGeom>
+          <a:noFill/>
+          <a:ln/>
+        </p:spPr>
+        <p:txBody>
+          <a:bodyPr wrap="square" lIns="0" tIns="0" rIns="0" bIns="0" rtlCol="0" anchor="t"/>
+          <a:lstStyle/>
+          <a:p>
+            <a:pPr indent="0" marL="0">
+              <a:buNone/>
+            </a:pPr>
+            <a:r>
+              <a:rPr lang="en-US" sz="1000" dirty="0">
+                <a:solidFill>
+                  <a:srgbClr val="667085"/>
+                </a:solidFill>
+                <a:latin typeface="Inter" pitchFamily="34" charset="0"/>
+                <a:ea typeface="Inter" pitchFamily="34" charset="-122"/>
+                <a:cs typeface="Inter" pitchFamily="34" charset="-120"/>
+              </a:rPr>
+              <a:t>card, device signature, then a standing permission</a:t>
+            </a:r>
+            <a:endParaRPr lang="en-US" sz="1000" dirty="0"/>
           </a:p>
         </p:txBody>
       </p:sp>
       <p:pic>
         <p:nvPicPr>
-          <p:cNvPr id="11" name="Image 1" descr="/workspace/ShenzhenFinTechathonTopicA/docs/media/06_fake_bill_chat.png">    </p:cNvPr>
+          <p:cNvPr id="12" name="Image 1" descr="/workspace/ShenzhenFinTechathonTopicA/docs/media/06_fake_bill_chat.png">    </p:cNvPr>
           <p:cNvPicPr>
             <a:picLocks noChangeAspect="1"/>
           </p:cNvPicPr>
@@ -12546,8 +13381,8 @@
         </p:blipFill>
         <p:spPr>
           <a:xfrm>
-            <a:off x="5120640" y="1188720"/>
-            <a:ext cx="3108960" cy="3152140"/>
+            <a:off x="3291840" y="1097280"/>
+            <a:ext cx="2560320" cy="2595880"/>
           </a:xfrm>
           <a:prstGeom prst="rect">
             <a:avLst/>
@@ -12556,18 +13391,18 @@
       </p:pic>
       <p:sp>
         <p:nvSpPr>
-          <p:cNvPr id="12" name="Shape 7"/>
-          <p:cNvSpPr/>
-          <p:nvPr/>
-        </p:nvSpPr>
-        <p:spPr>
-          <a:xfrm>
-            <a:off x="5120640" y="1188720"/>
-            <a:ext cx="3108960" cy="3152140"/>
+          <p:cNvPr id="13" name="Shape 8"/>
+          <p:cNvSpPr/>
+          <p:nvPr/>
+        </p:nvSpPr>
+        <p:spPr>
+          <a:xfrm>
+            <a:off x="3291840" y="1097280"/>
+            <a:ext cx="2560320" cy="2595880"/>
           </a:xfrm>
           <a:prstGeom prst="roundRect">
             <a:avLst>
-              <a:gd name="adj" fmla="val 1765"/>
+              <a:gd name="adj" fmla="val 2143"/>
             </a:avLst>
           </a:prstGeom>
           <a:ln w="12700">
@@ -12580,30 +13415,30 @@
       </p:sp>
       <p:sp>
         <p:nvSpPr>
-          <p:cNvPr id="13" name="Text 8"/>
-          <p:cNvSpPr/>
-          <p:nvPr/>
-        </p:nvSpPr>
-        <p:spPr>
-          <a:xfrm>
-            <a:off x="4663440" y="4377436"/>
-            <a:ext cx="4023360" cy="274320"/>
-          </a:xfrm>
-          <a:prstGeom prst="rect">
-            <a:avLst/>
-          </a:prstGeom>
-          <a:noFill/>
-          <a:ln/>
-        </p:spPr>
-        <p:txBody>
-          <a:bodyPr wrap="square" lIns="0" tIns="0" rIns="0" bIns="0" rtlCol="0" anchor="ctr"/>
-          <a:lstStyle/>
-          <a:p>
-            <a:pPr algn="ctr" indent="0" marL="0">
-              <a:buNone/>
-            </a:pPr>
-            <a:r>
-              <a:rPr lang="en-US" sz="1100" dirty="0">
+          <p:cNvPr id="14" name="Text 9"/>
+          <p:cNvSpPr/>
+          <p:nvPr/>
+        </p:nvSpPr>
+        <p:spPr>
+          <a:xfrm>
+            <a:off x="3291840" y="3766312"/>
+            <a:ext cx="2560320" cy="274320"/>
+          </a:xfrm>
+          <a:prstGeom prst="rect">
+            <a:avLst/>
+          </a:prstGeom>
+          <a:noFill/>
+          <a:ln/>
+        </p:spPr>
+        <p:txBody>
+          <a:bodyPr wrap="square" lIns="0" tIns="0" rIns="0" bIns="0" rtlCol="0" anchor="ctr"/>
+          <a:lstStyle/>
+          <a:p>
+            <a:pPr indent="0" marL="0">
+              <a:buNone/>
+            </a:pPr>
+            <a:r>
+              <a:rPr lang="en-US" sz="1200" b="1" dirty="0">
                 <a:solidFill>
                   <a:srgbClr val="101828"/>
                 </a:solidFill>
@@ -12611,9 +13446,174 @@
                 <a:ea typeface="Inter" pitchFamily="34" charset="-122"/>
                 <a:cs typeface="Inter" pitchFamily="34" charset="-120"/>
               </a:rPr>
-              <a:t>A fake bill: stopped with reasons, case sent to analysts</a:t>
-            </a:r>
-            <a:endParaRPr lang="en-US" sz="1100" dirty="0"/>
+              <a:t>2  An attack that goes nowhere</a:t>
+            </a:r>
+            <a:endParaRPr lang="en-US" sz="1200" dirty="0"/>
+          </a:p>
+        </p:txBody>
+      </p:sp>
+      <p:sp>
+        <p:nvSpPr>
+          <p:cNvPr id="15" name="Text 10"/>
+          <p:cNvSpPr/>
+          <p:nvPr/>
+        </p:nvSpPr>
+        <p:spPr>
+          <a:xfrm>
+            <a:off x="3291840" y="4040632"/>
+            <a:ext cx="2560320" cy="365760"/>
+          </a:xfrm>
+          <a:prstGeom prst="rect">
+            <a:avLst/>
+          </a:prstGeom>
+          <a:noFill/>
+          <a:ln/>
+        </p:spPr>
+        <p:txBody>
+          <a:bodyPr wrap="square" lIns="0" tIns="0" rIns="0" bIns="0" rtlCol="0" anchor="t"/>
+          <a:lstStyle/>
+          <a:p>
+            <a:pPr indent="0" marL="0">
+              <a:buNone/>
+            </a:pPr>
+            <a:r>
+              <a:rPr lang="en-US" sz="1000" dirty="0">
+                <a:solidFill>
+                  <a:srgbClr val="667085"/>
+                </a:solidFill>
+                <a:latin typeface="Inter" pitchFamily="34" charset="0"/>
+                <a:ea typeface="Inter" pitchFamily="34" charset="-122"/>
+                <a:cs typeface="Inter" pitchFamily="34" charset="-120"/>
+              </a:rPr>
+              <a:t>fake bill with a hidden instruction: stopped, case to analysts</a:t>
+            </a:r>
+            <a:endParaRPr lang="en-US" sz="1000" dirty="0"/>
+          </a:p>
+        </p:txBody>
+      </p:sp>
+      <p:pic>
+        <p:nvPicPr>
+          <p:cNvPr id="16" name="Image 2" descr="/workspace/ShenzhenFinTechathonTopicA/docs/media/12_invest_chat.png">    </p:cNvPr>
+          <p:cNvPicPr>
+            <a:picLocks noChangeAspect="1"/>
+          </p:cNvPicPr>
+          <p:nvPr/>
+        </p:nvPicPr>
+        <p:blipFill>
+          <a:blip r:embed="rId3"/>
+          <a:stretch>
+            <a:fillRect/>
+          </a:stretch>
+        </p:blipFill>
+        <p:spPr>
+          <a:xfrm>
+            <a:off x="6126480" y="1097280"/>
+            <a:ext cx="2560320" cy="2595880"/>
+          </a:xfrm>
+          <a:prstGeom prst="rect">
+            <a:avLst/>
+          </a:prstGeom>
+        </p:spPr>
+      </p:pic>
+      <p:sp>
+        <p:nvSpPr>
+          <p:cNvPr id="17" name="Shape 11"/>
+          <p:cNvSpPr/>
+          <p:nvPr/>
+        </p:nvSpPr>
+        <p:spPr>
+          <a:xfrm>
+            <a:off x="6126480" y="1097280"/>
+            <a:ext cx="2560320" cy="2595880"/>
+          </a:xfrm>
+          <a:prstGeom prst="roundRect">
+            <a:avLst>
+              <a:gd name="adj" fmla="val 2143"/>
+            </a:avLst>
+          </a:prstGeom>
+          <a:ln w="12700">
+            <a:solidFill>
+              <a:srgbClr val="E4E7EC"/>
+            </a:solidFill>
+            <a:prstDash val="solid"/>
+          </a:ln>
+        </p:spPr>
+      </p:sp>
+      <p:sp>
+        <p:nvSpPr>
+          <p:cNvPr id="18" name="Text 12"/>
+          <p:cNvSpPr/>
+          <p:nvPr/>
+        </p:nvSpPr>
+        <p:spPr>
+          <a:xfrm>
+            <a:off x="6126480" y="3766312"/>
+            <a:ext cx="2560320" cy="274320"/>
+          </a:xfrm>
+          <a:prstGeom prst="rect">
+            <a:avLst/>
+          </a:prstGeom>
+          <a:noFill/>
+          <a:ln/>
+        </p:spPr>
+        <p:txBody>
+          <a:bodyPr wrap="square" lIns="0" tIns="0" rIns="0" bIns="0" rtlCol="0" anchor="ctr"/>
+          <a:lstStyle/>
+          <a:p>
+            <a:pPr indent="0" marL="0">
+              <a:buNone/>
+            </a:pPr>
+            <a:r>
+              <a:rPr lang="en-US" sz="1200" b="1" dirty="0">
+                <a:solidFill>
+                  <a:srgbClr val="101828"/>
+                </a:solidFill>
+                <a:latin typeface="Inter" pitchFamily="34" charset="0"/>
+                <a:ea typeface="Inter" pitchFamily="34" charset="-122"/>
+                <a:cs typeface="Inter" pitchFamily="34" charset="-120"/>
+              </a:rPr>
+              <a:t>3  A real exchange, in a mandate</a:t>
+            </a:r>
+            <a:endParaRPr lang="en-US" sz="1200" dirty="0"/>
+          </a:p>
+        </p:txBody>
+      </p:sp>
+      <p:sp>
+        <p:nvSpPr>
+          <p:cNvPr id="19" name="Text 13"/>
+          <p:cNvSpPr/>
+          <p:nvPr/>
+        </p:nvSpPr>
+        <p:spPr>
+          <a:xfrm>
+            <a:off x="6126480" y="4040632"/>
+            <a:ext cx="2560320" cy="365760"/>
+          </a:xfrm>
+          <a:prstGeom prst="rect">
+            <a:avLst/>
+          </a:prstGeom>
+          <a:noFill/>
+          <a:ln/>
+        </p:spPr>
+        <p:txBody>
+          <a:bodyPr wrap="square" lIns="0" tIns="0" rIns="0" bIns="0" rtlCol="0" anchor="t"/>
+          <a:lstStyle/>
+          <a:p>
+            <a:pPr indent="0" marL="0">
+              <a:buNone/>
+            </a:pPr>
+            <a:r>
+              <a:rPr lang="en-US" sz="1000" dirty="0">
+                <a:solidFill>
+                  <a:srgbClr val="667085"/>
+                </a:solidFill>
+                <a:latin typeface="Inter" pitchFamily="34" charset="0"/>
+                <a:ea typeface="Inter" pitchFamily="34" charset="-122"/>
+                <a:cs typeface="Inter" pitchFamily="34" charset="-120"/>
+              </a:rPr>
+              <a:t>SPY on Alpaca paper, filled at $767.57</a:t>
+            </a:r>
+            <a:endParaRPr lang="en-US" sz="1000" dirty="0"/>
           </a:p>
         </p:txBody>
       </p:sp>
@@ -12826,7 +13826,7 @@
                 <a:ea typeface="Inter" pitchFamily="34" charset="-122"/>
                 <a:cs typeface="Inter" pitchFamily="34" charset="-120"/>
               </a:rPr>
-              <a:t>6 / 14</a:t>
+              <a:t>6 / 15</a:t>
             </a:r>
             <a:endParaRPr lang="en-US" sz="900" dirty="0"/>
           </a:p>
@@ -13065,7 +14065,7 @@
                 <a:ea typeface="Inter" pitchFamily="34" charset="-122"/>
                 <a:cs typeface="Inter" pitchFamily="34" charset="-120"/>
               </a:rPr>
-              <a:t>7 / 14</a:t>
+              <a:t>7 / 15</a:t>
             </a:r>
             <a:endParaRPr lang="en-US" sz="900" dirty="0"/>
           </a:p>
@@ -14998,7 +15998,7 @@
                 <a:ea typeface="Inter" pitchFamily="34" charset="-122"/>
                 <a:cs typeface="Inter" pitchFamily="34" charset="-120"/>
               </a:rPr>
-              <a:t>8 / 14</a:t>
+              <a:t>8 / 15</a:t>
             </a:r>
             <a:endParaRPr lang="en-US" sz="900" dirty="0"/>
           </a:p>
@@ -16489,7 +17489,7 @@
                 <a:ea typeface="Inter" pitchFamily="34" charset="-122"/>
                 <a:cs typeface="Inter" pitchFamily="34" charset="-120"/>
               </a:rPr>
-              <a:t>9 / 14</a:t>
+              <a:t>9 / 15</a:t>
             </a:r>
             <a:endParaRPr lang="en-US" sz="900" dirty="0"/>
           </a:p>

--- a/docs/presentation.pptx
+++ b/docs/presentation.pptx
@@ -1387,7 +1387,7 @@
           <a:p>
             <a:r>
               <a:rPr lang="en-US" dirty="0"/>
-              <a:t>We attacked the kernel four ways. 48 static attacks: fake bills, injected instructions, swapped payees, look-alike merchants, replayed signatures, over-limit requests, off-list investment orders. All 48 stopped. 5 attacks that try to plant something in the assistant's memory for later: all stopped. An adaptive attacker that learns from the kernel's answers, 10 rounds, 360 attempts: zero payments outside the mandate. And the earlier prototype's suite: 20 of 21 prevented, one bounded by the limit. Without the kernel the same static set lost $6,546.63.</a:t>
+              <a:t>We attacked the kernel four ways. 48 static attacks: fake bills, injected instructions, swapped payees, look-alike merchants, replayed signatures, over-limit requests, off-list investment orders. All 48 stopped. 5 attacks that try to plant something in the assistant's memory for later: all stopped. An adaptive attacker that learns from the kernel's answers, 10 rounds, 360 attempts: zero payments outside the mandate. We also let an open model, DeepSeek V4 Pro, play that attacker: 156 attempts, none reached its goal. And the earlier prototype's suite: 20 of 21 prevented, one bounded by the limit. Without the kernel the same static set lost $6,546.63.</a:t>
             </a:r>
             <a:endParaRPr lang="en-US" dirty="0"/>
           </a:p>

--- a/docs/presentation.pptx
+++ b/docs/presentation.pptx
@@ -1387,7 +1387,7 @@
           <a:p>
             <a:r>
               <a:rPr lang="en-US" dirty="0"/>
-              <a:t>We attacked the kernel four ways. 48 static attacks: fake bills, injected instructions, swapped payees, look-alike merchants, replayed signatures, over-limit requests, off-list investment orders. All 48 stopped. 5 attacks that try to plant something in the assistant's memory for later: all stopped. An adaptive attacker that learns from the kernel's answers, 10 rounds, 360 attempts: zero payments outside the mandate. We also let an open model, DeepSeek V4 Pro, play that attacker: 156 attempts, none reached its goal. And the earlier prototype's suite: 20 of 21 prevented, one bounded by the limit. Without the kernel the same static set lost $6,546.63.</a:t>
+              <a:t>We attacked the kernel four ways. 48 static attacks: fake bills, injected instructions, swapped payees, look-alike merchants, replayed signatures, over-limit requests, off-list investment orders. All 48 stopped. 5 attacks that try to plant something in the assistant's memory for later: all stopped. An adaptive attacker that learns from the kernel's answers, 10 rounds, 360 attempts: zero payments outside the mandate. We also let an open model, DeepSeek V4 Pro, play that attacker: 343 attempts, none reached its goal. And the earlier prototype's suite: 20 of 21 prevented, one bounded by the limit. Without the kernel the same static set lost $6,546.63.</a:t>
             </a:r>
             <a:endParaRPr lang="en-US" dirty="0"/>
           </a:p>
